--- a/assignment_1/task2/Task2_report.pptx
+++ b/assignment_1/task2/Task2_report.pptx
@@ -145,7 +145,9 @@
 <file path=ppt/revisionInfo.xml><?xml version="1.0" encoding="utf-8"?>
 <p1510:revInfo xmlns:a="http://schemas.openxmlformats.org/drawingml/2006/main" xmlns:r="http://schemas.openxmlformats.org/officeDocument/2006/relationships" xmlns:p1510="http://schemas.microsoft.com/office/powerpoint/2015/10/main">
   <p1510:revLst>
-    <p1510:client id="{036968B7-DA67-72A4-3DF0-AEB616358612}" v="7061" dt="2026-03-24T23:16:45.151"/>
+    <p1510:client id="{036968B7-DA67-72A4-3DF0-AEB616358612}" v="7715" dt="2026-03-25T11:10:53.253"/>
+    <p1510:client id="{767BBB93-3087-B744-08BA-B89B3F0EEC89}" v="2734" dt="2026-03-25T17:11:20.895"/>
+    <p1510:client id="{8CD50E63-8E47-5A93-9879-8D2832121154}" v="1381" dt="2026-03-25T22:05:17.511"/>
   </p1510:revLst>
 </p1510:revInfo>
 </file>
@@ -1599,7 +1601,7 @@
           <a:p>
             <a:fld id="{4AAD347D-5ACD-4C99-B74B-A9C85AD731AF}" type="datetimeFigureOut">
               <a:rPr lang="en-US" smtClean="0"/>
-              <a:t>3/24/2026</a:t>
+              <a:t>3/25/2026</a:t>
             </a:fld>
             <a:endParaRPr lang="en-US" dirty="0"/>
           </a:p>
@@ -1881,7 +1883,7 @@
           <a:p>
             <a:fld id="{4509A250-FF31-4206-8172-F9D3106AACB1}" type="datetimeFigureOut">
               <a:rPr lang="en-US" smtClean="0"/>
-              <a:t>3/24/2026</a:t>
+              <a:t>3/25/2026</a:t>
             </a:fld>
             <a:endParaRPr lang="en-US" dirty="0"/>
           </a:p>
@@ -2074,7 +2076,7 @@
           <a:p>
             <a:fld id="{4509A250-FF31-4206-8172-F9D3106AACB1}" type="datetimeFigureOut">
               <a:rPr lang="en-US" smtClean="0"/>
-              <a:t>3/24/2026</a:t>
+              <a:t>3/25/2026</a:t>
             </a:fld>
             <a:endParaRPr lang="en-US" dirty="0"/>
           </a:p>
@@ -2336,7 +2338,7 @@
           <a:p>
             <a:fld id="{4AAD347D-5ACD-4C99-B74B-A9C85AD731AF}" type="datetimeFigureOut">
               <a:rPr lang="en-US" smtClean="0"/>
-              <a:t>3/24/2026</a:t>
+              <a:t>3/25/2026</a:t>
             </a:fld>
             <a:endParaRPr lang="en-US" dirty="0"/>
           </a:p>
@@ -2763,7 +2765,7 @@
           <a:p>
             <a:fld id="{4AAD347D-5ACD-4C99-B74B-A9C85AD731AF}" type="datetimeFigureOut">
               <a:rPr lang="en-US" smtClean="0"/>
-              <a:t>3/24/2026</a:t>
+              <a:t>3/25/2026</a:t>
             </a:fld>
             <a:endParaRPr lang="en-US" dirty="0"/>
           </a:p>
@@ -3310,7 +3312,7 @@
           <a:p>
             <a:fld id="{4509A250-FF31-4206-8172-F9D3106AACB1}" type="datetimeFigureOut">
               <a:rPr lang="en-US" smtClean="0"/>
-              <a:t>3/24/2026</a:t>
+              <a:t>3/25/2026</a:t>
             </a:fld>
             <a:endParaRPr lang="en-US" dirty="0"/>
           </a:p>
@@ -4142,7 +4144,7 @@
           <a:p>
             <a:fld id="{4509A250-FF31-4206-8172-F9D3106AACB1}" type="datetimeFigureOut">
               <a:rPr lang="en-US" smtClean="0"/>
-              <a:t>3/24/2026</a:t>
+              <a:t>3/25/2026</a:t>
             </a:fld>
             <a:endParaRPr lang="en-US" dirty="0"/>
           </a:p>
@@ -4313,7 +4315,7 @@
           <a:p>
             <a:fld id="{4509A250-FF31-4206-8172-F9D3106AACB1}" type="datetimeFigureOut">
               <a:rPr lang="en-US" smtClean="0"/>
-              <a:t>3/24/2026</a:t>
+              <a:t>3/25/2026</a:t>
             </a:fld>
             <a:endParaRPr lang="en-US" dirty="0"/>
           </a:p>
@@ -4494,7 +4496,7 @@
           <a:p>
             <a:fld id="{4509A250-FF31-4206-8172-F9D3106AACB1}" type="datetimeFigureOut">
               <a:rPr lang="en-US" smtClean="0"/>
-              <a:t>3/24/2026</a:t>
+              <a:t>3/25/2026</a:t>
             </a:fld>
             <a:endParaRPr lang="en-US" dirty="0"/>
           </a:p>
@@ -4762,7 +4764,7 @@
           <a:p>
             <a:fld id="{4AAD347D-5ACD-4C99-B74B-A9C85AD731AF}" type="datetimeFigureOut">
               <a:rPr lang="en-US" smtClean="0"/>
-              <a:t>3/24/2026</a:t>
+              <a:t>3/25/2026</a:t>
             </a:fld>
             <a:endParaRPr lang="en-US" dirty="0"/>
           </a:p>
@@ -4933,7 +4935,7 @@
           <a:p>
             <a:fld id="{4509A250-FF31-4206-8172-F9D3106AACB1}" type="datetimeFigureOut">
               <a:rPr lang="en-US" smtClean="0"/>
-              <a:t>3/24/2026</a:t>
+              <a:t>3/25/2026</a:t>
             </a:fld>
             <a:endParaRPr lang="en-US" dirty="0"/>
           </a:p>
@@ -5139,7 +5141,7 @@
           <a:p>
             <a:fld id="{4AAD347D-5ACD-4C99-B74B-A9C85AD731AF}" type="datetimeFigureOut">
               <a:rPr lang="en-US" smtClean="0"/>
-              <a:t>3/24/2026</a:t>
+              <a:t>3/25/2026</a:t>
             </a:fld>
             <a:endParaRPr lang="en-US" dirty="0"/>
           </a:p>
@@ -5420,7 +5422,7 @@
           <a:p>
             <a:fld id="{9796027F-7875-4030-9381-8BD8C4F21935}" type="datetimeFigureOut">
               <a:rPr lang="en-US" smtClean="0"/>
-              <a:t>3/24/2026</a:t>
+              <a:t>3/25/2026</a:t>
             </a:fld>
             <a:endParaRPr lang="en-US" dirty="0"/>
           </a:p>
@@ -5688,7 +5690,7 @@
           <a:p>
             <a:fld id="{4AAD347D-5ACD-4C99-B74B-A9C85AD731AF}" type="datetimeFigureOut">
               <a:rPr lang="en-US" smtClean="0"/>
-              <a:t>3/24/2026</a:t>
+              <a:t>3/25/2026</a:t>
             </a:fld>
             <a:endParaRPr lang="en-US" dirty="0"/>
           </a:p>
@@ -6104,7 +6106,7 @@
           <a:p>
             <a:fld id="{4AAD347D-5ACD-4C99-B74B-A9C85AD731AF}" type="datetimeFigureOut">
               <a:rPr lang="en-US" smtClean="0"/>
-              <a:t>3/24/2026</a:t>
+              <a:t>3/25/2026</a:t>
             </a:fld>
             <a:endParaRPr lang="en-US" dirty="0"/>
           </a:p>
@@ -6253,7 +6255,7 @@
           <a:p>
             <a:fld id="{4509A250-FF31-4206-8172-F9D3106AACB1}" type="datetimeFigureOut">
               <a:rPr lang="en-US" smtClean="0"/>
-              <a:t>3/24/2026</a:t>
+              <a:t>3/25/2026</a:t>
             </a:fld>
             <a:endParaRPr lang="en-US" dirty="0"/>
           </a:p>
@@ -6379,7 +6381,7 @@
           <a:p>
             <a:fld id="{4509A250-FF31-4206-8172-F9D3106AACB1}" type="datetimeFigureOut">
               <a:rPr lang="en-US" smtClean="0"/>
-              <a:t>3/24/2026</a:t>
+              <a:t>3/25/2026</a:t>
             </a:fld>
             <a:endParaRPr lang="en-US" dirty="0"/>
           </a:p>
@@ -6659,7 +6661,7 @@
           <a:p>
             <a:fld id="{4AAD347D-5ACD-4C99-B74B-A9C85AD731AF}" type="datetimeFigureOut">
               <a:rPr lang="en-US" smtClean="0"/>
-              <a:t>3/24/2026</a:t>
+              <a:t>3/25/2026</a:t>
             </a:fld>
             <a:endParaRPr lang="en-US" dirty="0"/>
           </a:p>
@@ -6972,7 +6974,7 @@
           <a:p>
             <a:fld id="{4509A250-FF31-4206-8172-F9D3106AACB1}" type="datetimeFigureOut">
               <a:rPr lang="en-US" smtClean="0"/>
-              <a:t>3/24/2026</a:t>
+              <a:t>3/25/2026</a:t>
             </a:fld>
             <a:endParaRPr lang="en-US" dirty="0"/>
           </a:p>
@@ -7285,7 +7287,7 @@
           <a:p>
             <a:fld id="{4509A250-FF31-4206-8172-F9D3106AACB1}" type="datetimeFigureOut">
               <a:rPr lang="en-US" smtClean="0"/>
-              <a:t>3/24/2026</a:t>
+              <a:t>3/25/2026</a:t>
             </a:fld>
             <a:endParaRPr lang="en-US" dirty="0"/>
           </a:p>
@@ -7508,7 +7510,7 @@
           <a:p>
             <a:fld id="{4509A250-FF31-4206-8172-F9D3106AACB1}" type="datetimeFigureOut">
               <a:rPr lang="en-US" smtClean="0"/>
-              <a:t>3/24/2026</a:t>
+              <a:t>3/25/2026</a:t>
             </a:fld>
             <a:endParaRPr lang="en-US" dirty="0"/>
           </a:p>
@@ -7766,7 +7768,7 @@
           <a:p>
             <a:fld id="{9796027F-7875-4030-9381-8BD8C4F21935}" type="datetimeFigureOut">
               <a:rPr lang="en-US" smtClean="0"/>
-              <a:t>3/24/2026</a:t>
+              <a:t>3/25/2026</a:t>
             </a:fld>
             <a:endParaRPr lang="en-US" dirty="0"/>
           </a:p>
@@ -8058,7 +8060,7 @@
           <a:p>
             <a:fld id="{4AAD347D-5ACD-4C99-B74B-A9C85AD731AF}" type="datetimeFigureOut">
               <a:rPr lang="en-US" smtClean="0"/>
-              <a:t>3/24/2026</a:t>
+              <a:t>3/25/2026</a:t>
             </a:fld>
             <a:endParaRPr lang="en-US" dirty="0"/>
           </a:p>
@@ -8513,7 +8515,7 @@
           <a:p>
             <a:fld id="{4AAD347D-5ACD-4C99-B74B-A9C85AD731AF}" type="datetimeFigureOut">
               <a:rPr lang="en-US" smtClean="0"/>
-              <a:t>3/24/2026</a:t>
+              <a:t>3/25/2026</a:t>
             </a:fld>
             <a:endParaRPr lang="en-US" dirty="0"/>
           </a:p>
@@ -9090,7 +9092,7 @@
           <a:p>
             <a:fld id="{4509A250-FF31-4206-8172-F9D3106AACB1}" type="datetimeFigureOut">
               <a:rPr lang="en-US" smtClean="0"/>
-              <a:t>3/24/2026</a:t>
+              <a:t>3/25/2026</a:t>
             </a:fld>
             <a:endParaRPr lang="en-US" dirty="0"/>
           </a:p>
@@ -9943,7 +9945,7 @@
           <a:p>
             <a:fld id="{4509A250-FF31-4206-8172-F9D3106AACB1}" type="datetimeFigureOut">
               <a:rPr lang="en-US" smtClean="0"/>
-              <a:t>3/24/2026</a:t>
+              <a:t>3/25/2026</a:t>
             </a:fld>
             <a:endParaRPr lang="en-US" dirty="0"/>
           </a:p>
@@ -10149,7 +10151,7 @@
           <a:p>
             <a:fld id="{4AAD347D-5ACD-4C99-B74B-A9C85AD731AF}" type="datetimeFigureOut">
               <a:rPr lang="en-US" smtClean="0"/>
-              <a:t>3/24/2026</a:t>
+              <a:t>3/25/2026</a:t>
             </a:fld>
             <a:endParaRPr lang="en-US" dirty="0"/>
           </a:p>
@@ -10364,7 +10366,7 @@
           <a:p>
             <a:fld id="{4AAD347D-5ACD-4C99-B74B-A9C85AD731AF}" type="datetimeFigureOut">
               <a:rPr lang="en-US" smtClean="0"/>
-              <a:t>3/24/2026</a:t>
+              <a:t>3/25/2026</a:t>
             </a:fld>
             <a:endParaRPr lang="en-US" dirty="0"/>
           </a:p>
@@ -10632,7 +10634,7 @@
           <a:p>
             <a:fld id="{9796027F-7875-4030-9381-8BD8C4F21935}" type="datetimeFigureOut">
               <a:rPr lang="en-US" smtClean="0"/>
-              <a:t>3/24/2026</a:t>
+              <a:t>3/25/2026</a:t>
             </a:fld>
             <a:endParaRPr lang="en-US" dirty="0"/>
           </a:p>
@@ -11026,7 +11028,7 @@
           <a:p>
             <a:fld id="{9796027F-7875-4030-9381-8BD8C4F21935}" type="datetimeFigureOut">
               <a:rPr lang="en-US" smtClean="0"/>
-              <a:t>3/24/2026</a:t>
+              <a:t>3/25/2026</a:t>
             </a:fld>
             <a:endParaRPr lang="en-US" dirty="0"/>
           </a:p>
@@ -11145,7 +11147,7 @@
           <a:p>
             <a:fld id="{4509A250-FF31-4206-8172-F9D3106AACB1}" type="datetimeFigureOut">
               <a:rPr lang="en-US" smtClean="0"/>
-              <a:t>3/24/2026</a:t>
+              <a:t>3/25/2026</a:t>
             </a:fld>
             <a:endParaRPr lang="en-US" dirty="0"/>
           </a:p>
@@ -11241,7 +11243,7 @@
           <a:p>
             <a:fld id="{4509A250-FF31-4206-8172-F9D3106AACB1}" type="datetimeFigureOut">
               <a:rPr lang="en-US" smtClean="0"/>
-              <a:t>3/24/2026</a:t>
+              <a:t>3/25/2026</a:t>
             </a:fld>
             <a:endParaRPr lang="en-US" dirty="0"/>
           </a:p>
@@ -11515,7 +11517,7 @@
           <a:p>
             <a:fld id="{4509A250-FF31-4206-8172-F9D3106AACB1}" type="datetimeFigureOut">
               <a:rPr lang="en-US" smtClean="0"/>
-              <a:t>3/24/2026</a:t>
+              <a:t>3/25/2026</a:t>
             </a:fld>
             <a:endParaRPr lang="en-US" dirty="0"/>
           </a:p>
@@ -11797,7 +11799,7 @@
           <a:p>
             <a:fld id="{4509A250-FF31-4206-8172-F9D3106AACB1}" type="datetimeFigureOut">
               <a:rPr lang="en-US" smtClean="0"/>
-              <a:t>3/24/2026</a:t>
+              <a:t>3/25/2026</a:t>
             </a:fld>
             <a:endParaRPr lang="en-US" dirty="0"/>
           </a:p>
@@ -12038,7 +12040,7 @@
           <a:p>
             <a:fld id="{4AAD347D-5ACD-4C99-B74B-A9C85AD731AF}" type="datetimeFigureOut">
               <a:rPr lang="en-US" smtClean="0"/>
-              <a:t>3/24/2026</a:t>
+              <a:t>3/25/2026</a:t>
             </a:fld>
             <a:endParaRPr lang="en-US" dirty="0"/>
           </a:p>
@@ -12777,7 +12779,7 @@
           <a:p>
             <a:fld id="{4AAD347D-5ACD-4C99-B74B-A9C85AD731AF}" type="datetimeFigureOut">
               <a:rPr lang="en-US" smtClean="0"/>
-              <a:t>3/24/2026</a:t>
+              <a:t>3/25/2026</a:t>
             </a:fld>
             <a:endParaRPr lang="en-US" dirty="0"/>
           </a:p>
@@ -15453,8 +15455,8 @@
         </p:blipFill>
         <p:spPr>
           <a:xfrm>
-            <a:off x="573218" y="1776872"/>
-            <a:ext cx="7997579" cy="2872626"/>
+            <a:off x="272939" y="1747812"/>
+            <a:ext cx="8598137" cy="3095413"/>
           </a:xfrm>
           <a:prstGeom prst="rect">
             <a:avLst/>
@@ -16089,7 +16091,7 @@
           <a:p>
             <a:pPr lvl="1"/>
             <a:r>
-              <a:rPr lang="en-US" sz="1000">
+              <a:rPr lang="en-US" sz="1000" dirty="0">
                 <a:solidFill>
                   <a:srgbClr val="1A2B3C"/>
                 </a:solidFill>
@@ -16097,10 +16099,10 @@
                 <a:ea typeface="Calibri"/>
                 <a:cs typeface="Calibri"/>
               </a:rPr>
-              <a:t>- 3 or more FC layers starts giving us a slower training and worse </a:t>
-            </a:r>
-            <a:r>
-              <a:rPr lang="en-US" sz="1000" dirty="0">
+              <a:t>- 3 or more FC layers starts giving us a slower training and </a:t>
+            </a:r>
+            <a:r>
+              <a:rPr lang="en-US" sz="1000">
                 <a:solidFill>
                   <a:srgbClr val="1A2B3C"/>
                 </a:solidFill>
@@ -16108,7 +16110,18 @@
                 <a:ea typeface="Calibri"/>
                 <a:cs typeface="Calibri"/>
               </a:rPr>
-              <a:t>results; keep it simple and let convolutional layers learn the information, then pass them to minimal FC layers</a:t>
+              <a:t>worse results (parameters increase a lot if our convolution channels are wide); keep it simple and </a:t>
+            </a:r>
+            <a:r>
+              <a:rPr lang="en-US" sz="1000" dirty="0">
+                <a:solidFill>
+                  <a:srgbClr val="1A2B3C"/>
+                </a:solidFill>
+                <a:latin typeface="Calibri"/>
+                <a:ea typeface="Calibri"/>
+                <a:cs typeface="Calibri"/>
+              </a:rPr>
+              <a:t>let convolutional layers learn the information, then pass them to minimal FC layers</a:t>
             </a:r>
           </a:p>
           <a:p>
@@ -16617,7 +16630,7 @@
                 </a:solidFill>
                 <a:latin typeface="Trebuchet MS"/>
               </a:rPr>
-              <a:t>1.0</a:t>
+              <a:t>1.0000</a:t>
             </a:r>
             <a:endParaRPr lang="en-US" sz="2800" b="1">
               <a:solidFill>
@@ -16659,8 +16672,14 @@
                 </a:solidFill>
                 <a:latin typeface="Trebuchet MS"/>
               </a:rPr>
-              <a:t>0.99720</a:t>
-            </a:r>
+              <a:t>1.0000</a:t>
+            </a:r>
+            <a:endParaRPr lang="en-US" sz="2800" b="1" dirty="0">
+              <a:solidFill>
+                <a:srgbClr val="FFFFFF"/>
+              </a:solidFill>
+              <a:latin typeface="Trebuchet MS"/>
+            </a:endParaRPr>
           </a:p>
           <a:p>
             <a:pPr>
@@ -16724,7 +16743,7 @@
         </p:nvSpPr>
         <p:spPr>
           <a:xfrm>
-            <a:off x="4573200" y="3077292"/>
+            <a:off x="4505395" y="3096665"/>
             <a:ext cx="4465810" cy="1956480"/>
           </a:xfrm>
           <a:prstGeom prst="rect">
@@ -17798,7 +17817,7 @@
                 <a:ea typeface="Calibri"/>
                 <a:cs typeface="Calibri"/>
               </a:rPr>
-              <a:t>total wall-clock (13 solo runs + data pre-processing/augmentation and ensembles</a:t>
+              <a:t>total wall-clock (15 solo runs + data </a:t>
             </a:r>
             <a:r>
               <a:rPr lang="en-US" sz="1000" dirty="0">
@@ -17809,7 +17828,7 @@
                 <a:ea typeface="Calibri"/>
                 <a:cs typeface="Calibri"/>
               </a:rPr>
-              <a:t>)</a:t>
+              <a:t>pre-processing/augmentation and ensembles)</a:t>
             </a:r>
             <a:endParaRPr lang="en-US" sz="1000" dirty="0">
               <a:latin typeface="Calibri"/>
@@ -17969,10 +17988,13 @@
                 <a:ea typeface="Calibri"/>
                 <a:cs typeface="Calibri"/>
               </a:rPr>
-              <a:t>more than</a:t>
-            </a:r>
-            <a:r>
-              <a:rPr lang="en-US" sz="1000" dirty="0">
+              <a:t>more than MLP),</a:t>
+            </a:r>
+          </a:p>
+          <a:p>
+            <a:pPr algn="ctr"/>
+            <a:r>
+              <a:rPr lang="en-US" sz="1000">
                 <a:solidFill>
                   <a:srgbClr val="3D5A73"/>
                 </a:solidFill>
@@ -17980,10 +18002,13 @@
                 <a:ea typeface="Calibri"/>
                 <a:cs typeface="Calibri"/>
               </a:rPr>
-              <a:t> MLP)</a:t>
+              <a:t>according to W&amp;B</a:t>
             </a:r>
             <a:endParaRPr lang="en-US" sz="1000" dirty="0">
-              <a:latin typeface="Tw Cen MT"/>
+              <a:solidFill>
+                <a:srgbClr val="3D5A73"/>
+              </a:solidFill>
+              <a:latin typeface="Calibri"/>
               <a:ea typeface="Calibri"/>
               <a:cs typeface="Calibri"/>
             </a:endParaRPr>
@@ -22921,7 +22946,7 @@
           <p:nvPr>
             <p:extLst>
               <p:ext uri="{D42A27DB-BD31-4B8C-83A1-F6EECF244321}">
-                <p14:modId xmlns:p14="http://schemas.microsoft.com/office/powerpoint/2010/main" val="314816160"/>
+                <p14:modId xmlns:p14="http://schemas.microsoft.com/office/powerpoint/2010/main" val="2351065962"/>
               </p:ext>
             </p:extLst>
           </p:nvPr>
@@ -24109,15 +24134,15 @@
                         <a:buNone/>
                       </a:pPr>
                       <a:r>
-                        <a:rPr lang="en-US" sz="1400" dirty="0">
+                        <a:rPr lang="en-US" sz="1400">
                           <a:solidFill>
                             <a:srgbClr val="000000"/>
                           </a:solidFill>
                         </a:rPr>
-                        <a:t>Residual Network converges the fastest; </a:t>
+                        <a:t>Residual Network converges the fastest (in terms of number of epochs, not time); </a:t>
                       </a:r>
                       <a:r>
-                        <a:rPr lang="en-US" sz="1400" dirty="0" err="1">
+                        <a:rPr lang="en-US" sz="1400" err="1">
                           <a:solidFill>
                             <a:srgbClr val="000000"/>
                           </a:solidFill>
@@ -26410,8 +26435,8 @@
         </p:nvSpPr>
         <p:spPr>
           <a:xfrm>
-            <a:off x="274320" y="2436880"/>
-            <a:ext cx="5151120" cy="2452560"/>
+            <a:off x="313065" y="2436880"/>
+            <a:ext cx="5073630" cy="2530051"/>
           </a:xfrm>
           <a:prstGeom prst="rect">
             <a:avLst/>
@@ -27097,7 +27122,7 @@
                 </a:solidFill>
                 <a:latin typeface="Trebuchet MS"/>
               </a:rPr>
-              <a:t>0.99720</a:t>
+              <a:t>1.0000</a:t>
             </a:r>
             <a:endParaRPr lang="en-US" sz="3200">
               <a:solidFill>
@@ -27152,9 +27177,7 @@
             </a:endParaRPr>
           </a:p>
           <a:p>
-            <a:pPr marL="0" indent="0" algn="ctr">
-              <a:buNone/>
-            </a:pPr>
+            <a:pPr algn="ctr"/>
             <a:r>
               <a:rPr lang="en-US" sz="1100" dirty="0">
                 <a:solidFill>
@@ -27164,7 +27187,7 @@
                 <a:ea typeface="Calibri"/>
                 <a:cs typeface="Calibri"/>
               </a:rPr>
-              <a:t>(submitted I_CNN)</a:t>
+              <a:t>(submitted M_CNN)</a:t>
             </a:r>
             <a:endParaRPr lang="en-US" sz="1100" dirty="0">
               <a:latin typeface="Tw Cen MT" panose="020B0602020104020603"/>
@@ -27398,9 +27421,6 @@
             </a:r>
           </a:p>
           <a:p>
-            <a:pPr>
-              <a:buNone/>
-            </a:pPr>
             <a:r>
               <a:rPr lang="en-US">
                 <a:solidFill>
@@ -27429,7 +27449,7 @@
                 <a:ea typeface="Calibri"/>
                 <a:cs typeface="Calibri"/>
               </a:rPr>
-              <a:t>ENS_C+E (submitted) ★		1.0000              100%</a:t>
+              <a:t>M_CNN (submitted) ★		1.0000              100%</a:t>
             </a:r>
             <a:endParaRPr lang="en-US" b="1" dirty="0">
               <a:solidFill>
@@ -27448,7 +27468,7 @@
                 </a:solidFill>
                 <a:latin typeface="Calibri"/>
               </a:rPr>
-              <a:t>Kaggle public test        		0.99720              —  </a:t>
+              <a:t>Kaggle public test                     1.0000                 —  </a:t>
             </a:r>
             <a:endParaRPr lang="en-US">
               <a:solidFill>
@@ -27476,7 +27496,7 @@
         <p:spPr>
           <a:xfrm>
             <a:off x="5546979" y="2436880"/>
-            <a:ext cx="3414141" cy="2452560"/>
+            <a:ext cx="3414141" cy="2530051"/>
           </a:xfrm>
           <a:prstGeom prst="rect">
             <a:avLst/>
@@ -27510,8 +27530,8 @@
         </p:nvSpPr>
         <p:spPr>
           <a:xfrm>
-            <a:off x="5546979" y="2574040"/>
-            <a:ext cx="3414141" cy="2315400"/>
+            <a:off x="5546979" y="2433861"/>
+            <a:ext cx="3414141" cy="2541843"/>
           </a:xfrm>
           <a:prstGeom prst="rect">
             <a:avLst/>
@@ -27530,15 +27550,17 @@
                 </a:solidFill>
                 <a:latin typeface="Trebuchet MS"/>
               </a:rPr>
-              <a:t>Our model achieved a good performance</a:t>
-            </a:r>
-            <a:endParaRPr lang="en-US" dirty="0">
-              <a:solidFill>
-                <a:srgbClr val="00A896"/>
-              </a:solidFill>
-            </a:endParaRPr>
-          </a:p>
-          <a:p>
+              <a:t>Our model achieved </a:t>
+            </a:r>
+            <a:r>
+              <a:rPr lang="en-US" b="1">
+                <a:solidFill>
+                  <a:srgbClr val="00A896"/>
+                </a:solidFill>
+                <a:latin typeface="Trebuchet MS"/>
+              </a:rPr>
+              <a:t>a perfect performance</a:t>
+            </a:r>
             <a:endParaRPr lang="en-US" b="1" dirty="0">
               <a:solidFill>
                 <a:srgbClr val="00A896"/>
@@ -27579,15 +27601,49 @@
               <a:t>	</a:t>
             </a:r>
             <a:r>
-              <a:rPr lang="en-US" sz="2400" b="1" dirty="0">
+              <a:rPr lang="en-US" sz="2400" b="1">
                 <a:solidFill>
                   <a:srgbClr val="00A896"/>
                 </a:solidFill>
                 <a:latin typeface="Calibri"/>
               </a:rPr>
-              <a:t>0.2431</a:t>
+              <a:t>0.</a:t>
             </a:r>
             <a:endParaRPr lang="en-US" sz="2400" b="1" dirty="0">
+              <a:solidFill>
+                <a:srgbClr val="00A896"/>
+              </a:solidFill>
+              <a:latin typeface="Calibri"/>
+              <a:ea typeface="Calibri"/>
+              <a:cs typeface="Calibri"/>
+            </a:endParaRPr>
+          </a:p>
+          <a:p>
+            <a:r>
+              <a:rPr lang="en-US" sz="1100" b="1" dirty="0">
+                <a:solidFill>
+                  <a:schemeClr val="bg1"/>
+                </a:solidFill>
+                <a:latin typeface="Calibri"/>
+                <a:ea typeface="Calibri"/>
+                <a:cs typeface="Calibri"/>
+              </a:rPr>
+              <a:t>Note: </a:t>
+            </a:r>
+            <a:r>
+              <a:rPr lang="en-US" sz="1100" dirty="0">
+                <a:solidFill>
+                  <a:schemeClr val="bg1"/>
+                </a:solidFill>
+                <a:latin typeface="Calibri"/>
+                <a:ea typeface="Calibri"/>
+                <a:cs typeface="Calibri"/>
+              </a:rPr>
+              <a:t>we submitted M (Residual Network) instead of I since it also achieves a perfect score, but with lower losses (10^-3 vs 10^-2). In this report, we decided to analyze I instead of M since it converged faster, and M is so powerful that changing parameters and doing strange augmentation didn't hurt it, making it impossible to come to new conclusions</a:t>
+            </a:r>
+          </a:p>
+          <a:p>
+            <a:endParaRPr lang="en-US" sz="2400" dirty="0">
               <a:solidFill>
                 <a:srgbClr val="00A896"/>
               </a:solidFill>
@@ -27696,9 +27752,7 @@
             </a:endParaRPr>
           </a:p>
           <a:p>
-            <a:pPr marL="0" indent="0" algn="ctr">
-              <a:buNone/>
-            </a:pPr>
+            <a:pPr algn="ctr"/>
             <a:r>
               <a:rPr lang="en-US" sz="1100" dirty="0">
                 <a:solidFill>
@@ -27708,7 +27762,7 @@
                 <a:ea typeface="Calibri"/>
                 <a:cs typeface="Calibri"/>
               </a:rPr>
-              <a:t>(submitted I_CNN)</a:t>
+              <a:t>(submitted M_CNN)</a:t>
             </a:r>
             <a:endParaRPr lang="en-US" sz="1100" dirty="0">
               <a:latin typeface="Calibri"/>
@@ -27858,307 +27912,14 @@
       </p:sp>
       <p:sp>
         <p:nvSpPr>
-          <p:cNvPr id="5" name="Title"/>
+          <p:cNvPr id="50" name="InsightBG"/>
           <p:cNvSpPr/>
           <p:nvPr/>
         </p:nvSpPr>
         <p:spPr>
           <a:xfrm>
-            <a:off x="457199" y="109728"/>
-            <a:ext cx="6880671" cy="530352"/>
-          </a:xfrm>
-          <a:prstGeom prst="rect">
-            <a:avLst/>
-          </a:prstGeom>
-          <a:noFill/>
-          <a:ln/>
-        </p:spPr>
-        <p:txBody>
-          <a:bodyPr wrap="square" lIns="0" tIns="0" rIns="0" bIns="0" rtlCol="0" anchor="ctr"/>
-          <a:lstStyle/>
-          <a:p>
-            <a:pPr marL="0" indent="0">
-              <a:buNone/>
-            </a:pPr>
-            <a:r>
-              <a:rPr lang="en-US" sz="2200" b="1" dirty="0">
-                <a:solidFill>
-                  <a:srgbClr val="0D1B2A"/>
-                </a:solidFill>
-                <a:latin typeface="Trebuchet MS" pitchFamily="34" charset="0"/>
-              </a:rPr>
-              <a:t>Per-Class F1</a:t>
-            </a:r>
-          </a:p>
-        </p:txBody>
-      </p:sp>
-      <p:sp>
-        <p:nvSpPr>
-          <p:cNvPr id="20" name="ClassBG"/>
-          <p:cNvSpPr/>
-          <p:nvPr/>
-        </p:nvSpPr>
-        <p:spPr>
-          <a:xfrm>
-            <a:off x="4350994" y="740160"/>
-            <a:ext cx="4663920" cy="3823920"/>
-          </a:xfrm>
-          <a:prstGeom prst="rect">
-            <a:avLst/>
-          </a:prstGeom>
-          <a:solidFill>
-            <a:srgbClr val="FFFFFF"/>
-          </a:solidFill>
-          <a:ln w="6350">
-            <a:solidFill>
-              <a:srgbClr val="D8E4EC"/>
-            </a:solidFill>
-          </a:ln>
-          <a:effectLst>
-            <a:outerShdw blurRad="101600" dist="38100" dir="8100000" algn="bl" rotWithShape="0">
-              <a:srgbClr val="000000">
-                <a:alpha val="10000"/>
-              </a:srgbClr>
-            </a:outerShdw>
-          </a:effectLst>
-        </p:spPr>
-        <p:txBody>
-          <a:bodyPr/>
-          <a:lstStyle/>
-          <a:p>
-            <a:endParaRPr lang="en-US"/>
-          </a:p>
-        </p:txBody>
-      </p:sp>
-      <p:sp>
-        <p:nvSpPr>
-          <p:cNvPr id="30" name="Bar1fill"/>
-          <p:cNvSpPr/>
-          <p:nvPr/>
-        </p:nvSpPr>
-        <p:spPr>
-          <a:xfrm>
-            <a:off x="4443154" y="740160"/>
-            <a:ext cx="2194560" cy="357120"/>
-          </a:xfrm>
-          <a:prstGeom prst="rect">
-            <a:avLst/>
-          </a:prstGeom>
-          <a:solidFill>
-            <a:srgbClr val="00A896"/>
-          </a:solidFill>
-          <a:ln w="0">
-            <a:noFill/>
-          </a:ln>
-        </p:spPr>
-        <p:txBody>
-          <a:bodyPr/>
-          <a:lstStyle/>
-          <a:p>
-            <a:endParaRPr lang="en-US"/>
-          </a:p>
-        </p:txBody>
-      </p:sp>
-      <p:sp>
-        <p:nvSpPr>
-          <p:cNvPr id="31" name="Bar1txt"/>
-          <p:cNvSpPr/>
-          <p:nvPr/>
-        </p:nvSpPr>
-        <p:spPr>
-          <a:xfrm>
-            <a:off x="4443154" y="740160"/>
-            <a:ext cx="4480560" cy="357120"/>
-          </a:xfrm>
-          <a:prstGeom prst="rect">
-            <a:avLst/>
-          </a:prstGeom>
-          <a:noFill/>
-          <a:ln/>
-        </p:spPr>
-        <p:txBody>
-          <a:bodyPr wrap="square" lIns="91440" tIns="0" rIns="0" bIns="0" rtlCol="0" anchor="ctr"/>
-          <a:lstStyle/>
-          <a:p>
-            <a:pPr>
-              <a:buNone/>
-            </a:pPr>
-            <a:r>
-              <a:rPr lang="en-US" sz="1100" b="1" dirty="0">
-                <a:solidFill>
-                  <a:srgbClr val="FFFFFF"/>
-                </a:solidFill>
-                <a:latin typeface="Calibri"/>
-              </a:rPr>
-              <a:t>🔥 Fire    0.457  		           </a:t>
-            </a:r>
-            <a:r>
-              <a:rPr lang="en-US" sz="900" dirty="0">
-                <a:latin typeface="Calibri"/>
-              </a:rPr>
-              <a:t>distinctive orange palette</a:t>
-            </a:r>
-          </a:p>
-        </p:txBody>
-      </p:sp>
-      <p:sp>
-        <p:nvSpPr>
-          <p:cNvPr id="32" name="Bar2fill"/>
-          <p:cNvSpPr/>
-          <p:nvPr/>
-        </p:nvSpPr>
-        <p:spPr>
-          <a:xfrm>
-            <a:off x="4443154" y="1133280"/>
-            <a:ext cx="1737360" cy="329184"/>
-          </a:xfrm>
-          <a:prstGeom prst="rect">
-            <a:avLst/>
-          </a:prstGeom>
-          <a:solidFill>
-            <a:srgbClr val="028090"/>
-          </a:solidFill>
-          <a:ln w="0">
-            <a:noFill/>
-          </a:ln>
-        </p:spPr>
-        <p:txBody>
-          <a:bodyPr/>
-          <a:lstStyle/>
-          <a:p>
-            <a:endParaRPr lang="en-US"/>
-          </a:p>
-        </p:txBody>
-      </p:sp>
-      <p:sp>
-        <p:nvSpPr>
-          <p:cNvPr id="33" name="Bar2txt"/>
-          <p:cNvSpPr/>
-          <p:nvPr/>
-        </p:nvSpPr>
-        <p:spPr>
-          <a:xfrm>
-            <a:off x="4443154" y="1133280"/>
-            <a:ext cx="4480560" cy="329184"/>
-          </a:xfrm>
-          <a:prstGeom prst="rect">
-            <a:avLst/>
-          </a:prstGeom>
-          <a:noFill/>
-          <a:ln/>
-        </p:spPr>
-        <p:txBody>
-          <a:bodyPr wrap="square" lIns="91440" tIns="0" rIns="0" bIns="0" rtlCol="0" anchor="ctr"/>
-          <a:lstStyle/>
-          <a:p>
-            <a:pPr>
-              <a:buNone/>
-            </a:pPr>
-            <a:r>
-              <a:rPr lang="en-US" sz="1100" b="1" dirty="0">
-                <a:solidFill>
-                  <a:srgbClr val="FFFFFF"/>
-                </a:solidFill>
-                <a:latin typeface="Calibri"/>
-              </a:rPr>
-              <a:t>☠️ Poison  0.359                       </a:t>
-            </a:r>
-            <a:r>
-              <a:rPr lang="en-US" sz="900" dirty="0">
-                <a:solidFill>
-                  <a:srgbClr val="1A2B3C"/>
-                </a:solidFill>
-                <a:latin typeface="Calibri"/>
-              </a:rPr>
-              <a:t>unique purple; LS prevents overconfidence</a:t>
-            </a:r>
-          </a:p>
-        </p:txBody>
-      </p:sp>
-      <p:sp>
-        <p:nvSpPr>
-          <p:cNvPr id="34" name="Bar3fill"/>
-          <p:cNvSpPr/>
-          <p:nvPr/>
-        </p:nvSpPr>
-        <p:spPr>
-          <a:xfrm>
-            <a:off x="4443154" y="1517904"/>
-            <a:ext cx="1600200" cy="329184"/>
-          </a:xfrm>
-          <a:prstGeom prst="rect">
-            <a:avLst/>
-          </a:prstGeom>
-          <a:solidFill>
-            <a:srgbClr val="028090"/>
-          </a:solidFill>
-          <a:ln w="0">
-            <a:noFill/>
-          </a:ln>
-        </p:spPr>
-        <p:txBody>
-          <a:bodyPr/>
-          <a:lstStyle/>
-          <a:p>
-            <a:endParaRPr lang="en-US"/>
-          </a:p>
-        </p:txBody>
-      </p:sp>
-      <p:sp>
-        <p:nvSpPr>
-          <p:cNvPr id="35" name="Bar3txt"/>
-          <p:cNvSpPr/>
-          <p:nvPr/>
-        </p:nvSpPr>
-        <p:spPr>
-          <a:xfrm>
-            <a:off x="4443154" y="1517904"/>
-            <a:ext cx="4480560" cy="329184"/>
-          </a:xfrm>
-          <a:prstGeom prst="rect">
-            <a:avLst/>
-          </a:prstGeom>
-          <a:noFill/>
-          <a:ln/>
-        </p:spPr>
-        <p:txBody>
-          <a:bodyPr wrap="square" lIns="91440" tIns="0" rIns="0" bIns="0" rtlCol="0" anchor="ctr"/>
-          <a:lstStyle/>
-          <a:p>
-            <a:pPr>
-              <a:buNone/>
-            </a:pPr>
-            <a:r>
-              <a:rPr lang="en-US" sz="1100" b="1" dirty="0">
-                <a:solidFill>
-                  <a:srgbClr val="FFFFFF"/>
-                </a:solidFill>
-                <a:latin typeface="Calibri"/>
-              </a:rPr>
-              <a:t>💧 Water   0.332                  </a:t>
-            </a:r>
-            <a:r>
-              <a:rPr lang="en-US" sz="900" dirty="0">
-                <a:solidFill>
-                  <a:srgbClr val="1A2B3C"/>
-                </a:solidFill>
-                <a:latin typeface="Calibri"/>
-              </a:rPr>
-              <a:t>blue palette helps; confused with Normal</a:t>
-            </a:r>
-          </a:p>
-        </p:txBody>
-      </p:sp>
-      <p:sp>
-        <p:nvSpPr>
-          <p:cNvPr id="36" name="Bar4fill"/>
-          <p:cNvSpPr/>
-          <p:nvPr/>
-        </p:nvSpPr>
-        <p:spPr>
-          <a:xfrm>
-            <a:off x="4443154" y="1902528"/>
-            <a:ext cx="1371600" cy="329184"/>
+            <a:off x="-2500" y="4467666"/>
+            <a:ext cx="9149000" cy="671513"/>
           </a:xfrm>
           <a:prstGeom prst="rect">
             <a:avLst/>
@@ -28180,14 +27941,14 @@
       </p:sp>
       <p:sp>
         <p:nvSpPr>
-          <p:cNvPr id="37" name="Bar4txt"/>
+          <p:cNvPr id="51" name="InsightText"/>
           <p:cNvSpPr/>
           <p:nvPr/>
         </p:nvSpPr>
         <p:spPr>
           <a:xfrm>
-            <a:off x="4443154" y="1902528"/>
-            <a:ext cx="4480560" cy="329184"/>
+            <a:off x="323254" y="4611902"/>
+            <a:ext cx="8496050" cy="384840"/>
           </a:xfrm>
           <a:prstGeom prst="rect">
             <a:avLst/>
@@ -28196,504 +27957,9 @@
           <a:ln/>
         </p:spPr>
         <p:txBody>
-          <a:bodyPr wrap="square" lIns="91440" tIns="0" rIns="0" bIns="0" rtlCol="0" anchor="ctr"/>
-          <a:lstStyle/>
-          <a:p>
-            <a:pPr>
-              <a:buNone/>
-            </a:pPr>
-            <a:r>
-              <a:rPr lang="en-US" sz="1100" b="1" dirty="0">
-                <a:solidFill>
-                  <a:srgbClr val="FFFFFF"/>
-                </a:solidFill>
-                <a:latin typeface="Calibri"/>
-              </a:rPr>
-              <a:t>🌿 Grass   0.286            </a:t>
-            </a:r>
-            <a:r>
-              <a:rPr lang="en-US" sz="900" dirty="0">
-                <a:solidFill>
-                  <a:srgbClr val="1A2B3C"/>
-                </a:solidFill>
-                <a:latin typeface="Calibri"/>
-              </a:rPr>
-              <a:t>green palette; confused with Bug</a:t>
-            </a:r>
-          </a:p>
-        </p:txBody>
-      </p:sp>
-      <p:sp>
-        <p:nvSpPr>
-          <p:cNvPr id="38" name="Bar5fill"/>
-          <p:cNvSpPr/>
-          <p:nvPr/>
-        </p:nvSpPr>
-        <p:spPr>
-          <a:xfrm>
-            <a:off x="4443154" y="2287152"/>
-            <a:ext cx="1028160" cy="329184"/>
-          </a:xfrm>
-          <a:prstGeom prst="rect">
-            <a:avLst/>
-          </a:prstGeom>
-          <a:solidFill>
-            <a:srgbClr val="1C3A52"/>
-          </a:solidFill>
-          <a:ln w="0">
-            <a:noFill/>
-          </a:ln>
-        </p:spPr>
-        <p:txBody>
-          <a:bodyPr/>
-          <a:lstStyle/>
-          <a:p>
-            <a:endParaRPr lang="en-US"/>
-          </a:p>
-        </p:txBody>
-      </p:sp>
-      <p:sp>
-        <p:nvSpPr>
-          <p:cNvPr id="39" name="Bar5txt"/>
-          <p:cNvSpPr/>
-          <p:nvPr/>
-        </p:nvSpPr>
-        <p:spPr>
-          <a:xfrm>
-            <a:off x="4443154" y="2287152"/>
-            <a:ext cx="4480560" cy="329184"/>
-          </a:xfrm>
-          <a:prstGeom prst="rect">
-            <a:avLst/>
-          </a:prstGeom>
-          <a:noFill/>
-          <a:ln/>
-        </p:spPr>
-        <p:txBody>
-          <a:bodyPr wrap="square" lIns="91440" tIns="0" rIns="0" bIns="0" rtlCol="0" anchor="ctr"/>
-          <a:lstStyle/>
-          <a:p>
-            <a:pPr>
-              <a:buNone/>
-            </a:pPr>
-            <a:r>
-              <a:rPr lang="en-US" sz="1100" b="1" dirty="0">
-                <a:solidFill>
-                  <a:schemeClr val="bg1"/>
-                </a:solidFill>
-                <a:latin typeface="Calibri"/>
-              </a:rPr>
-              <a:t>😐 Normal  0.2</a:t>
-            </a:r>
-            <a:r>
-              <a:rPr lang="en-US" sz="1100" b="1" dirty="0">
-                <a:latin typeface="Calibri"/>
-              </a:rPr>
-              <a:t>15</a:t>
-            </a:r>
-            <a:r>
-              <a:rPr lang="en-US" sz="1100" b="1" dirty="0">
-                <a:solidFill>
-                  <a:schemeClr val="bg1"/>
-                </a:solidFill>
-                <a:latin typeface="Calibri"/>
-              </a:rPr>
-              <a:t> </a:t>
-            </a:r>
-            <a:r>
-              <a:rPr lang="en-US" sz="1100" b="1" dirty="0">
-                <a:solidFill>
-                  <a:srgbClr val="1C3A52"/>
-                </a:solidFill>
-                <a:latin typeface="Calibri"/>
-              </a:rPr>
-              <a:t> </a:t>
-            </a:r>
-            <a:r>
-              <a:rPr lang="en-US" sz="900" dirty="0">
-                <a:solidFill>
-                  <a:srgbClr val="1A2B3C"/>
-                </a:solidFill>
-                <a:latin typeface="Calibri"/>
-              </a:rPr>
-              <a:t>most diverse; no distinctive colour</a:t>
-            </a:r>
-          </a:p>
-        </p:txBody>
-      </p:sp>
-      <p:sp>
-        <p:nvSpPr>
-          <p:cNvPr id="40" name="Bar6fill"/>
-          <p:cNvSpPr/>
-          <p:nvPr/>
-        </p:nvSpPr>
-        <p:spPr>
-          <a:xfrm>
-            <a:off x="4443154" y="2671776"/>
-            <a:ext cx="668880" cy="329184"/>
-          </a:xfrm>
-          <a:prstGeom prst="rect">
-            <a:avLst/>
-          </a:prstGeom>
-          <a:solidFill>
-            <a:srgbClr val="C0392B"/>
-          </a:solidFill>
-          <a:ln w="0">
-            <a:noFill/>
-          </a:ln>
-        </p:spPr>
-        <p:txBody>
-          <a:bodyPr/>
-          <a:lstStyle/>
-          <a:p>
-            <a:endParaRPr lang="en-US"/>
-          </a:p>
-        </p:txBody>
-      </p:sp>
-      <p:sp>
-        <p:nvSpPr>
-          <p:cNvPr id="41" name="Bar6txt"/>
-          <p:cNvSpPr/>
-          <p:nvPr/>
-        </p:nvSpPr>
-        <p:spPr>
-          <a:xfrm>
-            <a:off x="4443154" y="2671776"/>
-            <a:ext cx="4480560" cy="329184"/>
-          </a:xfrm>
-          <a:prstGeom prst="rect">
-            <a:avLst/>
-          </a:prstGeom>
-          <a:noFill/>
-          <a:ln/>
-        </p:spPr>
-        <p:txBody>
-          <a:bodyPr wrap="square" lIns="91440" tIns="0" rIns="0" bIns="0" rtlCol="0" anchor="ctr"/>
-          <a:lstStyle/>
-          <a:p>
-            <a:pPr>
-              <a:buNone/>
-            </a:pPr>
-            <a:r>
-              <a:rPr lang="en-US" sz="1100" b="1" dirty="0">
-                <a:solidFill>
-                  <a:srgbClr val="FFFFFF"/>
-                </a:solidFill>
-                <a:latin typeface="Calibri"/>
-              </a:rPr>
-              <a:t>🐛 Bug  </a:t>
-            </a:r>
-            <a:r>
-              <a:rPr lang="en-US" sz="1100" b="1" dirty="0">
-                <a:latin typeface="Calibri"/>
-              </a:rPr>
-              <a:t>   0.140  </a:t>
-            </a:r>
-            <a:r>
-              <a:rPr lang="en-US" sz="900" dirty="0">
-                <a:solidFill>
-                  <a:srgbClr val="1A2B3C"/>
-                </a:solidFill>
-                <a:latin typeface="Calibri"/>
-              </a:rPr>
-              <a:t>green overlaps Grass; confused with Normal</a:t>
-            </a:r>
-          </a:p>
-        </p:txBody>
-      </p:sp>
-      <p:sp>
-        <p:nvSpPr>
-          <p:cNvPr id="42" name="Bar7fill"/>
-          <p:cNvSpPr/>
-          <p:nvPr/>
-        </p:nvSpPr>
-        <p:spPr>
-          <a:xfrm>
-            <a:off x="4443154" y="3056400"/>
-            <a:ext cx="640080" cy="329184"/>
-          </a:xfrm>
-          <a:prstGeom prst="rect">
-            <a:avLst/>
-          </a:prstGeom>
-          <a:solidFill>
-            <a:srgbClr val="C0392B"/>
-          </a:solidFill>
-          <a:ln w="0">
-            <a:noFill/>
-          </a:ln>
-        </p:spPr>
-        <p:txBody>
-          <a:bodyPr/>
-          <a:lstStyle/>
-          <a:p>
-            <a:endParaRPr lang="en-US"/>
-          </a:p>
-        </p:txBody>
-      </p:sp>
-      <p:sp>
-        <p:nvSpPr>
-          <p:cNvPr id="43" name="Bar7txt"/>
-          <p:cNvSpPr/>
-          <p:nvPr/>
-        </p:nvSpPr>
-        <p:spPr>
-          <a:xfrm>
-            <a:off x="4443154" y="3056400"/>
-            <a:ext cx="4480560" cy="329184"/>
-          </a:xfrm>
-          <a:prstGeom prst="rect">
-            <a:avLst/>
-          </a:prstGeom>
-          <a:noFill/>
-          <a:ln/>
-        </p:spPr>
-        <p:txBody>
-          <a:bodyPr wrap="square" lIns="91440" tIns="0" rIns="0" bIns="0" rtlCol="0" anchor="ctr"/>
-          <a:lstStyle/>
-          <a:p>
-            <a:pPr>
-              <a:buNone/>
-            </a:pPr>
-            <a:r>
-              <a:rPr lang="en-US" sz="1100" b="1" dirty="0">
-                <a:solidFill>
-                  <a:srgbClr val="FFFFFF"/>
-                </a:solidFill>
-                <a:latin typeface="Calibri"/>
-              </a:rPr>
-              <a:t>🗿 Rock</a:t>
-            </a:r>
-            <a:r>
-              <a:rPr lang="en-US" sz="1100" b="1" dirty="0">
-                <a:latin typeface="Calibri"/>
-              </a:rPr>
-              <a:t>    0.134  </a:t>
-            </a:r>
-            <a:r>
-              <a:rPr lang="en-US" sz="900" dirty="0">
-                <a:solidFill>
-                  <a:srgbClr val="1A2B3C"/>
-                </a:solidFill>
-                <a:latin typeface="Calibri"/>
-              </a:rPr>
-              <a:t>grey/brown shared with Ground and Fighting</a:t>
-            </a:r>
-          </a:p>
-        </p:txBody>
-      </p:sp>
-      <p:sp>
-        <p:nvSpPr>
-          <p:cNvPr id="44" name="Bar8fill"/>
-          <p:cNvSpPr/>
-          <p:nvPr/>
-        </p:nvSpPr>
-        <p:spPr>
-          <a:xfrm>
-            <a:off x="4443154" y="3441024"/>
-            <a:ext cx="602640" cy="329184"/>
-          </a:xfrm>
-          <a:prstGeom prst="rect">
-            <a:avLst/>
-          </a:prstGeom>
-          <a:solidFill>
-            <a:srgbClr val="C0392B"/>
-          </a:solidFill>
-          <a:ln w="0">
-            <a:noFill/>
-          </a:ln>
-        </p:spPr>
-        <p:txBody>
-          <a:bodyPr/>
-          <a:lstStyle/>
-          <a:p>
-            <a:endParaRPr lang="en-US"/>
-          </a:p>
-        </p:txBody>
-      </p:sp>
-      <p:sp>
-        <p:nvSpPr>
-          <p:cNvPr id="45" name="Bar8txt"/>
-          <p:cNvSpPr/>
-          <p:nvPr/>
-        </p:nvSpPr>
-        <p:spPr>
-          <a:xfrm>
-            <a:off x="4443154" y="3441024"/>
-            <a:ext cx="4480560" cy="329184"/>
-          </a:xfrm>
-          <a:prstGeom prst="rect">
-            <a:avLst/>
-          </a:prstGeom>
-          <a:noFill/>
-          <a:ln/>
-        </p:spPr>
-        <p:txBody>
-          <a:bodyPr wrap="square" lIns="91440" tIns="0" rIns="0" bIns="0" rtlCol="0" anchor="ctr"/>
-          <a:lstStyle/>
-          <a:p>
-            <a:pPr>
-              <a:buNone/>
-            </a:pPr>
-            <a:r>
-              <a:rPr lang="en-US" sz="1100" b="1" dirty="0">
-                <a:solidFill>
-                  <a:srgbClr val="FFFFFF"/>
-                </a:solidFill>
-                <a:latin typeface="Calibri"/>
-              </a:rPr>
-              <a:t>⚔️ Fight </a:t>
-            </a:r>
-            <a:r>
-              <a:rPr lang="en-US" sz="1100" b="1" dirty="0">
-                <a:latin typeface="Calibri"/>
-              </a:rPr>
-              <a:t> 0.126  </a:t>
-            </a:r>
-            <a:r>
-              <a:rPr lang="en-US" sz="900" dirty="0">
-                <a:solidFill>
-                  <a:srgbClr val="1A2B3C"/>
-                </a:solidFill>
-                <a:latin typeface="Calibri"/>
-              </a:rPr>
-              <a:t>humanoid silhouette = same as Normal for MLP</a:t>
-            </a:r>
-          </a:p>
-        </p:txBody>
-      </p:sp>
-      <p:sp>
-        <p:nvSpPr>
-          <p:cNvPr id="46" name="Bar9fill"/>
-          <p:cNvSpPr/>
-          <p:nvPr/>
-        </p:nvSpPr>
-        <p:spPr>
-          <a:xfrm>
-            <a:off x="4443154" y="3825648"/>
-            <a:ext cx="511200" cy="329184"/>
-          </a:xfrm>
-          <a:prstGeom prst="rect">
-            <a:avLst/>
-          </a:prstGeom>
-          <a:solidFill>
-            <a:srgbClr val="C0392B"/>
-          </a:solidFill>
-          <a:ln w="0">
-            <a:noFill/>
-          </a:ln>
-        </p:spPr>
-        <p:txBody>
-          <a:bodyPr/>
-          <a:lstStyle/>
-          <a:p>
-            <a:endParaRPr lang="en-US"/>
-          </a:p>
-        </p:txBody>
-      </p:sp>
-      <p:sp>
-        <p:nvSpPr>
-          <p:cNvPr id="47" name="Bar9txt"/>
-          <p:cNvSpPr/>
-          <p:nvPr/>
-        </p:nvSpPr>
-        <p:spPr>
-          <a:xfrm>
-            <a:off x="4443154" y="3825648"/>
-            <a:ext cx="4480560" cy="329184"/>
-          </a:xfrm>
-          <a:prstGeom prst="rect">
-            <a:avLst/>
-          </a:prstGeom>
-          <a:noFill/>
-          <a:ln/>
-        </p:spPr>
-        <p:txBody>
-          <a:bodyPr wrap="square" lIns="91440" tIns="0" rIns="0" bIns="0" rtlCol="0" anchor="ctr"/>
-          <a:lstStyle/>
-          <a:p>
-            <a:pPr>
-              <a:buNone/>
-            </a:pPr>
-            <a:r>
-              <a:rPr lang="en-US" sz="1100" b="1" dirty="0">
-                <a:solidFill>
-                  <a:srgbClr val="FFFFFF"/>
-                </a:solidFill>
-                <a:latin typeface="Calibri"/>
-              </a:rPr>
-              <a:t>🌍 Gro</a:t>
-            </a:r>
-            <a:r>
-              <a:rPr lang="en-US" sz="1100" b="1" dirty="0">
-                <a:latin typeface="Calibri"/>
-              </a:rPr>
-              <a:t>und 0.107  </a:t>
-            </a:r>
-            <a:r>
-              <a:rPr lang="en-US" sz="900" dirty="0">
-                <a:solidFill>
-                  <a:srgbClr val="1A2B3C"/>
-                </a:solidFill>
-                <a:latin typeface="Calibri"/>
-              </a:rPr>
-              <a:t>fewest samples (244) + brown/grey overlap</a:t>
-            </a:r>
-          </a:p>
-        </p:txBody>
-      </p:sp>
-      <p:sp>
-        <p:nvSpPr>
-          <p:cNvPr id="50" name="InsightBG"/>
-          <p:cNvSpPr/>
-          <p:nvPr/>
-        </p:nvSpPr>
-        <p:spPr>
-          <a:xfrm>
-            <a:off x="274320" y="4628400"/>
-            <a:ext cx="8595360" cy="457200"/>
-          </a:xfrm>
-          <a:prstGeom prst="rect">
-            <a:avLst/>
-          </a:prstGeom>
-          <a:solidFill>
-            <a:srgbClr val="1C3A52"/>
-          </a:solidFill>
-          <a:ln w="0">
-            <a:noFill/>
-          </a:ln>
-        </p:spPr>
-        <p:txBody>
-          <a:bodyPr/>
-          <a:lstStyle/>
-          <a:p>
-            <a:endParaRPr lang="en-US"/>
-          </a:p>
-        </p:txBody>
-      </p:sp>
-      <p:sp>
-        <p:nvSpPr>
-          <p:cNvPr id="51" name="InsightText"/>
-          <p:cNvSpPr/>
-          <p:nvPr/>
-        </p:nvSpPr>
-        <p:spPr>
-          <a:xfrm>
-            <a:off x="457200" y="4665480"/>
-            <a:ext cx="8228160" cy="384840"/>
-          </a:xfrm>
-          <a:prstGeom prst="rect">
-            <a:avLst/>
-          </a:prstGeom>
-          <a:noFill/>
-          <a:ln/>
-        </p:spPr>
-        <p:txBody>
-          <a:bodyPr wrap="square" rtlCol="0" anchor="ctr"/>
-          <a:lstStyle/>
-          <a:p>
-            <a:pPr>
-              <a:buNone/>
-            </a:pPr>
+          <a:bodyPr wrap="square" lIns="91440" tIns="45720" rIns="91440" bIns="45720" rtlCol="0" anchor="ctr"/>
+          <a:lstStyle/>
+          <a:p>
             <a:r>
               <a:rPr lang="en-US" sz="1100" b="1" dirty="0">
                 <a:solidFill>
@@ -28704,7 +27970,7 @@
                 </a:solidFill>
                 <a:latin typeface="Trebuchet MS"/>
               </a:rPr>
-              <a:t>Pattern: Color Palette Drives Performance - </a:t>
+              <a:t>In worse models, the color palette still drives some performance: </a:t>
             </a:r>
             <a:r>
               <a:rPr lang="en-US" sz="1200" dirty="0">
@@ -28713,580 +27979,172 @@
                 </a:solidFill>
                 <a:latin typeface="Calibri"/>
               </a:rPr>
-              <a:t>distinctive colour = high F1 (Fire/Poison/Water); shared palette or humanoid shape = low F1 (Bug/Rock/Fighting/Ground). MLP on flat pixels is essentially a colour histogram classifier.</a:t>
-            </a:r>
-          </a:p>
-        </p:txBody>
-      </p:sp>
-      <p:grpSp>
-        <p:nvGrpSpPr>
-          <p:cNvPr id="14" name="Group 13">
+              <a:t>as in MLPs there's high F1 in Fire/Poison/Water, due to the distinctive </a:t>
+            </a:r>
+            <a:r>
+              <a:rPr lang="en-US" sz="1200" dirty="0" err="1">
+                <a:solidFill>
+                  <a:srgbClr val="AACCD8"/>
+                </a:solidFill>
+                <a:latin typeface="Calibri"/>
+              </a:rPr>
+              <a:t>colours</a:t>
+            </a:r>
+            <a:r>
+              <a:rPr lang="en-US" sz="1200" dirty="0">
+                <a:solidFill>
+                  <a:srgbClr val="AACCD8"/>
+                </a:solidFill>
+                <a:latin typeface="Calibri"/>
+              </a:rPr>
+              <a:t> of these types; shared palette or humanoid shape give us low F1 (Bug/Rock/Fighting/Ground), since they have no predominant </a:t>
+            </a:r>
+            <a:r>
+              <a:rPr lang="en-US" sz="1200" dirty="0" err="1">
+                <a:solidFill>
+                  <a:srgbClr val="AACCD8"/>
+                </a:solidFill>
+                <a:latin typeface="Calibri"/>
+              </a:rPr>
+              <a:t>colours</a:t>
+            </a:r>
+            <a:r>
+              <a:rPr lang="en-US" sz="1200" dirty="0">
+                <a:solidFill>
+                  <a:srgbClr val="AACCD8"/>
+                </a:solidFill>
+                <a:latin typeface="Calibri"/>
+              </a:rPr>
+              <a:t>. These models had more difficulty making the jump from the </a:t>
+            </a:r>
+            <a:r>
+              <a:rPr lang="en-US" sz="1200" dirty="0" err="1">
+                <a:solidFill>
+                  <a:srgbClr val="AACCD8"/>
+                </a:solidFill>
+                <a:latin typeface="Calibri"/>
+              </a:rPr>
+              <a:t>colours</a:t>
+            </a:r>
+            <a:r>
+              <a:rPr lang="en-US" sz="1200" dirty="0">
+                <a:solidFill>
+                  <a:srgbClr val="AACCD8"/>
+                </a:solidFill>
+                <a:latin typeface="Calibri"/>
+              </a:rPr>
+              <a:t> to the shapes of the </a:t>
+            </a:r>
+            <a:r>
+              <a:rPr lang="en-US" sz="1200" dirty="0" err="1">
+                <a:solidFill>
+                  <a:srgbClr val="AACCD8"/>
+                </a:solidFill>
+                <a:latin typeface="Calibri"/>
+              </a:rPr>
+              <a:t>pokemon</a:t>
+            </a:r>
+            <a:r>
+              <a:rPr lang="en-US" sz="1200" dirty="0">
+                <a:solidFill>
+                  <a:srgbClr val="AACCD8"/>
+                </a:solidFill>
+                <a:latin typeface="Calibri"/>
+              </a:rPr>
+              <a:t> themselves</a:t>
+            </a:r>
+            <a:endParaRPr lang="en-US" sz="1200" dirty="0">
+              <a:solidFill>
+                <a:srgbClr val="AACCD8"/>
+              </a:solidFill>
+              <a:latin typeface="Calibri"/>
+              <a:ea typeface="Calibri"/>
+              <a:cs typeface="Calibri"/>
+            </a:endParaRPr>
+          </a:p>
+        </p:txBody>
+      </p:sp>
+      <p:pic>
+        <p:nvPicPr>
+          <p:cNvPr id="6" name="Picture 5" descr="A red and yellow chart&#10;&#10;AI-generated content may be incorrect.">
             <a:extLst>
               <a:ext uri="{FF2B5EF4-FFF2-40B4-BE49-F238E27FC236}">
-                <a16:creationId xmlns:a16="http://schemas.microsoft.com/office/drawing/2014/main" id="{D7D7BD19-8433-4220-0326-4A5E6E9DD5F1}"/>
+                <a16:creationId xmlns:a16="http://schemas.microsoft.com/office/drawing/2014/main" id="{10968137-3EBD-2374-015A-4AF676334C6E}"/>
               </a:ext>
             </a:extLst>
           </p:cNvPr>
-          <p:cNvGrpSpPr/>
+          <p:cNvPicPr>
+            <a:picLocks noChangeAspect="1"/>
+          </p:cNvPicPr>
           <p:nvPr/>
-        </p:nvGrpSpPr>
-        <p:grpSpPr>
-          <a:xfrm>
-            <a:off x="62346" y="704400"/>
-            <a:ext cx="4159440" cy="3812241"/>
-            <a:chOff x="328275" y="1078992"/>
-            <a:chExt cx="5948798" cy="5452234"/>
-          </a:xfrm>
-        </p:grpSpPr>
-        <p:pic>
-          <p:nvPicPr>
-            <p:cNvPr id="8" name="Picture 7">
-              <a:extLst>
-                <a:ext uri="{FF2B5EF4-FFF2-40B4-BE49-F238E27FC236}">
-                  <a16:creationId xmlns:a16="http://schemas.microsoft.com/office/drawing/2014/main" id="{521649CF-B41C-41B2-9BCE-27EF28A8079C}"/>
-                </a:ext>
-              </a:extLst>
-            </p:cNvPr>
-            <p:cNvPicPr>
-              <a:picLocks noChangeAspect="1"/>
-            </p:cNvPicPr>
-            <p:nvPr/>
-          </p:nvPicPr>
-          <p:blipFill>
-            <a:blip r:embed="rId2"/>
-            <a:srcRect l="7907" b="32403"/>
-            <a:stretch>
-              <a:fillRect/>
-            </a:stretch>
-          </p:blipFill>
-          <p:spPr>
-            <a:xfrm>
-              <a:off x="328275" y="1078992"/>
-              <a:ext cx="5894723" cy="5232293"/>
-            </a:xfrm>
-            <a:prstGeom prst="rect">
-              <a:avLst/>
-            </a:prstGeom>
-          </p:spPr>
-        </p:pic>
-        <p:pic>
-          <p:nvPicPr>
-            <p:cNvPr id="9" name="Picture 8">
-              <a:extLst>
-                <a:ext uri="{FF2B5EF4-FFF2-40B4-BE49-F238E27FC236}">
-                  <a16:creationId xmlns:a16="http://schemas.microsoft.com/office/drawing/2014/main" id="{A4C3F6E0-4B22-02B8-7D33-E48BFF2088EE}"/>
-                </a:ext>
-              </a:extLst>
-            </p:cNvPr>
-            <p:cNvPicPr>
-              <a:picLocks noChangeAspect="1"/>
-            </p:cNvPicPr>
-            <p:nvPr/>
-          </p:nvPicPr>
-          <p:blipFill>
-            <a:blip r:embed="rId2"/>
-            <a:srcRect l="7907" t="93501"/>
-            <a:stretch>
-              <a:fillRect/>
-            </a:stretch>
-          </p:blipFill>
-          <p:spPr>
-            <a:xfrm>
-              <a:off x="382349" y="6028195"/>
-              <a:ext cx="5894724" cy="503031"/>
-            </a:xfrm>
-            <a:prstGeom prst="rect">
-              <a:avLst/>
-            </a:prstGeom>
-          </p:spPr>
-        </p:pic>
-        <p:sp>
-          <p:nvSpPr>
-            <p:cNvPr id="12" name="Rectangle 11">
-              <a:extLst>
-                <a:ext uri="{FF2B5EF4-FFF2-40B4-BE49-F238E27FC236}">
-                  <a16:creationId xmlns:a16="http://schemas.microsoft.com/office/drawing/2014/main" id="{CF15CF4F-F84D-2F98-42DC-4C7FCC704E0E}"/>
-                </a:ext>
-              </a:extLst>
-            </p:cNvPr>
-            <p:cNvSpPr/>
-            <p:nvPr/>
-          </p:nvSpPr>
-          <p:spPr>
-            <a:xfrm>
-              <a:off x="484106" y="5453535"/>
-              <a:ext cx="5351533" cy="574659"/>
-            </a:xfrm>
-            <a:prstGeom prst="rect">
-              <a:avLst/>
-            </a:prstGeom>
-            <a:gradFill flip="none" rotWithShape="1">
-              <a:gsLst>
-                <a:gs pos="0">
-                  <a:schemeClr val="bg1">
-                    <a:alpha val="0"/>
-                  </a:schemeClr>
-                </a:gs>
-                <a:gs pos="76000">
-                  <a:schemeClr val="bg1"/>
-                </a:gs>
-              </a:gsLst>
-              <a:lin ang="5400000" scaled="1"/>
-              <a:tileRect/>
-            </a:gradFill>
-            <a:ln>
-              <a:noFill/>
-            </a:ln>
-          </p:spPr>
-          <p:style>
-            <a:lnRef idx="2">
-              <a:schemeClr val="accent1">
-                <a:shade val="15000"/>
-              </a:schemeClr>
-            </a:lnRef>
-            <a:fillRef idx="1">
-              <a:schemeClr val="accent1"/>
-            </a:fillRef>
-            <a:effectRef idx="0">
-              <a:schemeClr val="accent1"/>
-            </a:effectRef>
-            <a:fontRef idx="minor">
-              <a:schemeClr val="lt1"/>
-            </a:fontRef>
-          </p:style>
-          <p:txBody>
-            <a:bodyPr rtlCol="0" anchor="ctr"/>
-            <a:lstStyle/>
-            <a:p>
-              <a:pPr algn="ctr"/>
-              <a:endParaRPr lang="pt-PT"/>
-            </a:p>
-          </p:txBody>
-        </p:sp>
-        <p:sp>
-          <p:nvSpPr>
-            <p:cNvPr id="13" name="TextBox 12">
-              <a:extLst>
-                <a:ext uri="{FF2B5EF4-FFF2-40B4-BE49-F238E27FC236}">
-                  <a16:creationId xmlns:a16="http://schemas.microsoft.com/office/drawing/2014/main" id="{12A7E1E9-F967-D1E3-186E-9C912BC32AB9}"/>
-                </a:ext>
-              </a:extLst>
-            </p:cNvPr>
-            <p:cNvSpPr txBox="1"/>
-            <p:nvPr/>
-          </p:nvSpPr>
-          <p:spPr>
-            <a:xfrm>
-              <a:off x="1197893" y="5754481"/>
-              <a:ext cx="4769552" cy="370577"/>
-            </a:xfrm>
-            <a:prstGeom prst="rect">
-              <a:avLst/>
-            </a:prstGeom>
-            <a:noFill/>
-          </p:spPr>
-          <p:txBody>
-            <a:bodyPr wrap="square">
-              <a:spAutoFit/>
-            </a:bodyPr>
-            <a:lstStyle/>
-            <a:p>
-              <a:pPr>
-                <a:lnSpc>
-                  <a:spcPts val="1425"/>
-                </a:lnSpc>
-              </a:pPr>
-              <a:r>
-                <a:rPr lang="pt-PT" sz="1000" dirty="0">
-                  <a:solidFill>
-                    <a:schemeClr val="bg1"/>
-                  </a:solidFill>
-                  <a:latin typeface="Consolas" panose="020B0609020204030204" pitchFamily="49" charset="0"/>
-                </a:rPr>
-                <a:t>🐛u⚔️ </a:t>
-              </a:r>
-              <a:r>
-                <a:rPr lang="pt-PT" sz="1000" b="0" dirty="0">
-                  <a:solidFill>
-                    <a:schemeClr val="bg1"/>
-                  </a:solidFill>
-                  <a:effectLst/>
-                  <a:latin typeface="Consolas" panose="020B0609020204030204" pitchFamily="49" charset="0"/>
-                </a:rPr>
-                <a:t>🔥  </a:t>
-              </a:r>
-              <a:r>
-                <a:rPr lang="pt-PT" sz="1000" dirty="0">
-                  <a:solidFill>
-                    <a:schemeClr val="bg1"/>
-                  </a:solidFill>
-                  <a:latin typeface="Consolas" panose="020B0609020204030204" pitchFamily="49" charset="0"/>
-                </a:rPr>
-                <a:t>🌿  🌍 </a:t>
-              </a:r>
-              <a:r>
-                <a:rPr lang="pt-PT" sz="1000" b="0" dirty="0">
-                  <a:solidFill>
-                    <a:schemeClr val="bg1"/>
-                  </a:solidFill>
-                  <a:effectLst/>
-                  <a:latin typeface="Consolas" panose="020B0609020204030204" pitchFamily="49" charset="0"/>
-                </a:rPr>
-                <a:t>😐  </a:t>
-              </a:r>
-              <a:r>
-                <a:rPr lang="pt-PT" sz="1000" dirty="0">
-                  <a:solidFill>
-                    <a:schemeClr val="bg1"/>
-                  </a:solidFill>
-                  <a:latin typeface="Consolas" panose="020B0609020204030204" pitchFamily="49" charset="0"/>
-                </a:rPr>
-                <a:t>☠️ </a:t>
-              </a:r>
-              <a:r>
-                <a:rPr lang="pt-PT" sz="1000" b="0" dirty="0">
-                  <a:solidFill>
-                    <a:schemeClr val="bg1"/>
-                  </a:solidFill>
-                  <a:effectLst/>
-                  <a:latin typeface="Consolas" panose="020B0609020204030204" pitchFamily="49" charset="0"/>
-                </a:rPr>
-                <a:t>🪨  </a:t>
-              </a:r>
-              <a:r>
-                <a:rPr lang="pt-PT" sz="1000" dirty="0">
-                  <a:solidFill>
-                    <a:schemeClr val="bg1"/>
-                  </a:solidFill>
-                  <a:latin typeface="Consolas" panose="020B0609020204030204" pitchFamily="49" charset="0"/>
-                </a:rPr>
-                <a:t>💧</a:t>
-              </a:r>
-              <a:r>
-                <a:rPr lang="pt-PT" sz="800" b="1" dirty="0">
-                  <a:latin typeface="Consolas" panose="020B0609020204030204" pitchFamily="49" charset="0"/>
-                </a:rPr>
-                <a:t>  </a:t>
-              </a:r>
-              <a:r>
-                <a:rPr lang="pt-PT" sz="800" b="1" dirty="0" err="1">
-                  <a:latin typeface="Consolas" panose="020B0609020204030204" pitchFamily="49" charset="0"/>
-                </a:rPr>
-                <a:t>avg</a:t>
-              </a:r>
-              <a:endParaRPr lang="pt-PT" sz="1000" b="1" dirty="0">
-                <a:effectLst/>
-                <a:latin typeface="Consolas" panose="020B0609020204030204" pitchFamily="49" charset="0"/>
-              </a:endParaRPr>
-            </a:p>
-          </p:txBody>
-        </p:sp>
-      </p:grpSp>
-    </p:spTree>
-  </p:cSld>
-  <p:clrMapOvr>
-    <a:masterClrMapping/>
-  </p:clrMapOvr>
-</p:sld>
-</file>
-
-<file path=ppt/slides/slide23.xml><?xml version="1.0" encoding="utf-8"?>
-<p:sld xmlns:a="http://schemas.openxmlformats.org/drawingml/2006/main" xmlns:r="http://schemas.openxmlformats.org/officeDocument/2006/relationships" xmlns:p="http://schemas.openxmlformats.org/presentationml/2006/main">
-  <p:cSld>
-    <p:spTree>
-      <p:nvGrpSpPr>
-        <p:cNvPr id="1" name=""/>
-        <p:cNvGrpSpPr/>
-        <p:nvPr/>
-      </p:nvGrpSpPr>
-      <p:grpSpPr>
-        <a:xfrm>
-          <a:off x="0" y="0"/>
-          <a:ext cx="0" cy="0"/>
-          <a:chOff x="0" y="0"/>
-          <a:chExt cx="0" cy="0"/>
-        </a:xfrm>
-      </p:grpSpPr>
-      <p:sp>
-        <p:nvSpPr>
-          <p:cNvPr id="2" name="TopBar"/>
-          <p:cNvSpPr/>
-          <p:nvPr/>
-        </p:nvSpPr>
-        <p:spPr>
-          <a:xfrm>
-            <a:off x="0" y="0"/>
-            <a:ext cx="9144000" cy="64008"/>
+        </p:nvPicPr>
+        <p:blipFill>
+          <a:blip r:embed="rId2"/>
+          <a:stretch>
+            <a:fillRect/>
+          </a:stretch>
+        </p:blipFill>
+        <p:spPr>
+          <a:xfrm>
+            <a:off x="-1030" y="613273"/>
+            <a:ext cx="4233824" cy="3647551"/>
           </a:xfrm>
           <a:prstGeom prst="rect">
             <a:avLst/>
           </a:prstGeom>
-          <a:solidFill>
-            <a:srgbClr val="00A896"/>
-          </a:solidFill>
-          <a:ln w="12700">
-            <a:solidFill>
-              <a:srgbClr val="00A896"/>
-            </a:solidFill>
-            <a:prstDash val="solid"/>
-          </a:ln>
-        </p:spPr>
-        <p:txBody>
-          <a:bodyPr/>
-          <a:lstStyle/>
-          <a:p>
-            <a:endParaRPr lang="en-US"/>
-          </a:p>
-        </p:txBody>
-      </p:sp>
-      <p:sp>
-        <p:nvSpPr>
-          <p:cNvPr id="3" name="Badge"/>
-          <p:cNvSpPr/>
-          <p:nvPr/>
-        </p:nvSpPr>
-        <p:spPr>
-          <a:xfrm>
-            <a:off x="7498079" y="82296"/>
-            <a:ext cx="1557633" cy="329184"/>
-          </a:xfrm>
-          <a:prstGeom prst="rect">
-            <a:avLst/>
-          </a:prstGeom>
-          <a:solidFill>
-            <a:srgbClr val="1C3A52"/>
-          </a:solidFill>
-          <a:ln w="12700">
-            <a:solidFill>
-              <a:srgbClr val="1C3A52"/>
-            </a:solidFill>
-            <a:prstDash val="solid"/>
-          </a:ln>
-        </p:spPr>
-        <p:txBody>
-          <a:bodyPr/>
-          <a:lstStyle/>
-          <a:p>
-            <a:pPr algn="ctr"/>
-            <a:r>
-              <a:rPr lang="en-US" b="1" dirty="0">
-                <a:solidFill>
-                  <a:srgbClr val="FFFFFF"/>
-                </a:solidFill>
-              </a:rPr>
-              <a:t>Perf Eval</a:t>
-            </a:r>
-          </a:p>
-        </p:txBody>
-      </p:sp>
-      <p:sp>
-        <p:nvSpPr>
-          <p:cNvPr id="4" name="NumCircle"/>
-          <p:cNvSpPr/>
-          <p:nvPr/>
-        </p:nvSpPr>
-        <p:spPr>
-          <a:xfrm>
-            <a:off x="7088176" y="4253"/>
-            <a:ext cx="470123" cy="470912"/>
-          </a:xfrm>
-          <a:prstGeom prst="roundRect">
-            <a:avLst/>
-          </a:prstGeom>
-        </p:spPr>
-        <p:style>
-          <a:lnRef idx="0">
-            <a:schemeClr val="accent1"/>
-          </a:lnRef>
-          <a:fillRef idx="3">
-            <a:schemeClr val="accent1"/>
-          </a:fillRef>
-          <a:effectRef idx="3">
-            <a:schemeClr val="accent1"/>
-          </a:effectRef>
-          <a:fontRef idx="minor">
-            <a:schemeClr val="lt1"/>
-          </a:fontRef>
-        </p:style>
-        <p:txBody>
-          <a:bodyPr lIns="91440" tIns="45720" rIns="91440" bIns="45720" rtlCol="0" anchor="ctr"/>
-          <a:lstStyle/>
-          <a:p>
-            <a:pPr algn="ctr"/>
-            <a:r>
-              <a:rPr lang="en-US" sz="2800" b="1"/>
-              <a:t>3</a:t>
-            </a:r>
-          </a:p>
-        </p:txBody>
-      </p:sp>
-      <p:sp>
-        <p:nvSpPr>
-          <p:cNvPr id="5" name="Title"/>
-          <p:cNvSpPr/>
-          <p:nvPr/>
-        </p:nvSpPr>
-        <p:spPr>
-          <a:xfrm>
-            <a:off x="457200" y="109728"/>
-            <a:ext cx="6400800" cy="530352"/>
-          </a:xfrm>
-          <a:prstGeom prst="rect">
-            <a:avLst/>
-          </a:prstGeom>
-          <a:noFill/>
-          <a:ln/>
-        </p:spPr>
-        <p:txBody>
-          <a:bodyPr wrap="square" lIns="0" tIns="0" rIns="0" bIns="0" rtlCol="0" anchor="ctr"/>
-          <a:lstStyle/>
-          <a:p>
-            <a:pPr marL="0" indent="0">
-              <a:buNone/>
-            </a:pPr>
-            <a:r>
-              <a:rPr lang="en-US" sz="2200" b="1" dirty="0">
-                <a:solidFill>
-                  <a:srgbClr val="0D1B2A"/>
-                </a:solidFill>
-                <a:latin typeface="Trebuchet MS" pitchFamily="34" charset="0"/>
-              </a:rPr>
-              <a:t>Confusion Matrix — Normal as the Catch-All Class</a:t>
-            </a:r>
-          </a:p>
-        </p:txBody>
-      </p:sp>
-      <p:sp>
-        <p:nvSpPr>
-          <p:cNvPr id="30" name="CatchBG"/>
-          <p:cNvSpPr/>
-          <p:nvPr/>
-        </p:nvSpPr>
-        <p:spPr>
-          <a:xfrm>
-            <a:off x="190237" y="3980347"/>
-            <a:ext cx="4205520" cy="954705"/>
-          </a:xfrm>
-          <a:prstGeom prst="rect">
-            <a:avLst/>
-          </a:prstGeom>
-          <a:solidFill>
-            <a:srgbClr val="0D1B2A"/>
-          </a:solidFill>
-          <a:ln w="0">
-            <a:noFill/>
-          </a:ln>
-        </p:spPr>
-        <p:txBody>
-          <a:bodyPr/>
-          <a:lstStyle/>
-          <a:p>
-            <a:endParaRPr lang="en-US"/>
-          </a:p>
-        </p:txBody>
-      </p:sp>
-      <p:sp>
-        <p:nvSpPr>
-          <p:cNvPr id="31" name="CatchText"/>
-          <p:cNvSpPr/>
-          <p:nvPr/>
-        </p:nvSpPr>
-        <p:spPr>
-          <a:xfrm>
-            <a:off x="373117" y="3941304"/>
-            <a:ext cx="4022640" cy="1324344"/>
-          </a:xfrm>
-          <a:prstGeom prst="rect">
-            <a:avLst/>
-          </a:prstGeom>
-          <a:noFill/>
-          <a:ln/>
-        </p:spPr>
-        <p:txBody>
-          <a:bodyPr wrap="square" rtlCol="0" anchor="t"/>
-          <a:lstStyle/>
-          <a:p>
-            <a:pPr>
-              <a:buNone/>
-            </a:pPr>
-            <a:r>
-              <a:rPr lang="en-US" sz="1200" b="1" dirty="0">
-                <a:solidFill>
-                  <a:srgbClr val="00A896"/>
-                </a:solidFill>
-                <a:latin typeface="Trebuchet MS"/>
-              </a:rPr>
-              <a:t>Why Normal is the catch-all</a:t>
-            </a:r>
-          </a:p>
-          <a:p>
-            <a:pPr marL="228600" indent="-228600">
-              <a:buChar char="•"/>
-            </a:pPr>
-            <a:r>
-              <a:rPr lang="en-US" sz="1100" dirty="0">
-                <a:solidFill>
-                  <a:schemeClr val="bg1"/>
-                </a:solidFill>
-                <a:latin typeface="Calibri"/>
-              </a:rPr>
-              <a:t>Normal = most diverse class: humanoids of every shape and size, no dominant colour</a:t>
-            </a:r>
-          </a:p>
-          <a:p>
-            <a:pPr marL="228600" indent="-228600">
-              <a:buChar char="•"/>
-            </a:pPr>
-            <a:r>
-              <a:rPr lang="en-US" sz="1100" dirty="0">
-                <a:solidFill>
-                  <a:schemeClr val="bg1"/>
-                </a:solidFill>
-                <a:latin typeface="Calibri"/>
-              </a:rPr>
-              <a:t>Bug, Fighting and Ground all lack distinctive palettes — the MLP falls back to predicting Normal</a:t>
-            </a:r>
-          </a:p>
-        </p:txBody>
-      </p:sp>
+        </p:spPr>
+      </p:pic>
       <p:graphicFrame>
         <p:nvGraphicFramePr>
-          <p:cNvPr id="8" name="Table 0"/>
+          <p:cNvPr id="11" name="Table 0">
+            <a:extLst>
+              <a:ext uri="{FF2B5EF4-FFF2-40B4-BE49-F238E27FC236}">
+                <a16:creationId xmlns:a16="http://schemas.microsoft.com/office/drawing/2014/main" id="{0DAD39FF-0189-2C36-9279-54274F87F156}"/>
+              </a:ext>
+            </a:extLst>
+          </p:cNvPr>
           <p:cNvGraphicFramePr>
             <a:graphicFrameLocks noGrp="1"/>
           </p:cNvGraphicFramePr>
           <p:nvPr>
             <p:extLst>
               <p:ext uri="{D42A27DB-BD31-4B8C-83A1-F6EECF244321}">
-                <p14:modId xmlns:p14="http://schemas.microsoft.com/office/powerpoint/2010/main" val="4165694185"/>
+                <p14:modId xmlns:p14="http://schemas.microsoft.com/office/powerpoint/2010/main" val="4091317701"/>
               </p:ext>
             </p:extLst>
           </p:nvPr>
         </p:nvGraphicFramePr>
         <p:xfrm>
-          <a:off x="4782312" y="679680"/>
-          <a:ext cx="4171451" cy="4367808"/>
+          <a:off x="5050203" y="626101"/>
+          <a:ext cx="3055847" cy="3412498"/>
         </p:xfrm>
         <a:graphic>
           <a:graphicData uri="http://schemas.openxmlformats.org/drawingml/2006/table">
             <a:tbl>
               <a:tblPr/>
               <a:tblGrid>
-                <a:gridCol w="844851">
+                <a:gridCol w="708080">
                   <a:extLst>
                     <a:ext uri="{9D8B030D-6E8A-4147-A177-3AD203B41FA5}">
                       <a16:colId xmlns:a16="http://schemas.microsoft.com/office/drawing/2014/main" val="20000"/>
                     </a:ext>
                   </a:extLst>
                 </a:gridCol>
-                <a:gridCol w="580835">
+                <a:gridCol w="619932">
                   <a:extLst>
                     <a:ext uri="{9D8B030D-6E8A-4147-A177-3AD203B41FA5}">
                       <a16:colId xmlns:a16="http://schemas.microsoft.com/office/drawing/2014/main" val="20001"/>
                     </a:ext>
                   </a:extLst>
                 </a:gridCol>
-                <a:gridCol w="2745765">
+                <a:gridCol w="611586">
+                  <a:extLst>
+                    <a:ext uri="{9D8B030D-6E8A-4147-A177-3AD203B41FA5}">
+                      <a16:colId xmlns:a16="http://schemas.microsoft.com/office/drawing/2014/main" val="4133161899"/>
+                    </a:ext>
+                  </a:extLst>
+                </a:gridCol>
+                <a:gridCol w="1116249">
                   <a:extLst>
                     <a:ext uri="{9D8B030D-6E8A-4147-A177-3AD203B41FA5}">
                       <a16:colId xmlns:a16="http://schemas.microsoft.com/office/drawing/2014/main" val="20002"/>
@@ -29294,7 +28152,7 @@
                   </a:extLst>
                 </a:gridCol>
               </a:tblGrid>
-              <a:tr h="279540">
+              <a:tr h="371659">
                 <a:tc>
                   <a:txBody>
                     <a:bodyPr/>
@@ -29372,20 +28230,20 @@
                         <a:buNone/>
                       </a:pPr>
                       <a:r>
-                        <a:rPr lang="en-US" sz="1100" b="1" dirty="0">
+                        <a:rPr lang="en-US" sz="1100" b="1">
                           <a:solidFill>
                             <a:srgbClr val="FFFFFF"/>
                           </a:solidFill>
-                          <a:latin typeface="Calibri" pitchFamily="34" charset="0"/>
-                          <a:ea typeface="Calibri" pitchFamily="34" charset="-122"/>
-                          <a:cs typeface="Calibri" pitchFamily="34" charset="-120"/>
+                          <a:latin typeface="Calibri"/>
+                          <a:ea typeface="Calibri"/>
+                          <a:cs typeface="Calibri"/>
                         </a:rPr>
-                        <a:t>F1</a:t>
+                        <a:t>CNN F1</a:t>
                       </a:r>
-                      <a:endParaRPr lang="en-US" sz="1100" dirty="0">
-                        <a:latin typeface="Calibri" charset="0"/>
-                        <a:ea typeface="Calibri" charset="0"/>
-                        <a:cs typeface="Calibri" charset="0"/>
+                      <a:endParaRPr lang="en-US" sz="1100">
+                        <a:latin typeface="Calibri"/>
+                        <a:ea typeface="Calibri"/>
+                        <a:cs typeface="Calibri"/>
                       </a:endParaRPr>
                     </a:p>
                   </a:txBody>
@@ -29436,29 +28294,84 @@
                     <a:bodyPr/>
                     <a:lstStyle/>
                     <a:p>
-                      <a:pPr marL="0" indent="0">
+                      <a:pPr marL="0" lvl="0" indent="0" algn="ctr">
                         <a:buNone/>
                       </a:pPr>
                       <a:r>
-                        <a:rPr lang="en-US" sz="1100" b="1" dirty="0">
+                        <a:rPr lang="en-US" sz="1100" b="1">
                           <a:solidFill>
                             <a:srgbClr val="FFFFFF"/>
                           </a:solidFill>
-                          <a:latin typeface="Calibri" pitchFamily="34" charset="0"/>
-                          <a:ea typeface="Calibri" pitchFamily="34" charset="-122"/>
-                          <a:cs typeface="Calibri" pitchFamily="34" charset="-120"/>
+                          <a:latin typeface="Calibri"/>
+                          <a:ea typeface="Calibri"/>
+                          <a:cs typeface="Calibri"/>
                         </a:rPr>
-                        <a:t>Main confusion</a:t>
+                        <a:t>MLP F1</a:t>
                       </a:r>
-                      <a:endParaRPr lang="en-US" sz="1100" dirty="0">
-                        <a:latin typeface="Calibri" charset="0"/>
-                        <a:ea typeface="Calibri" charset="0"/>
-                        <a:cs typeface="Calibri" charset="0"/>
+                      <a:endParaRPr lang="en-US" sz="1100" b="1" dirty="0">
+                        <a:solidFill>
+                          <a:srgbClr val="FFFFFF"/>
+                        </a:solidFill>
+                        <a:latin typeface="Calibri"/>
+                        <a:ea typeface="Calibri"/>
+                        <a:cs typeface="Calibri"/>
                       </a:endParaRPr>
                     </a:p>
                   </a:txBody>
                   <a:tcPr>
                     <a:lnL w="5080" cap="flat" cmpd="sng" algn="ctr">
+                      <a:solidFill>
+                        <a:srgbClr val="D8E4EC"/>
+                      </a:solidFill>
+                      <a:prstDash val="solid"/>
+                      <a:round/>
+                      <a:headEnd type="none" w="med" len="med"/>
+                      <a:tailEnd type="none" w="med" len="med"/>
+                    </a:lnL>
+                    <a:lnR w="5079">
+                      <a:solidFill>
+                        <a:srgbClr val="D8E4EC"/>
+                      </a:solidFill>
+                    </a:lnR>
+                    <a:lnT w="5079">
+                      <a:solidFill>
+                        <a:srgbClr val="D8E4EC"/>
+                      </a:solidFill>
+                    </a:lnT>
+                    <a:lnB w="5079">
+                      <a:solidFill>
+                        <a:srgbClr val="D8E4EC"/>
+                      </a:solidFill>
+                    </a:lnB>
+                    <a:solidFill>
+                      <a:srgbClr val="0D1B2A"/>
+                    </a:solidFill>
+                  </a:tcPr>
+                </a:tc>
+                <a:tc>
+                  <a:txBody>
+                    <a:bodyPr/>
+                    <a:lstStyle/>
+                    <a:p>
+                      <a:pPr marL="0" lvl="0" indent="0" algn="ctr">
+                        <a:buNone/>
+                      </a:pPr>
+                      <a:r>
+                        <a:rPr lang="en-US" sz="1100" b="1">
+                          <a:solidFill>
+                            <a:srgbClr val="FFFFFF"/>
+                          </a:solidFill>
+                          <a:latin typeface="Calibri"/>
+                          <a:ea typeface="Calibri"/>
+                          <a:cs typeface="Calibri"/>
+                        </a:rPr>
+                        <a:t>Improvement</a:t>
+                      </a:r>
+                      <a:endParaRPr lang="en-US"/>
+                    </a:p>
+                  </a:txBody>
+                  <a:tcPr>
+                    <a:lnL w="5079" cap="flat" cmpd="sng" algn="ctr">
                       <a:solidFill>
                         <a:srgbClr val="D8E4EC"/>
                       </a:solidFill>
@@ -29505,7 +28418,7 @@
                   </a:ext>
                 </a:extLst>
               </a:tr>
-              <a:tr h="454252">
+              <a:tr h="337871">
                 <a:tc>
                   <a:txBody>
                     <a:bodyPr/>
@@ -29583,21 +28496,16 @@
                         <a:buNone/>
                       </a:pPr>
                       <a:r>
-                        <a:rPr lang="en-US" sz="1100" b="1" dirty="0">
+                        <a:rPr lang="en-US" sz="1100" b="0">
                           <a:solidFill>
-                            <a:srgbClr val="E97C35"/>
+                            <a:schemeClr val="tx1"/>
                           </a:solidFill>
-                          <a:latin typeface="Calibri" pitchFamily="34" charset="0"/>
-                          <a:ea typeface="Calibri" pitchFamily="34" charset="-122"/>
-                          <a:cs typeface="Calibri" pitchFamily="34" charset="-120"/>
+                          <a:latin typeface="Calibri"/>
+                          <a:ea typeface="Calibri"/>
+                          <a:cs typeface="Calibri"/>
                         </a:rPr>
-                        <a:t>0.49</a:t>
+                        <a:t>1.0</a:t>
                       </a:r>
-                      <a:endParaRPr lang="en-US" sz="1100" dirty="0">
-                        <a:latin typeface="Calibri" charset="0"/>
-                        <a:ea typeface="Calibri" charset="0"/>
-                        <a:cs typeface="Calibri" charset="0"/>
-                      </a:endParaRPr>
                     </a:p>
                   </a:txBody>
                   <a:tcPr anchor="ctr">
@@ -29647,29 +28555,75 @@
                     <a:bodyPr/>
                     <a:lstStyle/>
                     <a:p>
-                      <a:pPr marL="0" indent="0">
+                      <a:pPr marL="0" lvl="0" indent="0" algn="ctr">
                         <a:buNone/>
                       </a:pPr>
                       <a:r>
-                        <a:rPr lang="en-US" sz="1100" dirty="0">
+                        <a:rPr lang="en-US" sz="1100" b="0">
                           <a:solidFill>
-                            <a:srgbClr val="000000"/>
+                            <a:schemeClr val="tx1"/>
                           </a:solidFill>
-                          <a:latin typeface="Calibri" pitchFamily="34" charset="0"/>
-                          <a:ea typeface="Calibri" pitchFamily="34" charset="-122"/>
-                          <a:cs typeface="Calibri" pitchFamily="34" charset="-120"/>
+                          <a:latin typeface="Calibri"/>
+                          <a:ea typeface="Calibri"/>
+                          <a:cs typeface="Calibri"/>
                         </a:rPr>
-                        <a:t>Gets 49% of own class right — warm orange unique</a:t>
+                        <a:t>0.457</a:t>
                       </a:r>
-                      <a:endParaRPr lang="en-US" sz="1100" dirty="0">
-                        <a:latin typeface="Calibri" charset="0"/>
-                        <a:ea typeface="Calibri" charset="0"/>
-                        <a:cs typeface="Calibri" charset="0"/>
-                      </a:endParaRPr>
                     </a:p>
                   </a:txBody>
                   <a:tcPr anchor="ctr">
                     <a:lnL w="5080" cap="flat" cmpd="sng" algn="ctr">
+                      <a:solidFill>
+                        <a:srgbClr val="D8E4EC"/>
+                      </a:solidFill>
+                      <a:prstDash val="solid"/>
+                      <a:round/>
+                      <a:headEnd type="none" w="med" len="med"/>
+                      <a:tailEnd type="none" w="med" len="med"/>
+                    </a:lnL>
+                    <a:lnR w="5079">
+                      <a:solidFill>
+                        <a:srgbClr val="D8E4EC"/>
+                      </a:solidFill>
+                    </a:lnR>
+                    <a:lnT w="5079">
+                      <a:solidFill>
+                        <a:srgbClr val="D8E4EC"/>
+                      </a:solidFill>
+                    </a:lnT>
+                    <a:lnB w="5079">
+                      <a:solidFill>
+                        <a:srgbClr val="D8E4EC"/>
+                      </a:solidFill>
+                    </a:lnB>
+                    <a:solidFill>
+                      <a:srgbClr val="FFFFFF"/>
+                    </a:solidFill>
+                  </a:tcPr>
+                </a:tc>
+                <a:tc>
+                  <a:txBody>
+                    <a:bodyPr/>
+                    <a:lstStyle/>
+                    <a:p>
+                      <a:pPr marL="0" indent="0" algn="ctr">
+                        <a:buNone/>
+                      </a:pPr>
+                      <a:r>
+                        <a:rPr lang="en-US" sz="1100" b="1">
+                          <a:solidFill>
+                            <a:srgbClr val="00B050"/>
+                          </a:solidFill>
+                          <a:latin typeface="Calibri"/>
+                          <a:ea typeface="Calibri"/>
+                          <a:cs typeface="Calibri"/>
+                        </a:rPr>
+                        <a:t>+0.543</a:t>
+                      </a:r>
+                    </a:p>
+                  </a:txBody>
+                  <a:tcPr anchor="ctr">
+                    <a:lnL w="5079" cap="flat" cmpd="sng" algn="ctr">
                       <a:solidFill>
                         <a:srgbClr val="D8E4EC"/>
                       </a:solidFill>
@@ -29716,7 +28670,7 @@
                   </a:ext>
                 </a:extLst>
               </a:tr>
-              <a:tr h="454252">
+              <a:tr h="337871">
                 <a:tc>
                   <a:txBody>
                     <a:bodyPr/>
@@ -29794,21 +28748,16 @@
                         <a:buNone/>
                       </a:pPr>
                       <a:r>
-                        <a:rPr lang="en-US" sz="1100" b="1" dirty="0">
+                        <a:rPr lang="en-US" sz="1100" b="0">
                           <a:solidFill>
-                            <a:srgbClr val="00A896"/>
+                            <a:schemeClr val="tx1"/>
                           </a:solidFill>
-                          <a:latin typeface="Calibri" pitchFamily="34" charset="0"/>
-                          <a:ea typeface="Calibri" pitchFamily="34" charset="-122"/>
-                          <a:cs typeface="Calibri" pitchFamily="34" charset="-120"/>
+                          <a:latin typeface="Calibri"/>
+                          <a:ea typeface="Calibri"/>
+                          <a:cs typeface="Calibri"/>
                         </a:rPr>
-                        <a:t>0.40</a:t>
+                        <a:t>1.0</a:t>
                       </a:r>
-                      <a:endParaRPr lang="en-US" sz="1100" dirty="0">
-                        <a:latin typeface="Calibri" charset="0"/>
-                        <a:ea typeface="Calibri" charset="0"/>
-                        <a:cs typeface="Calibri" charset="0"/>
-                      </a:endParaRPr>
                     </a:p>
                   </a:txBody>
                   <a:tcPr anchor="ctr">
@@ -29858,29 +28807,75 @@
                     <a:bodyPr/>
                     <a:lstStyle/>
                     <a:p>
-                      <a:pPr marL="0" indent="0">
+                      <a:pPr marL="0" lvl="0" indent="0" algn="ctr">
                         <a:buNone/>
                       </a:pPr>
                       <a:r>
-                        <a:rPr lang="en-US" sz="1100" dirty="0">
+                        <a:rPr lang="en-US" sz="1100" b="0">
                           <a:solidFill>
-                            <a:srgbClr val="000000"/>
+                            <a:schemeClr val="tx1"/>
                           </a:solidFill>
-                          <a:latin typeface="Calibri" pitchFamily="34" charset="0"/>
-                          <a:ea typeface="Calibri" pitchFamily="34" charset="-122"/>
-                          <a:cs typeface="Calibri" pitchFamily="34" charset="-120"/>
+                          <a:latin typeface="Calibri"/>
+                          <a:ea typeface="Calibri"/>
+                          <a:cs typeface="Calibri"/>
                         </a:rPr>
-                        <a:t>40% correct; confused with Water (purple→blue)</a:t>
+                        <a:t>0.359</a:t>
                       </a:r>
-                      <a:endParaRPr lang="en-US" sz="1100" dirty="0">
-                        <a:latin typeface="Calibri" charset="0"/>
-                        <a:ea typeface="Calibri" charset="0"/>
-                        <a:cs typeface="Calibri" charset="0"/>
-                      </a:endParaRPr>
                     </a:p>
                   </a:txBody>
                   <a:tcPr anchor="ctr">
                     <a:lnL w="5080" cap="flat" cmpd="sng" algn="ctr">
+                      <a:solidFill>
+                        <a:srgbClr val="D8E4EC"/>
+                      </a:solidFill>
+                      <a:prstDash val="solid"/>
+                      <a:round/>
+                      <a:headEnd type="none" w="med" len="med"/>
+                      <a:tailEnd type="none" w="med" len="med"/>
+                    </a:lnL>
+                    <a:lnR w="5079">
+                      <a:solidFill>
+                        <a:srgbClr val="D8E4EC"/>
+                      </a:solidFill>
+                    </a:lnR>
+                    <a:lnT w="5079">
+                      <a:solidFill>
+                        <a:srgbClr val="D8E4EC"/>
+                      </a:solidFill>
+                    </a:lnT>
+                    <a:lnB w="5079">
+                      <a:solidFill>
+                        <a:srgbClr val="D8E4EC"/>
+                      </a:solidFill>
+                    </a:lnB>
+                    <a:solidFill>
+                      <a:srgbClr val="FFFFFF"/>
+                    </a:solidFill>
+                  </a:tcPr>
+                </a:tc>
+                <a:tc>
+                  <a:txBody>
+                    <a:bodyPr/>
+                    <a:lstStyle/>
+                    <a:p>
+                      <a:pPr marL="0" lvl="0" indent="0" algn="ctr">
+                        <a:buNone/>
+                      </a:pPr>
+                      <a:r>
+                        <a:rPr lang="en-US" sz="1100" b="1" i="0" u="none" strike="noStrike" noProof="0">
+                          <a:solidFill>
+                            <a:srgbClr val="00B050"/>
+                          </a:solidFill>
+                          <a:latin typeface="Calibri"/>
+                          <a:ea typeface="Calibri"/>
+                          <a:cs typeface="Calibri"/>
+                        </a:rPr>
+                        <a:t>+0.641</a:t>
+                      </a:r>
+                    </a:p>
+                  </a:txBody>
+                  <a:tcPr anchor="ctr">
+                    <a:lnL w="5079" cap="flat" cmpd="sng" algn="ctr">
                       <a:solidFill>
                         <a:srgbClr val="D8E4EC"/>
                       </a:solidFill>
@@ -29927,7 +28922,7 @@
                   </a:ext>
                 </a:extLst>
               </a:tr>
-              <a:tr h="454252">
+              <a:tr h="337871">
                 <a:tc>
                   <a:txBody>
                     <a:bodyPr/>
@@ -29941,16 +28936,16 @@
                           <a:solidFill>
                             <a:srgbClr val="000000"/>
                           </a:solidFill>
-                          <a:latin typeface="Calibri" pitchFamily="34" charset="0"/>
-                          <a:ea typeface="Calibri" pitchFamily="34" charset="-122"/>
-                          <a:cs typeface="Calibri" pitchFamily="34" charset="-120"/>
+                          <a:latin typeface="Calibri"/>
+                          <a:ea typeface="Calibri"/>
+                          <a:cs typeface="Calibri"/>
                         </a:rPr>
                         <a:t>Water</a:t>
                       </a:r>
-                      <a:endParaRPr lang="en-US" sz="1100" b="1" dirty="0">
-                        <a:latin typeface="Calibri" charset="0"/>
-                        <a:ea typeface="Calibri" charset="0"/>
-                        <a:cs typeface="Calibri" charset="0"/>
+                      <a:endParaRPr lang="en-US" sz="1100" b="1">
+                        <a:latin typeface="Calibri"/>
+                        <a:ea typeface="Calibri"/>
+                        <a:cs typeface="Calibri"/>
                       </a:endParaRPr>
                     </a:p>
                   </a:txBody>
@@ -30005,21 +29000,16 @@
                         <a:buNone/>
                       </a:pPr>
                       <a:r>
-                        <a:rPr lang="en-US" sz="1100" dirty="0">
+                        <a:rPr lang="en-US" sz="1100" b="0">
                           <a:solidFill>
-                            <a:srgbClr val="000000"/>
+                            <a:schemeClr val="tx1"/>
                           </a:solidFill>
-                          <a:latin typeface="Calibri" pitchFamily="34" charset="0"/>
-                          <a:ea typeface="Calibri" pitchFamily="34" charset="-122"/>
-                          <a:cs typeface="Calibri" pitchFamily="34" charset="-120"/>
+                          <a:latin typeface="Calibri"/>
+                          <a:ea typeface="Calibri"/>
+                          <a:cs typeface="Calibri"/>
                         </a:rPr>
-                        <a:t>0.33</a:t>
+                        <a:t>1.0</a:t>
                       </a:r>
-                      <a:endParaRPr lang="en-US" sz="1100" dirty="0">
-                        <a:latin typeface="Calibri" charset="0"/>
-                        <a:ea typeface="Calibri" charset="0"/>
-                        <a:cs typeface="Calibri" charset="0"/>
-                      </a:endParaRPr>
                     </a:p>
                   </a:txBody>
                   <a:tcPr anchor="ctr">
@@ -30069,29 +29059,83 @@
                     <a:bodyPr/>
                     <a:lstStyle/>
                     <a:p>
-                      <a:pPr marL="0" indent="0">
+                      <a:pPr marL="0" lvl="0" indent="0" algn="ctr">
                         <a:buNone/>
                       </a:pPr>
                       <a:r>
-                        <a:rPr lang="en-US" sz="1100" dirty="0">
+                        <a:rPr lang="en-US" sz="1100">
                           <a:solidFill>
-                            <a:srgbClr val="000000"/>
+                            <a:schemeClr val="tx1"/>
                           </a:solidFill>
-                          <a:latin typeface="Calibri" pitchFamily="34" charset="0"/>
-                          <a:ea typeface="Calibri" pitchFamily="34" charset="-122"/>
-                          <a:cs typeface="Calibri" pitchFamily="34" charset="-120"/>
+                          <a:latin typeface="Calibri"/>
+                          <a:ea typeface="Calibri"/>
+                          <a:cs typeface="Calibri"/>
                         </a:rPr>
-                        <a:t>High precision, low recall — confused with Normal</a:t>
+                        <a:t>0.332</a:t>
                       </a:r>
                       <a:endParaRPr lang="en-US" sz="1100" dirty="0">
-                        <a:latin typeface="Calibri" charset="0"/>
-                        <a:ea typeface="Calibri" charset="0"/>
-                        <a:cs typeface="Calibri" charset="0"/>
+                        <a:solidFill>
+                          <a:schemeClr val="tx1"/>
+                        </a:solidFill>
+                        <a:latin typeface="Calibri"/>
+                        <a:ea typeface="Calibri"/>
+                        <a:cs typeface="Calibri"/>
                       </a:endParaRPr>
                     </a:p>
                   </a:txBody>
                   <a:tcPr anchor="ctr">
                     <a:lnL w="5080" cap="flat" cmpd="sng" algn="ctr">
+                      <a:solidFill>
+                        <a:srgbClr val="D8E4EC"/>
+                      </a:solidFill>
+                      <a:prstDash val="solid"/>
+                      <a:round/>
+                      <a:headEnd type="none" w="med" len="med"/>
+                      <a:tailEnd type="none" w="med" len="med"/>
+                    </a:lnL>
+                    <a:lnR w="5079">
+                      <a:solidFill>
+                        <a:srgbClr val="D8E4EC"/>
+                      </a:solidFill>
+                    </a:lnR>
+                    <a:lnT w="5079">
+                      <a:solidFill>
+                        <a:srgbClr val="D8E4EC"/>
+                      </a:solidFill>
+                    </a:lnT>
+                    <a:lnB w="5079">
+                      <a:solidFill>
+                        <a:srgbClr val="D8E4EC"/>
+                      </a:solidFill>
+                    </a:lnB>
+                    <a:solidFill>
+                      <a:srgbClr val="FFFFFF"/>
+                    </a:solidFill>
+                  </a:tcPr>
+                </a:tc>
+                <a:tc>
+                  <a:txBody>
+                    <a:bodyPr/>
+                    <a:lstStyle/>
+                    <a:p>
+                      <a:pPr marL="0" lvl="0" indent="0" algn="ctr">
+                        <a:buNone/>
+                      </a:pPr>
+                      <a:r>
+                        <a:rPr lang="en-US" sz="1100" b="1" i="0" u="none" strike="noStrike" noProof="0">
+                          <a:solidFill>
+                            <a:srgbClr val="00B050"/>
+                          </a:solidFill>
+                          <a:latin typeface="Calibri"/>
+                          <a:ea typeface="Calibri"/>
+                          <a:cs typeface="Calibri"/>
+                        </a:rPr>
+                        <a:t>+0.668</a:t>
+                      </a:r>
+                    </a:p>
+                  </a:txBody>
+                  <a:tcPr anchor="ctr">
+                    <a:lnL w="5079" cap="flat" cmpd="sng" algn="ctr">
                       <a:solidFill>
                         <a:srgbClr val="D8E4EC"/>
                       </a:solidFill>
@@ -30138,7 +29182,7 @@
                   </a:ext>
                 </a:extLst>
               </a:tr>
-              <a:tr h="454252">
+              <a:tr h="337871">
                 <a:tc>
                   <a:txBody>
                     <a:bodyPr/>
@@ -30216,21 +29260,16 @@
                         <a:buNone/>
                       </a:pPr>
                       <a:r>
-                        <a:rPr lang="en-US" sz="1100" dirty="0">
+                        <a:rPr lang="en-US" sz="1100">
                           <a:solidFill>
-                            <a:srgbClr val="000000"/>
+                            <a:schemeClr val="tx1"/>
                           </a:solidFill>
-                          <a:latin typeface="Calibri" pitchFamily="34" charset="0"/>
-                          <a:ea typeface="Calibri" pitchFamily="34" charset="-122"/>
-                          <a:cs typeface="Calibri" pitchFamily="34" charset="-120"/>
+                          <a:latin typeface="Calibri"/>
+                          <a:ea typeface="Calibri"/>
+                          <a:cs typeface="Calibri"/>
                         </a:rPr>
-                        <a:t>0.35</a:t>
+                        <a:t>1.0</a:t>
                       </a:r>
-                      <a:endParaRPr lang="en-US" sz="1100" dirty="0">
-                        <a:latin typeface="Calibri" charset="0"/>
-                        <a:ea typeface="Calibri" charset="0"/>
-                        <a:cs typeface="Calibri" charset="0"/>
-                      </a:endParaRPr>
                     </a:p>
                   </a:txBody>
                   <a:tcPr anchor="ctr">
@@ -30280,29 +29319,83 @@
                     <a:bodyPr/>
                     <a:lstStyle/>
                     <a:p>
-                      <a:pPr marL="0" indent="0">
+                      <a:pPr marL="0" lvl="0" indent="0" algn="ctr">
                         <a:buNone/>
                       </a:pPr>
                       <a:r>
-                        <a:rPr lang="en-US" sz="1100" dirty="0">
+                        <a:rPr lang="en-US" sz="1100">
                           <a:solidFill>
-                            <a:srgbClr val="000000"/>
+                            <a:schemeClr val="tx1"/>
                           </a:solidFill>
-                          <a:latin typeface="Calibri" pitchFamily="34" charset="0"/>
-                          <a:ea typeface="Calibri" pitchFamily="34" charset="-122"/>
-                          <a:cs typeface="Calibri" pitchFamily="34" charset="-120"/>
+                          <a:latin typeface="Calibri"/>
+                          <a:ea typeface="Calibri"/>
+                          <a:cs typeface="Calibri"/>
                         </a:rPr>
-                        <a:t>35% correct; confused with Bug (green palette)</a:t>
+                        <a:t>0.286</a:t>
                       </a:r>
                       <a:endParaRPr lang="en-US" sz="1100" dirty="0">
-                        <a:latin typeface="Calibri" charset="0"/>
-                        <a:ea typeface="Calibri" charset="0"/>
-                        <a:cs typeface="Calibri" charset="0"/>
+                        <a:solidFill>
+                          <a:schemeClr val="tx1"/>
+                        </a:solidFill>
+                        <a:latin typeface="Calibri"/>
+                        <a:ea typeface="Calibri"/>
+                        <a:cs typeface="Calibri"/>
                       </a:endParaRPr>
                     </a:p>
                   </a:txBody>
                   <a:tcPr anchor="ctr">
                     <a:lnL w="5080" cap="flat" cmpd="sng" algn="ctr">
+                      <a:solidFill>
+                        <a:srgbClr val="D8E4EC"/>
+                      </a:solidFill>
+                      <a:prstDash val="solid"/>
+                      <a:round/>
+                      <a:headEnd type="none" w="med" len="med"/>
+                      <a:tailEnd type="none" w="med" len="med"/>
+                    </a:lnL>
+                    <a:lnR w="5079">
+                      <a:solidFill>
+                        <a:srgbClr val="D8E4EC"/>
+                      </a:solidFill>
+                    </a:lnR>
+                    <a:lnT w="5079">
+                      <a:solidFill>
+                        <a:srgbClr val="D8E4EC"/>
+                      </a:solidFill>
+                    </a:lnT>
+                    <a:lnB w="5079">
+                      <a:solidFill>
+                        <a:srgbClr val="D8E4EC"/>
+                      </a:solidFill>
+                    </a:lnB>
+                    <a:solidFill>
+                      <a:srgbClr val="FFFFFF"/>
+                    </a:solidFill>
+                  </a:tcPr>
+                </a:tc>
+                <a:tc>
+                  <a:txBody>
+                    <a:bodyPr/>
+                    <a:lstStyle/>
+                    <a:p>
+                      <a:pPr marL="0" lvl="0" indent="0" algn="ctr">
+                        <a:buNone/>
+                      </a:pPr>
+                      <a:r>
+                        <a:rPr lang="en-US" sz="1100" b="1" i="0" u="none" strike="noStrike" noProof="0">
+                          <a:solidFill>
+                            <a:srgbClr val="00B050"/>
+                          </a:solidFill>
+                          <a:latin typeface="Calibri"/>
+                          <a:ea typeface="Calibri"/>
+                          <a:cs typeface="Calibri"/>
+                        </a:rPr>
+                        <a:t>+0.714</a:t>
+                      </a:r>
+                    </a:p>
+                  </a:txBody>
+                  <a:tcPr anchor="ctr">
+                    <a:lnL w="5079" cap="flat" cmpd="sng" algn="ctr">
                       <a:solidFill>
                         <a:srgbClr val="D8E4EC"/>
                       </a:solidFill>
@@ -30349,7 +29442,7 @@
                   </a:ext>
                 </a:extLst>
               </a:tr>
-              <a:tr h="454252">
+              <a:tr h="337871">
                 <a:tc>
                   <a:txBody>
                     <a:bodyPr/>
@@ -30427,21 +29520,16 @@
                         <a:buNone/>
                       </a:pPr>
                       <a:r>
-                        <a:rPr lang="en-US" sz="1100" dirty="0">
+                        <a:rPr lang="en-US" sz="1100">
                           <a:solidFill>
-                            <a:srgbClr val="000000"/>
+                            <a:schemeClr val="tx1"/>
                           </a:solidFill>
-                          <a:latin typeface="Calibri" pitchFamily="34" charset="0"/>
-                          <a:ea typeface="Calibri" pitchFamily="34" charset="-122"/>
-                          <a:cs typeface="Calibri" pitchFamily="34" charset="-120"/>
+                          <a:latin typeface="Calibri"/>
+                          <a:ea typeface="Calibri"/>
+                          <a:cs typeface="Calibri"/>
                         </a:rPr>
-                        <a:t>0.20</a:t>
+                        <a:t>1.0</a:t>
                       </a:r>
-                      <a:endParaRPr lang="en-US" sz="1100" dirty="0">
-                        <a:latin typeface="Calibri" charset="0"/>
-                        <a:ea typeface="Calibri" charset="0"/>
-                        <a:cs typeface="Calibri" charset="0"/>
-                      </a:endParaRPr>
                     </a:p>
                   </a:txBody>
                   <a:tcPr anchor="ctr">
@@ -30491,29 +29579,83 @@
                     <a:bodyPr/>
                     <a:lstStyle/>
                     <a:p>
-                      <a:pPr marL="0" indent="0">
+                      <a:pPr marL="0" lvl="0" indent="0" algn="ctr">
                         <a:buNone/>
                       </a:pPr>
                       <a:r>
-                        <a:rPr lang="en-US" sz="1100" dirty="0">
+                        <a:rPr lang="en-US" sz="1100">
                           <a:solidFill>
-                            <a:srgbClr val="000000"/>
+                            <a:schemeClr val="tx1"/>
                           </a:solidFill>
-                          <a:latin typeface="Calibri" pitchFamily="34" charset="0"/>
-                          <a:ea typeface="Calibri" pitchFamily="34" charset="-122"/>
-                          <a:cs typeface="Calibri" pitchFamily="34" charset="-120"/>
+                          <a:latin typeface="Calibri"/>
+                          <a:ea typeface="Calibri"/>
+                          <a:cs typeface="Calibri"/>
                         </a:rPr>
-                        <a:t>Diverse humanoids — confused with Fire, Bug, Poison</a:t>
+                        <a:t>0.215</a:t>
                       </a:r>
                       <a:endParaRPr lang="en-US" sz="1100" dirty="0">
-                        <a:latin typeface="Calibri" charset="0"/>
-                        <a:ea typeface="Calibri" charset="0"/>
-                        <a:cs typeface="Calibri" charset="0"/>
+                        <a:solidFill>
+                          <a:schemeClr val="tx1"/>
+                        </a:solidFill>
+                        <a:latin typeface="Calibri"/>
+                        <a:ea typeface="Calibri"/>
+                        <a:cs typeface="Calibri"/>
                       </a:endParaRPr>
                     </a:p>
                   </a:txBody>
                   <a:tcPr anchor="ctr">
                     <a:lnL w="5080" cap="flat" cmpd="sng" algn="ctr">
+                      <a:solidFill>
+                        <a:srgbClr val="D8E4EC"/>
+                      </a:solidFill>
+                      <a:prstDash val="solid"/>
+                      <a:round/>
+                      <a:headEnd type="none" w="med" len="med"/>
+                      <a:tailEnd type="none" w="med" len="med"/>
+                    </a:lnL>
+                    <a:lnR w="5079">
+                      <a:solidFill>
+                        <a:srgbClr val="D8E4EC"/>
+                      </a:solidFill>
+                    </a:lnR>
+                    <a:lnT w="5079">
+                      <a:solidFill>
+                        <a:srgbClr val="D8E4EC"/>
+                      </a:solidFill>
+                    </a:lnT>
+                    <a:lnB w="5079">
+                      <a:solidFill>
+                        <a:srgbClr val="D8E4EC"/>
+                      </a:solidFill>
+                    </a:lnB>
+                    <a:solidFill>
+                      <a:srgbClr val="FFFFFF"/>
+                    </a:solidFill>
+                  </a:tcPr>
+                </a:tc>
+                <a:tc>
+                  <a:txBody>
+                    <a:bodyPr/>
+                    <a:lstStyle/>
+                    <a:p>
+                      <a:pPr marL="0" lvl="0" indent="0" algn="ctr">
+                        <a:buNone/>
+                      </a:pPr>
+                      <a:r>
+                        <a:rPr lang="en-US" sz="1100" b="1" i="0" u="none" strike="noStrike" noProof="0">
+                          <a:solidFill>
+                            <a:srgbClr val="00B050"/>
+                          </a:solidFill>
+                          <a:latin typeface="Calibri"/>
+                          <a:ea typeface="Calibri"/>
+                          <a:cs typeface="Calibri"/>
+                        </a:rPr>
+                        <a:t>+0.785</a:t>
+                      </a:r>
+                    </a:p>
+                  </a:txBody>
+                  <a:tcPr anchor="ctr">
+                    <a:lnL w="5079" cap="flat" cmpd="sng" algn="ctr">
                       <a:solidFill>
                         <a:srgbClr val="D8E4EC"/>
                       </a:solidFill>
@@ -30560,7 +29702,7 @@
                   </a:ext>
                 </a:extLst>
               </a:tr>
-              <a:tr h="454252">
+              <a:tr h="337871">
                 <a:tc>
                   <a:txBody>
                     <a:bodyPr/>
@@ -30638,21 +29780,16 @@
                         <a:buNone/>
                       </a:pPr>
                       <a:r>
-                        <a:rPr lang="en-US" sz="1100" dirty="0">
+                        <a:rPr lang="en-US" sz="1100">
                           <a:solidFill>
-                            <a:srgbClr val="E74C3C"/>
+                            <a:schemeClr val="tx1"/>
                           </a:solidFill>
-                          <a:latin typeface="Calibri" pitchFamily="34" charset="0"/>
-                          <a:ea typeface="Calibri" pitchFamily="34" charset="-122"/>
-                          <a:cs typeface="Calibri" pitchFamily="34" charset="-120"/>
+                          <a:latin typeface="Calibri"/>
+                          <a:ea typeface="Calibri"/>
+                          <a:cs typeface="Calibri"/>
                         </a:rPr>
-                        <a:t>0.13</a:t>
+                        <a:t>1.0</a:t>
                       </a:r>
-                      <a:endParaRPr lang="en-US" sz="1100" dirty="0">
-                        <a:latin typeface="Calibri" charset="0"/>
-                        <a:ea typeface="Calibri" charset="0"/>
-                        <a:cs typeface="Calibri" charset="0"/>
-                      </a:endParaRPr>
                     </a:p>
                   </a:txBody>
                   <a:tcPr anchor="ctr">
@@ -30702,29 +29839,83 @@
                     <a:bodyPr/>
                     <a:lstStyle/>
                     <a:p>
-                      <a:pPr marL="0" indent="0">
+                      <a:pPr marL="0" lvl="0" indent="0" algn="ctr">
                         <a:buNone/>
                       </a:pPr>
                       <a:r>
-                        <a:rPr lang="en-US" sz="1100" dirty="0">
+                        <a:rPr lang="en-US" sz="1100">
                           <a:solidFill>
-                            <a:srgbClr val="000000"/>
+                            <a:schemeClr val="tx1"/>
                           </a:solidFill>
-                          <a:latin typeface="Calibri" pitchFamily="34" charset="0"/>
-                          <a:ea typeface="Calibri" pitchFamily="34" charset="-122"/>
-                          <a:cs typeface="Calibri" pitchFamily="34" charset="-120"/>
+                          <a:latin typeface="Calibri"/>
+                          <a:ea typeface="Calibri"/>
+                          <a:cs typeface="Calibri"/>
                         </a:rPr>
-                        <a:t>Only 13% correct — near-identical to Grass</a:t>
+                        <a:t>0.140</a:t>
                       </a:r>
                       <a:endParaRPr lang="en-US" sz="1100" dirty="0">
-                        <a:latin typeface="Calibri" charset="0"/>
-                        <a:ea typeface="Calibri" charset="0"/>
-                        <a:cs typeface="Calibri" charset="0"/>
+                        <a:solidFill>
+                          <a:schemeClr val="tx1"/>
+                        </a:solidFill>
+                        <a:latin typeface="Calibri"/>
+                        <a:ea typeface="Calibri"/>
+                        <a:cs typeface="Calibri"/>
                       </a:endParaRPr>
                     </a:p>
                   </a:txBody>
                   <a:tcPr anchor="ctr">
                     <a:lnL w="5080" cap="flat" cmpd="sng" algn="ctr">
+                      <a:solidFill>
+                        <a:srgbClr val="D8E4EC"/>
+                      </a:solidFill>
+                      <a:prstDash val="solid"/>
+                      <a:round/>
+                      <a:headEnd type="none" w="med" len="med"/>
+                      <a:tailEnd type="none" w="med" len="med"/>
+                    </a:lnL>
+                    <a:lnR w="5079">
+                      <a:solidFill>
+                        <a:srgbClr val="D8E4EC"/>
+                      </a:solidFill>
+                    </a:lnR>
+                    <a:lnT w="5079">
+                      <a:solidFill>
+                        <a:srgbClr val="D8E4EC"/>
+                      </a:solidFill>
+                    </a:lnT>
+                    <a:lnB w="5079">
+                      <a:solidFill>
+                        <a:srgbClr val="D8E4EC"/>
+                      </a:solidFill>
+                    </a:lnB>
+                    <a:solidFill>
+                      <a:srgbClr val="FFFFFF"/>
+                    </a:solidFill>
+                  </a:tcPr>
+                </a:tc>
+                <a:tc>
+                  <a:txBody>
+                    <a:bodyPr/>
+                    <a:lstStyle/>
+                    <a:p>
+                      <a:pPr marL="0" lvl="0" indent="0" algn="ctr">
+                        <a:buNone/>
+                      </a:pPr>
+                      <a:r>
+                        <a:rPr lang="en-US" sz="1100" b="1" i="0" u="none" strike="noStrike" noProof="0">
+                          <a:solidFill>
+                            <a:srgbClr val="00B050"/>
+                          </a:solidFill>
+                          <a:latin typeface="Calibri"/>
+                          <a:ea typeface="Calibri"/>
+                          <a:cs typeface="Calibri"/>
+                        </a:rPr>
+                        <a:t>+0.860</a:t>
+                      </a:r>
+                    </a:p>
+                  </a:txBody>
+                  <a:tcPr anchor="ctr">
+                    <a:lnL w="5079" cap="flat" cmpd="sng" algn="ctr">
                       <a:solidFill>
                         <a:srgbClr val="D8E4EC"/>
                       </a:solidFill>
@@ -30771,7 +29962,7 @@
                   </a:ext>
                 </a:extLst>
               </a:tr>
-              <a:tr h="454252">
+              <a:tr h="337871">
                 <a:tc>
                   <a:txBody>
                     <a:bodyPr/>
@@ -30849,21 +30040,16 @@
                         <a:buNone/>
                       </a:pPr>
                       <a:r>
-                        <a:rPr lang="en-US" sz="1100" dirty="0">
+                        <a:rPr lang="en-US" sz="1100">
                           <a:solidFill>
-                            <a:srgbClr val="E74C3C"/>
+                            <a:schemeClr val="tx1"/>
                           </a:solidFill>
-                          <a:latin typeface="Calibri" pitchFamily="34" charset="0"/>
-                          <a:ea typeface="Calibri" pitchFamily="34" charset="-122"/>
-                          <a:cs typeface="Calibri" pitchFamily="34" charset="-120"/>
+                          <a:latin typeface="Calibri"/>
+                          <a:ea typeface="Calibri"/>
+                          <a:cs typeface="Calibri"/>
                         </a:rPr>
-                        <a:t>0.14</a:t>
+                        <a:t>1.0</a:t>
                       </a:r>
-                      <a:endParaRPr lang="en-US" sz="1100" dirty="0">
-                        <a:latin typeface="Calibri" charset="0"/>
-                        <a:ea typeface="Calibri" charset="0"/>
-                        <a:cs typeface="Calibri" charset="0"/>
-                      </a:endParaRPr>
                     </a:p>
                   </a:txBody>
                   <a:tcPr anchor="ctr">
@@ -30913,29 +30099,83 @@
                     <a:bodyPr/>
                     <a:lstStyle/>
                     <a:p>
-                      <a:pPr marL="0" indent="0">
+                      <a:pPr marL="0" lvl="0" indent="0" algn="ctr">
                         <a:buNone/>
                       </a:pPr>
                       <a:r>
-                        <a:rPr lang="en-US" sz="1100" dirty="0">
+                        <a:rPr lang="en-US" sz="1100">
                           <a:solidFill>
-                            <a:srgbClr val="000000"/>
+                            <a:schemeClr val="tx1"/>
                           </a:solidFill>
-                          <a:latin typeface="Calibri" pitchFamily="34" charset="0"/>
-                          <a:ea typeface="Calibri" pitchFamily="34" charset="-122"/>
-                          <a:cs typeface="Calibri" pitchFamily="34" charset="-120"/>
+                          <a:latin typeface="Calibri"/>
+                          <a:ea typeface="Calibri"/>
+                          <a:cs typeface="Calibri"/>
                         </a:rPr>
-                        <a:t>Humanoid; 16% sent to Normal, 12% to Bug</a:t>
+                        <a:t>0.126</a:t>
                       </a:r>
                       <a:endParaRPr lang="en-US" sz="1100" dirty="0">
-                        <a:latin typeface="Calibri" charset="0"/>
-                        <a:ea typeface="Calibri" charset="0"/>
-                        <a:cs typeface="Calibri" charset="0"/>
+                        <a:solidFill>
+                          <a:schemeClr val="tx1"/>
+                        </a:solidFill>
+                        <a:latin typeface="Calibri"/>
+                        <a:ea typeface="Calibri"/>
+                        <a:cs typeface="Calibri"/>
                       </a:endParaRPr>
                     </a:p>
                   </a:txBody>
                   <a:tcPr anchor="ctr">
                     <a:lnL w="5080" cap="flat" cmpd="sng" algn="ctr">
+                      <a:solidFill>
+                        <a:srgbClr val="D8E4EC"/>
+                      </a:solidFill>
+                      <a:prstDash val="solid"/>
+                      <a:round/>
+                      <a:headEnd type="none" w="med" len="med"/>
+                      <a:tailEnd type="none" w="med" len="med"/>
+                    </a:lnL>
+                    <a:lnR w="5079">
+                      <a:solidFill>
+                        <a:srgbClr val="D8E4EC"/>
+                      </a:solidFill>
+                    </a:lnR>
+                    <a:lnT w="5079">
+                      <a:solidFill>
+                        <a:srgbClr val="D8E4EC"/>
+                      </a:solidFill>
+                    </a:lnT>
+                    <a:lnB w="5079">
+                      <a:solidFill>
+                        <a:srgbClr val="D8E4EC"/>
+                      </a:solidFill>
+                    </a:lnB>
+                    <a:solidFill>
+                      <a:srgbClr val="FFFFFF"/>
+                    </a:solidFill>
+                  </a:tcPr>
+                </a:tc>
+                <a:tc>
+                  <a:txBody>
+                    <a:bodyPr/>
+                    <a:lstStyle/>
+                    <a:p>
+                      <a:pPr marL="0" lvl="0" indent="0" algn="ctr">
+                        <a:buNone/>
+                      </a:pPr>
+                      <a:r>
+                        <a:rPr lang="en-US" sz="1100" b="1" i="0" u="none" strike="noStrike" noProof="0">
+                          <a:solidFill>
+                            <a:srgbClr val="00B050"/>
+                          </a:solidFill>
+                          <a:latin typeface="Calibri"/>
+                          <a:ea typeface="Calibri"/>
+                          <a:cs typeface="Calibri"/>
+                        </a:rPr>
+                        <a:t>+0.874</a:t>
+                      </a:r>
+                    </a:p>
+                  </a:txBody>
+                  <a:tcPr anchor="ctr">
+                    <a:lnL w="5079" cap="flat" cmpd="sng" algn="ctr">
                       <a:solidFill>
                         <a:srgbClr val="D8E4EC"/>
                       </a:solidFill>
@@ -30982,7 +30222,7 @@
                   </a:ext>
                 </a:extLst>
               </a:tr>
-              <a:tr h="454252">
+              <a:tr h="337871">
                 <a:tc>
                   <a:txBody>
                     <a:bodyPr/>
@@ -31060,21 +30300,16 @@
                         <a:buNone/>
                       </a:pPr>
                       <a:r>
-                        <a:rPr lang="en-US" sz="1100" dirty="0">
+                        <a:rPr lang="en-US" sz="1100">
                           <a:solidFill>
-                            <a:srgbClr val="E74C3C"/>
+                            <a:schemeClr val="tx1"/>
                           </a:solidFill>
-                          <a:latin typeface="Calibri" pitchFamily="34" charset="0"/>
-                          <a:ea typeface="Calibri" pitchFamily="34" charset="-122"/>
-                          <a:cs typeface="Calibri" pitchFamily="34" charset="-120"/>
+                          <a:latin typeface="Calibri"/>
+                          <a:ea typeface="Calibri"/>
+                          <a:cs typeface="Calibri"/>
                         </a:rPr>
-                        <a:t>0.17</a:t>
+                        <a:t>1.0</a:t>
                       </a:r>
-                      <a:endParaRPr lang="en-US" sz="1100" dirty="0">
-                        <a:latin typeface="Calibri" charset="0"/>
-                        <a:ea typeface="Calibri" charset="0"/>
-                        <a:cs typeface="Calibri" charset="0"/>
-                      </a:endParaRPr>
                     </a:p>
                   </a:txBody>
                   <a:tcPr anchor="ctr">
@@ -31124,29 +30359,83 @@
                     <a:bodyPr/>
                     <a:lstStyle/>
                     <a:p>
-                      <a:pPr marL="0" indent="0">
+                      <a:pPr marL="0" lvl="0" indent="0" algn="ctr">
                         <a:buNone/>
                       </a:pPr>
                       <a:r>
-                        <a:rPr lang="en-US" sz="1100" dirty="0">
+                        <a:rPr lang="en-US" sz="1100">
                           <a:solidFill>
-                            <a:srgbClr val="000000"/>
+                            <a:schemeClr val="tx1"/>
                           </a:solidFill>
-                          <a:latin typeface="Calibri" pitchFamily="34" charset="0"/>
-                          <a:ea typeface="Calibri" pitchFamily="34" charset="-122"/>
-                          <a:cs typeface="Calibri" pitchFamily="34" charset="-120"/>
+                          <a:latin typeface="Calibri"/>
+                          <a:ea typeface="Calibri"/>
+                          <a:cs typeface="Calibri"/>
                         </a:rPr>
-                        <a:t>Grey/brown; 17% sent to Normal, 15% to Poison</a:t>
+                        <a:t>0.134</a:t>
                       </a:r>
                       <a:endParaRPr lang="en-US" sz="1100" dirty="0">
-                        <a:latin typeface="Calibri" charset="0"/>
-                        <a:ea typeface="Calibri" charset="0"/>
-                        <a:cs typeface="Calibri" charset="0"/>
+                        <a:solidFill>
+                          <a:schemeClr val="tx1"/>
+                        </a:solidFill>
+                        <a:latin typeface="Calibri"/>
+                        <a:ea typeface="Calibri"/>
+                        <a:cs typeface="Calibri"/>
                       </a:endParaRPr>
                     </a:p>
                   </a:txBody>
                   <a:tcPr anchor="ctr">
                     <a:lnL w="5080" cap="flat" cmpd="sng" algn="ctr">
+                      <a:solidFill>
+                        <a:srgbClr val="D8E4EC"/>
+                      </a:solidFill>
+                      <a:prstDash val="solid"/>
+                      <a:round/>
+                      <a:headEnd type="none" w="med" len="med"/>
+                      <a:tailEnd type="none" w="med" len="med"/>
+                    </a:lnL>
+                    <a:lnR w="5079">
+                      <a:solidFill>
+                        <a:srgbClr val="D8E4EC"/>
+                      </a:solidFill>
+                    </a:lnR>
+                    <a:lnT w="5079">
+                      <a:solidFill>
+                        <a:srgbClr val="D8E4EC"/>
+                      </a:solidFill>
+                    </a:lnT>
+                    <a:lnB w="5079">
+                      <a:solidFill>
+                        <a:srgbClr val="D8E4EC"/>
+                      </a:solidFill>
+                    </a:lnB>
+                    <a:solidFill>
+                      <a:srgbClr val="FFFFFF"/>
+                    </a:solidFill>
+                  </a:tcPr>
+                </a:tc>
+                <a:tc>
+                  <a:txBody>
+                    <a:bodyPr/>
+                    <a:lstStyle/>
+                    <a:p>
+                      <a:pPr marL="0" lvl="0" indent="0" algn="ctr">
+                        <a:buNone/>
+                      </a:pPr>
+                      <a:r>
+                        <a:rPr lang="en-US" sz="1100" b="1" i="0" u="none" strike="noStrike" noProof="0">
+                          <a:solidFill>
+                            <a:srgbClr val="00B050"/>
+                          </a:solidFill>
+                          <a:latin typeface="Calibri"/>
+                          <a:ea typeface="Calibri"/>
+                          <a:cs typeface="Calibri"/>
+                        </a:rPr>
+                        <a:t>+0.866</a:t>
+                      </a:r>
+                    </a:p>
+                  </a:txBody>
+                  <a:tcPr anchor="ctr">
+                    <a:lnL w="5079" cap="flat" cmpd="sng" algn="ctr">
                       <a:solidFill>
                         <a:srgbClr val="D8E4EC"/>
                       </a:solidFill>
@@ -31193,7 +30482,7 @@
                   </a:ext>
                 </a:extLst>
               </a:tr>
-              <a:tr h="454252">
+              <a:tr h="337871">
                 <a:tc>
                   <a:txBody>
                     <a:bodyPr/>
@@ -31271,21 +30560,16 @@
                         <a:buNone/>
                       </a:pPr>
                       <a:r>
-                        <a:rPr lang="en-US" sz="1100" dirty="0">
+                        <a:rPr lang="en-US" sz="1100">
                           <a:solidFill>
-                            <a:srgbClr val="E74C3C"/>
+                            <a:schemeClr val="tx1"/>
                           </a:solidFill>
-                          <a:latin typeface="Calibri" pitchFamily="34" charset="0"/>
-                          <a:ea typeface="Calibri" pitchFamily="34" charset="-122"/>
-                          <a:cs typeface="Calibri" pitchFamily="34" charset="-120"/>
+                          <a:latin typeface="Calibri"/>
+                          <a:ea typeface="Calibri"/>
+                          <a:cs typeface="Calibri"/>
                         </a:rPr>
-                        <a:t>0.10</a:t>
+                        <a:t>1.0</a:t>
                       </a:r>
-                      <a:endParaRPr lang="en-US" sz="1100" dirty="0">
-                        <a:latin typeface="Calibri" charset="0"/>
-                        <a:ea typeface="Calibri" charset="0"/>
-                        <a:cs typeface="Calibri" charset="0"/>
-                      </a:endParaRPr>
                     </a:p>
                   </a:txBody>
                   <a:tcPr anchor="ctr">
@@ -31335,29 +30619,87 @@
                     <a:bodyPr/>
                     <a:lstStyle/>
                     <a:p>
-                      <a:pPr marL="0" indent="0">
+                      <a:pPr marL="0" lvl="0" indent="0" algn="ctr">
                         <a:buNone/>
                       </a:pPr>
                       <a:r>
-                        <a:rPr lang="en-US" sz="1100" dirty="0">
+                        <a:rPr lang="en-US" sz="1100">
                           <a:solidFill>
-                            <a:srgbClr val="000000"/>
+                            <a:schemeClr val="tx1"/>
                           </a:solidFill>
-                          <a:latin typeface="Calibri" pitchFamily="34" charset="0"/>
-                          <a:ea typeface="Calibri" pitchFamily="34" charset="-122"/>
-                          <a:cs typeface="Calibri" pitchFamily="34" charset="-120"/>
+                          <a:latin typeface="Calibri"/>
+                          <a:ea typeface="Calibri"/>
+                          <a:cs typeface="Calibri"/>
                         </a:rPr>
-                        <a:t>Worst class; 24% sent to Normal (fewest samples)</a:t>
+                        <a:t>0.107</a:t>
                       </a:r>
                       <a:endParaRPr lang="en-US" sz="1100" dirty="0">
-                        <a:latin typeface="Calibri" charset="0"/>
-                        <a:ea typeface="Calibri" charset="0"/>
-                        <a:cs typeface="Calibri" charset="0"/>
+                        <a:solidFill>
+                          <a:schemeClr val="tx1"/>
+                        </a:solidFill>
+                        <a:latin typeface="Calibri"/>
+                        <a:ea typeface="Calibri"/>
+                        <a:cs typeface="Calibri"/>
                       </a:endParaRPr>
                     </a:p>
                   </a:txBody>
                   <a:tcPr anchor="ctr">
                     <a:lnL w="5080" cap="flat" cmpd="sng" algn="ctr">
+                      <a:solidFill>
+                        <a:srgbClr val="D8E4EC"/>
+                      </a:solidFill>
+                      <a:prstDash val="solid"/>
+                      <a:round/>
+                      <a:headEnd type="none" w="med" len="med"/>
+                      <a:tailEnd type="none" w="med" len="med"/>
+                    </a:lnL>
+                    <a:lnR w="5079">
+                      <a:solidFill>
+                        <a:srgbClr val="D8E4EC"/>
+                      </a:solidFill>
+                    </a:lnR>
+                    <a:lnT w="5079">
+                      <a:solidFill>
+                        <a:srgbClr val="D8E4EC"/>
+                      </a:solidFill>
+                    </a:lnT>
+                    <a:lnB w="5079" cap="flat" cmpd="sng" algn="ctr">
+                      <a:solidFill>
+                        <a:srgbClr val="D8E4EC"/>
+                      </a:solidFill>
+                      <a:prstDash val="solid"/>
+                      <a:round/>
+                      <a:headEnd type="none" w="med" len="med"/>
+                      <a:tailEnd type="none" w="med" len="med"/>
+                    </a:lnB>
+                    <a:solidFill>
+                      <a:srgbClr val="FFFFFF"/>
+                    </a:solidFill>
+                  </a:tcPr>
+                </a:tc>
+                <a:tc>
+                  <a:txBody>
+                    <a:bodyPr/>
+                    <a:lstStyle/>
+                    <a:p>
+                      <a:pPr marL="0" lvl="0" indent="0" algn="ctr">
+                        <a:buNone/>
+                      </a:pPr>
+                      <a:r>
+                        <a:rPr lang="en-US" sz="1100" b="1" i="0" u="none" strike="noStrike" noProof="0">
+                          <a:solidFill>
+                            <a:srgbClr val="00B050"/>
+                          </a:solidFill>
+                          <a:latin typeface="Calibri"/>
+                          <a:ea typeface="Calibri"/>
+                          <a:cs typeface="Calibri"/>
+                        </a:rPr>
+                        <a:t>+0.893</a:t>
+                      </a:r>
+                    </a:p>
+                  </a:txBody>
+                  <a:tcPr anchor="ctr">
+                    <a:lnL w="5079" cap="flat" cmpd="sng" algn="ctr">
                       <a:solidFill>
                         <a:srgbClr val="D8E4EC"/>
                       </a:solidFill>
@@ -31408,12 +30750,294 @@
           </a:graphicData>
         </a:graphic>
       </p:graphicFrame>
+    </p:spTree>
+  </p:cSld>
+  <p:clrMapOvr>
+    <a:masterClrMapping/>
+  </p:clrMapOvr>
+</p:sld>
+</file>
+
+<file path=ppt/slides/slide23.xml><?xml version="1.0" encoding="utf-8"?>
+<p:sld xmlns:a="http://schemas.openxmlformats.org/drawingml/2006/main" xmlns:r="http://schemas.openxmlformats.org/officeDocument/2006/relationships" xmlns:p="http://schemas.openxmlformats.org/presentationml/2006/main">
+  <p:cSld>
+    <p:spTree>
+      <p:nvGrpSpPr>
+        <p:cNvPr id="1" name=""/>
+        <p:cNvGrpSpPr/>
+        <p:nvPr/>
+      </p:nvGrpSpPr>
+      <p:grpSpPr>
+        <a:xfrm>
+          <a:off x="0" y="0"/>
+          <a:ext cx="0" cy="0"/>
+          <a:chOff x="0" y="0"/>
+          <a:chExt cx="0" cy="0"/>
+        </a:xfrm>
+      </p:grpSpPr>
+      <p:sp>
+        <p:nvSpPr>
+          <p:cNvPr id="2" name="TopBar"/>
+          <p:cNvSpPr/>
+          <p:nvPr/>
+        </p:nvSpPr>
+        <p:spPr>
+          <a:xfrm>
+            <a:off x="0" y="0"/>
+            <a:ext cx="9144000" cy="64008"/>
+          </a:xfrm>
+          <a:prstGeom prst="rect">
+            <a:avLst/>
+          </a:prstGeom>
+          <a:solidFill>
+            <a:srgbClr val="00A896"/>
+          </a:solidFill>
+          <a:ln w="12700">
+            <a:solidFill>
+              <a:srgbClr val="00A896"/>
+            </a:solidFill>
+            <a:prstDash val="solid"/>
+          </a:ln>
+        </p:spPr>
+        <p:txBody>
+          <a:bodyPr/>
+          <a:lstStyle/>
+          <a:p>
+            <a:endParaRPr lang="en-US"/>
+          </a:p>
+        </p:txBody>
+      </p:sp>
+      <p:sp>
+        <p:nvSpPr>
+          <p:cNvPr id="3" name="Badge"/>
+          <p:cNvSpPr/>
+          <p:nvPr/>
+        </p:nvSpPr>
+        <p:spPr>
+          <a:xfrm>
+            <a:off x="7498079" y="82296"/>
+            <a:ext cx="1557633" cy="329184"/>
+          </a:xfrm>
+          <a:prstGeom prst="rect">
+            <a:avLst/>
+          </a:prstGeom>
+          <a:solidFill>
+            <a:srgbClr val="1C3A52"/>
+          </a:solidFill>
+          <a:ln w="12700">
+            <a:solidFill>
+              <a:srgbClr val="1C3A52"/>
+            </a:solidFill>
+            <a:prstDash val="solid"/>
+          </a:ln>
+        </p:spPr>
+        <p:txBody>
+          <a:bodyPr/>
+          <a:lstStyle/>
+          <a:p>
+            <a:pPr algn="ctr"/>
+            <a:r>
+              <a:rPr lang="en-US" b="1" dirty="0">
+                <a:solidFill>
+                  <a:srgbClr val="FFFFFF"/>
+                </a:solidFill>
+              </a:rPr>
+              <a:t>Perf Eval</a:t>
+            </a:r>
+          </a:p>
+        </p:txBody>
+      </p:sp>
+      <p:sp>
+        <p:nvSpPr>
+          <p:cNvPr id="4" name="NumCircle"/>
+          <p:cNvSpPr/>
+          <p:nvPr/>
+        </p:nvSpPr>
+        <p:spPr>
+          <a:xfrm>
+            <a:off x="7088176" y="4253"/>
+            <a:ext cx="470123" cy="470912"/>
+          </a:xfrm>
+          <a:prstGeom prst="roundRect">
+            <a:avLst/>
+          </a:prstGeom>
+        </p:spPr>
+        <p:style>
+          <a:lnRef idx="0">
+            <a:schemeClr val="accent1"/>
+          </a:lnRef>
+          <a:fillRef idx="3">
+            <a:schemeClr val="accent1"/>
+          </a:fillRef>
+          <a:effectRef idx="3">
+            <a:schemeClr val="accent1"/>
+          </a:effectRef>
+          <a:fontRef idx="minor">
+            <a:schemeClr val="lt1"/>
+          </a:fontRef>
+        </p:style>
+        <p:txBody>
+          <a:bodyPr lIns="91440" tIns="45720" rIns="91440" bIns="45720" rtlCol="0" anchor="ctr"/>
+          <a:lstStyle/>
+          <a:p>
+            <a:pPr algn="ctr"/>
+            <a:r>
+              <a:rPr lang="en-US" sz="2800" b="1"/>
+              <a:t>3</a:t>
+            </a:r>
+          </a:p>
+        </p:txBody>
+      </p:sp>
+      <p:sp>
+        <p:nvSpPr>
+          <p:cNvPr id="5" name="Title"/>
+          <p:cNvSpPr/>
+          <p:nvPr/>
+        </p:nvSpPr>
+        <p:spPr>
+          <a:xfrm>
+            <a:off x="457200" y="109728"/>
+            <a:ext cx="6400800" cy="530352"/>
+          </a:xfrm>
+          <a:prstGeom prst="rect">
+            <a:avLst/>
+          </a:prstGeom>
+          <a:noFill/>
+          <a:ln/>
+        </p:spPr>
+        <p:txBody>
+          <a:bodyPr wrap="square" lIns="0" tIns="0" rIns="0" bIns="0" rtlCol="0" anchor="ctr"/>
+          <a:lstStyle/>
+          <a:p>
+            <a:pPr marL="0" indent="0">
+              <a:buNone/>
+            </a:pPr>
+            <a:r>
+              <a:rPr lang="en-US" sz="2200" b="1" dirty="0">
+                <a:solidFill>
+                  <a:srgbClr val="0D1B2A"/>
+                </a:solidFill>
+                <a:latin typeface="Trebuchet MS" pitchFamily="34" charset="0"/>
+              </a:rPr>
+              <a:t>Confusion Matrix — Normal as the Catch-All Class</a:t>
+            </a:r>
+          </a:p>
+        </p:txBody>
+      </p:sp>
+      <p:sp>
+        <p:nvSpPr>
+          <p:cNvPr id="30" name="CatchBG"/>
+          <p:cNvSpPr/>
+          <p:nvPr/>
+        </p:nvSpPr>
+        <p:spPr>
+          <a:xfrm>
+            <a:off x="154517" y="4194659"/>
+            <a:ext cx="4017997" cy="954705"/>
+          </a:xfrm>
+          <a:prstGeom prst="rect">
+            <a:avLst/>
+          </a:prstGeom>
+          <a:solidFill>
+            <a:srgbClr val="0D1B2A"/>
+          </a:solidFill>
+          <a:ln w="0">
+            <a:noFill/>
+          </a:ln>
+        </p:spPr>
+        <p:txBody>
+          <a:bodyPr/>
+          <a:lstStyle/>
+          <a:p>
+            <a:endParaRPr lang="en-US"/>
+          </a:p>
+        </p:txBody>
+      </p:sp>
+      <p:sp>
+        <p:nvSpPr>
+          <p:cNvPr id="31" name="CatchText"/>
+          <p:cNvSpPr/>
+          <p:nvPr/>
+        </p:nvSpPr>
+        <p:spPr>
+          <a:xfrm>
+            <a:off x="292749" y="4173475"/>
+            <a:ext cx="4022640" cy="1324344"/>
+          </a:xfrm>
+          <a:prstGeom prst="rect">
+            <a:avLst/>
+          </a:prstGeom>
+          <a:noFill/>
+          <a:ln/>
+        </p:spPr>
+        <p:txBody>
+          <a:bodyPr wrap="square" lIns="91440" tIns="45720" rIns="91440" bIns="45720" rtlCol="0" anchor="t"/>
+          <a:lstStyle/>
+          <a:p>
+            <a:r>
+              <a:rPr lang="en-US" sz="1200" b="1">
+                <a:solidFill>
+                  <a:srgbClr val="00A896"/>
+                </a:solidFill>
+                <a:latin typeface="Trebuchet MS"/>
+              </a:rPr>
+              <a:t>Normal is the catch-all for MLP</a:t>
+            </a:r>
+            <a:endParaRPr lang="en-US"/>
+          </a:p>
+          <a:p>
+            <a:pPr marL="228600" indent="-228600">
+              <a:buChar char="•"/>
+            </a:pPr>
+            <a:r>
+              <a:rPr lang="en-US" sz="1100" dirty="0">
+                <a:solidFill>
+                  <a:schemeClr val="bg1"/>
+                </a:solidFill>
+                <a:latin typeface="Calibri"/>
+              </a:rPr>
+              <a:t>Normal = most diverse class: humanoids of every shape and size, no dominant </a:t>
+            </a:r>
+            <a:r>
+              <a:rPr lang="en-US" sz="1100" dirty="0" err="1">
+                <a:solidFill>
+                  <a:schemeClr val="bg1"/>
+                </a:solidFill>
+                <a:latin typeface="Calibri"/>
+              </a:rPr>
+              <a:t>colour</a:t>
+            </a:r>
+            <a:endParaRPr lang="en-US" sz="1100" dirty="0" err="1">
+              <a:solidFill>
+                <a:schemeClr val="bg1"/>
+              </a:solidFill>
+              <a:latin typeface="Calibri"/>
+              <a:ea typeface="Calibri"/>
+              <a:cs typeface="Calibri"/>
+            </a:endParaRPr>
+          </a:p>
+          <a:p>
+            <a:pPr marL="228600" indent="-228600">
+              <a:buChar char="•"/>
+            </a:pPr>
+            <a:r>
+              <a:rPr lang="en-US" sz="1100" dirty="0">
+                <a:solidFill>
+                  <a:schemeClr val="bg1"/>
+                </a:solidFill>
+                <a:latin typeface="Calibri"/>
+              </a:rPr>
+              <a:t>Bug, Fighting and Ground all lack distinctive palettes — the MLP falls back to predicting Normal</a:t>
+            </a:r>
+          </a:p>
+        </p:txBody>
+      </p:sp>
       <p:pic>
         <p:nvPicPr>
-          <p:cNvPr id="12" name="Picture 11">
+          <p:cNvPr id="7" name="Picture 6">
             <a:extLst>
               <a:ext uri="{FF2B5EF4-FFF2-40B4-BE49-F238E27FC236}">
-                <a16:creationId xmlns:a16="http://schemas.microsoft.com/office/drawing/2014/main" id="{CB407761-126A-8F2A-3A5B-4FDECE90D6C9}"/>
+                <a16:creationId xmlns:a16="http://schemas.microsoft.com/office/drawing/2014/main" id="{93140B6C-BAD5-FF14-C36A-64E2C5AB0B87}"/>
               </a:ext>
             </a:extLst>
           </p:cNvPr>
@@ -31430,14 +31054,252 @@
         </p:blipFill>
         <p:spPr>
           <a:xfrm>
-            <a:off x="248960" y="685800"/>
-            <a:ext cx="4102764" cy="3255504"/>
+            <a:off x="221486" y="1089422"/>
+            <a:ext cx="3816489" cy="3107531"/>
           </a:xfrm>
           <a:prstGeom prst="rect">
             <a:avLst/>
           </a:prstGeom>
         </p:spPr>
       </p:pic>
+      <p:sp>
+        <p:nvSpPr>
+          <p:cNvPr id="8" name="CatchText">
+            <a:extLst>
+              <a:ext uri="{FF2B5EF4-FFF2-40B4-BE49-F238E27FC236}">
+                <a16:creationId xmlns:a16="http://schemas.microsoft.com/office/drawing/2014/main" id="{206C3F56-0D8B-5637-9765-9A2455DC7083}"/>
+              </a:ext>
+            </a:extLst>
+          </p:cNvPr>
+          <p:cNvSpPr/>
+          <p:nvPr/>
+        </p:nvSpPr>
+        <p:spPr>
+          <a:xfrm>
+            <a:off x="1801866" y="673037"/>
+            <a:ext cx="665079" cy="395657"/>
+          </a:xfrm>
+          <a:prstGeom prst="rect">
+            <a:avLst/>
+          </a:prstGeom>
+          <a:noFill/>
+          <a:ln/>
+        </p:spPr>
+        <p:txBody>
+          <a:bodyPr wrap="square" lIns="91440" tIns="45720" rIns="91440" bIns="45720" rtlCol="0" anchor="t"/>
+          <a:lstStyle/>
+          <a:p>
+            <a:r>
+              <a:rPr lang="en-US" sz="2000" b="1">
+                <a:latin typeface="Trebuchet MS"/>
+              </a:rPr>
+              <a:t>MLP</a:t>
+            </a:r>
+            <a:endParaRPr lang="en-US" sz="2000"/>
+          </a:p>
+          <a:p>
+            <a:pPr marL="228600" indent="-228600">
+              <a:buChar char="•"/>
+            </a:pPr>
+            <a:endParaRPr lang="en-US" sz="1100" dirty="0">
+              <a:latin typeface="Calibri"/>
+              <a:ea typeface="Calibri"/>
+              <a:cs typeface="Calibri"/>
+            </a:endParaRPr>
+          </a:p>
+        </p:txBody>
+      </p:sp>
+      <p:pic>
+        <p:nvPicPr>
+          <p:cNvPr id="13" name="Picture 12" descr="A graph of a number of blue squares&#10;&#10;AI-generated content may be incorrect.">
+            <a:extLst>
+              <a:ext uri="{FF2B5EF4-FFF2-40B4-BE49-F238E27FC236}">
+                <a16:creationId xmlns:a16="http://schemas.microsoft.com/office/drawing/2014/main" id="{D1277C1D-5659-D855-875F-6E823397BB4D}"/>
+              </a:ext>
+            </a:extLst>
+          </p:cNvPr>
+          <p:cNvPicPr>
+            <a:picLocks noChangeAspect="1"/>
+          </p:cNvPicPr>
+          <p:nvPr/>
+        </p:nvPicPr>
+        <p:blipFill>
+          <a:blip r:embed="rId3"/>
+          <a:stretch>
+            <a:fillRect/>
+          </a:stretch>
+        </p:blipFill>
+        <p:spPr>
+          <a:xfrm>
+            <a:off x="4574381" y="1085850"/>
+            <a:ext cx="3924300" cy="3114675"/>
+          </a:xfrm>
+          <a:prstGeom prst="rect">
+            <a:avLst/>
+          </a:prstGeom>
+        </p:spPr>
+      </p:pic>
+      <p:sp>
+        <p:nvSpPr>
+          <p:cNvPr id="14" name="CatchBG">
+            <a:extLst>
+              <a:ext uri="{FF2B5EF4-FFF2-40B4-BE49-F238E27FC236}">
+                <a16:creationId xmlns:a16="http://schemas.microsoft.com/office/drawing/2014/main" id="{6E306E00-2890-9B44-D47E-21C5D109AD13}"/>
+              </a:ext>
+            </a:extLst>
+          </p:cNvPr>
+          <p:cNvSpPr/>
+          <p:nvPr/>
+        </p:nvSpPr>
+        <p:spPr>
+          <a:xfrm>
+            <a:off x="4521133" y="4194658"/>
+            <a:ext cx="4017997" cy="954705"/>
+          </a:xfrm>
+          <a:prstGeom prst="rect">
+            <a:avLst/>
+          </a:prstGeom>
+          <a:solidFill>
+            <a:srgbClr val="0D1B2A"/>
+          </a:solidFill>
+          <a:ln w="0">
+            <a:noFill/>
+          </a:ln>
+        </p:spPr>
+        <p:txBody>
+          <a:bodyPr/>
+          <a:lstStyle/>
+          <a:p>
+            <a:endParaRPr lang="en-US"/>
+          </a:p>
+        </p:txBody>
+      </p:sp>
+      <p:sp>
+        <p:nvSpPr>
+          <p:cNvPr id="15" name="CatchText">
+            <a:extLst>
+              <a:ext uri="{FF2B5EF4-FFF2-40B4-BE49-F238E27FC236}">
+                <a16:creationId xmlns:a16="http://schemas.microsoft.com/office/drawing/2014/main" id="{B4E6DBCC-BEFA-D387-E58B-1D8FA5762AB6}"/>
+              </a:ext>
+            </a:extLst>
+          </p:cNvPr>
+          <p:cNvSpPr/>
+          <p:nvPr/>
+        </p:nvSpPr>
+        <p:spPr>
+          <a:xfrm>
+            <a:off x="4659365" y="4173474"/>
+            <a:ext cx="4022640" cy="1324344"/>
+          </a:xfrm>
+          <a:prstGeom prst="rect">
+            <a:avLst/>
+          </a:prstGeom>
+          <a:noFill/>
+          <a:ln/>
+        </p:spPr>
+        <p:txBody>
+          <a:bodyPr wrap="square" lIns="91440" tIns="45720" rIns="91440" bIns="45720" rtlCol="0" anchor="t"/>
+          <a:lstStyle/>
+          <a:p>
+            <a:r>
+              <a:rPr lang="en-US" sz="1200" b="1">
+                <a:solidFill>
+                  <a:srgbClr val="00A896"/>
+                </a:solidFill>
+                <a:latin typeface="Trebuchet MS"/>
+              </a:rPr>
+              <a:t>CNNs are immune to this</a:t>
+            </a:r>
+            <a:endParaRPr lang="en-US"/>
+          </a:p>
+          <a:p>
+            <a:pPr marL="228600" indent="-228600">
+              <a:buFont typeface="Arial"/>
+              <a:buChar char="•"/>
+            </a:pPr>
+            <a:r>
+              <a:rPr lang="en-US" sz="1100" dirty="0">
+                <a:solidFill>
+                  <a:schemeClr val="bg1"/>
+                </a:solidFill>
+                <a:latin typeface="Calibri"/>
+                <a:ea typeface="Calibri"/>
+                <a:cs typeface="Calibri"/>
+              </a:rPr>
+              <a:t>As stated before, they can learn other patterns besides </a:t>
+            </a:r>
+            <a:r>
+              <a:rPr lang="en-US" sz="1100" dirty="0" err="1">
+                <a:solidFill>
+                  <a:schemeClr val="bg1"/>
+                </a:solidFill>
+                <a:latin typeface="Calibri"/>
+                <a:ea typeface="Calibri"/>
+                <a:cs typeface="Calibri"/>
+              </a:rPr>
+              <a:t>colour</a:t>
+            </a:r>
+            <a:r>
+              <a:rPr lang="en-US" sz="1100" dirty="0">
+                <a:solidFill>
+                  <a:schemeClr val="bg1"/>
+                </a:solidFill>
+                <a:latin typeface="Calibri"/>
+                <a:ea typeface="Calibri"/>
+                <a:cs typeface="Calibri"/>
+              </a:rPr>
+              <a:t> and independent pixels</a:t>
+            </a:r>
+          </a:p>
+        </p:txBody>
+      </p:sp>
+      <p:sp>
+        <p:nvSpPr>
+          <p:cNvPr id="16" name="CatchText">
+            <a:extLst>
+              <a:ext uri="{FF2B5EF4-FFF2-40B4-BE49-F238E27FC236}">
+                <a16:creationId xmlns:a16="http://schemas.microsoft.com/office/drawing/2014/main" id="{7999AF14-4CB2-B054-1934-616B39B0E07A}"/>
+              </a:ext>
+            </a:extLst>
+          </p:cNvPr>
+          <p:cNvSpPr/>
+          <p:nvPr/>
+        </p:nvSpPr>
+        <p:spPr>
+          <a:xfrm>
+            <a:off x="6150624" y="673036"/>
+            <a:ext cx="781164" cy="413516"/>
+          </a:xfrm>
+          <a:prstGeom prst="rect">
+            <a:avLst/>
+          </a:prstGeom>
+          <a:noFill/>
+          <a:ln/>
+        </p:spPr>
+        <p:txBody>
+          <a:bodyPr wrap="square" lIns="91440" tIns="45720" rIns="91440" bIns="45720" rtlCol="0" anchor="t"/>
+          <a:lstStyle/>
+          <a:p>
+            <a:r>
+              <a:rPr lang="en-US" sz="2000" b="1">
+                <a:latin typeface="Trebuchet MS"/>
+              </a:rPr>
+              <a:t>CNN</a:t>
+            </a:r>
+            <a:endParaRPr lang="en-US" sz="2000"/>
+          </a:p>
+          <a:p>
+            <a:pPr marL="228600" indent="-228600">
+              <a:buChar char="•"/>
+            </a:pPr>
+            <a:endParaRPr lang="en-US" sz="1100" dirty="0">
+              <a:latin typeface="Calibri"/>
+              <a:ea typeface="Calibri"/>
+              <a:cs typeface="Calibri"/>
+            </a:endParaRPr>
+          </a:p>
+        </p:txBody>
+      </p:sp>
     </p:spTree>
   </p:cSld>
   <p:clrMapOvr>
@@ -31704,9 +31566,6 @@
           <a:bodyPr wrap="square" lIns="91440" tIns="0" rIns="0" bIns="0" rtlCol="0" anchor="ctr"/>
           <a:lstStyle/>
           <a:p>
-            <a:pPr>
-              <a:buNone/>
-            </a:pPr>
             <a:r>
               <a:rPr lang="en-US" sz="1000" b="1" dirty="0">
                 <a:solidFill>
@@ -31714,7 +31573,7 @@
                 </a:solidFill>
                 <a:latin typeface="Calibri"/>
               </a:rPr>
-              <a:t>ENS_C+E ★  F1=0.2428  acc=26.7%   </a:t>
+              <a:t>ENSEMBLE I+K ★  F1=1.0000 acc=100%   </a:t>
             </a:r>
             <a:r>
               <a:rPr lang="en-US" sz="1000" dirty="0">
@@ -31723,7 +31582,7 @@
                 </a:solidFill>
                 <a:latin typeface="Calibri"/>
               </a:rPr>
-              <a:t>SUBMITTED — C (class weights) + E (sampler) = complementary error patterns</a:t>
+              <a:t> Combining perfect models together doesn't change the result - expected</a:t>
             </a:r>
           </a:p>
         </p:txBody>
@@ -31736,8 +31595,8 @@
         </p:nvSpPr>
         <p:spPr>
           <a:xfrm>
-            <a:off x="274320" y="1198260"/>
-            <a:ext cx="8595360" cy="219960"/>
+            <a:off x="274320" y="1189331"/>
+            <a:ext cx="8604289" cy="407482"/>
           </a:xfrm>
           <a:prstGeom prst="rect">
             <a:avLst/>
@@ -31767,8 +31626,8 @@
         </p:nvSpPr>
         <p:spPr>
           <a:xfrm>
-            <a:off x="274320" y="1198260"/>
-            <a:ext cx="8595360" cy="219960"/>
+            <a:off x="274320" y="1198261"/>
+            <a:ext cx="8604289" cy="407482"/>
           </a:xfrm>
           <a:prstGeom prst="rect">
             <a:avLst/>
@@ -31780,9 +31639,6 @@
           <a:bodyPr wrap="square" lIns="91440" tIns="0" rIns="0" bIns="0" rtlCol="0" anchor="ctr"/>
           <a:lstStyle/>
           <a:p>
-            <a:pPr>
-              <a:buNone/>
-            </a:pPr>
             <a:r>
               <a:rPr lang="en-US" sz="1000" b="1" dirty="0">
                 <a:solidFill>
@@ -31790,7 +31646,7 @@
                 </a:solidFill>
                 <a:latin typeface="Calibri"/>
               </a:rPr>
-              <a:t>ENS_R+E+P       F1=0.2427  acc=26.3%   </a:t>
+              <a:t>ENSEMBLE C+H F1=0.9908 acc=99.0%   </a:t>
             </a:r>
             <a:r>
               <a:rPr lang="en-US" sz="1000" dirty="0">
@@ -31799,236 +31655,16 @@
                 </a:solidFill>
                 <a:latin typeface="Calibri"/>
               </a:rPr>
-              <a:t>Near-identical to C+E; 3-model ensemble</a:t>
-            </a:r>
-          </a:p>
-        </p:txBody>
-      </p:sp>
-      <p:sp>
-        <p:nvSpPr>
-          <p:cNvPr id="15" name="E3"/>
-          <p:cNvSpPr/>
-          <p:nvPr/>
-        </p:nvSpPr>
-        <p:spPr>
-          <a:xfrm>
-            <a:off x="274320" y="1418220"/>
-            <a:ext cx="8595360" cy="219960"/>
-          </a:xfrm>
-          <a:prstGeom prst="rect">
-            <a:avLst/>
-          </a:prstGeom>
-          <a:solidFill>
-            <a:srgbClr val="F4F7F9"/>
-          </a:solidFill>
-          <a:ln w="3175">
-            <a:solidFill>
-              <a:srgbClr val="E0ECF4"/>
-            </a:solidFill>
-          </a:ln>
-        </p:spPr>
-        <p:txBody>
-          <a:bodyPr/>
-          <a:lstStyle/>
-          <a:p>
-            <a:endParaRPr lang="en-US"/>
-          </a:p>
-        </p:txBody>
-      </p:sp>
-      <p:sp>
-        <p:nvSpPr>
-          <p:cNvPr id="16" name="E3t"/>
-          <p:cNvSpPr/>
-          <p:nvPr/>
-        </p:nvSpPr>
-        <p:spPr>
-          <a:xfrm>
-            <a:off x="274320" y="1418220"/>
-            <a:ext cx="8595360" cy="219960"/>
-          </a:xfrm>
-          <a:prstGeom prst="rect">
-            <a:avLst/>
-          </a:prstGeom>
-          <a:noFill/>
-          <a:ln/>
-        </p:spPr>
-        <p:txBody>
-          <a:bodyPr wrap="square" lIns="91440" tIns="0" rIns="0" bIns="0" rtlCol="0" anchor="ctr"/>
-          <a:lstStyle/>
-          <a:p>
-            <a:pPr>
-              <a:buNone/>
-            </a:pPr>
-            <a:r>
-              <a:rPr lang="en-US" sz="1000" b="1" dirty="0">
-                <a:solidFill>
-                  <a:srgbClr val="1C3A52"/>
-                </a:solidFill>
-                <a:latin typeface="Calibri"/>
-              </a:rPr>
-              <a:t>ENS_C+E+P       F1=0.2405  acc=26.3%   </a:t>
-            </a:r>
-            <a:r>
-              <a:rPr lang="en-US" sz="1000" dirty="0">
-                <a:solidFill>
-                  <a:srgbClr val="1A2B3C"/>
-                </a:solidFill>
-                <a:latin typeface="Calibri"/>
-              </a:rPr>
-              <a:t>P drags down slightly — weak model adds noise</a:t>
-            </a:r>
-          </a:p>
-        </p:txBody>
-      </p:sp>
-      <p:sp>
-        <p:nvSpPr>
-          <p:cNvPr id="17" name="E4"/>
-          <p:cNvSpPr/>
-          <p:nvPr/>
-        </p:nvSpPr>
-        <p:spPr>
-          <a:xfrm>
-            <a:off x="274320" y="1638180"/>
-            <a:ext cx="8595360" cy="219960"/>
-          </a:xfrm>
-          <a:prstGeom prst="rect">
-            <a:avLst/>
-          </a:prstGeom>
-          <a:solidFill>
-            <a:srgbClr val="FDF8F0"/>
-          </a:solidFill>
-          <a:ln w="3175">
-            <a:solidFill>
-              <a:srgbClr val="E8D8B8"/>
-            </a:solidFill>
-          </a:ln>
-        </p:spPr>
-        <p:txBody>
-          <a:bodyPr/>
-          <a:lstStyle/>
-          <a:p>
-            <a:endParaRPr lang="en-US"/>
-          </a:p>
-        </p:txBody>
-      </p:sp>
-      <p:sp>
-        <p:nvSpPr>
-          <p:cNvPr id="18" name="E4t"/>
-          <p:cNvSpPr/>
-          <p:nvPr/>
-        </p:nvSpPr>
-        <p:spPr>
-          <a:xfrm>
-            <a:off x="274320" y="1638180"/>
-            <a:ext cx="8595360" cy="219960"/>
-          </a:xfrm>
-          <a:prstGeom prst="rect">
-            <a:avLst/>
-          </a:prstGeom>
-          <a:noFill/>
-          <a:ln/>
-        </p:spPr>
-        <p:txBody>
-          <a:bodyPr wrap="square" lIns="91440" tIns="0" rIns="0" bIns="0" rtlCol="0" anchor="ctr"/>
-          <a:lstStyle/>
-          <a:p>
-            <a:pPr>
-              <a:buNone/>
-            </a:pPr>
-            <a:r>
-              <a:rPr lang="en-US" sz="1000" b="1" dirty="0">
-                <a:solidFill>
-                  <a:srgbClr val="C0392B"/>
-                </a:solidFill>
-                <a:latin typeface="Calibri"/>
-              </a:rPr>
-              <a:t>ENS_C+R         F1=0.2339  acc=25.6%   </a:t>
-            </a:r>
-            <a:r>
-              <a:rPr lang="en-US" sz="1000" dirty="0">
-                <a:solidFill>
-                  <a:srgbClr val="1A2B3C"/>
-                </a:solidFill>
-                <a:latin typeface="Calibri"/>
-              </a:rPr>
-              <a:t>Both use CW — same error patterns, no diversity benefit</a:t>
-            </a:r>
-          </a:p>
-        </p:txBody>
-      </p:sp>
-      <p:sp>
-        <p:nvSpPr>
-          <p:cNvPr id="19" name="E567"/>
-          <p:cNvSpPr/>
-          <p:nvPr/>
-        </p:nvSpPr>
-        <p:spPr>
-          <a:xfrm>
-            <a:off x="274320" y="1858140"/>
-            <a:ext cx="8595360" cy="219960"/>
-          </a:xfrm>
-          <a:prstGeom prst="rect">
-            <a:avLst/>
-          </a:prstGeom>
-          <a:solidFill>
-            <a:srgbClr val="FDF3F0"/>
-          </a:solidFill>
-          <a:ln w="3175">
-            <a:solidFill>
-              <a:srgbClr val="E8C4B8"/>
-            </a:solidFill>
-          </a:ln>
-        </p:spPr>
-        <p:txBody>
-          <a:bodyPr/>
-          <a:lstStyle/>
-          <a:p>
-            <a:endParaRPr lang="en-US"/>
-          </a:p>
-        </p:txBody>
-      </p:sp>
-      <p:sp>
-        <p:nvSpPr>
-          <p:cNvPr id="6" name="E567t"/>
-          <p:cNvSpPr/>
-          <p:nvPr/>
-        </p:nvSpPr>
-        <p:spPr>
-          <a:xfrm>
-            <a:off x="274320" y="1858140"/>
-            <a:ext cx="8595360" cy="219960"/>
-          </a:xfrm>
-          <a:prstGeom prst="rect">
-            <a:avLst/>
-          </a:prstGeom>
-          <a:noFill/>
-          <a:ln/>
-        </p:spPr>
-        <p:txBody>
-          <a:bodyPr wrap="square" lIns="91440" tIns="0" rIns="0" bIns="0" rtlCol="0" anchor="ctr"/>
-          <a:lstStyle/>
-          <a:p>
-            <a:pPr>
-              <a:buNone/>
-            </a:pPr>
-            <a:r>
-              <a:rPr lang="en-US" sz="1000" b="1" dirty="0">
-                <a:solidFill>
-                  <a:srgbClr val="C0392B"/>
-                </a:solidFill>
-                <a:latin typeface="Calibri"/>
-              </a:rPr>
-              <a:t>ENS_R+E / ENS_C+R+M / ENS_R+P   </a:t>
-            </a:r>
-            <a:r>
-              <a:rPr lang="en-US" sz="1000" dirty="0">
-                <a:solidFill>
-                  <a:srgbClr val="1A2B3C"/>
-                </a:solidFill>
-                <a:latin typeface="Calibri"/>
-              </a:rPr>
-              <a:t>F1=0.224–0.229  Too similar models or too weak — no diversity gain</a:t>
-            </a:r>
+              <a:t>Combining a bad model with a perfect one gave a similar performance, no additional noise (class weights + dropout combination)</a:t>
+            </a:r>
+            <a:endParaRPr lang="en-US" sz="1000" dirty="0">
+              <a:solidFill>
+                <a:srgbClr val="1A2B3C"/>
+              </a:solidFill>
+              <a:latin typeface="Calibri"/>
+              <a:ea typeface="Calibri"/>
+              <a:cs typeface="Calibri"/>
+            </a:endParaRPr>
           </a:p>
         </p:txBody>
       </p:sp>
@@ -32040,8 +31676,8 @@
         </p:nvSpPr>
         <p:spPr>
           <a:xfrm>
-            <a:off x="274320" y="2169540"/>
-            <a:ext cx="4205520" cy="2394720"/>
+            <a:off x="256461" y="2357062"/>
+            <a:ext cx="4205520" cy="1680345"/>
           </a:xfrm>
           <a:prstGeom prst="rect">
             <a:avLst/>
@@ -32078,7 +31714,7 @@
         </p:nvSpPr>
         <p:spPr>
           <a:xfrm>
-            <a:off x="457200" y="2243700"/>
+            <a:off x="439341" y="2609816"/>
             <a:ext cx="3840480" cy="2286000"/>
           </a:xfrm>
           <a:prstGeom prst="rect">
@@ -32088,20 +31724,17 @@
           <a:ln/>
         </p:spPr>
         <p:txBody>
-          <a:bodyPr wrap="square" rtlCol="0" anchor="t"/>
-          <a:lstStyle/>
-          <a:p>
-            <a:pPr>
-              <a:buNone/>
-            </a:pPr>
-            <a:r>
-              <a:rPr lang="en-US" sz="1200" b="1" dirty="0">
+          <a:bodyPr wrap="square" lIns="91440" tIns="45720" rIns="91440" bIns="45720" rtlCol="0" anchor="t"/>
+          <a:lstStyle/>
+          <a:p>
+            <a:r>
+              <a:rPr lang="en-US" sz="1200" b="1">
                 <a:solidFill>
                   <a:srgbClr val="028090"/>
                 </a:solidFill>
                 <a:latin typeface="Trebuchet MS"/>
               </a:rPr>
-              <a:t>Why C+E wins over any solo</a:t>
+              <a:t>C + H had a similar performance to solo H</a:t>
             </a:r>
           </a:p>
           <a:p>
@@ -32123,14 +31756,22 @@
               <a:buChar char="•"/>
             </a:pPr>
             <a:r>
-              <a:rPr lang="en-US" sz="1100" dirty="0">
+              <a:rPr lang="en-US" sz="1100">
                 <a:solidFill>
                   <a:srgbClr val="1A2B3C"/>
                 </a:solidFill>
                 <a:latin typeface="Calibri"/>
               </a:rPr>
-              <a:t>E uses sampler — adjusts data frequency</a:t>
-            </a:r>
+              <a:t>H uses dropout — randomly drops neurons</a:t>
+            </a:r>
+            <a:endParaRPr lang="en-US" sz="1100">
+              <a:solidFill>
+                <a:srgbClr val="1A2B3C"/>
+              </a:solidFill>
+              <a:latin typeface="Calibri"/>
+              <a:ea typeface="Calibri"/>
+              <a:cs typeface="Calibri"/>
+            </a:endParaRPr>
           </a:p>
           <a:p>
             <a:pPr marL="228600" indent="-228600">
@@ -32143,45 +31784,16 @@
                 </a:solidFill>
                 <a:latin typeface="Calibri"/>
               </a:rPr>
-              <a:t>Different mechanisms = different mistakes = soft-average compensates</a:t>
-            </a:r>
-          </a:p>
-          <a:p>
-            <a:pPr marL="228600" indent="-228600">
-              <a:buChar char="•"/>
-            </a:pPr>
-            <a:r>
-              <a:rPr lang="en-US" sz="1100" b="1" dirty="0">
-                <a:solidFill>
-                  <a:srgbClr val="028090"/>
-                </a:solidFill>
-                <a:latin typeface="Calibri"/>
-              </a:rPr>
-              <a:t>+0.003 F1 over best solo</a:t>
-            </a:r>
-            <a:r>
-              <a:rPr lang="en-US" sz="1100" dirty="0">
-                <a:solidFill>
-                  <a:srgbClr val="1A2B3C"/>
-                </a:solidFill>
-                <a:latin typeface="Calibri"/>
-              </a:rPr>
-              <a:t> — small but consistent</a:t>
-            </a:r>
-          </a:p>
-          <a:p>
-            <a:pPr marL="228600" indent="-228600">
-              <a:buChar char="•"/>
-            </a:pPr>
-            <a:r>
-              <a:rPr lang="en-US" sz="1100" dirty="0">
-                <a:solidFill>
-                  <a:srgbClr val="1A2B3C"/>
-                </a:solidFill>
-                <a:latin typeface="Calibri"/>
-              </a:rPr>
-              <a:t>C+R fails (0.234): both use CW — too similar, no error diversity</a:t>
-            </a:r>
+              <a:t>Different mechanisms = different mistakes, but model H's performance doesn't outweigh H's near perfect performance</a:t>
+            </a:r>
+            <a:endParaRPr lang="en-US" sz="1100" dirty="0">
+              <a:solidFill>
+                <a:srgbClr val="1A2B3C"/>
+              </a:solidFill>
+              <a:latin typeface="Calibri"/>
+              <a:ea typeface="Calibri"/>
+              <a:cs typeface="Calibri"/>
+            </a:endParaRPr>
           </a:p>
         </p:txBody>
       </p:sp>
@@ -32193,8 +31805,8 @@
         </p:nvSpPr>
         <p:spPr>
           <a:xfrm>
-            <a:off x="4663920" y="2169540"/>
-            <a:ext cx="4205520" cy="2394720"/>
+            <a:off x="4663920" y="2357063"/>
+            <a:ext cx="4205520" cy="1680345"/>
           </a:xfrm>
           <a:prstGeom prst="rect">
             <a:avLst/>
@@ -32222,7 +31834,7 @@
         </p:nvSpPr>
         <p:spPr>
           <a:xfrm>
-            <a:off x="4846800" y="2243700"/>
+            <a:off x="4846800" y="2431223"/>
             <a:ext cx="3840480" cy="2286000"/>
           </a:xfrm>
           <a:prstGeom prst="rect">
@@ -32274,13 +31886,10 @@
                 </a:solidFill>
                 <a:latin typeface="Trebuchet MS"/>
               </a:rPr>
-              <a:t> – 1.0</a:t>
-            </a:r>
-          </a:p>
-          <a:p>
-            <a:pPr>
-              <a:buNone/>
-            </a:pPr>
+              <a:t> – 1.0000</a:t>
+            </a:r>
+          </a:p>
+          <a:p>
             <a:r>
               <a:rPr lang="en-US" sz="1200" b="1" dirty="0">
                 <a:solidFill>
@@ -32306,7 +31915,7 @@
                 </a:solidFill>
                 <a:latin typeface="Trebuchet MS"/>
               </a:rPr>
-              <a:t> - 0.99720</a:t>
+              <a:t> – 1.0000</a:t>
             </a:r>
           </a:p>
           <a:p>
@@ -32317,7 +31926,7 @@
                 </a:solidFill>
                 <a:latin typeface="Trebuchet MS"/>
               </a:rPr>
-              <a:t>	−0.028 (-0.28%)</a:t>
+              <a:t>	−0.0000 (-0.00%)</a:t>
             </a:r>
           </a:p>
           <a:p>
@@ -32339,7 +31948,7 @@
                 </a:solidFill>
                 <a:latin typeface="Calibri"/>
               </a:rPr>
-              <a:t>This gap is negligible, since:</a:t>
+              <a:t>No gap:</a:t>
             </a:r>
             <a:endParaRPr lang="en-US" sz="1000" b="1">
               <a:solidFill>
@@ -32355,35 +31964,6 @@
               <a:buChar char="•"/>
             </a:pPr>
             <a:r>
-              <a:rPr lang="en-US" sz="1100" dirty="0">
-                <a:solidFill>
-                  <a:srgbClr val="AACCD8"/>
-                </a:solidFill>
-                <a:latin typeface="Calibri"/>
-              </a:rPr>
-              <a:t>Can occur due to normal </a:t>
-            </a:r>
-            <a:r>
-              <a:rPr lang="en-US" sz="1100">
-                <a:solidFill>
-                  <a:srgbClr val="AACCD8"/>
-                </a:solidFill>
-                <a:latin typeface="Calibri"/>
-              </a:rPr>
-              <a:t>variance</a:t>
-            </a:r>
-            <a:endParaRPr lang="en-US" sz="1100" dirty="0">
-              <a:solidFill>
-                <a:srgbClr val="AACCD8"/>
-              </a:solidFill>
-              <a:latin typeface="Calibri"/>
-            </a:endParaRPr>
-          </a:p>
-          <a:p>
-            <a:pPr marL="228600" indent="-228600">
-              <a:buChar char="•"/>
-            </a:pPr>
-            <a:r>
               <a:rPr lang="en-US" sz="1100">
                 <a:solidFill>
                   <a:srgbClr val="AACCD8"/>
@@ -32392,23 +31972,7 @@
                 <a:ea typeface="Calibri"/>
                 <a:cs typeface="Calibri"/>
               </a:rPr>
-              <a:t>Data is different between local validation and Kaggle</a:t>
-            </a:r>
-          </a:p>
-          <a:p>
-            <a:pPr marL="228600" indent="-228600">
-              <a:buChar char="•"/>
-            </a:pPr>
-            <a:r>
-              <a:rPr lang="en-US" sz="1100">
-                <a:solidFill>
-                  <a:srgbClr val="AACCD8"/>
-                </a:solidFill>
-                <a:latin typeface="Calibri"/>
-                <a:ea typeface="Calibri"/>
-                <a:cs typeface="Calibri"/>
-              </a:rPr>
-              <a:t>It is a very tiny performance change</a:t>
+              <a:t>We correctly evaluated our model's performance locally</a:t>
             </a:r>
             <a:endParaRPr lang="en-US" sz="1100" dirty="0">
               <a:solidFill>
@@ -32499,21 +32063,23 @@
           <a:bodyPr wrap="square" lIns="0" tIns="0" rIns="0" bIns="0" rtlCol="0" anchor="ctr"/>
           <a:lstStyle/>
           <a:p>
-            <a:pPr marL="0" indent="0">
-              <a:buNone/>
-            </a:pPr>
-            <a:r>
-              <a:rPr lang="en-US" sz="2200" b="1" dirty="0">
+            <a:r>
+              <a:rPr lang="en-US" sz="2200" b="1">
                 <a:solidFill>
                   <a:srgbClr val="0D1B2A"/>
                 </a:solidFill>
-                <a:latin typeface="Trebuchet MS" pitchFamily="34" charset="0"/>
+                <a:latin typeface="Trebuchet MS"/>
                 <a:ea typeface="Trebuchet MS" pitchFamily="34" charset="-122"/>
                 <a:cs typeface="Trebuchet MS" pitchFamily="34" charset="-120"/>
               </a:rPr>
-              <a:t>Why MLP Has a Hard Ceiling on This Data</a:t>
-            </a:r>
-            <a:endParaRPr lang="en-US" sz="2200" dirty="0"/>
+              <a:t>Why Are CNNs Better For This Task?</a:t>
+            </a:r>
+            <a:endParaRPr lang="en-US" sz="2200" b="1" dirty="0">
+              <a:solidFill>
+                <a:srgbClr val="0D1B2A"/>
+              </a:solidFill>
+              <a:latin typeface="Trebuchet MS"/>
+            </a:endParaRPr>
           </a:p>
         </p:txBody>
       </p:sp>
@@ -32748,21 +32314,20 @@
           <a:bodyPr wrap="square" lIns="0" tIns="0" rIns="0" bIns="0" rtlCol="0" anchor="ctr"/>
           <a:lstStyle/>
           <a:p>
-            <a:pPr marL="0" indent="0">
-              <a:buNone/>
-            </a:pPr>
-            <a:r>
-              <a:rPr lang="en-US" sz="1200" b="1" dirty="0">
+            <a:r>
+              <a:rPr lang="en-US" sz="1200" b="1">
                 <a:solidFill>
                   <a:srgbClr val="0D1B2A"/>
                 </a:solidFill>
-                <a:latin typeface="Trebuchet MS" pitchFamily="34" charset="0"/>
+                <a:latin typeface="Trebuchet MS"/>
                 <a:ea typeface="Trebuchet MS" pitchFamily="34" charset="-122"/>
                 <a:cs typeface="Trebuchet MS" pitchFamily="34" charset="-120"/>
               </a:rPr>
-              <a:t>No spatial inductive bias</a:t>
-            </a:r>
-            <a:endParaRPr lang="en-US" sz="1200" dirty="0"/>
+              <a:t>Spatial Inductive Bias</a:t>
+            </a:r>
+            <a:endParaRPr lang="en-US" sz="1200">
+              <a:latin typeface="Trebuchet MS"/>
+            </a:endParaRPr>
           </a:p>
         </p:txBody>
       </p:sp>
@@ -32787,21 +32352,61 @@
           <a:bodyPr wrap="square" lIns="0" tIns="0" rIns="0" bIns="0" rtlCol="0" anchor="ctr"/>
           <a:lstStyle/>
           <a:p>
-            <a:pPr marL="0" indent="0">
-              <a:buNone/>
-            </a:pPr>
             <a:r>
               <a:rPr lang="en-US" sz="1100" dirty="0">
                 <a:solidFill>
                   <a:srgbClr val="3D5A73"/>
                 </a:solidFill>
-                <a:latin typeface="Calibri" pitchFamily="34" charset="0"/>
-                <a:ea typeface="Calibri" pitchFamily="34" charset="-122"/>
-                <a:cs typeface="Calibri" pitchFamily="34" charset="-120"/>
+                <a:latin typeface="Calibri"/>
+                <a:ea typeface="Calibri"/>
+                <a:cs typeface="Calibri"/>
               </a:rPr>
-              <a:t>A sprite at top-left and bottom-right = completely different 12 288-vector. MLP can't learn 'flame exists somewhere'.</a:t>
-            </a:r>
-            <a:endParaRPr lang="en-US" sz="1100" dirty="0"/>
+              <a:t>A CNN can recognize the same sprite at top-left or bottom-right, even though the input vector is different (translation invariance). MLPs can't learn "this </a:t>
+            </a:r>
+            <a:r>
+              <a:rPr lang="en-US" sz="1100" dirty="0" err="1">
+                <a:solidFill>
+                  <a:srgbClr val="3D5A73"/>
+                </a:solidFill>
+                <a:latin typeface="Calibri"/>
+                <a:ea typeface="Calibri"/>
+                <a:cs typeface="Calibri"/>
+              </a:rPr>
+              <a:t>pokemon</a:t>
+            </a:r>
+            <a:r>
+              <a:rPr lang="en-US" sz="1100" dirty="0">
+                <a:solidFill>
+                  <a:srgbClr val="3D5A73"/>
+                </a:solidFill>
+                <a:latin typeface="Calibri"/>
+                <a:ea typeface="Calibri"/>
+                <a:cs typeface="Calibri"/>
+              </a:rPr>
+              <a:t> exists somewhere", even though the </a:t>
+            </a:r>
+            <a:r>
+              <a:rPr lang="en-US" sz="1100" dirty="0" err="1">
+                <a:solidFill>
+                  <a:srgbClr val="3D5A73"/>
+                </a:solidFill>
+                <a:latin typeface="Calibri"/>
+                <a:ea typeface="Calibri"/>
+                <a:cs typeface="Calibri"/>
+              </a:rPr>
+              <a:t>pokemons</a:t>
+            </a:r>
+            <a:r>
+              <a:rPr lang="en-US" sz="1100" dirty="0">
+                <a:solidFill>
+                  <a:srgbClr val="3D5A73"/>
+                </a:solidFill>
+                <a:latin typeface="Calibri"/>
+                <a:ea typeface="Calibri"/>
+                <a:cs typeface="Calibri"/>
+              </a:rPr>
+              <a:t> always appears in the same way.</a:t>
+            </a:r>
           </a:p>
         </p:txBody>
       </p:sp>
@@ -32897,21 +32502,16 @@
           <a:bodyPr wrap="square" lIns="0" tIns="0" rIns="0" bIns="0" rtlCol="0" anchor="ctr"/>
           <a:lstStyle/>
           <a:p>
-            <a:pPr marL="0" indent="0">
-              <a:buNone/>
-            </a:pPr>
-            <a:r>
-              <a:rPr lang="en-US" sz="1200" b="1" dirty="0">
+            <a:r>
+              <a:rPr lang="en-US" sz="1200" b="1">
                 <a:solidFill>
                   <a:srgbClr val="0D1B2A"/>
                 </a:solidFill>
-                <a:latin typeface="Trebuchet MS" pitchFamily="34" charset="0"/>
-                <a:ea typeface="Trebuchet MS" pitchFamily="34" charset="-122"/>
-                <a:cs typeface="Trebuchet MS" pitchFamily="34" charset="-120"/>
+                <a:latin typeface="Trebuchet MS"/>
               </a:rPr>
-              <a:t>Feature-to-sample ratio: 4.26:1</a:t>
-            </a:r>
-            <a:endParaRPr lang="en-US" sz="1200" dirty="0"/>
+              <a:t>Local Feature Learning</a:t>
+            </a:r>
+            <a:endParaRPr lang="en-US"/>
           </a:p>
         </p:txBody>
       </p:sp>
@@ -32923,7 +32523,7 @@
         </p:nvSpPr>
         <p:spPr>
           <a:xfrm>
-            <a:off x="493776" y="2916936"/>
+            <a:off x="484090" y="2878190"/>
             <a:ext cx="3886200" cy="640080"/>
           </a:xfrm>
           <a:prstGeom prst="rect">
@@ -32936,21 +32536,36 @@
           <a:bodyPr wrap="square" lIns="0" tIns="0" rIns="0" bIns="0" rtlCol="0" anchor="ctr"/>
           <a:lstStyle/>
           <a:p>
-            <a:pPr marL="0" indent="0">
-              <a:buNone/>
-            </a:pPr>
             <a:r>
               <a:rPr lang="en-US" sz="1100" dirty="0">
                 <a:solidFill>
                   <a:srgbClr val="3D5A73"/>
                 </a:solidFill>
-                <a:latin typeface="Calibri" pitchFamily="34" charset="0"/>
-                <a:ea typeface="Calibri" pitchFamily="34" charset="-122"/>
-                <a:cs typeface="Calibri" pitchFamily="34" charset="-120"/>
+                <a:latin typeface="Calibri"/>
+                <a:ea typeface="Calibri"/>
+                <a:cs typeface="Calibri"/>
               </a:rPr>
-              <a:t>12 288 features vs 2 880 samples. Even with Dropout + BN, MLP memorises noise rather than learning patterns.</a:t>
-            </a:r>
-            <a:endParaRPr lang="en-US" sz="1100" dirty="0"/>
+              <a:t>CNNs focus on local pattern (edges, shapes, flame tails, …), rather than treating each pixel independently. MLPs need weights for each </a:t>
+            </a:r>
+            <a:r>
+              <a:rPr lang="en-US" sz="1100">
+                <a:solidFill>
+                  <a:srgbClr val="3D5A73"/>
+                </a:solidFill>
+                <a:latin typeface="Calibri"/>
+                <a:ea typeface="Calibri"/>
+                <a:cs typeface="Calibri"/>
+              </a:rPr>
+              <a:t>pixel, making them prone to overfit on small datasets like this one - too many parameters.</a:t>
+            </a:r>
+            <a:endParaRPr lang="en-US" sz="1100" dirty="0">
+              <a:solidFill>
+                <a:srgbClr val="3D5A73"/>
+              </a:solidFill>
+              <a:latin typeface="Calibri"/>
+              <a:ea typeface="Calibri"/>
+              <a:cs typeface="Calibri"/>
+            </a:endParaRPr>
           </a:p>
         </p:txBody>
       </p:sp>
@@ -33046,21 +32661,16 @@
           <a:bodyPr wrap="square" lIns="0" tIns="0" rIns="0" bIns="0" rtlCol="0" anchor="ctr"/>
           <a:lstStyle/>
           <a:p>
-            <a:pPr marL="0" indent="0">
-              <a:buNone/>
-            </a:pPr>
-            <a:r>
-              <a:rPr lang="en-US" sz="1200" b="1" dirty="0">
+            <a:r>
+              <a:rPr lang="en-US" sz="1200" b="1">
                 <a:solidFill>
                   <a:srgbClr val="0D1B2A"/>
                 </a:solidFill>
-                <a:latin typeface="Trebuchet MS" pitchFamily="34" charset="0"/>
-                <a:ea typeface="Trebuchet MS" pitchFamily="34" charset="-122"/>
-                <a:cs typeface="Trebuchet MS" pitchFamily="34" charset="-120"/>
+                <a:latin typeface="Trebuchet MS"/>
               </a:rPr>
-              <a:t>High intra-class variance</a:t>
-            </a:r>
-            <a:endParaRPr lang="en-US" sz="1200" dirty="0"/>
+              <a:t>Hierarchical Feature Learning</a:t>
+            </a:r>
+            <a:endParaRPr lang="en-US"/>
           </a:p>
         </p:txBody>
       </p:sp>
@@ -33085,21 +32695,83 @@
           <a:bodyPr wrap="square" lIns="0" tIns="0" rIns="0" bIns="0" rtlCol="0" anchor="ctr"/>
           <a:lstStyle/>
           <a:p>
-            <a:pPr marL="0" indent="0">
-              <a:buNone/>
-            </a:pPr>
             <a:r>
               <a:rPr lang="en-US" sz="1100" dirty="0">
                 <a:solidFill>
                   <a:srgbClr val="3D5A73"/>
                 </a:solidFill>
-                <a:latin typeface="Calibri" pitchFamily="34" charset="0"/>
-                <a:ea typeface="Calibri" pitchFamily="34" charset="-122"/>
-                <a:cs typeface="Calibri" pitchFamily="34" charset="-120"/>
+                <a:latin typeface="Calibri"/>
+                <a:ea typeface="Calibri"/>
+                <a:cs typeface="Calibri"/>
               </a:rPr>
-              <a:t>Blastoise and Vaporeon are both Water-type but look nothing alike. MLP can only learn average colour histograms.</a:t>
-            </a:r>
-            <a:endParaRPr lang="en-US" sz="1100" dirty="0"/>
+              <a:t>CNNs can build layered representations from simple edges to more complex shapes. This helps identifying </a:t>
+            </a:r>
+            <a:r>
+              <a:rPr lang="en-US" sz="1100" dirty="0" err="1">
+                <a:solidFill>
+                  <a:srgbClr val="3D5A73"/>
+                </a:solidFill>
+                <a:latin typeface="Calibri"/>
+                <a:ea typeface="Calibri"/>
+                <a:cs typeface="Calibri"/>
+              </a:rPr>
+              <a:t>pokemon</a:t>
+            </a:r>
+            <a:r>
+              <a:rPr lang="en-US" sz="1100" dirty="0">
+                <a:solidFill>
+                  <a:srgbClr val="3D5A73"/>
+                </a:solidFill>
+                <a:latin typeface="Calibri"/>
+                <a:ea typeface="Calibri"/>
+                <a:cs typeface="Calibri"/>
+              </a:rPr>
+              <a:t> even when we lose the </a:t>
+            </a:r>
+            <a:r>
+              <a:rPr lang="en-US" sz="1100" dirty="0" err="1">
+                <a:solidFill>
+                  <a:srgbClr val="3D5A73"/>
+                </a:solidFill>
+                <a:latin typeface="Calibri"/>
+                <a:ea typeface="Calibri"/>
+                <a:cs typeface="Calibri"/>
+              </a:rPr>
+              <a:t>colour</a:t>
+            </a:r>
+            <a:r>
+              <a:rPr lang="en-US" sz="1100" dirty="0">
+                <a:solidFill>
+                  <a:srgbClr val="3D5A73"/>
+                </a:solidFill>
+                <a:latin typeface="Calibri"/>
+                <a:ea typeface="Calibri"/>
+                <a:cs typeface="Calibri"/>
+              </a:rPr>
+              <a:t>, for example, due to the memorization of the </a:t>
+            </a:r>
+            <a:r>
+              <a:rPr lang="en-US" sz="1100" dirty="0" err="1">
+                <a:solidFill>
+                  <a:srgbClr val="3D5A73"/>
+                </a:solidFill>
+                <a:latin typeface="Calibri"/>
+                <a:ea typeface="Calibri"/>
+                <a:cs typeface="Calibri"/>
+              </a:rPr>
+              <a:t>pokemon's</a:t>
+            </a:r>
+            <a:r>
+              <a:rPr lang="en-US" sz="1100" dirty="0">
+                <a:solidFill>
+                  <a:srgbClr val="3D5A73"/>
+                </a:solidFill>
+                <a:latin typeface="Calibri"/>
+                <a:ea typeface="Calibri"/>
+                <a:cs typeface="Calibri"/>
+              </a:rPr>
+              <a:t> shape and details.</a:t>
+            </a:r>
           </a:p>
         </p:txBody>
       </p:sp>
@@ -33266,21 +32938,20 @@
           <a:bodyPr wrap="square" lIns="0" tIns="0" rIns="0" bIns="0" rtlCol="0" anchor="ctr"/>
           <a:lstStyle/>
           <a:p>
-            <a:pPr marL="0" indent="0">
-              <a:buNone/>
-            </a:pPr>
-            <a:r>
-              <a:rPr lang="en-US" sz="1200" b="1" dirty="0">
+            <a:r>
+              <a:rPr lang="en-US" sz="1200" b="1">
                 <a:solidFill>
                   <a:srgbClr val="0D1B2A"/>
                 </a:solidFill>
-                <a:latin typeface="Trebuchet MS" pitchFamily="34" charset="0"/>
+                <a:latin typeface="Trebuchet MS"/>
                 <a:ea typeface="Trebuchet MS" pitchFamily="34" charset="-122"/>
                 <a:cs typeface="Trebuchet MS" pitchFamily="34" charset="-120"/>
               </a:rPr>
-              <a:t>Augmentation −0.047 F1</a:t>
-            </a:r>
-            <a:endParaRPr lang="en-US" sz="1200" dirty="0"/>
+              <a:t>CNN vs MLP: +0.7572 F1</a:t>
+            </a:r>
+            <a:endParaRPr lang="en-US" sz="1200">
+              <a:latin typeface="Trebuchet MS"/>
+            </a:endParaRPr>
           </a:p>
         </p:txBody>
       </p:sp>
@@ -33305,21 +32976,39 @@
           <a:bodyPr wrap="square" lIns="0" tIns="0" rIns="0" bIns="0" rtlCol="0" anchor="ctr"/>
           <a:lstStyle/>
           <a:p>
-            <a:pPr marL="0" indent="0">
-              <a:buNone/>
-            </a:pPr>
             <a:r>
               <a:rPr lang="en-US" sz="1100" dirty="0">
                 <a:solidFill>
                   <a:srgbClr val="3D5A73"/>
                 </a:solidFill>
-                <a:latin typeface="Calibri" pitchFamily="34" charset="0"/>
-                <a:ea typeface="Calibri" pitchFamily="34" charset="-122"/>
-                <a:cs typeface="Calibri" pitchFamily="34" charset="-120"/>
+                <a:latin typeface="Calibri"/>
+                <a:ea typeface="Calibri"/>
+                <a:cs typeface="Calibri"/>
               </a:rPr>
-              <a:t>Random flips/jitter/rotation break the pixel vector. CNN will benefit from the same augmentation because filters are position-invariant.</a:t>
-            </a:r>
-            <a:endParaRPr lang="en-US" sz="1100" dirty="0"/>
+              <a:t>The same </a:t>
+            </a:r>
+            <a:r>
+              <a:rPr lang="en-US" sz="1100" dirty="0" err="1">
+                <a:solidFill>
+                  <a:srgbClr val="3D5A73"/>
+                </a:solidFill>
+                <a:latin typeface="Calibri"/>
+                <a:ea typeface="Calibri"/>
+                <a:cs typeface="Calibri"/>
+              </a:rPr>
+              <a:t>pokemon</a:t>
+            </a:r>
+            <a:r>
+              <a:rPr lang="en-US" sz="1100" dirty="0">
+                <a:solidFill>
+                  <a:srgbClr val="3D5A73"/>
+                </a:solidFill>
+                <a:latin typeface="Calibri"/>
+                <a:ea typeface="Calibri"/>
+                <a:cs typeface="Calibri"/>
+              </a:rPr>
+              <a:t> appearing in different positions breaks the pixel vector. CNN  doesn't mind this.</a:t>
+            </a:r>
           </a:p>
         </p:txBody>
       </p:sp>
@@ -33415,21 +33104,23 @@
           <a:bodyPr wrap="square" lIns="0" tIns="0" rIns="0" bIns="0" rtlCol="0" anchor="ctr"/>
           <a:lstStyle/>
           <a:p>
-            <a:pPr marL="0" indent="0">
-              <a:buNone/>
-            </a:pPr>
-            <a:r>
-              <a:rPr lang="en-US" sz="1200" b="1" dirty="0">
+            <a:r>
+              <a:rPr lang="en-US" sz="1200" b="1">
                 <a:solidFill>
                   <a:srgbClr val="0D1B2A"/>
                 </a:solidFill>
-                <a:latin typeface="Trebuchet MS" pitchFamily="34" charset="0"/>
+                <a:latin typeface="Trebuchet MS"/>
                 <a:ea typeface="Trebuchet MS" pitchFamily="34" charset="-122"/>
                 <a:cs typeface="Trebuchet MS" pitchFamily="34" charset="-120"/>
               </a:rPr>
-              <a:t>Grayscale −0.103 F1</a:t>
-            </a:r>
-            <a:endParaRPr lang="en-US" sz="1200" dirty="0"/>
+              <a:t>CNN vs MLP: -96.7% Parameters</a:t>
+            </a:r>
+            <a:endParaRPr lang="en-US" sz="1200" b="1">
+              <a:solidFill>
+                <a:srgbClr val="0D1B2A"/>
+              </a:solidFill>
+              <a:latin typeface="Tw Cen MT"/>
+            </a:endParaRPr>
           </a:p>
         </p:txBody>
       </p:sp>
@@ -33454,21 +33145,36 @@
           <a:bodyPr wrap="square" lIns="0" tIns="0" rIns="0" bIns="0" rtlCol="0" anchor="ctr"/>
           <a:lstStyle/>
           <a:p>
-            <a:pPr marL="0" indent="0">
-              <a:buNone/>
-            </a:pPr>
             <a:r>
               <a:rPr lang="en-US" sz="1100" dirty="0">
                 <a:solidFill>
                   <a:srgbClr val="3D5A73"/>
                 </a:solidFill>
-                <a:latin typeface="Calibri" pitchFamily="34" charset="0"/>
-                <a:ea typeface="Calibri" pitchFamily="34" charset="-122"/>
-                <a:cs typeface="Calibri" pitchFamily="34" charset="-120"/>
+                <a:latin typeface="Calibri"/>
+                <a:ea typeface="Calibri"/>
+                <a:cs typeface="Calibri"/>
               </a:rPr>
-              <a:t>Removing colour channels reduces dimensionality 3x, but loses the main discriminative signal. Colour is king for Pokémon types.</a:t>
-            </a:r>
-            <a:endParaRPr lang="en-US" sz="1100" dirty="0"/>
+              <a:t>The CNN we analyzed has around 200 000 parameters, while the best MLP model has more than 6 million. With a 4.26/1 feature ratio, the MLP is </a:t>
+            </a:r>
+            <a:r>
+              <a:rPr lang="en-US" sz="1100">
+                <a:solidFill>
+                  <a:srgbClr val="3D5A73"/>
+                </a:solidFill>
+                <a:latin typeface="Calibri"/>
+                <a:ea typeface="Calibri"/>
+                <a:cs typeface="Calibri"/>
+              </a:rPr>
+              <a:t>memorizing noise rather than learning patterns</a:t>
+            </a:r>
+            <a:endParaRPr lang="en-US" sz="1100" dirty="0">
+              <a:solidFill>
+                <a:srgbClr val="3D5A73"/>
+              </a:solidFill>
+              <a:latin typeface="Calibri"/>
+              <a:ea typeface="Calibri"/>
+              <a:cs typeface="Calibri"/>
+            </a:endParaRPr>
           </a:p>
         </p:txBody>
       </p:sp>
@@ -33564,21 +33270,16 @@
           <a:bodyPr wrap="square" lIns="0" tIns="0" rIns="0" bIns="0" rtlCol="0" anchor="ctr"/>
           <a:lstStyle/>
           <a:p>
-            <a:pPr marL="0" indent="0">
-              <a:buNone/>
-            </a:pPr>
-            <a:r>
-              <a:rPr lang="en-US" sz="1200" b="1" dirty="0">
+            <a:r>
+              <a:rPr lang="en-US" sz="1200" b="1">
                 <a:solidFill>
                   <a:srgbClr val="0D1B2A"/>
                 </a:solidFill>
-                <a:latin typeface="Trebuchet MS" pitchFamily="34" charset="0"/>
-                <a:ea typeface="Trebuchet MS" pitchFamily="34" charset="-122"/>
-                <a:cs typeface="Trebuchet MS" pitchFamily="34" charset="-120"/>
+                <a:latin typeface="Trebuchet MS"/>
               </a:rPr>
-              <a:t>val_loss ≈ random (2.197)</a:t>
-            </a:r>
-            <a:endParaRPr lang="en-US" sz="1200" dirty="0"/>
+              <a:t>CNN Grayscale: -4.81% F1</a:t>
+            </a:r>
+            <a:endParaRPr lang="en-US"/>
           </a:p>
         </p:txBody>
       </p:sp>
@@ -33603,21 +33304,39 @@
           <a:bodyPr wrap="square" lIns="0" tIns="0" rIns="0" bIns="0" rtlCol="0" anchor="ctr"/>
           <a:lstStyle/>
           <a:p>
-            <a:pPr marL="0" indent="0">
-              <a:buNone/>
-            </a:pPr>
             <a:r>
               <a:rPr lang="en-US" sz="1100" dirty="0">
                 <a:solidFill>
                   <a:srgbClr val="3D5A73"/>
                 </a:solidFill>
-                <a:latin typeface="Calibri" pitchFamily="34" charset="0"/>
-                <a:ea typeface="Calibri" pitchFamily="34" charset="-122"/>
-                <a:cs typeface="Calibri" pitchFamily="34" charset="-120"/>
+                <a:latin typeface="Calibri"/>
+                <a:ea typeface="Calibri"/>
+                <a:cs typeface="Calibri"/>
               </a:rPr>
-              <a:t>Even the best model's val_loss hovers at ~2.22 — barely above log(9). The model discriminates but isn't confident.</a:t>
-            </a:r>
-            <a:endParaRPr lang="en-US" sz="1100" dirty="0"/>
+              <a:t>The analyzed model has a 4.81% performance decrease (0.9519 F1) when trained with grayscale data, as opposed to RGB. While the performance is worse, it still is much better than the best MLP model (0.2428 F1). The CNN learns the </a:t>
+            </a:r>
+            <a:r>
+              <a:rPr lang="en-US" sz="1100" dirty="0" err="1">
+                <a:solidFill>
+                  <a:srgbClr val="3D5A73"/>
+                </a:solidFill>
+                <a:latin typeface="Calibri"/>
+                <a:ea typeface="Calibri"/>
+                <a:cs typeface="Calibri"/>
+              </a:rPr>
+              <a:t>pokemon</a:t>
+            </a:r>
+            <a:r>
+              <a:rPr lang="en-US" sz="1100" dirty="0">
+                <a:solidFill>
+                  <a:srgbClr val="3D5A73"/>
+                </a:solidFill>
+                <a:latin typeface="Calibri"/>
+                <a:ea typeface="Calibri"/>
+                <a:cs typeface="Calibri"/>
+              </a:rPr>
+              <a:t> shapes correctly.</a:t>
+            </a:r>
           </a:p>
         </p:txBody>
       </p:sp>
@@ -33976,21 +33695,42 @@
           <a:bodyPr wrap="square" lIns="0" tIns="0" rIns="0" bIns="0" rtlCol="0" anchor="ctr"/>
           <a:lstStyle/>
           <a:p>
-            <a:pPr marL="0" indent="0">
-              <a:buNone/>
-            </a:pPr>
             <a:r>
               <a:rPr lang="en-US" sz="1100" b="1" dirty="0">
                 <a:solidFill>
                   <a:srgbClr val="FFFFFF"/>
                 </a:solidFill>
-                <a:latin typeface="Trebuchet MS" pitchFamily="34" charset="0"/>
+                <a:latin typeface="Trebuchet MS"/>
                 <a:ea typeface="Trebuchet MS" pitchFamily="34" charset="-122"/>
                 <a:cs typeface="Trebuchet MS" pitchFamily="34" charset="-120"/>
               </a:rPr>
-              <a:t>Best MLP result: 0.2428 val F1 (ensemble C+E), 0.2288 Kaggle</a:t>
-            </a:r>
-            <a:endParaRPr lang="en-US" sz="1100" dirty="0"/>
+              <a:t>Best CNN result: 1.0000 </a:t>
+            </a:r>
+            <a:r>
+              <a:rPr lang="en-US" sz="1100" b="1" dirty="0" err="1">
+                <a:solidFill>
+                  <a:srgbClr val="FFFFFF"/>
+                </a:solidFill>
+                <a:latin typeface="Trebuchet MS"/>
+                <a:ea typeface="Trebuchet MS" pitchFamily="34" charset="-122"/>
+                <a:cs typeface="Trebuchet MS" pitchFamily="34" charset="-120"/>
+              </a:rPr>
+              <a:t>val</a:t>
+            </a:r>
+            <a:r>
+              <a:rPr lang="en-US" sz="1100" b="1" dirty="0">
+                <a:solidFill>
+                  <a:srgbClr val="FFFFFF"/>
+                </a:solidFill>
+                <a:latin typeface="Trebuchet MS"/>
+                <a:ea typeface="Trebuchet MS" pitchFamily="34" charset="-122"/>
+                <a:cs typeface="Trebuchet MS" pitchFamily="34" charset="-120"/>
+              </a:rPr>
+              <a:t> F1 (I, J, K, L, M, I+K), 1.0000 Kaggle (M)</a:t>
+            </a:r>
+            <a:endParaRPr lang="en-US" sz="1100" dirty="0">
+              <a:latin typeface="Trebuchet MS"/>
+            </a:endParaRPr>
           </a:p>
         </p:txBody>
       </p:sp>
@@ -34015,31 +33755,20 @@
           <a:bodyPr wrap="square" lIns="0" tIns="0" rIns="0" bIns="0" rtlCol="0" anchor="ctr"/>
           <a:lstStyle/>
           <a:p>
-            <a:pPr marL="0" indent="0">
-              <a:buNone/>
-            </a:pPr>
-            <a:r>
-              <a:rPr lang="en-US" sz="1050" dirty="0">
+            <a:r>
+              <a:rPr lang="en-US" sz="1050">
                 <a:solidFill>
                   <a:schemeClr val="accent2">
                     <a:lumMod val="40000"/>
                     <a:lumOff val="60000"/>
                   </a:schemeClr>
                 </a:solidFill>
-                <a:latin typeface="Calibri" pitchFamily="34" charset="0"/>
-                <a:ea typeface="Calibri" pitchFamily="34" charset="-122"/>
-                <a:cs typeface="Calibri" pitchFamily="34" charset="-120"/>
+                <a:latin typeface="Calibri"/>
+                <a:ea typeface="Calibri"/>
+                <a:cs typeface="Calibri"/>
               </a:rPr>
-              <a:t>2.18x above random baseline. All 19 solo + 7 ensemble experiments are above random.</a:t>
-            </a:r>
-            <a:endParaRPr lang="en-US" sz="1050" dirty="0">
-              <a:solidFill>
-                <a:schemeClr val="accent2">
-                  <a:lumMod val="40000"/>
-                  <a:lumOff val="60000"/>
-                </a:schemeClr>
-              </a:solidFill>
-            </a:endParaRPr>
+              <a:t>4.12x above MLP best model. All 15 solo + 2 ensemble experiments are above the best MLP.</a:t>
+            </a:r>
           </a:p>
         </p:txBody>
       </p:sp>
@@ -34135,21 +33864,42 @@
           <a:bodyPr wrap="square" lIns="0" tIns="0" rIns="0" bIns="0" rtlCol="0" anchor="ctr"/>
           <a:lstStyle/>
           <a:p>
-            <a:pPr marL="0" indent="0">
-              <a:buNone/>
-            </a:pPr>
             <a:r>
               <a:rPr lang="en-US" sz="1100" b="1" dirty="0">
                 <a:solidFill>
                   <a:srgbClr val="FFFFFF"/>
                 </a:solidFill>
-                <a:latin typeface="Trebuchet MS" pitchFamily="34" charset="0"/>
+                <a:latin typeface="Trebuchet MS"/>
                 <a:ea typeface="Trebuchet MS" pitchFamily="34" charset="-122"/>
                 <a:cs typeface="Trebuchet MS" pitchFamily="34" charset="-120"/>
               </a:rPr>
-              <a:t>Label smoothing = most impactful technique</a:t>
-            </a:r>
-            <a:endParaRPr lang="en-US" sz="1100" dirty="0"/>
+              <a:t>Dropout and </a:t>
+            </a:r>
+            <a:r>
+              <a:rPr lang="en-US" sz="1100" b="1" dirty="0" err="1">
+                <a:solidFill>
+                  <a:srgbClr val="FFFFFF"/>
+                </a:solidFill>
+                <a:latin typeface="Trebuchet MS"/>
+                <a:ea typeface="Trebuchet MS" pitchFamily="34" charset="-122"/>
+                <a:cs typeface="Trebuchet MS" pitchFamily="34" charset="-120"/>
+              </a:rPr>
+              <a:t>WeightedRandomSampler</a:t>
+            </a:r>
+            <a:r>
+              <a:rPr lang="en-US" sz="1100" b="1" dirty="0">
+                <a:solidFill>
+                  <a:srgbClr val="FFFFFF"/>
+                </a:solidFill>
+                <a:latin typeface="Trebuchet MS"/>
+                <a:ea typeface="Trebuchet MS" pitchFamily="34" charset="-122"/>
+                <a:cs typeface="Trebuchet MS" pitchFamily="34" charset="-120"/>
+              </a:rPr>
+              <a:t> = most impactful techniques</a:t>
+            </a:r>
+            <a:endParaRPr lang="en-US" sz="1100" dirty="0">
+              <a:latin typeface="Trebuchet MS"/>
+            </a:endParaRPr>
           </a:p>
         </p:txBody>
       </p:sp>
@@ -34174,31 +33924,20 @@
           <a:bodyPr wrap="square" lIns="0" tIns="0" rIns="0" bIns="0" rtlCol="0" anchor="ctr"/>
           <a:lstStyle/>
           <a:p>
-            <a:pPr marL="0" indent="0">
-              <a:buNone/>
-            </a:pPr>
-            <a:r>
-              <a:rPr lang="en-US" sz="1050" dirty="0">
+            <a:r>
+              <a:rPr lang="en-US" sz="1050">
                 <a:solidFill>
                   <a:schemeClr val="accent2">
                     <a:lumMod val="40000"/>
                     <a:lumOff val="60000"/>
                   </a:schemeClr>
                 </a:solidFill>
-                <a:latin typeface="Calibri" pitchFamily="34" charset="0"/>
-                <a:ea typeface="Calibri" pitchFamily="34" charset="-122"/>
-                <a:cs typeface="Calibri" pitchFamily="34" charset="-120"/>
+                <a:latin typeface="Calibri"/>
+                <a:ea typeface="Calibri"/>
+                <a:cs typeface="Calibri"/>
               </a:rPr>
-              <a:t>LS=0.15 rescued Rock from F1=0.000. All top-6 solo experiments use LS ≥ 0.1.</a:t>
-            </a:r>
-            <a:endParaRPr lang="en-US" sz="1050" dirty="0">
-              <a:solidFill>
-                <a:schemeClr val="accent2">
-                  <a:lumMod val="40000"/>
-                  <a:lumOff val="60000"/>
-                </a:schemeClr>
-              </a:solidFill>
-            </a:endParaRPr>
+              <a:t>Prevented overfit and handles class imbalance. All top solo experiments use them with dropout=0.3.</a:t>
+            </a:r>
           </a:p>
         </p:txBody>
       </p:sp>
@@ -34305,17 +34044,19 @@
               <a:buNone/>
             </a:pPr>
             <a:r>
-              <a:rPr lang="en-US" sz="1100" b="1" dirty="0">
+              <a:rPr lang="en-US" sz="1100" b="1">
                 <a:solidFill>
                   <a:srgbClr val="FFFFFF"/>
                 </a:solidFill>
-                <a:latin typeface="Trebuchet MS" pitchFamily="34" charset="0"/>
+                <a:latin typeface="Trebuchet MS"/>
                 <a:ea typeface="Trebuchet MS" pitchFamily="34" charset="-122"/>
                 <a:cs typeface="Trebuchet MS" pitchFamily="34" charset="-120"/>
               </a:rPr>
-              <a:t>Augmentation and depth both hurt</a:t>
-            </a:r>
-            <a:endParaRPr lang="en-US" sz="1100" dirty="0"/>
+              <a:t>Augmentation hurt</a:t>
+            </a:r>
+            <a:endParaRPr lang="en-US" sz="1100">
+              <a:latin typeface="Trebuchet MS"/>
+            </a:endParaRPr>
           </a:p>
         </p:txBody>
       </p:sp>
@@ -34340,31 +34081,20 @@
           <a:bodyPr wrap="square" lIns="0" tIns="0" rIns="0" bIns="0" rtlCol="0" anchor="ctr"/>
           <a:lstStyle/>
           <a:p>
-            <a:pPr marL="0" indent="0">
-              <a:buNone/>
-            </a:pPr>
-            <a:r>
-              <a:rPr lang="en-US" sz="1050" dirty="0">
+            <a:r>
+              <a:rPr lang="en-US" sz="1050">
                 <a:solidFill>
                   <a:schemeClr val="accent2">
                     <a:lumMod val="40000"/>
                     <a:lumOff val="60000"/>
                   </a:schemeClr>
                 </a:solidFill>
-                <a:latin typeface="Calibri" pitchFamily="34" charset="0"/>
-                <a:ea typeface="Calibri" pitchFamily="34" charset="-122"/>
-                <a:cs typeface="Calibri" pitchFamily="34" charset="-120"/>
+                <a:latin typeface="Calibri"/>
+                <a:ea typeface="Calibri"/>
+                <a:cs typeface="Calibri"/>
               </a:rPr>
-              <a:t>Confirmed empirically: MLP has no spatial invariance, and small data can't regularise deeper nets.</a:t>
-            </a:r>
-            <a:endParaRPr lang="en-US" sz="1050" dirty="0">
-              <a:solidFill>
-                <a:schemeClr val="accent2">
-                  <a:lumMod val="40000"/>
-                  <a:lumOff val="60000"/>
-                </a:schemeClr>
-              </a:solidFill>
-            </a:endParaRPr>
+              <a:t>Confirmed empirically: performance decreases while using due to sprites always being presented the same way</a:t>
+            </a:r>
           </a:p>
         </p:txBody>
       </p:sp>
@@ -34422,11 +34152,11 @@
             <a:avLst/>
           </a:prstGeom>
           <a:solidFill>
-            <a:srgbClr val="E97C35"/>
+            <a:srgbClr val="00A896"/>
           </a:solidFill>
           <a:ln w="12700">
             <a:solidFill>
-              <a:srgbClr val="E97C35"/>
+              <a:srgbClr val="00A896"/>
             </a:solidFill>
             <a:prstDash val="solid"/>
           </a:ln>
@@ -34460,19 +34190,14 @@
           <a:bodyPr wrap="square" lIns="0" tIns="0" rIns="0" bIns="0" rtlCol="0" anchor="ctr"/>
           <a:lstStyle/>
           <a:p>
-            <a:pPr marL="0" indent="0">
-              <a:buNone/>
-            </a:pPr>
-            <a:r>
-              <a:rPr lang="en-US" sz="1100" b="1" dirty="0">
+            <a:r>
+              <a:rPr lang="en-US" sz="1100" b="1">
                 <a:solidFill>
                   <a:srgbClr val="FFFFFF"/>
                 </a:solidFill>
-                <a:latin typeface="Trebuchet MS" pitchFamily="34" charset="0"/>
-                <a:ea typeface="Trebuchet MS" pitchFamily="34" charset="-122"/>
-                <a:cs typeface="Trebuchet MS" pitchFamily="34" charset="-120"/>
+                <a:latin typeface="Trebuchet MS"/>
               </a:rPr>
-              <a:t>MLP ceiling is real and confirmed</a:t>
+              <a:t>CNNs are better than MLPs for this task; ceiling surpassed</a:t>
             </a:r>
             <a:endParaRPr lang="en-US" sz="1100" dirty="0"/>
           </a:p>
@@ -34499,9 +34224,6 @@
           <a:bodyPr wrap="square" lIns="0" tIns="0" rIns="0" bIns="0" rtlCol="0" anchor="ctr"/>
           <a:lstStyle/>
           <a:p>
-            <a:pPr marL="0" indent="0">
-              <a:buNone/>
-            </a:pPr>
             <a:r>
               <a:rPr lang="en-US" sz="1050" dirty="0">
                 <a:solidFill>
@@ -34510,20 +34232,12 @@
                     <a:lumOff val="60000"/>
                   </a:schemeClr>
                 </a:solidFill>
-                <a:latin typeface="Calibri" pitchFamily="34" charset="0"/>
-                <a:ea typeface="Calibri" pitchFamily="34" charset="-122"/>
-                <a:cs typeface="Calibri" pitchFamily="34" charset="-120"/>
+                <a:latin typeface="Calibri"/>
+                <a:ea typeface="Calibri"/>
+                <a:cs typeface="Calibri"/>
               </a:rPr>
-              <a:t>val_loss ≈ log(9) = random. Feature-to-sample ratio 4.26:1 = no amount of tuning fixes this.</a:t>
-            </a:r>
-            <a:endParaRPr lang="en-US" sz="1050" dirty="0">
-              <a:solidFill>
-                <a:schemeClr val="accent2">
-                  <a:lumMod val="40000"/>
-                  <a:lumOff val="60000"/>
-                </a:schemeClr>
-              </a:solidFill>
-            </a:endParaRPr>
+              <a:t>Feature-to-sample ratio 4.26:1 = no amount of tuning fixes MLP bad performance; CNN keeps spatial structure, and learns sprite shapes/details</a:t>
+            </a:r>
           </a:p>
         </p:txBody>
       </p:sp>
@@ -34619,21 +34333,15 @@
           <a:bodyPr wrap="square" lIns="0" tIns="0" rIns="0" bIns="0" rtlCol="0" anchor="ctr"/>
           <a:lstStyle/>
           <a:p>
-            <a:pPr marL="0" indent="0">
-              <a:buNone/>
-            </a:pPr>
-            <a:r>
-              <a:rPr lang="en-US" sz="1100" b="1" dirty="0">
-                <a:solidFill>
-                  <a:srgbClr val="FFFFFF"/>
-                </a:solidFill>
-                <a:latin typeface="Trebuchet MS" pitchFamily="34" charset="0"/>
-                <a:ea typeface="Trebuchet MS" pitchFamily="34" charset="-122"/>
-                <a:cs typeface="Trebuchet MS" pitchFamily="34" charset="-120"/>
+            <a:r>
+              <a:rPr lang="en-US" sz="1100" b="1">
+                <a:latin typeface="Trebuchet MS"/>
               </a:rPr>
-              <a:t>Ensemble diversity &gt; ensemble quality</a:t>
-            </a:r>
-            <a:endParaRPr lang="en-US" sz="1100" dirty="0"/>
+              <a:t>No need for ensembles</a:t>
+            </a:r>
+            <a:endParaRPr lang="en-US" sz="1100" b="1" dirty="0">
+              <a:latin typeface="Trebuchet MS"/>
+            </a:endParaRPr>
           </a:p>
         </p:txBody>
       </p:sp>
@@ -34658,9 +34366,6 @@
           <a:bodyPr wrap="square" lIns="0" tIns="0" rIns="0" bIns="0" rtlCol="0" anchor="ctr"/>
           <a:lstStyle/>
           <a:p>
-            <a:pPr marL="0" indent="0">
-              <a:buNone/>
-            </a:pPr>
             <a:r>
               <a:rPr lang="en-US" sz="1050" dirty="0">
                 <a:solidFill>
@@ -34669,20 +34374,12 @@
                     <a:lumOff val="60000"/>
                   </a:schemeClr>
                 </a:solidFill>
-                <a:latin typeface="Calibri" pitchFamily="34" charset="0"/>
-                <a:ea typeface="Calibri" pitchFamily="34" charset="-122"/>
-                <a:cs typeface="Calibri" pitchFamily="34" charset="-120"/>
+                <a:latin typeface="Calibri"/>
+                <a:ea typeface="Calibri"/>
+                <a:cs typeface="Calibri"/>
               </a:rPr>
-              <a:t>C+E (0.2428) beats two top solos (C=0.2395, R=0.2396) because different imbalance mechanisms produce complementary errors.</a:t>
-            </a:r>
-            <a:endParaRPr lang="en-US" sz="1050" dirty="0">
-              <a:solidFill>
-                <a:schemeClr val="accent2">
-                  <a:lumMod val="40000"/>
-                  <a:lumOff val="60000"/>
-                </a:schemeClr>
-              </a:solidFill>
-            </a:endParaRPr>
+              <a:t>Ensembled experiments returned similar results; CNN solo is already good enough for this task</a:t>
+            </a:r>
           </a:p>
         </p:txBody>
       </p:sp>
@@ -34782,58 +34479,27 @@
           <a:ln/>
         </p:spPr>
         <p:txBody>
-          <a:bodyPr wrap="square" rtlCol="0" anchor="ctr"/>
-          <a:lstStyle/>
+          <a:bodyPr wrap="square" lIns="91440" tIns="45720" rIns="91440" bIns="45720" rtlCol="0" anchor="ctr"/>
+          <a:lstStyle/>
+          <a:p>
+            <a:pPr algn="ctr"/>
+            <a:r>
+              <a:rPr lang="en-US" sz="2000" b="1">
+                <a:latin typeface="Trebuchet MS"/>
+              </a:rPr>
+              <a:t>Transfer Learning and Fine-Tuning</a:t>
+            </a:r>
+            <a:endParaRPr lang="en-US" sz="2000" b="1" dirty="0">
+              <a:latin typeface="Trebuchet MS"/>
+            </a:endParaRPr>
+          </a:p>
           <a:p>
             <a:pPr marL="0" indent="0" algn="ctr">
               <a:buNone/>
             </a:pPr>
-            <a:r>
-              <a:rPr lang="en-US" sz="2000" b="1" dirty="0">
-                <a:solidFill>
-                  <a:srgbClr val="FFFFFF"/>
-                </a:solidFill>
-                <a:latin typeface="Trebuchet MS" pitchFamily="34" charset="0"/>
-                <a:ea typeface="Trebuchet MS" pitchFamily="34" charset="-122"/>
-                <a:cs typeface="Trebuchet MS" pitchFamily="34" charset="-120"/>
-              </a:rPr>
-              <a:t>CNN</a:t>
-            </a:r>
-            <a:endParaRPr lang="en-US" sz="2000" dirty="0"/>
-          </a:p>
-          <a:p>
-            <a:pPr marL="0" indent="0" algn="ctr">
-              <a:buNone/>
-            </a:pPr>
-            <a:r>
-              <a:rPr lang="en-US" sz="1200" dirty="0">
-                <a:solidFill>
-                  <a:srgbClr val="FFFFFF"/>
-                </a:solidFill>
-                <a:latin typeface="Trebuchet MS" pitchFamily="34" charset="0"/>
-                <a:ea typeface="Trebuchet MS" pitchFamily="34" charset="-122"/>
-                <a:cs typeface="Trebuchet MS" pitchFamily="34" charset="-120"/>
-              </a:rPr>
-              <a:t>Convolutional</a:t>
-            </a:r>
-            <a:endParaRPr lang="en-US" sz="2000" dirty="0"/>
-          </a:p>
-          <a:p>
-            <a:pPr marL="0" indent="0" algn="ctr">
-              <a:buNone/>
-            </a:pPr>
-            <a:r>
-              <a:rPr lang="en-US" sz="1200" dirty="0">
-                <a:solidFill>
-                  <a:srgbClr val="FFFFFF"/>
-                </a:solidFill>
-                <a:latin typeface="Trebuchet MS" pitchFamily="34" charset="0"/>
-                <a:ea typeface="Trebuchet MS" pitchFamily="34" charset="-122"/>
-                <a:cs typeface="Trebuchet MS" pitchFamily="34" charset="-120"/>
-              </a:rPr>
-              <a:t>Neural Network</a:t>
-            </a:r>
-            <a:endParaRPr lang="en-US" sz="2000" dirty="0"/>
+            <a:endParaRPr lang="en-US" sz="1200" dirty="0">
+              <a:latin typeface="Trebuchet MS"/>
+            </a:endParaRPr>
           </a:p>
         </p:txBody>
       </p:sp>
@@ -34855,7 +34521,7 @@
           <a:ln/>
         </p:spPr>
         <p:txBody>
-          <a:bodyPr wrap="square" rtlCol="0" anchor="ctr"/>
+          <a:bodyPr wrap="square" lIns="91440" tIns="45720" rIns="91440" bIns="45720" rtlCol="0" anchor="ctr"/>
           <a:lstStyle/>
           <a:p>
             <a:pPr marL="342900" indent="-342900">
@@ -34863,17 +34529,21 @@
               <a:buChar char="•"/>
             </a:pPr>
             <a:r>
-              <a:rPr lang="en-US" sz="1000" dirty="0">
+              <a:rPr lang="en-US" sz="1000">
                 <a:solidFill>
                   <a:srgbClr val="FFFFFF"/>
                 </a:solidFill>
-                <a:latin typeface="Calibri" pitchFamily="34" charset="0"/>
-                <a:ea typeface="Calibri" pitchFamily="34" charset="-122"/>
-                <a:cs typeface="Calibri" pitchFamily="34" charset="-120"/>
+                <a:latin typeface="Calibri"/>
+                <a:ea typeface="Calibri"/>
+                <a:cs typeface="Calibri"/>
               </a:rPr>
-              <a:t>Spatial inductive bias — same filters at every position</a:t>
-            </a:r>
-            <a:endParaRPr lang="en-US" sz="1000" dirty="0"/>
+              <a:t>Can we use a pre-trained model to our task?</a:t>
+            </a:r>
+            <a:endParaRPr lang="en-US" sz="1000">
+              <a:latin typeface="Calibri"/>
+              <a:ea typeface="Calibri"/>
+              <a:cs typeface="Calibri"/>
+            </a:endParaRPr>
           </a:p>
           <a:p>
             <a:pPr marL="342900" indent="-342900">
@@ -34881,17 +34551,32 @@
               <a:buChar char="•"/>
             </a:pPr>
             <a:r>
+              <a:rPr lang="en-US" sz="1000">
+                <a:solidFill>
+                  <a:srgbClr val="FFFFFF"/>
+                </a:solidFill>
+                <a:latin typeface="Calibri"/>
+                <a:ea typeface="Calibri"/>
+                <a:cs typeface="Calibri"/>
+              </a:rPr>
+              <a:t>How deep will we need to go to replace the weights? Classifier head only, or further (with minimal learning rates)</a:t>
+            </a:r>
+            <a:r>
               <a:rPr lang="en-US" sz="1000" dirty="0">
                 <a:solidFill>
                   <a:srgbClr val="FFFFFF"/>
                 </a:solidFill>
-                <a:latin typeface="Calibri" pitchFamily="34" charset="0"/>
-                <a:ea typeface="Calibri" pitchFamily="34" charset="-122"/>
-                <a:cs typeface="Calibri" pitchFamily="34" charset="-120"/>
+                <a:latin typeface="Calibri"/>
+                <a:ea typeface="Calibri"/>
+                <a:cs typeface="Calibri"/>
               </a:rPr>
-              <a:t>3×3 conv = 27 params vs 12 288 per MLP node</a:t>
-            </a:r>
-            <a:endParaRPr lang="en-US" sz="1000" dirty="0"/>
+              <a:t>?</a:t>
+            </a:r>
+            <a:endParaRPr lang="en-US" sz="1000">
+              <a:latin typeface="Calibri"/>
+              <a:ea typeface="Calibri"/>
+              <a:cs typeface="Calibri"/>
+            </a:endParaRPr>
           </a:p>
           <a:p>
             <a:pPr marL="342900" indent="-342900">
@@ -34899,17 +34584,21 @@
               <a:buChar char="•"/>
             </a:pPr>
             <a:r>
-              <a:rPr lang="en-US" sz="1000" dirty="0">
+              <a:rPr lang="en-US" sz="1000">
                 <a:solidFill>
                   <a:srgbClr val="FFFFFF"/>
                 </a:solidFill>
-                <a:latin typeface="Calibri" pitchFamily="34" charset="0"/>
-                <a:ea typeface="Calibri" pitchFamily="34" charset="-122"/>
-                <a:cs typeface="Calibri" pitchFamily="34" charset="-120"/>
+                <a:latin typeface="Calibri"/>
+                <a:ea typeface="Calibri"/>
+                <a:cs typeface="Calibri"/>
               </a:rPr>
-              <a:t>Augmentation will HELP (not hurt)</a:t>
-            </a:r>
-            <a:endParaRPr lang="en-US" sz="1000" dirty="0"/>
+              <a:t>Will augmentation still hurt the models in this new dataset?</a:t>
+            </a:r>
+            <a:endParaRPr lang="en-US" sz="1000">
+              <a:latin typeface="Calibri"/>
+              <a:ea typeface="Calibri"/>
+              <a:cs typeface="Calibri"/>
+            </a:endParaRPr>
           </a:p>
           <a:p>
             <a:pPr marL="342900" indent="-342900">
@@ -34917,111 +34606,21 @@
               <a:buChar char="•"/>
             </a:pPr>
             <a:r>
-              <a:rPr lang="en-US" sz="1000" dirty="0">
+              <a:rPr lang="en-US" sz="1000">
                 <a:solidFill>
                   <a:srgbClr val="FFFFFF"/>
                 </a:solidFill>
-                <a:latin typeface="Calibri" pitchFamily="34" charset="0"/>
-                <a:ea typeface="Calibri" pitchFamily="34" charset="-122"/>
-                <a:cs typeface="Calibri" pitchFamily="34" charset="-120"/>
+                <a:latin typeface="Calibri"/>
+                <a:ea typeface="Calibri"/>
+                <a:cs typeface="Calibri"/>
               </a:rPr>
-              <a:t>Target F1: 0.55 – 0.70</a:t>
-            </a:r>
-            <a:endParaRPr lang="en-US" sz="1000" dirty="0"/>
-          </a:p>
-        </p:txBody>
-      </p:sp>
-      <p:sp>
-        <p:nvSpPr>
-          <p:cNvPr id="30" name="Text 28"/>
-          <p:cNvSpPr/>
-          <p:nvPr/>
-        </p:nvSpPr>
-        <p:spPr>
-          <a:xfrm>
-            <a:off x="6629400" y="2304288"/>
-            <a:ext cx="2212848" cy="1965960"/>
-          </a:xfrm>
-          <a:prstGeom prst="rect">
-            <a:avLst/>
-          </a:prstGeom>
-          <a:noFill/>
-          <a:ln/>
-        </p:spPr>
-        <p:txBody>
-          <a:bodyPr wrap="square" rtlCol="0" anchor="ctr"/>
-          <a:lstStyle/>
-          <a:p>
-            <a:pPr marL="342900" indent="-342900">
-              <a:buSzPct val="100000"/>
-              <a:buChar char="•"/>
-            </a:pPr>
-            <a:r>
-              <a:rPr lang="en-US" sz="1000" dirty="0">
-                <a:solidFill>
-                  <a:srgbClr val="FFFFFF"/>
-                </a:solidFill>
-                <a:latin typeface="Calibri" pitchFamily="34" charset="0"/>
-                <a:ea typeface="Calibri" pitchFamily="34" charset="-122"/>
-                <a:cs typeface="Calibri" pitchFamily="34" charset="-120"/>
-              </a:rPr>
-              <a:t>Spatial inductive bias — same filters at every position</a:t>
-            </a:r>
-            <a:endParaRPr lang="en-US" sz="1000" dirty="0"/>
-          </a:p>
-          <a:p>
-            <a:pPr marL="342900" indent="-342900">
-              <a:buSzPct val="100000"/>
-              <a:buChar char="•"/>
-            </a:pPr>
-            <a:r>
-              <a:rPr lang="en-US" sz="1000" dirty="0">
-                <a:solidFill>
-                  <a:srgbClr val="FFFFFF"/>
-                </a:solidFill>
-                <a:latin typeface="Calibri" pitchFamily="34" charset="0"/>
-                <a:ea typeface="Calibri" pitchFamily="34" charset="-122"/>
-                <a:cs typeface="Calibri" pitchFamily="34" charset="-120"/>
-              </a:rPr>
-              <a:t>3×3 conv = 27 params vs 12 288 per MLP node</a:t>
-            </a:r>
-            <a:endParaRPr lang="en-US" sz="1000" dirty="0"/>
-          </a:p>
-          <a:p>
-            <a:pPr marL="342900" indent="-342900">
-              <a:buSzPct val="100000"/>
-              <a:buChar char="•"/>
-            </a:pPr>
-            <a:r>
-              <a:rPr lang="en-US" sz="1000" dirty="0">
-                <a:solidFill>
-                  <a:srgbClr val="FFFFFF"/>
-                </a:solidFill>
-                <a:latin typeface="Calibri" pitchFamily="34" charset="0"/>
-                <a:ea typeface="Calibri" pitchFamily="34" charset="-122"/>
-                <a:cs typeface="Calibri" pitchFamily="34" charset="-120"/>
-              </a:rPr>
-              <a:t>Augmentation will HELP (not hurt)</a:t>
-            </a:r>
-            <a:endParaRPr lang="en-US" sz="1000" dirty="0"/>
-          </a:p>
-          <a:p>
-            <a:pPr marL="342900" indent="-342900">
-              <a:buSzPct val="100000"/>
-              <a:buChar char="•"/>
-            </a:pPr>
-            <a:r>
-              <a:rPr lang="en-US" sz="1000" dirty="0">
-                <a:solidFill>
-                  <a:srgbClr val="FFFFFF"/>
-                </a:solidFill>
-                <a:latin typeface="Calibri" pitchFamily="34" charset="0"/>
-                <a:ea typeface="Calibri" pitchFamily="34" charset="-122"/>
-                <a:cs typeface="Calibri" pitchFamily="34" charset="-120"/>
-              </a:rPr>
-              <a:t>Target F1: 0.55 – 0.70</a:t>
-            </a:r>
-            <a:endParaRPr lang="en-US" sz="1000" dirty="0"/>
+              <a:t>Target F1: 0.60 to 0.70</a:t>
+            </a:r>
+            <a:endParaRPr lang="en-US" sz="1000">
+              <a:latin typeface="Calibri"/>
+              <a:ea typeface="Calibri"/>
+              <a:cs typeface="Calibri"/>
+            </a:endParaRPr>
           </a:p>
         </p:txBody>
       </p:sp>
@@ -35084,17 +34683,21 @@
               <a:buNone/>
             </a:pPr>
             <a:r>
-              <a:rPr lang="en-US" sz="1000" dirty="0">
+              <a:rPr lang="en-US" sz="1000">
                 <a:solidFill>
                   <a:srgbClr val="FFFFFF"/>
                 </a:solidFill>
-                <a:latin typeface="Calibri" pitchFamily="34" charset="0"/>
-                <a:ea typeface="Calibri" pitchFamily="34" charset="-122"/>
-                <a:cs typeface="Calibri" pitchFamily="34" charset="-120"/>
+                <a:latin typeface="Calibri"/>
+                <a:ea typeface="Calibri"/>
+                <a:cs typeface="Calibri"/>
               </a:rPr>
-              <a:t>Task 1 complete  ·  Kaggle score: 0.2288  ·  22 experiments  ·  ~44 min on T4</a:t>
-            </a:r>
-            <a:endParaRPr lang="en-US" sz="1000" dirty="0"/>
+              <a:t>Task 2 complete  ·  Kaggle score: 1.0000 · 17 experiments  ·  ~37 min on T4</a:t>
+            </a:r>
+            <a:endParaRPr lang="en-US" sz="1000">
+              <a:latin typeface="Calibri"/>
+              <a:ea typeface="Calibri"/>
+              <a:cs typeface="Calibri"/>
+            </a:endParaRPr>
           </a:p>
         </p:txBody>
       </p:sp>
@@ -42740,7 +42343,7 @@
                 <a:ea typeface="Calibri"/>
                 <a:cs typeface="Calibri"/>
               </a:rPr>
-              <a:t>Decreased effectiveness when compared to MLPs:</a:t>
+              <a:t>Decreased effectiveness when compared to MLPs. Idea:</a:t>
             </a:r>
             <a:endParaRPr lang="en-US" sz="1100" b="1">
               <a:solidFill>
@@ -42760,9 +42363,22 @@
                 <a:solidFill>
                   <a:srgbClr val="1A2B3C"/>
                 </a:solidFill>
-                <a:latin typeface="Calibri" pitchFamily="34" charset="0"/>
+                <a:latin typeface="Calibri"/>
+                <a:ea typeface="Calibri"/>
+                <a:cs typeface="Calibri"/>
               </a:rPr>
-              <a:t>Softens hard one-hot targets (0.85/0.15 blend vs 1.0 hard)</a:t>
+              <a:t>Softens hard one-hot targets </a:t>
+            </a:r>
+            <a:r>
+              <a:rPr lang="en-US" sz="1100">
+                <a:solidFill>
+                  <a:srgbClr val="1A2B3C"/>
+                </a:solidFill>
+                <a:latin typeface="Calibri"/>
+                <a:ea typeface="Calibri"/>
+                <a:cs typeface="Calibri"/>
+              </a:rPr>
+              <a:t>(0.9/0.1 blend vs 1.0 hard)</a:t>
             </a:r>
           </a:p>
           <a:p>
@@ -42788,9 +42404,33 @@
                 <a:solidFill>
                   <a:srgbClr val="1A2B3C"/>
                 </a:solidFill>
-                <a:latin typeface="Calibri" pitchFamily="34" charset="0"/>
+                <a:latin typeface="Calibri"/>
+                <a:ea typeface="Calibri"/>
+                <a:cs typeface="Calibri"/>
               </a:rPr>
-              <a:t>Key on noisy boundaries — Bug/Grass and Rock/Ground share colour palettes</a:t>
+              <a:t>Key on noisy boundaries — Bug/Grass and Rock/Ground share </a:t>
+            </a:r>
+            <a:r>
+              <a:rPr lang="en-US" sz="1100" dirty="0" err="1">
+                <a:solidFill>
+                  <a:srgbClr val="1A2B3C"/>
+                </a:solidFill>
+                <a:latin typeface="Calibri"/>
+                <a:ea typeface="Calibri"/>
+                <a:cs typeface="Calibri"/>
+              </a:rPr>
+              <a:t>colour</a:t>
+            </a:r>
+            <a:r>
+              <a:rPr lang="en-US" sz="1100" dirty="0">
+                <a:solidFill>
+                  <a:srgbClr val="1A2B3C"/>
+                </a:solidFill>
+                <a:latin typeface="Calibri"/>
+                <a:ea typeface="Calibri"/>
+                <a:cs typeface="Calibri"/>
+              </a:rPr>
+              <a:t> palettes</a:t>
             </a:r>
           </a:p>
           <a:p>

--- a/assignment_1/task2/Task2_report.pptx
+++ b/assignment_1/task2/Task2_report.pptx
@@ -1601,7 +1601,7 @@
           <a:p>
             <a:fld id="{4AAD347D-5ACD-4C99-B74B-A9C85AD731AF}" type="datetimeFigureOut">
               <a:rPr lang="en-US" smtClean="0"/>
-              <a:t>3/25/2026</a:t>
+              <a:t>3/28/2026</a:t>
             </a:fld>
             <a:endParaRPr lang="en-US" dirty="0"/>
           </a:p>
@@ -1643,7 +1643,7 @@
           <a:p>
             <a:fld id="{D57F1E4F-1CFF-5643-939E-02111984F565}" type="slidenum">
               <a:rPr lang="en-US" smtClean="0"/>
-              <a:t>‹#›</a:t>
+              <a:t>‹nº›</a:t>
             </a:fld>
             <a:endParaRPr lang="en-US" dirty="0"/>
           </a:p>
@@ -1883,7 +1883,7 @@
           <a:p>
             <a:fld id="{4509A250-FF31-4206-8172-F9D3106AACB1}" type="datetimeFigureOut">
               <a:rPr lang="en-US" smtClean="0"/>
-              <a:t>3/25/2026</a:t>
+              <a:t>3/28/2026</a:t>
             </a:fld>
             <a:endParaRPr lang="en-US" dirty="0"/>
           </a:p>
@@ -1925,7 +1925,7 @@
           <a:p>
             <a:fld id="{D57F1E4F-1CFF-5643-939E-02111984F565}" type="slidenum">
               <a:rPr lang="en-US" smtClean="0"/>
-              <a:t>‹#›</a:t>
+              <a:t>‹nº›</a:t>
             </a:fld>
             <a:endParaRPr lang="en-US" dirty="0"/>
           </a:p>
@@ -2076,7 +2076,7 @@
           <a:p>
             <a:fld id="{4509A250-FF31-4206-8172-F9D3106AACB1}" type="datetimeFigureOut">
               <a:rPr lang="en-US" smtClean="0"/>
-              <a:t>3/25/2026</a:t>
+              <a:t>3/28/2026</a:t>
             </a:fld>
             <a:endParaRPr lang="en-US" dirty="0"/>
           </a:p>
@@ -2118,7 +2118,7 @@
           <a:p>
             <a:fld id="{D57F1E4F-1CFF-5643-939E-02111984F565}" type="slidenum">
               <a:rPr lang="en-US" smtClean="0"/>
-              <a:t>‹#›</a:t>
+              <a:t>‹nº›</a:t>
             </a:fld>
             <a:endParaRPr lang="en-US" dirty="0"/>
           </a:p>
@@ -2338,7 +2338,7 @@
           <a:p>
             <a:fld id="{4AAD347D-5ACD-4C99-B74B-A9C85AD731AF}" type="datetimeFigureOut">
               <a:rPr lang="en-US" smtClean="0"/>
-              <a:t>3/25/2026</a:t>
+              <a:t>3/28/2026</a:t>
             </a:fld>
             <a:endParaRPr lang="en-US" dirty="0"/>
           </a:p>
@@ -2380,7 +2380,7 @@
           <a:p>
             <a:fld id="{D57F1E4F-1CFF-5643-939E-02111984F565}" type="slidenum">
               <a:rPr lang="en-US" smtClean="0"/>
-              <a:t>‹#›</a:t>
+              <a:t>‹nº›</a:t>
             </a:fld>
             <a:endParaRPr lang="en-US" dirty="0"/>
           </a:p>
@@ -2765,7 +2765,7 @@
           <a:p>
             <a:fld id="{4AAD347D-5ACD-4C99-B74B-A9C85AD731AF}" type="datetimeFigureOut">
               <a:rPr lang="en-US" smtClean="0"/>
-              <a:t>3/25/2026</a:t>
+              <a:t>3/28/2026</a:t>
             </a:fld>
             <a:endParaRPr lang="en-US" dirty="0"/>
           </a:p>
@@ -2807,7 +2807,7 @@
           <a:p>
             <a:fld id="{D57F1E4F-1CFF-5643-939E-02111984F565}" type="slidenum">
               <a:rPr lang="en-US" smtClean="0"/>
-              <a:t>‹#›</a:t>
+              <a:t>‹nº›</a:t>
             </a:fld>
             <a:endParaRPr lang="en-US" dirty="0"/>
           </a:p>
@@ -3312,7 +3312,7 @@
           <a:p>
             <a:fld id="{4509A250-FF31-4206-8172-F9D3106AACB1}" type="datetimeFigureOut">
               <a:rPr lang="en-US" smtClean="0"/>
-              <a:t>3/25/2026</a:t>
+              <a:t>3/28/2026</a:t>
             </a:fld>
             <a:endParaRPr lang="en-US" dirty="0"/>
           </a:p>
@@ -3354,7 +3354,7 @@
           <a:p>
             <a:fld id="{D57F1E4F-1CFF-5643-939E-02111984F565}" type="slidenum">
               <a:rPr lang="en-US" smtClean="0"/>
-              <a:t>‹#›</a:t>
+              <a:t>‹nº›</a:t>
             </a:fld>
             <a:endParaRPr lang="en-US" dirty="0"/>
           </a:p>
@@ -4144,7 +4144,7 @@
           <a:p>
             <a:fld id="{4509A250-FF31-4206-8172-F9D3106AACB1}" type="datetimeFigureOut">
               <a:rPr lang="en-US" smtClean="0"/>
-              <a:t>3/25/2026</a:t>
+              <a:t>3/28/2026</a:t>
             </a:fld>
             <a:endParaRPr lang="en-US" dirty="0"/>
           </a:p>
@@ -4186,7 +4186,7 @@
           <a:p>
             <a:fld id="{D57F1E4F-1CFF-5643-939E-02111984F565}" type="slidenum">
               <a:rPr lang="en-US" smtClean="0"/>
-              <a:t>‹#›</a:t>
+              <a:t>‹nº›</a:t>
             </a:fld>
             <a:endParaRPr lang="en-US" dirty="0"/>
           </a:p>
@@ -4315,7 +4315,7 @@
           <a:p>
             <a:fld id="{4509A250-FF31-4206-8172-F9D3106AACB1}" type="datetimeFigureOut">
               <a:rPr lang="en-US" smtClean="0"/>
-              <a:t>3/25/2026</a:t>
+              <a:t>3/28/2026</a:t>
             </a:fld>
             <a:endParaRPr lang="en-US" dirty="0"/>
           </a:p>
@@ -4357,7 +4357,7 @@
           <a:p>
             <a:fld id="{D57F1E4F-1CFF-5643-939E-02111984F565}" type="slidenum">
               <a:rPr lang="en-US" smtClean="0"/>
-              <a:t>‹#›</a:t>
+              <a:t>‹nº›</a:t>
             </a:fld>
             <a:endParaRPr lang="en-US" dirty="0"/>
           </a:p>
@@ -4496,7 +4496,7 @@
           <a:p>
             <a:fld id="{4509A250-FF31-4206-8172-F9D3106AACB1}" type="datetimeFigureOut">
               <a:rPr lang="en-US" smtClean="0"/>
-              <a:t>3/25/2026</a:t>
+              <a:t>3/28/2026</a:t>
             </a:fld>
             <a:endParaRPr lang="en-US" dirty="0"/>
           </a:p>
@@ -4538,7 +4538,7 @@
           <a:p>
             <a:fld id="{D57F1E4F-1CFF-5643-939E-02111984F565}" type="slidenum">
               <a:rPr lang="en-US" smtClean="0"/>
-              <a:t>‹#›</a:t>
+              <a:t>‹nº›</a:t>
             </a:fld>
             <a:endParaRPr lang="en-US" dirty="0"/>
           </a:p>
@@ -4764,7 +4764,7 @@
           <a:p>
             <a:fld id="{4AAD347D-5ACD-4C99-B74B-A9C85AD731AF}" type="datetimeFigureOut">
               <a:rPr lang="en-US" smtClean="0"/>
-              <a:t>3/25/2026</a:t>
+              <a:t>3/28/2026</a:t>
             </a:fld>
             <a:endParaRPr lang="en-US" dirty="0"/>
           </a:p>
@@ -4806,7 +4806,7 @@
           <a:p>
             <a:fld id="{D57F1E4F-1CFF-5643-939E-02111984F565}" type="slidenum">
               <a:rPr lang="en-US" smtClean="0"/>
-              <a:t>‹#›</a:t>
+              <a:t>‹nº›</a:t>
             </a:fld>
             <a:endParaRPr lang="en-US" dirty="0"/>
           </a:p>
@@ -4935,7 +4935,7 @@
           <a:p>
             <a:fld id="{4509A250-FF31-4206-8172-F9D3106AACB1}" type="datetimeFigureOut">
               <a:rPr lang="en-US" smtClean="0"/>
-              <a:t>3/25/2026</a:t>
+              <a:t>3/28/2026</a:t>
             </a:fld>
             <a:endParaRPr lang="en-US" dirty="0"/>
           </a:p>
@@ -4977,7 +4977,7 @@
           <a:p>
             <a:fld id="{D57F1E4F-1CFF-5643-939E-02111984F565}" type="slidenum">
               <a:rPr lang="en-US" smtClean="0"/>
-              <a:t>‹#›</a:t>
+              <a:t>‹nº›</a:t>
             </a:fld>
             <a:endParaRPr lang="en-US" dirty="0"/>
           </a:p>
@@ -5141,7 +5141,7 @@
           <a:p>
             <a:fld id="{4AAD347D-5ACD-4C99-B74B-A9C85AD731AF}" type="datetimeFigureOut">
               <a:rPr lang="en-US" smtClean="0"/>
-              <a:t>3/25/2026</a:t>
+              <a:t>3/28/2026</a:t>
             </a:fld>
             <a:endParaRPr lang="en-US" dirty="0"/>
           </a:p>
@@ -5183,7 +5183,7 @@
           <a:p>
             <a:fld id="{D57F1E4F-1CFF-5643-939E-02111984F565}" type="slidenum">
               <a:rPr lang="en-US" smtClean="0"/>
-              <a:t>‹#›</a:t>
+              <a:t>‹nº›</a:t>
             </a:fld>
             <a:endParaRPr lang="en-US" dirty="0"/>
           </a:p>
@@ -5422,7 +5422,7 @@
           <a:p>
             <a:fld id="{9796027F-7875-4030-9381-8BD8C4F21935}" type="datetimeFigureOut">
               <a:rPr lang="en-US" smtClean="0"/>
-              <a:t>3/25/2026</a:t>
+              <a:t>3/28/2026</a:t>
             </a:fld>
             <a:endParaRPr lang="en-US" dirty="0"/>
           </a:p>
@@ -5464,7 +5464,7 @@
           <a:p>
             <a:fld id="{D57F1E4F-1CFF-5643-939E-02111984F565}" type="slidenum">
               <a:rPr lang="en-US" smtClean="0"/>
-              <a:t>‹#›</a:t>
+              <a:t>‹nº›</a:t>
             </a:fld>
             <a:endParaRPr lang="en-US" dirty="0"/>
           </a:p>
@@ -5690,7 +5690,7 @@
           <a:p>
             <a:fld id="{4AAD347D-5ACD-4C99-B74B-A9C85AD731AF}" type="datetimeFigureOut">
               <a:rPr lang="en-US" smtClean="0"/>
-              <a:t>3/25/2026</a:t>
+              <a:t>3/28/2026</a:t>
             </a:fld>
             <a:endParaRPr lang="en-US" dirty="0"/>
           </a:p>
@@ -5732,7 +5732,7 @@
           <a:p>
             <a:fld id="{D57F1E4F-1CFF-5643-939E-02111984F565}" type="slidenum">
               <a:rPr lang="en-US" smtClean="0"/>
-              <a:t>‹#›</a:t>
+              <a:t>‹nº›</a:t>
             </a:fld>
             <a:endParaRPr lang="en-US" dirty="0"/>
           </a:p>
@@ -6106,7 +6106,7 @@
           <a:p>
             <a:fld id="{4AAD347D-5ACD-4C99-B74B-A9C85AD731AF}" type="datetimeFigureOut">
               <a:rPr lang="en-US" smtClean="0"/>
-              <a:t>3/25/2026</a:t>
+              <a:t>3/28/2026</a:t>
             </a:fld>
             <a:endParaRPr lang="en-US" dirty="0"/>
           </a:p>
@@ -6148,7 +6148,7 @@
           <a:p>
             <a:fld id="{D57F1E4F-1CFF-5643-939E-02111984F565}" type="slidenum">
               <a:rPr lang="en-US" smtClean="0"/>
-              <a:t>‹#›</a:t>
+              <a:t>‹nº›</a:t>
             </a:fld>
             <a:endParaRPr lang="en-US" dirty="0"/>
           </a:p>
@@ -6255,7 +6255,7 @@
           <a:p>
             <a:fld id="{4509A250-FF31-4206-8172-F9D3106AACB1}" type="datetimeFigureOut">
               <a:rPr lang="en-US" smtClean="0"/>
-              <a:t>3/25/2026</a:t>
+              <a:t>3/28/2026</a:t>
             </a:fld>
             <a:endParaRPr lang="en-US" dirty="0"/>
           </a:p>
@@ -6297,7 +6297,7 @@
           <a:p>
             <a:fld id="{D57F1E4F-1CFF-5643-939E-02111984F565}" type="slidenum">
               <a:rPr lang="en-US" smtClean="0"/>
-              <a:t>‹#›</a:t>
+              <a:t>‹nº›</a:t>
             </a:fld>
             <a:endParaRPr lang="en-US" dirty="0"/>
           </a:p>
@@ -6381,7 +6381,7 @@
           <a:p>
             <a:fld id="{4509A250-FF31-4206-8172-F9D3106AACB1}" type="datetimeFigureOut">
               <a:rPr lang="en-US" smtClean="0"/>
-              <a:t>3/25/2026</a:t>
+              <a:t>3/28/2026</a:t>
             </a:fld>
             <a:endParaRPr lang="en-US" dirty="0"/>
           </a:p>
@@ -6423,7 +6423,7 @@
           <a:p>
             <a:fld id="{D57F1E4F-1CFF-5643-939E-02111984F565}" type="slidenum">
               <a:rPr lang="en-US" smtClean="0"/>
-              <a:t>‹#›</a:t>
+              <a:t>‹nº›</a:t>
             </a:fld>
             <a:endParaRPr lang="en-US" dirty="0"/>
           </a:p>
@@ -6661,7 +6661,7 @@
           <a:p>
             <a:fld id="{4AAD347D-5ACD-4C99-B74B-A9C85AD731AF}" type="datetimeFigureOut">
               <a:rPr lang="en-US" smtClean="0"/>
-              <a:t>3/25/2026</a:t>
+              <a:t>3/28/2026</a:t>
             </a:fld>
             <a:endParaRPr lang="en-US" dirty="0"/>
           </a:p>
@@ -6703,7 +6703,7 @@
           <a:p>
             <a:fld id="{D57F1E4F-1CFF-5643-939E-02111984F565}" type="slidenum">
               <a:rPr lang="en-US" smtClean="0"/>
-              <a:t>‹#›</a:t>
+              <a:t>‹nº›</a:t>
             </a:fld>
             <a:endParaRPr lang="en-US" dirty="0"/>
           </a:p>
@@ -6974,7 +6974,7 @@
           <a:p>
             <a:fld id="{4509A250-FF31-4206-8172-F9D3106AACB1}" type="datetimeFigureOut">
               <a:rPr lang="en-US" smtClean="0"/>
-              <a:t>3/25/2026</a:t>
+              <a:t>3/28/2026</a:t>
             </a:fld>
             <a:endParaRPr lang="en-US" dirty="0"/>
           </a:p>
@@ -7016,7 +7016,7 @@
           <a:p>
             <a:fld id="{D57F1E4F-1CFF-5643-939E-02111984F565}" type="slidenum">
               <a:rPr lang="en-US" smtClean="0"/>
-              <a:t>‹#›</a:t>
+              <a:t>‹nº›</a:t>
             </a:fld>
             <a:endParaRPr lang="en-US" dirty="0"/>
           </a:p>
@@ -7287,7 +7287,7 @@
           <a:p>
             <a:fld id="{4509A250-FF31-4206-8172-F9D3106AACB1}" type="datetimeFigureOut">
               <a:rPr lang="en-US" smtClean="0"/>
-              <a:t>3/25/2026</a:t>
+              <a:t>3/28/2026</a:t>
             </a:fld>
             <a:endParaRPr lang="en-US" dirty="0"/>
           </a:p>
@@ -7329,7 +7329,7 @@
           <a:p>
             <a:fld id="{D57F1E4F-1CFF-5643-939E-02111984F565}" type="slidenum">
               <a:rPr lang="en-US" smtClean="0"/>
-              <a:t>‹#›</a:t>
+              <a:t>‹nº›</a:t>
             </a:fld>
             <a:endParaRPr lang="en-US" dirty="0"/>
           </a:p>
@@ -7510,7 +7510,7 @@
           <a:p>
             <a:fld id="{4509A250-FF31-4206-8172-F9D3106AACB1}" type="datetimeFigureOut">
               <a:rPr lang="en-US" smtClean="0"/>
-              <a:t>3/25/2026</a:t>
+              <a:t>3/28/2026</a:t>
             </a:fld>
             <a:endParaRPr lang="en-US" dirty="0"/>
           </a:p>
@@ -7552,7 +7552,7 @@
           <a:p>
             <a:fld id="{D57F1E4F-1CFF-5643-939E-02111984F565}" type="slidenum">
               <a:rPr lang="en-US" smtClean="0"/>
-              <a:t>‹#›</a:t>
+              <a:t>‹nº›</a:t>
             </a:fld>
             <a:endParaRPr lang="en-US" dirty="0"/>
           </a:p>
@@ -7768,7 +7768,7 @@
           <a:p>
             <a:fld id="{9796027F-7875-4030-9381-8BD8C4F21935}" type="datetimeFigureOut">
               <a:rPr lang="en-US" smtClean="0"/>
-              <a:t>3/25/2026</a:t>
+              <a:t>3/28/2026</a:t>
             </a:fld>
             <a:endParaRPr lang="en-US" dirty="0"/>
           </a:p>
@@ -7810,7 +7810,7 @@
           <a:p>
             <a:fld id="{D57F1E4F-1CFF-5643-939E-02111984F565}" type="slidenum">
               <a:rPr lang="en-US" smtClean="0"/>
-              <a:t>‹#›</a:t>
+              <a:t>‹nº›</a:t>
             </a:fld>
             <a:endParaRPr lang="en-US" dirty="0"/>
           </a:p>
@@ -8060,7 +8060,7 @@
           <a:p>
             <a:fld id="{4AAD347D-5ACD-4C99-B74B-A9C85AD731AF}" type="datetimeFigureOut">
               <a:rPr lang="en-US" smtClean="0"/>
-              <a:t>3/25/2026</a:t>
+              <a:t>3/28/2026</a:t>
             </a:fld>
             <a:endParaRPr lang="en-US" dirty="0"/>
           </a:p>
@@ -8102,7 +8102,7 @@
           <a:p>
             <a:fld id="{D57F1E4F-1CFF-5643-939E-02111984F565}" type="slidenum">
               <a:rPr lang="en-US" smtClean="0"/>
-              <a:t>‹#›</a:t>
+              <a:t>‹nº›</a:t>
             </a:fld>
             <a:endParaRPr lang="en-US" dirty="0"/>
           </a:p>
@@ -8515,7 +8515,7 @@
           <a:p>
             <a:fld id="{4AAD347D-5ACD-4C99-B74B-A9C85AD731AF}" type="datetimeFigureOut">
               <a:rPr lang="en-US" smtClean="0"/>
-              <a:t>3/25/2026</a:t>
+              <a:t>3/28/2026</a:t>
             </a:fld>
             <a:endParaRPr lang="en-US" dirty="0"/>
           </a:p>
@@ -8557,7 +8557,7 @@
           <a:p>
             <a:fld id="{D57F1E4F-1CFF-5643-939E-02111984F565}" type="slidenum">
               <a:rPr lang="en-US" smtClean="0"/>
-              <a:t>‹#›</a:t>
+              <a:t>‹nº›</a:t>
             </a:fld>
             <a:endParaRPr lang="en-US" dirty="0"/>
           </a:p>
@@ -9092,7 +9092,7 @@
           <a:p>
             <a:fld id="{4509A250-FF31-4206-8172-F9D3106AACB1}" type="datetimeFigureOut">
               <a:rPr lang="en-US" smtClean="0"/>
-              <a:t>3/25/2026</a:t>
+              <a:t>3/28/2026</a:t>
             </a:fld>
             <a:endParaRPr lang="en-US" dirty="0"/>
           </a:p>
@@ -9134,7 +9134,7 @@
           <a:p>
             <a:fld id="{D57F1E4F-1CFF-5643-939E-02111984F565}" type="slidenum">
               <a:rPr lang="en-US" smtClean="0"/>
-              <a:t>‹#›</a:t>
+              <a:t>‹nº›</a:t>
             </a:fld>
             <a:endParaRPr lang="en-US" dirty="0"/>
           </a:p>
@@ -9945,7 +9945,7 @@
           <a:p>
             <a:fld id="{4509A250-FF31-4206-8172-F9D3106AACB1}" type="datetimeFigureOut">
               <a:rPr lang="en-US" smtClean="0"/>
-              <a:t>3/25/2026</a:t>
+              <a:t>3/28/2026</a:t>
             </a:fld>
             <a:endParaRPr lang="en-US" dirty="0"/>
           </a:p>
@@ -9987,7 +9987,7 @@
           <a:p>
             <a:fld id="{D57F1E4F-1CFF-5643-939E-02111984F565}" type="slidenum">
               <a:rPr lang="en-US" smtClean="0"/>
-              <a:t>‹#›</a:t>
+              <a:t>‹nº›</a:t>
             </a:fld>
             <a:endParaRPr lang="en-US" dirty="0"/>
           </a:p>
@@ -10151,7 +10151,7 @@
           <a:p>
             <a:fld id="{4AAD347D-5ACD-4C99-B74B-A9C85AD731AF}" type="datetimeFigureOut">
               <a:rPr lang="en-US" smtClean="0"/>
-              <a:t>3/25/2026</a:t>
+              <a:t>3/28/2026</a:t>
             </a:fld>
             <a:endParaRPr lang="en-US" dirty="0"/>
           </a:p>
@@ -10193,7 +10193,7 @@
           <a:p>
             <a:fld id="{D57F1E4F-1CFF-5643-939E-02111984F565}" type="slidenum">
               <a:rPr lang="en-US" smtClean="0"/>
-              <a:t>‹#›</a:t>
+              <a:t>‹nº›</a:t>
             </a:fld>
             <a:endParaRPr lang="en-US" dirty="0"/>
           </a:p>
@@ -10366,7 +10366,7 @@
           <a:p>
             <a:fld id="{4AAD347D-5ACD-4C99-B74B-A9C85AD731AF}" type="datetimeFigureOut">
               <a:rPr lang="en-US" smtClean="0"/>
-              <a:t>3/25/2026</a:t>
+              <a:t>3/28/2026</a:t>
             </a:fld>
             <a:endParaRPr lang="en-US" dirty="0"/>
           </a:p>
@@ -10408,7 +10408,7 @@
           <a:p>
             <a:fld id="{D57F1E4F-1CFF-5643-939E-02111984F565}" type="slidenum">
               <a:rPr lang="en-US" smtClean="0"/>
-              <a:t>‹#›</a:t>
+              <a:t>‹nº›</a:t>
             </a:fld>
             <a:endParaRPr lang="en-US" dirty="0"/>
           </a:p>
@@ -10634,7 +10634,7 @@
           <a:p>
             <a:fld id="{9796027F-7875-4030-9381-8BD8C4F21935}" type="datetimeFigureOut">
               <a:rPr lang="en-US" smtClean="0"/>
-              <a:t>3/25/2026</a:t>
+              <a:t>3/28/2026</a:t>
             </a:fld>
             <a:endParaRPr lang="en-US" dirty="0"/>
           </a:p>
@@ -10676,7 +10676,7 @@
           <a:p>
             <a:fld id="{D57F1E4F-1CFF-5643-939E-02111984F565}" type="slidenum">
               <a:rPr lang="en-US" smtClean="0"/>
-              <a:t>‹#›</a:t>
+              <a:t>‹nº›</a:t>
             </a:fld>
             <a:endParaRPr lang="en-US" dirty="0"/>
           </a:p>
@@ -11028,7 +11028,7 @@
           <a:p>
             <a:fld id="{9796027F-7875-4030-9381-8BD8C4F21935}" type="datetimeFigureOut">
               <a:rPr lang="en-US" smtClean="0"/>
-              <a:t>3/25/2026</a:t>
+              <a:t>3/28/2026</a:t>
             </a:fld>
             <a:endParaRPr lang="en-US" dirty="0"/>
           </a:p>
@@ -11070,7 +11070,7 @@
           <a:p>
             <a:fld id="{D57F1E4F-1CFF-5643-939E-02111984F565}" type="slidenum">
               <a:rPr lang="en-US" smtClean="0"/>
-              <a:t>‹#›</a:t>
+              <a:t>‹nº›</a:t>
             </a:fld>
             <a:endParaRPr lang="en-US" dirty="0"/>
           </a:p>
@@ -11147,7 +11147,7 @@
           <a:p>
             <a:fld id="{4509A250-FF31-4206-8172-F9D3106AACB1}" type="datetimeFigureOut">
               <a:rPr lang="en-US" smtClean="0"/>
-              <a:t>3/25/2026</a:t>
+              <a:t>3/28/2026</a:t>
             </a:fld>
             <a:endParaRPr lang="en-US" dirty="0"/>
           </a:p>
@@ -11189,7 +11189,7 @@
           <a:p>
             <a:fld id="{D57F1E4F-1CFF-5643-939E-02111984F565}" type="slidenum">
               <a:rPr lang="en-US" smtClean="0"/>
-              <a:t>‹#›</a:t>
+              <a:t>‹nº›</a:t>
             </a:fld>
             <a:endParaRPr lang="en-US" dirty="0"/>
           </a:p>
@@ -11243,7 +11243,7 @@
           <a:p>
             <a:fld id="{4509A250-FF31-4206-8172-F9D3106AACB1}" type="datetimeFigureOut">
               <a:rPr lang="en-US" smtClean="0"/>
-              <a:t>3/25/2026</a:t>
+              <a:t>3/28/2026</a:t>
             </a:fld>
             <a:endParaRPr lang="en-US" dirty="0"/>
           </a:p>
@@ -11285,7 +11285,7 @@
           <a:p>
             <a:fld id="{D57F1E4F-1CFF-5643-939E-02111984F565}" type="slidenum">
               <a:rPr lang="en-US" smtClean="0"/>
-              <a:t>‹#›</a:t>
+              <a:t>‹nº›</a:t>
             </a:fld>
             <a:endParaRPr lang="en-US" dirty="0"/>
           </a:p>
@@ -11517,7 +11517,7 @@
           <a:p>
             <a:fld id="{4509A250-FF31-4206-8172-F9D3106AACB1}" type="datetimeFigureOut">
               <a:rPr lang="en-US" smtClean="0"/>
-              <a:t>3/25/2026</a:t>
+              <a:t>3/28/2026</a:t>
             </a:fld>
             <a:endParaRPr lang="en-US" dirty="0"/>
           </a:p>
@@ -11559,7 +11559,7 @@
           <a:p>
             <a:fld id="{D57F1E4F-1CFF-5643-939E-02111984F565}" type="slidenum">
               <a:rPr lang="en-US" smtClean="0"/>
-              <a:t>‹#›</a:t>
+              <a:t>‹nº›</a:t>
             </a:fld>
             <a:endParaRPr lang="en-US" dirty="0"/>
           </a:p>
@@ -11799,7 +11799,7 @@
           <a:p>
             <a:fld id="{4509A250-FF31-4206-8172-F9D3106AACB1}" type="datetimeFigureOut">
               <a:rPr lang="en-US" smtClean="0"/>
-              <a:t>3/25/2026</a:t>
+              <a:t>3/28/2026</a:t>
             </a:fld>
             <a:endParaRPr lang="en-US" dirty="0"/>
           </a:p>
@@ -11841,7 +11841,7 @@
           <a:p>
             <a:fld id="{D57F1E4F-1CFF-5643-939E-02111984F565}" type="slidenum">
               <a:rPr lang="en-US" smtClean="0"/>
-              <a:t>‹#›</a:t>
+              <a:t>‹nº›</a:t>
             </a:fld>
             <a:endParaRPr lang="en-US" dirty="0"/>
           </a:p>
@@ -12040,7 +12040,7 @@
           <a:p>
             <a:fld id="{4AAD347D-5ACD-4C99-B74B-A9C85AD731AF}" type="datetimeFigureOut">
               <a:rPr lang="en-US" smtClean="0"/>
-              <a:t>3/25/2026</a:t>
+              <a:t>3/28/2026</a:t>
             </a:fld>
             <a:endParaRPr lang="en-US" dirty="0"/>
           </a:p>
@@ -12154,7 +12154,7 @@
           <a:p>
             <a:fld id="{D57F1E4F-1CFF-5643-939E-02111984F565}" type="slidenum">
               <a:rPr lang="en-US" smtClean="0"/>
-              <a:t>‹#›</a:t>
+              <a:t>‹nº›</a:t>
             </a:fld>
             <a:endParaRPr lang="en-US" dirty="0"/>
           </a:p>
@@ -12779,7 +12779,7 @@
           <a:p>
             <a:fld id="{4AAD347D-5ACD-4C99-B74B-A9C85AD731AF}" type="datetimeFigureOut">
               <a:rPr lang="en-US" smtClean="0"/>
-              <a:t>3/25/2026</a:t>
+              <a:t>3/28/2026</a:t>
             </a:fld>
             <a:endParaRPr lang="en-US" dirty="0"/>
           </a:p>
@@ -12853,7 +12853,7 @@
           <a:p>
             <a:fld id="{D57F1E4F-1CFF-5643-939E-02111984F565}" type="slidenum">
               <a:rPr lang="en-US" smtClean="0"/>
-              <a:t>‹#›</a:t>
+              <a:t>‹nº›</a:t>
             </a:fld>
             <a:endParaRPr lang="en-US" dirty="0"/>
           </a:p>
@@ -13982,29 +13982,7 @@
                 <a:ea typeface="Calibri"/>
                 <a:cs typeface="Calibri"/>
               </a:rPr>
-              <a:t>Let's take a look at some samples from the dataset which feature the same </a:t>
-            </a:r>
-            <a:r>
-              <a:rPr lang="en-US" sz="1200" dirty="0" err="1">
-                <a:solidFill>
-                  <a:schemeClr val="bg1"/>
-                </a:solidFill>
-                <a:latin typeface="Calibri"/>
-                <a:ea typeface="Calibri"/>
-                <a:cs typeface="Calibri"/>
-              </a:rPr>
-              <a:t>pokemon</a:t>
-            </a:r>
-            <a:r>
-              <a:rPr lang="en-US" sz="1200" dirty="0">
-                <a:solidFill>
-                  <a:schemeClr val="bg1"/>
-                </a:solidFill>
-                <a:latin typeface="Calibri"/>
-                <a:ea typeface="Calibri"/>
-                <a:cs typeface="Calibri"/>
-              </a:rPr>
-              <a:t> </a:t>
+              <a:t>Let's take a look at some samples from the dataset which feature the same Pokémon </a:t>
             </a:r>
             <a:r>
               <a:rPr lang="en-US" sz="1200" b="1" dirty="0">
@@ -14020,7 +13998,7 @@
               </a:rPr>
               <a:t> </a:t>
             </a:r>
-            <a:endParaRPr lang="en-US" sz="1200">
+            <a:endParaRPr lang="en-US" sz="1200" dirty="0">
               <a:solidFill>
                 <a:schemeClr val="accent2">
                   <a:lumMod val="40000"/>
@@ -14312,51 +14290,7 @@
                 <a:ea typeface="Calibri"/>
                 <a:cs typeface="Calibri"/>
               </a:rPr>
-              <a:t>From this small set of examples we can see that the </a:t>
-            </a:r>
-            <a:r>
-              <a:rPr lang="en-US" sz="1200" dirty="0" err="1">
-                <a:solidFill>
-                  <a:srgbClr val="0D1B2A"/>
-                </a:solidFill>
-                <a:latin typeface="Calibri"/>
-                <a:ea typeface="Calibri"/>
-                <a:cs typeface="Calibri"/>
-              </a:rPr>
-              <a:t>pokemon</a:t>
-            </a:r>
-            <a:r>
-              <a:rPr lang="en-US" sz="1200" dirty="0">
-                <a:solidFill>
-                  <a:srgbClr val="0D1B2A"/>
-                </a:solidFill>
-                <a:latin typeface="Calibri"/>
-                <a:ea typeface="Calibri"/>
-                <a:cs typeface="Calibri"/>
-              </a:rPr>
-              <a:t> always remains in the same upright position, facing the same direction, with the same </a:t>
-            </a:r>
-            <a:r>
-              <a:rPr lang="en-US" sz="1200" dirty="0" err="1">
-                <a:solidFill>
-                  <a:srgbClr val="0D1B2A"/>
-                </a:solidFill>
-                <a:latin typeface="Calibri"/>
-                <a:ea typeface="Calibri"/>
-                <a:cs typeface="Calibri"/>
-              </a:rPr>
-              <a:t>colours</a:t>
-            </a:r>
-            <a:r>
-              <a:rPr lang="en-US" sz="1200" dirty="0">
-                <a:solidFill>
-                  <a:srgbClr val="0D1B2A"/>
-                </a:solidFill>
-                <a:latin typeface="Calibri"/>
-                <a:ea typeface="Calibri"/>
-                <a:cs typeface="Calibri"/>
-              </a:rPr>
-              <a:t>, … and the only thing that changes are: its position in the picture, and the background. Since CNNs are invariant to the object's position in the picture, in reality, the only thing that really changes is the background. So, if we replace a training example that has all these characteristics with a flipped image of </a:t>
+              <a:t>From this small set of examples, we can see that the Pokémon always remains in the same upright position, facing the same direction, with the same colors, … and the only thing that changes are: its position in the picture, and the background. Since CNNs are invariant to the object's position in the picture, in reality, the only thing that really changes is the background. So, if we replace a training example that has all these characteristics with a flipped image of </a:t>
             </a:r>
             <a:r>
               <a:rPr lang="en-US" sz="1200" dirty="0" err="1">
@@ -14400,10 +14334,13 @@
                 <a:ea typeface="Calibri"/>
                 <a:cs typeface="Calibri"/>
               </a:rPr>
-              <a:t>/test time by adding unnecessary noise, which hurts our model's performance (specially in the case of </a:t>
-            </a:r>
-            <a:r>
-              <a:rPr lang="en-US" sz="1200" dirty="0" err="1">
+              <a:t>/test time by adding unnecessary noise, which hurts our model's performance (specially in the case of color changes and grayscale since, as explored in task 1, the color is one of the dominant factors in identifying a Pokémon's type).</a:t>
+            </a:r>
+          </a:p>
+          <a:p>
+            <a:pPr algn="ctr"/>
+            <a:r>
+              <a:rPr lang="en-US" sz="1200" dirty="0">
                 <a:solidFill>
                   <a:srgbClr val="0D1B2A"/>
                 </a:solidFill>
@@ -14411,98 +14348,7 @@
                 <a:ea typeface="Calibri"/>
                 <a:cs typeface="Calibri"/>
               </a:rPr>
-              <a:t>colour</a:t>
-            </a:r>
-            <a:r>
-              <a:rPr lang="en-US" sz="1200" dirty="0">
-                <a:solidFill>
-                  <a:srgbClr val="0D1B2A"/>
-                </a:solidFill>
-                <a:latin typeface="Calibri"/>
-                <a:ea typeface="Calibri"/>
-                <a:cs typeface="Calibri"/>
-              </a:rPr>
-              <a:t> changes and grayscale since, as explored in task 1, the </a:t>
-            </a:r>
-            <a:r>
-              <a:rPr lang="en-US" sz="1200" dirty="0" err="1">
-                <a:solidFill>
-                  <a:srgbClr val="0D1B2A"/>
-                </a:solidFill>
-                <a:latin typeface="Calibri"/>
-                <a:ea typeface="Calibri"/>
-                <a:cs typeface="Calibri"/>
-              </a:rPr>
-              <a:t>colour</a:t>
-            </a:r>
-            <a:r>
-              <a:rPr lang="en-US" sz="1200" dirty="0">
-                <a:solidFill>
-                  <a:srgbClr val="0D1B2A"/>
-                </a:solidFill>
-                <a:latin typeface="Calibri"/>
-                <a:ea typeface="Calibri"/>
-                <a:cs typeface="Calibri"/>
-              </a:rPr>
-              <a:t> is one of the dominant factors in identifying a </a:t>
-            </a:r>
-            <a:r>
-              <a:rPr lang="en-US" sz="1200" dirty="0" err="1">
-                <a:solidFill>
-                  <a:srgbClr val="0D1B2A"/>
-                </a:solidFill>
-                <a:latin typeface="Calibri"/>
-                <a:ea typeface="Calibri"/>
-                <a:cs typeface="Calibri"/>
-              </a:rPr>
-              <a:t>pokemon's</a:t>
-            </a:r>
-            <a:r>
-              <a:rPr lang="en-US" sz="1200" dirty="0">
-                <a:solidFill>
-                  <a:srgbClr val="0D1B2A"/>
-                </a:solidFill>
-                <a:latin typeface="Calibri"/>
-                <a:ea typeface="Calibri"/>
-                <a:cs typeface="Calibri"/>
-              </a:rPr>
-              <a:t> type).</a:t>
-            </a:r>
-          </a:p>
-          <a:p>
-            <a:pPr algn="ctr"/>
-            <a:r>
-              <a:rPr lang="en-US" sz="1200" dirty="0">
-                <a:solidFill>
-                  <a:srgbClr val="0D1B2A"/>
-                </a:solidFill>
-                <a:latin typeface="Calibri"/>
-                <a:ea typeface="Calibri"/>
-                <a:cs typeface="Calibri"/>
-              </a:rPr>
-              <a:t>Even though we're not trying to identify the </a:t>
-            </a:r>
-            <a:r>
-              <a:rPr lang="en-US" sz="1200" dirty="0" err="1">
-                <a:solidFill>
-                  <a:srgbClr val="0D1B2A"/>
-                </a:solidFill>
-                <a:latin typeface="Calibri"/>
-                <a:ea typeface="Calibri"/>
-                <a:cs typeface="Calibri"/>
-              </a:rPr>
-              <a:t>pokemon</a:t>
-            </a:r>
-            <a:r>
-              <a:rPr lang="en-US" sz="1200" dirty="0">
-                <a:solidFill>
-                  <a:srgbClr val="0D1B2A"/>
-                </a:solidFill>
-                <a:latin typeface="Calibri"/>
-                <a:ea typeface="Calibri"/>
-                <a:cs typeface="Calibri"/>
-              </a:rPr>
-              <a:t> itself, but its type, this reasoning can be applied.</a:t>
+              <a:t>Even though we're not trying to identify the Pokémon itself, but its type, this reasoning can be applied.</a:t>
             </a:r>
           </a:p>
         </p:txBody>
@@ -15992,7 +15838,7 @@
               <a:buNone/>
             </a:pPr>
             <a:r>
-              <a:rPr lang="en-US" sz="1400" b="1">
+              <a:rPr lang="en-US" sz="1400" b="1" dirty="0">
                 <a:solidFill>
                   <a:srgbClr val="C0392B"/>
                 </a:solidFill>
@@ -16006,7 +15852,7 @@
               <a:buChar char="✗"/>
             </a:pPr>
             <a:r>
-              <a:rPr lang="en-US" sz="1100" b="1">
+              <a:rPr lang="en-US" sz="1100" b="1" dirty="0">
                 <a:solidFill>
                   <a:srgbClr val="C0392B"/>
                 </a:solidFill>
@@ -16039,29 +15885,7 @@
                 <a:ea typeface="Calibri"/>
                 <a:cs typeface="Calibri"/>
               </a:rPr>
-              <a:t>0.0149 F1; the </a:t>
-            </a:r>
-            <a:r>
-              <a:rPr lang="en-US" sz="1000" dirty="0" err="1">
-                <a:solidFill>
-                  <a:srgbClr val="1A2B3C"/>
-                </a:solidFill>
-                <a:latin typeface="Calibri"/>
-                <a:ea typeface="Calibri"/>
-                <a:cs typeface="Calibri"/>
-              </a:rPr>
-              <a:t>pokemons</a:t>
-            </a:r>
-            <a:r>
-              <a:rPr lang="en-US" sz="1000" dirty="0">
-                <a:solidFill>
-                  <a:srgbClr val="1A2B3C"/>
-                </a:solidFill>
-                <a:latin typeface="Calibri"/>
-                <a:ea typeface="Calibri"/>
-                <a:cs typeface="Calibri"/>
-              </a:rPr>
-              <a:t> are always the same way, the only thing that changes are the background at the position; CNNs are translation invariant so the only real thing that changes for our network is the background. The more aggressive the augmentation is the bigger the decay in performance</a:t>
+              <a:t>0.0149 F1; the Pokémons are always the same way, the only thing that changes are the background at the position; CNNs are translation invariant so the only real thing that changes for our network is the background. The more aggressive the augmentation is the bigger the decay in performance</a:t>
             </a:r>
           </a:p>
           <a:p>
@@ -16069,7 +15893,7 @@
               <a:buChar char="✗"/>
             </a:pPr>
             <a:r>
-              <a:rPr lang="en-US" sz="1100" b="1">
+              <a:rPr lang="en-US" sz="1100" b="1" dirty="0">
                 <a:solidFill>
                   <a:srgbClr val="C0392B"/>
                 </a:solidFill>
@@ -16079,14 +15903,6 @@
               </a:rPr>
               <a:t>Many FC layers</a:t>
             </a:r>
-            <a:endParaRPr lang="en-US" sz="1100" b="1" dirty="0">
-              <a:solidFill>
-                <a:srgbClr val="C0392B"/>
-              </a:solidFill>
-              <a:latin typeface="Calibri"/>
-              <a:ea typeface="Calibri"/>
-              <a:cs typeface="Calibri"/>
-            </a:endParaRPr>
           </a:p>
           <a:p>
             <a:pPr lvl="1"/>
@@ -16099,29 +15915,7 @@
                 <a:ea typeface="Calibri"/>
                 <a:cs typeface="Calibri"/>
               </a:rPr>
-              <a:t>- 3 or more FC layers starts giving us a slower training and </a:t>
-            </a:r>
-            <a:r>
-              <a:rPr lang="en-US" sz="1000">
-                <a:solidFill>
-                  <a:srgbClr val="1A2B3C"/>
-                </a:solidFill>
-                <a:latin typeface="Calibri"/>
-                <a:ea typeface="Calibri"/>
-                <a:cs typeface="Calibri"/>
-              </a:rPr>
-              <a:t>worse results (parameters increase a lot if our convolution channels are wide); keep it simple and </a:t>
-            </a:r>
-            <a:r>
-              <a:rPr lang="en-US" sz="1000" dirty="0">
-                <a:solidFill>
-                  <a:srgbClr val="1A2B3C"/>
-                </a:solidFill>
-                <a:latin typeface="Calibri"/>
-                <a:ea typeface="Calibri"/>
-                <a:cs typeface="Calibri"/>
-              </a:rPr>
-              <a:t>let convolutional layers learn the information, then pass them to minimal FC layers</a:t>
+              <a:t>- 3 or more FC layers starts giving us a slower training and worse results (parameters increase a lot if our convolution channels are wide); keep it simple and let convolutional layers learn the information, then pass them to minimal FC layers</a:t>
             </a:r>
           </a:p>
           <a:p>
@@ -16190,7 +15984,7 @@
               <a:buChar char="✗"/>
             </a:pPr>
             <a:r>
-              <a:rPr lang="en-US" sz="1100" b="1">
+              <a:rPr lang="en-US" sz="1100" b="1" dirty="0">
                 <a:solidFill>
                   <a:srgbClr val="C0392B"/>
                 </a:solidFill>
@@ -16200,7 +15994,7 @@
               </a:rPr>
               <a:t>Ensembles</a:t>
             </a:r>
-            <a:endParaRPr lang="en-US" sz="1100" b="1">
+            <a:endParaRPr lang="en-US" sz="1100" b="1" dirty="0">
               <a:solidFill>
                 <a:srgbClr val="C0392B"/>
               </a:solidFill>
@@ -16231,29 +16025,7 @@
                 <a:ea typeface="Calibri"/>
                 <a:cs typeface="Calibri"/>
               </a:rPr>
-              <a:t>Ensembled models </a:t>
-            </a:r>
-            <a:r>
-              <a:rPr lang="en-US" sz="1000">
-                <a:solidFill>
-                  <a:srgbClr val="1A2B3C"/>
-                </a:solidFill>
-                <a:latin typeface="Calibri"/>
-                <a:ea typeface="Calibri"/>
-                <a:cs typeface="Calibri"/>
-              </a:rPr>
-              <a:t>could not</a:t>
-            </a:r>
-            <a:r>
-              <a:rPr lang="en-US" sz="1000" dirty="0">
-                <a:solidFill>
-                  <a:srgbClr val="1A2B3C"/>
-                </a:solidFill>
-                <a:latin typeface="Calibri"/>
-                <a:ea typeface="Calibri"/>
-                <a:cs typeface="Calibri"/>
-              </a:rPr>
-              <a:t> achieve a better performance</a:t>
+              <a:t>Ensembled models could not achieve a better performance</a:t>
             </a:r>
           </a:p>
           <a:p>
@@ -16261,7 +16033,7 @@
               <a:buChar char="✗"/>
             </a:pPr>
             <a:r>
-              <a:rPr lang="en-US" sz="1100" b="1">
+              <a:rPr lang="en-US" sz="1100" b="1" dirty="0">
                 <a:solidFill>
                   <a:srgbClr val="C0392B"/>
                 </a:solidFill>
@@ -16271,14 +16043,6 @@
               </a:rPr>
               <a:t>Label Smoothing</a:t>
             </a:r>
-            <a:endParaRPr lang="en-US" sz="1100" b="1" dirty="0">
-              <a:solidFill>
-                <a:srgbClr val="C0392B"/>
-              </a:solidFill>
-              <a:latin typeface="Calibri"/>
-              <a:ea typeface="Calibri"/>
-              <a:cs typeface="Calibri"/>
-            </a:endParaRPr>
           </a:p>
           <a:p>
             <a:pPr lvl="1"/>
@@ -16294,7 +16058,7 @@
               <a:t>- </a:t>
             </a:r>
             <a:r>
-              <a:rPr lang="en-US" sz="1000">
+              <a:rPr lang="en-US" sz="1000" dirty="0">
                 <a:solidFill>
                   <a:srgbClr val="1A2B3C"/>
                 </a:solidFill>
@@ -16757,7 +16521,7 @@
           <a:lstStyle/>
           <a:p>
             <a:r>
-              <a:rPr lang="en-US" sz="1300" b="1">
+              <a:rPr lang="en-US" sz="1300" b="1" dirty="0">
                 <a:solidFill>
                   <a:srgbClr val="00A896"/>
                 </a:solidFill>
@@ -16810,59 +16574,23 @@
                 <a:ea typeface="Calibri"/>
                 <a:cs typeface="Calibri"/>
               </a:rPr>
-              <a:t>This problem screams CNN! The dataset has images, In which the </a:t>
-            </a:r>
-            <a:r>
-              <a:rPr lang="en-US" sz="1100" dirty="0" err="1">
-                <a:solidFill>
-                  <a:schemeClr val="bg1"/>
+              <a:t>This problem screams CNN! The dataset has images, In which the Pokémons always appear in the same way, only changing their position and the background: CNNs are invariant to translations! MLPs lose all sense of spatial structure</a:t>
+            </a:r>
+          </a:p>
+          <a:p>
+            <a:r>
+              <a:rPr lang="en-US" sz="1100" b="1" dirty="0">
+                <a:solidFill>
+                  <a:schemeClr val="accent2">
+                    <a:lumMod val="40000"/>
+                    <a:lumOff val="60000"/>
+                  </a:schemeClr>
                 </a:solidFill>
                 <a:latin typeface="Calibri"/>
                 <a:ea typeface="Calibri"/>
                 <a:cs typeface="Calibri"/>
               </a:rPr>
-              <a:t>pokemons</a:t>
-            </a:r>
-            <a:r>
-              <a:rPr lang="en-US" sz="1100" dirty="0">
-                <a:solidFill>
-                  <a:schemeClr val="bg1"/>
-                </a:solidFill>
-                <a:latin typeface="Calibri"/>
-                <a:ea typeface="Calibri"/>
-                <a:cs typeface="Calibri"/>
-              </a:rPr>
-              <a:t> always appear in the same way, only changing their position and the background: CNNs are invariant to translations! MLPs lose all sense of spatial structure</a:t>
-            </a:r>
-          </a:p>
-          <a:p>
-            <a:r>
-              <a:rPr lang="en-US" sz="1100" b="1" dirty="0">
-                <a:solidFill>
-                  <a:schemeClr val="accent2">
-                    <a:lumMod val="40000"/>
-                    <a:lumOff val="60000"/>
-                  </a:schemeClr>
-                </a:solidFill>
-                <a:latin typeface="Calibri"/>
-                <a:ea typeface="Calibri"/>
-                <a:cs typeface="Calibri"/>
-              </a:rPr>
-              <a:t>Next: Transfer Learning and Fine-Tuning (Task 3) - can we achieve the </a:t>
-            </a:r>
-            <a:r>
-              <a:rPr lang="en-US" sz="1100" b="1">
-                <a:solidFill>
-                  <a:schemeClr val="accent2">
-                    <a:lumMod val="40000"/>
-                    <a:lumOff val="60000"/>
-                  </a:schemeClr>
-                </a:solidFill>
-                <a:latin typeface="Calibri"/>
-                <a:ea typeface="Calibri"/>
-                <a:cs typeface="Calibri"/>
-              </a:rPr>
-              <a:t>same performance by replacing the classifier head of a pretrained model?</a:t>
+              <a:t>Next: Transfer Learning and Fine-Tuning (Task 3) - can we achieve the same performance by replacing the classifier head of a pretrained model?</a:t>
             </a:r>
           </a:p>
         </p:txBody>
@@ -27979,79 +27707,7 @@
                 </a:solidFill>
                 <a:latin typeface="Calibri"/>
               </a:rPr>
-              <a:t>as in MLPs there's high F1 in Fire/Poison/Water, due to the distinctive </a:t>
-            </a:r>
-            <a:r>
-              <a:rPr lang="en-US" sz="1200" dirty="0" err="1">
-                <a:solidFill>
-                  <a:srgbClr val="AACCD8"/>
-                </a:solidFill>
-                <a:latin typeface="Calibri"/>
-              </a:rPr>
-              <a:t>colours</a:t>
-            </a:r>
-            <a:r>
-              <a:rPr lang="en-US" sz="1200" dirty="0">
-                <a:solidFill>
-                  <a:srgbClr val="AACCD8"/>
-                </a:solidFill>
-                <a:latin typeface="Calibri"/>
-              </a:rPr>
-              <a:t> of these types; shared palette or humanoid shape give us low F1 (Bug/Rock/Fighting/Ground), since they have no predominant </a:t>
-            </a:r>
-            <a:r>
-              <a:rPr lang="en-US" sz="1200" dirty="0" err="1">
-                <a:solidFill>
-                  <a:srgbClr val="AACCD8"/>
-                </a:solidFill>
-                <a:latin typeface="Calibri"/>
-              </a:rPr>
-              <a:t>colours</a:t>
-            </a:r>
-            <a:r>
-              <a:rPr lang="en-US" sz="1200" dirty="0">
-                <a:solidFill>
-                  <a:srgbClr val="AACCD8"/>
-                </a:solidFill>
-                <a:latin typeface="Calibri"/>
-              </a:rPr>
-              <a:t>. These models had more difficulty making the jump from the </a:t>
-            </a:r>
-            <a:r>
-              <a:rPr lang="en-US" sz="1200" dirty="0" err="1">
-                <a:solidFill>
-                  <a:srgbClr val="AACCD8"/>
-                </a:solidFill>
-                <a:latin typeface="Calibri"/>
-              </a:rPr>
-              <a:t>colours</a:t>
-            </a:r>
-            <a:r>
-              <a:rPr lang="en-US" sz="1200" dirty="0">
-                <a:solidFill>
-                  <a:srgbClr val="AACCD8"/>
-                </a:solidFill>
-                <a:latin typeface="Calibri"/>
-              </a:rPr>
-              <a:t> to the shapes of the </a:t>
-            </a:r>
-            <a:r>
-              <a:rPr lang="en-US" sz="1200" dirty="0" err="1">
-                <a:solidFill>
-                  <a:srgbClr val="AACCD8"/>
-                </a:solidFill>
-                <a:latin typeface="Calibri"/>
-              </a:rPr>
-              <a:t>pokemon</a:t>
-            </a:r>
-            <a:r>
-              <a:rPr lang="en-US" sz="1200" dirty="0">
-                <a:solidFill>
-                  <a:srgbClr val="AACCD8"/>
-                </a:solidFill>
-                <a:latin typeface="Calibri"/>
-              </a:rPr>
-              <a:t> themselves</a:t>
+              <a:t>as in MLPs there's high F1 in Fire/Poison/Water, due to the distinctive colors of these types; shared palette or humanoid shape give us low F1 (Bug/Rock/Fighting/Ground), since they have no predominant colors. These models had more difficulty making the jump from the colors to the shapes of the Pokémon themselves</a:t>
             </a:r>
             <a:endParaRPr lang="en-US" sz="1200" dirty="0">
               <a:solidFill>
@@ -30975,7 +30631,7 @@
           <a:lstStyle/>
           <a:p>
             <a:r>
-              <a:rPr lang="en-US" sz="1200" b="1">
+              <a:rPr lang="en-US" sz="1200" b="1" dirty="0">
                 <a:solidFill>
                   <a:srgbClr val="00A896"/>
                 </a:solidFill>
@@ -30983,7 +30639,7 @@
               </a:rPr>
               <a:t>Normal is the catch-all for MLP</a:t>
             </a:r>
-            <a:endParaRPr lang="en-US"/>
+            <a:endParaRPr lang="en-US" dirty="0"/>
           </a:p>
           <a:p>
             <a:pPr marL="228600" indent="-228600">
@@ -30996,18 +30652,9 @@
                 </a:solidFill>
                 <a:latin typeface="Calibri"/>
               </a:rPr>
-              <a:t>Normal = most diverse class: humanoids of every shape and size, no dominant </a:t>
-            </a:r>
-            <a:r>
-              <a:rPr lang="en-US" sz="1100" dirty="0" err="1">
-                <a:solidFill>
-                  <a:schemeClr val="bg1"/>
-                </a:solidFill>
-                <a:latin typeface="Calibri"/>
-              </a:rPr>
-              <a:t>colour</a:t>
-            </a:r>
-            <a:endParaRPr lang="en-US" sz="1100" dirty="0" err="1">
+              <a:t>Normal = most diverse class: humanoids of every shape and size, no dominant color</a:t>
+            </a:r>
+            <a:endParaRPr lang="en-US" sz="1100" dirty="0">
               <a:solidFill>
                 <a:schemeClr val="bg1"/>
               </a:solidFill>
@@ -31202,7 +30849,7 @@
           <a:lstStyle/>
           <a:p>
             <a:r>
-              <a:rPr lang="en-US" sz="1200" b="1">
+              <a:rPr lang="en-US" sz="1200" b="1" dirty="0">
                 <a:solidFill>
                   <a:srgbClr val="00A896"/>
                 </a:solidFill>
@@ -31210,7 +30857,7 @@
               </a:rPr>
               <a:t>CNNs are immune to this</a:t>
             </a:r>
-            <a:endParaRPr lang="en-US"/>
+            <a:endParaRPr lang="en-US" dirty="0"/>
           </a:p>
           <a:p>
             <a:pPr marL="228600" indent="-228600">
@@ -31226,29 +30873,7 @@
                 <a:ea typeface="Calibri"/>
                 <a:cs typeface="Calibri"/>
               </a:rPr>
-              <a:t>As stated before, they can learn other patterns besides </a:t>
-            </a:r>
-            <a:r>
-              <a:rPr lang="en-US" sz="1100" dirty="0" err="1">
-                <a:solidFill>
-                  <a:schemeClr val="bg1"/>
-                </a:solidFill>
-                <a:latin typeface="Calibri"/>
-                <a:ea typeface="Calibri"/>
-                <a:cs typeface="Calibri"/>
-              </a:rPr>
-              <a:t>colour</a:t>
-            </a:r>
-            <a:r>
-              <a:rPr lang="en-US" sz="1100" dirty="0">
-                <a:solidFill>
-                  <a:schemeClr val="bg1"/>
-                </a:solidFill>
-                <a:latin typeface="Calibri"/>
-                <a:ea typeface="Calibri"/>
-                <a:cs typeface="Calibri"/>
-              </a:rPr>
-              <a:t> and independent pixels</a:t>
+              <a:t>As stated before, they can learn other patterns besides color and independent pixels</a:t>
             </a:r>
           </a:p>
         </p:txBody>
@@ -42324,7 +41949,7 @@
               <a:buNone/>
             </a:pPr>
             <a:r>
-              <a:rPr lang="en-US" sz="1400" b="1">
+              <a:rPr lang="en-US" sz="1400" b="1" dirty="0">
                 <a:solidFill>
                   <a:srgbClr val="00A896"/>
                 </a:solidFill>
@@ -42335,7 +41960,7 @@
           </a:p>
           <a:p>
             <a:r>
-              <a:rPr lang="en-US" sz="1100" b="1">
+              <a:rPr lang="en-US" sz="1100" b="1" dirty="0">
                 <a:solidFill>
                   <a:srgbClr val="1C3A52"/>
                 </a:solidFill>
@@ -42345,7 +41970,7 @@
               </a:rPr>
               <a:t>Decreased effectiveness when compared to MLPs. Idea:</a:t>
             </a:r>
-            <a:endParaRPr lang="en-US" sz="1100" b="1">
+            <a:endParaRPr lang="en-US" sz="1100" b="1" dirty="0">
               <a:solidFill>
                 <a:srgbClr val="1C3A52"/>
               </a:solidFill>
@@ -42367,10 +41992,29 @@
                 <a:ea typeface="Calibri"/>
                 <a:cs typeface="Calibri"/>
               </a:rPr>
-              <a:t>Softens hard one-hot targets </a:t>
-            </a:r>
-            <a:r>
-              <a:rPr lang="en-US" sz="1100">
+              <a:t>Softens hard one-hot targets (0.9/0.1 blend vs 1.0 hard)</a:t>
+            </a:r>
+          </a:p>
+          <a:p>
+            <a:pPr marL="228600" indent="-228600">
+              <a:buChar char="•"/>
+            </a:pPr>
+            <a:r>
+              <a:rPr lang="en-US" sz="1100" dirty="0">
+                <a:solidFill>
+                  <a:srgbClr val="1A2B3C"/>
+                </a:solidFill>
+                <a:latin typeface="Calibri" pitchFamily="34" charset="0"/>
+              </a:rPr>
+              <a:t>Prevents overconfident predictions on visually ambiguous classes</a:t>
+            </a:r>
+          </a:p>
+          <a:p>
+            <a:pPr marL="228600" indent="-228600">
+              <a:buChar char="•"/>
+            </a:pPr>
+            <a:r>
+              <a:rPr lang="en-US" sz="1100" dirty="0">
                 <a:solidFill>
                   <a:srgbClr val="1A2B3C"/>
                 </a:solidFill>
@@ -42378,67 +42022,15 @@
                 <a:ea typeface="Calibri"/>
                 <a:cs typeface="Calibri"/>
               </a:rPr>
-              <a:t>(0.9/0.1 blend vs 1.0 hard)</a:t>
-            </a:r>
-          </a:p>
-          <a:p>
-            <a:pPr marL="228600" indent="-228600">
-              <a:buChar char="•"/>
+              <a:t>Key on noisy boundaries — Bug/Grass and Rock/Ground share color palettes</a:t>
+            </a:r>
+          </a:p>
+          <a:p>
+            <a:pPr>
+              <a:buNone/>
             </a:pPr>
             <a:r>
-              <a:rPr lang="en-US" sz="1100" dirty="0">
-                <a:solidFill>
-                  <a:srgbClr val="1A2B3C"/>
-                </a:solidFill>
-                <a:latin typeface="Calibri" pitchFamily="34" charset="0"/>
-              </a:rPr>
-              <a:t>Prevents overconfident predictions on visually ambiguous classes</a:t>
-            </a:r>
-          </a:p>
-          <a:p>
-            <a:pPr marL="228600" indent="-228600">
-              <a:buChar char="•"/>
-            </a:pPr>
-            <a:r>
-              <a:rPr lang="en-US" sz="1100" dirty="0">
-                <a:solidFill>
-                  <a:srgbClr val="1A2B3C"/>
-                </a:solidFill>
-                <a:latin typeface="Calibri"/>
-                <a:ea typeface="Calibri"/>
-                <a:cs typeface="Calibri"/>
-              </a:rPr>
-              <a:t>Key on noisy boundaries — Bug/Grass and Rock/Ground share </a:t>
-            </a:r>
-            <a:r>
-              <a:rPr lang="en-US" sz="1100" dirty="0" err="1">
-                <a:solidFill>
-                  <a:srgbClr val="1A2B3C"/>
-                </a:solidFill>
-                <a:latin typeface="Calibri"/>
-                <a:ea typeface="Calibri"/>
-                <a:cs typeface="Calibri"/>
-              </a:rPr>
-              <a:t>colour</a:t>
-            </a:r>
-            <a:r>
-              <a:rPr lang="en-US" sz="1100" dirty="0">
-                <a:solidFill>
-                  <a:srgbClr val="1A2B3C"/>
-                </a:solidFill>
-                <a:latin typeface="Calibri"/>
-                <a:ea typeface="Calibri"/>
-                <a:cs typeface="Calibri"/>
-              </a:rPr>
-              <a:t> palettes</a:t>
-            </a:r>
-          </a:p>
-          <a:p>
-            <a:pPr>
-              <a:buNone/>
-            </a:pPr>
-            <a:r>
-              <a:rPr lang="en-US" sz="1100" b="1">
+              <a:rPr lang="en-US" sz="1100" b="1" dirty="0">
                 <a:solidFill>
                   <a:srgbClr val="1C3A52"/>
                 </a:solidFill>
@@ -42454,7 +42046,7 @@
               <a:buChar char="•"/>
             </a:pPr>
             <a:r>
-              <a:rPr lang="en-US" sz="1100">
+              <a:rPr lang="en-US" sz="1100" dirty="0">
                 <a:solidFill>
                   <a:srgbClr val="1A2B3C"/>
                 </a:solidFill>
@@ -42462,29 +42054,7 @@
                 <a:ea typeface="Calibri"/>
                 <a:cs typeface="Calibri"/>
               </a:rPr>
-              <a:t>LS=0.1 (F) = 0.9750 vs LS=0.0 </a:t>
-            </a:r>
-            <a:r>
-              <a:rPr lang="en-US" sz="1100" dirty="0">
-                <a:solidFill>
-                  <a:srgbClr val="1A2B3C"/>
-                </a:solidFill>
-                <a:latin typeface="Calibri"/>
-                <a:ea typeface="Calibri"/>
-                <a:cs typeface="Calibri"/>
-              </a:rPr>
-              <a:t>(C) = </a:t>
-            </a:r>
-            <a:r>
-              <a:rPr lang="en-US" sz="1100">
-                <a:solidFill>
-                  <a:srgbClr val="1A2B3C"/>
-                </a:solidFill>
-                <a:latin typeface="Calibri"/>
-                <a:ea typeface="Calibri"/>
-                <a:cs typeface="Calibri"/>
-              </a:rPr>
-              <a:t>0.9880 — tiny decrease</a:t>
+              <a:t>LS=0.1 (F) = 0.9750 vs LS=0.0 (C) = 0.9880 — tiny decrease</a:t>
             </a:r>
           </a:p>
           <a:p>
@@ -42507,29 +42077,7 @@
                 <a:ea typeface="Calibri"/>
                 <a:cs typeface="Calibri"/>
               </a:rPr>
-              <a:t>A lot of models can effectively </a:t>
-            </a:r>
-            <a:r>
-              <a:rPr lang="en-US" sz="1100">
-                <a:solidFill>
-                  <a:srgbClr val="1A2B3C"/>
-                </a:solidFill>
-                <a:latin typeface="Calibri"/>
-                <a:ea typeface="Calibri"/>
-                <a:cs typeface="Calibri"/>
-              </a:rPr>
-              <a:t>converge to a near-perfect validation score, adding label smoothing adds unnecessary </a:t>
-            </a:r>
-            <a:r>
-              <a:rPr lang="en-US" sz="1100" dirty="0">
-                <a:solidFill>
-                  <a:srgbClr val="1A2B3C"/>
-                </a:solidFill>
-                <a:latin typeface="Calibri"/>
-                <a:ea typeface="Calibri"/>
-                <a:cs typeface="Calibri"/>
-              </a:rPr>
-              <a:t>noise</a:t>
+              <a:t>A lot of models can effectively converge to a near-perfect validation score, adding label smoothing adds unnecessary noise</a:t>
             </a:r>
           </a:p>
         </p:txBody>
@@ -43077,22 +42625,13 @@
               <a:buNone/>
             </a:pPr>
             <a:r>
-              <a:rPr lang="en-US" sz="1400" b="1" dirty="0" err="1">
+              <a:rPr lang="en-US" sz="1400" b="1" dirty="0">
                 <a:solidFill>
                   <a:srgbClr val="028090"/>
                 </a:solidFill>
                 <a:latin typeface="Trebuchet MS"/>
               </a:rPr>
-              <a:t>Optimiser</a:t>
-            </a:r>
-            <a:r>
-              <a:rPr lang="en-US" sz="1400" b="1" dirty="0">
-                <a:solidFill>
-                  <a:srgbClr val="028090"/>
-                </a:solidFill>
-                <a:latin typeface="Trebuchet MS"/>
-              </a:rPr>
-              <a:t> + Scheduler</a:t>
+              <a:t>Optimizer + Scheduler</a:t>
             </a:r>
           </a:p>
           <a:p>
@@ -43890,54 +43429,9 @@
                 </a:solidFill>
                 <a:latin typeface="Calibri"/>
               </a:rPr>
-              <a:t>A 64x64 RGB image results in an initial vector of length = 12.288. If we convert to grayscale the size is reduced by 3, to 4096. Are we able to achieve similar results with this smaller input?  Turns out no. </a:t>
-            </a:r>
-            <a:r>
-              <a:rPr lang="en-US" sz="1300" err="1">
-                <a:solidFill>
-                  <a:srgbClr val="1A2B3C"/>
-                </a:solidFill>
-                <a:latin typeface="Calibri"/>
-              </a:rPr>
-              <a:t>Pokemon</a:t>
-            </a:r>
-            <a:r>
-              <a:rPr lang="en-US" sz="1300" dirty="0">
-                <a:solidFill>
-                  <a:srgbClr val="1A2B3C"/>
-                </a:solidFill>
-                <a:latin typeface="Calibri"/>
-              </a:rPr>
-              <a:t> classi</a:t>
-            </a:r>
-            <a:r>
-              <a:rPr lang="en-US" sz="1300" err="1">
-                <a:solidFill>
-                  <a:srgbClr val="1A2B3C"/>
-                </a:solidFill>
-                <a:latin typeface="Calibri"/>
-              </a:rPr>
-              <a:t>ficatio</a:t>
-            </a:r>
-            <a:r>
-              <a:rPr lang="en-US" sz="1300" dirty="0">
-                <a:solidFill>
-                  <a:srgbClr val="1A2B3C"/>
-                </a:solidFill>
-                <a:latin typeface="Calibri"/>
-              </a:rPr>
-              <a:t>n is strongly color-dependent (Fire=orange, water=blue, poison=purple, </a:t>
-            </a:r>
-            <a:r>
-              <a:rPr lang="en-US" sz="1300">
-                <a:solidFill>
-                  <a:srgbClr val="1A2B3C"/>
-                </a:solidFill>
-                <a:latin typeface="Calibri"/>
-              </a:rPr>
-              <a:t>grass=green, ...)</a:t>
-            </a:r>
-            <a:endParaRPr lang="en-US" sz="1300">
+              <a:t>A 64x64 RGB image results in an initial vector of length = 12.288. If we convert to grayscale the size is reduced by 3, to 4096. Are we able to achieve similar results with this smaller input?  Turns out no. Pokémon classification is strongly color-dependent (Fire=orange, water=blue, poison=purple, grass=green, ...)</a:t>
+            </a:r>
+            <a:endParaRPr lang="en-US" sz="1300" dirty="0">
               <a:solidFill>
                 <a:srgbClr val="1A2B3C"/>
               </a:solidFill>

--- a/assignment_1/task2/Task2_report.pptx
+++ b/assignment_1/task2/Task2_report.pptx
@@ -145,9 +145,8 @@
 <file path=ppt/revisionInfo.xml><?xml version="1.0" encoding="utf-8"?>
 <p1510:revInfo xmlns:a="http://schemas.openxmlformats.org/drawingml/2006/main" xmlns:r="http://schemas.openxmlformats.org/officeDocument/2006/relationships" xmlns:p1510="http://schemas.microsoft.com/office/powerpoint/2015/10/main">
   <p1510:revLst>
-    <p1510:client id="{036968B7-DA67-72A4-3DF0-AEB616358612}" v="7715" dt="2026-03-25T11:10:53.253"/>
-    <p1510:client id="{767BBB93-3087-B744-08BA-B89B3F0EEC89}" v="2734" dt="2026-03-25T17:11:20.895"/>
-    <p1510:client id="{8CD50E63-8E47-5A93-9879-8D2832121154}" v="1381" dt="2026-03-25T22:05:17.511"/>
+    <p1510:client id="{CDABB519-467D-FD08-6A41-EB6CC6DEA994}" v="72" dt="2026-03-31T09:43:37.433"/>
+    <p1510:client id="{DA793C8F-70EE-6D19-B59A-A289D2A9283E}" v="297" dt="2026-03-31T12:48:54.240"/>
   </p1510:revLst>
 </p1510:revInfo>
 </file>
@@ -1601,7 +1600,7 @@
           <a:p>
             <a:fld id="{4AAD347D-5ACD-4C99-B74B-A9C85AD731AF}" type="datetimeFigureOut">
               <a:rPr lang="en-US" smtClean="0"/>
-              <a:t>3/28/2026</a:t>
+              <a:t>3/31/2026</a:t>
             </a:fld>
             <a:endParaRPr lang="en-US" dirty="0"/>
           </a:p>
@@ -1643,7 +1642,7 @@
           <a:p>
             <a:fld id="{D57F1E4F-1CFF-5643-939E-02111984F565}" type="slidenum">
               <a:rPr lang="en-US" smtClean="0"/>
-              <a:t>‹nº›</a:t>
+              <a:t>‹#›</a:t>
             </a:fld>
             <a:endParaRPr lang="en-US" dirty="0"/>
           </a:p>
@@ -1883,7 +1882,7 @@
           <a:p>
             <a:fld id="{4509A250-FF31-4206-8172-F9D3106AACB1}" type="datetimeFigureOut">
               <a:rPr lang="en-US" smtClean="0"/>
-              <a:t>3/28/2026</a:t>
+              <a:t>3/31/2026</a:t>
             </a:fld>
             <a:endParaRPr lang="en-US" dirty="0"/>
           </a:p>
@@ -1925,7 +1924,7 @@
           <a:p>
             <a:fld id="{D57F1E4F-1CFF-5643-939E-02111984F565}" type="slidenum">
               <a:rPr lang="en-US" smtClean="0"/>
-              <a:t>‹nº›</a:t>
+              <a:t>‹#›</a:t>
             </a:fld>
             <a:endParaRPr lang="en-US" dirty="0"/>
           </a:p>
@@ -2076,7 +2075,7 @@
           <a:p>
             <a:fld id="{4509A250-FF31-4206-8172-F9D3106AACB1}" type="datetimeFigureOut">
               <a:rPr lang="en-US" smtClean="0"/>
-              <a:t>3/28/2026</a:t>
+              <a:t>3/31/2026</a:t>
             </a:fld>
             <a:endParaRPr lang="en-US" dirty="0"/>
           </a:p>
@@ -2118,7 +2117,7 @@
           <a:p>
             <a:fld id="{D57F1E4F-1CFF-5643-939E-02111984F565}" type="slidenum">
               <a:rPr lang="en-US" smtClean="0"/>
-              <a:t>‹nº›</a:t>
+              <a:t>‹#›</a:t>
             </a:fld>
             <a:endParaRPr lang="en-US" dirty="0"/>
           </a:p>
@@ -2338,7 +2337,7 @@
           <a:p>
             <a:fld id="{4AAD347D-5ACD-4C99-B74B-A9C85AD731AF}" type="datetimeFigureOut">
               <a:rPr lang="en-US" smtClean="0"/>
-              <a:t>3/28/2026</a:t>
+              <a:t>3/31/2026</a:t>
             </a:fld>
             <a:endParaRPr lang="en-US" dirty="0"/>
           </a:p>
@@ -2380,7 +2379,7 @@
           <a:p>
             <a:fld id="{D57F1E4F-1CFF-5643-939E-02111984F565}" type="slidenum">
               <a:rPr lang="en-US" smtClean="0"/>
-              <a:t>‹nº›</a:t>
+              <a:t>‹#›</a:t>
             </a:fld>
             <a:endParaRPr lang="en-US" dirty="0"/>
           </a:p>
@@ -2765,7 +2764,7 @@
           <a:p>
             <a:fld id="{4AAD347D-5ACD-4C99-B74B-A9C85AD731AF}" type="datetimeFigureOut">
               <a:rPr lang="en-US" smtClean="0"/>
-              <a:t>3/28/2026</a:t>
+              <a:t>3/31/2026</a:t>
             </a:fld>
             <a:endParaRPr lang="en-US" dirty="0"/>
           </a:p>
@@ -2807,7 +2806,7 @@
           <a:p>
             <a:fld id="{D57F1E4F-1CFF-5643-939E-02111984F565}" type="slidenum">
               <a:rPr lang="en-US" smtClean="0"/>
-              <a:t>‹nº›</a:t>
+              <a:t>‹#›</a:t>
             </a:fld>
             <a:endParaRPr lang="en-US" dirty="0"/>
           </a:p>
@@ -3312,7 +3311,7 @@
           <a:p>
             <a:fld id="{4509A250-FF31-4206-8172-F9D3106AACB1}" type="datetimeFigureOut">
               <a:rPr lang="en-US" smtClean="0"/>
-              <a:t>3/28/2026</a:t>
+              <a:t>3/31/2026</a:t>
             </a:fld>
             <a:endParaRPr lang="en-US" dirty="0"/>
           </a:p>
@@ -3354,7 +3353,7 @@
           <a:p>
             <a:fld id="{D57F1E4F-1CFF-5643-939E-02111984F565}" type="slidenum">
               <a:rPr lang="en-US" smtClean="0"/>
-              <a:t>‹nº›</a:t>
+              <a:t>‹#›</a:t>
             </a:fld>
             <a:endParaRPr lang="en-US" dirty="0"/>
           </a:p>
@@ -4144,7 +4143,7 @@
           <a:p>
             <a:fld id="{4509A250-FF31-4206-8172-F9D3106AACB1}" type="datetimeFigureOut">
               <a:rPr lang="en-US" smtClean="0"/>
-              <a:t>3/28/2026</a:t>
+              <a:t>3/31/2026</a:t>
             </a:fld>
             <a:endParaRPr lang="en-US" dirty="0"/>
           </a:p>
@@ -4186,7 +4185,7 @@
           <a:p>
             <a:fld id="{D57F1E4F-1CFF-5643-939E-02111984F565}" type="slidenum">
               <a:rPr lang="en-US" smtClean="0"/>
-              <a:t>‹nº›</a:t>
+              <a:t>‹#›</a:t>
             </a:fld>
             <a:endParaRPr lang="en-US" dirty="0"/>
           </a:p>
@@ -4315,7 +4314,7 @@
           <a:p>
             <a:fld id="{4509A250-FF31-4206-8172-F9D3106AACB1}" type="datetimeFigureOut">
               <a:rPr lang="en-US" smtClean="0"/>
-              <a:t>3/28/2026</a:t>
+              <a:t>3/31/2026</a:t>
             </a:fld>
             <a:endParaRPr lang="en-US" dirty="0"/>
           </a:p>
@@ -4357,7 +4356,7 @@
           <a:p>
             <a:fld id="{D57F1E4F-1CFF-5643-939E-02111984F565}" type="slidenum">
               <a:rPr lang="en-US" smtClean="0"/>
-              <a:t>‹nº›</a:t>
+              <a:t>‹#›</a:t>
             </a:fld>
             <a:endParaRPr lang="en-US" dirty="0"/>
           </a:p>
@@ -4496,7 +4495,7 @@
           <a:p>
             <a:fld id="{4509A250-FF31-4206-8172-F9D3106AACB1}" type="datetimeFigureOut">
               <a:rPr lang="en-US" smtClean="0"/>
-              <a:t>3/28/2026</a:t>
+              <a:t>3/31/2026</a:t>
             </a:fld>
             <a:endParaRPr lang="en-US" dirty="0"/>
           </a:p>
@@ -4538,7 +4537,7 @@
           <a:p>
             <a:fld id="{D57F1E4F-1CFF-5643-939E-02111984F565}" type="slidenum">
               <a:rPr lang="en-US" smtClean="0"/>
-              <a:t>‹nº›</a:t>
+              <a:t>‹#›</a:t>
             </a:fld>
             <a:endParaRPr lang="en-US" dirty="0"/>
           </a:p>
@@ -4764,7 +4763,7 @@
           <a:p>
             <a:fld id="{4AAD347D-5ACD-4C99-B74B-A9C85AD731AF}" type="datetimeFigureOut">
               <a:rPr lang="en-US" smtClean="0"/>
-              <a:t>3/28/2026</a:t>
+              <a:t>3/31/2026</a:t>
             </a:fld>
             <a:endParaRPr lang="en-US" dirty="0"/>
           </a:p>
@@ -4806,7 +4805,7 @@
           <a:p>
             <a:fld id="{D57F1E4F-1CFF-5643-939E-02111984F565}" type="slidenum">
               <a:rPr lang="en-US" smtClean="0"/>
-              <a:t>‹nº›</a:t>
+              <a:t>‹#›</a:t>
             </a:fld>
             <a:endParaRPr lang="en-US" dirty="0"/>
           </a:p>
@@ -4935,7 +4934,7 @@
           <a:p>
             <a:fld id="{4509A250-FF31-4206-8172-F9D3106AACB1}" type="datetimeFigureOut">
               <a:rPr lang="en-US" smtClean="0"/>
-              <a:t>3/28/2026</a:t>
+              <a:t>3/31/2026</a:t>
             </a:fld>
             <a:endParaRPr lang="en-US" dirty="0"/>
           </a:p>
@@ -4977,7 +4976,7 @@
           <a:p>
             <a:fld id="{D57F1E4F-1CFF-5643-939E-02111984F565}" type="slidenum">
               <a:rPr lang="en-US" smtClean="0"/>
-              <a:t>‹nº›</a:t>
+              <a:t>‹#›</a:t>
             </a:fld>
             <a:endParaRPr lang="en-US" dirty="0"/>
           </a:p>
@@ -5141,7 +5140,7 @@
           <a:p>
             <a:fld id="{4AAD347D-5ACD-4C99-B74B-A9C85AD731AF}" type="datetimeFigureOut">
               <a:rPr lang="en-US" smtClean="0"/>
-              <a:t>3/28/2026</a:t>
+              <a:t>3/31/2026</a:t>
             </a:fld>
             <a:endParaRPr lang="en-US" dirty="0"/>
           </a:p>
@@ -5183,7 +5182,7 @@
           <a:p>
             <a:fld id="{D57F1E4F-1CFF-5643-939E-02111984F565}" type="slidenum">
               <a:rPr lang="en-US" smtClean="0"/>
-              <a:t>‹nº›</a:t>
+              <a:t>‹#›</a:t>
             </a:fld>
             <a:endParaRPr lang="en-US" dirty="0"/>
           </a:p>
@@ -5422,7 +5421,7 @@
           <a:p>
             <a:fld id="{9796027F-7875-4030-9381-8BD8C4F21935}" type="datetimeFigureOut">
               <a:rPr lang="en-US" smtClean="0"/>
-              <a:t>3/28/2026</a:t>
+              <a:t>3/31/2026</a:t>
             </a:fld>
             <a:endParaRPr lang="en-US" dirty="0"/>
           </a:p>
@@ -5464,7 +5463,7 @@
           <a:p>
             <a:fld id="{D57F1E4F-1CFF-5643-939E-02111984F565}" type="slidenum">
               <a:rPr lang="en-US" smtClean="0"/>
-              <a:t>‹nº›</a:t>
+              <a:t>‹#›</a:t>
             </a:fld>
             <a:endParaRPr lang="en-US" dirty="0"/>
           </a:p>
@@ -5690,7 +5689,7 @@
           <a:p>
             <a:fld id="{4AAD347D-5ACD-4C99-B74B-A9C85AD731AF}" type="datetimeFigureOut">
               <a:rPr lang="en-US" smtClean="0"/>
-              <a:t>3/28/2026</a:t>
+              <a:t>3/31/2026</a:t>
             </a:fld>
             <a:endParaRPr lang="en-US" dirty="0"/>
           </a:p>
@@ -5732,7 +5731,7 @@
           <a:p>
             <a:fld id="{D57F1E4F-1CFF-5643-939E-02111984F565}" type="slidenum">
               <a:rPr lang="en-US" smtClean="0"/>
-              <a:t>‹nº›</a:t>
+              <a:t>‹#›</a:t>
             </a:fld>
             <a:endParaRPr lang="en-US" dirty="0"/>
           </a:p>
@@ -6106,7 +6105,7 @@
           <a:p>
             <a:fld id="{4AAD347D-5ACD-4C99-B74B-A9C85AD731AF}" type="datetimeFigureOut">
               <a:rPr lang="en-US" smtClean="0"/>
-              <a:t>3/28/2026</a:t>
+              <a:t>3/31/2026</a:t>
             </a:fld>
             <a:endParaRPr lang="en-US" dirty="0"/>
           </a:p>
@@ -6148,7 +6147,7 @@
           <a:p>
             <a:fld id="{D57F1E4F-1CFF-5643-939E-02111984F565}" type="slidenum">
               <a:rPr lang="en-US" smtClean="0"/>
-              <a:t>‹nº›</a:t>
+              <a:t>‹#›</a:t>
             </a:fld>
             <a:endParaRPr lang="en-US" dirty="0"/>
           </a:p>
@@ -6255,7 +6254,7 @@
           <a:p>
             <a:fld id="{4509A250-FF31-4206-8172-F9D3106AACB1}" type="datetimeFigureOut">
               <a:rPr lang="en-US" smtClean="0"/>
-              <a:t>3/28/2026</a:t>
+              <a:t>3/31/2026</a:t>
             </a:fld>
             <a:endParaRPr lang="en-US" dirty="0"/>
           </a:p>
@@ -6297,7 +6296,7 @@
           <a:p>
             <a:fld id="{D57F1E4F-1CFF-5643-939E-02111984F565}" type="slidenum">
               <a:rPr lang="en-US" smtClean="0"/>
-              <a:t>‹nº›</a:t>
+              <a:t>‹#›</a:t>
             </a:fld>
             <a:endParaRPr lang="en-US" dirty="0"/>
           </a:p>
@@ -6381,7 +6380,7 @@
           <a:p>
             <a:fld id="{4509A250-FF31-4206-8172-F9D3106AACB1}" type="datetimeFigureOut">
               <a:rPr lang="en-US" smtClean="0"/>
-              <a:t>3/28/2026</a:t>
+              <a:t>3/31/2026</a:t>
             </a:fld>
             <a:endParaRPr lang="en-US" dirty="0"/>
           </a:p>
@@ -6423,7 +6422,7 @@
           <a:p>
             <a:fld id="{D57F1E4F-1CFF-5643-939E-02111984F565}" type="slidenum">
               <a:rPr lang="en-US" smtClean="0"/>
-              <a:t>‹nº›</a:t>
+              <a:t>‹#›</a:t>
             </a:fld>
             <a:endParaRPr lang="en-US" dirty="0"/>
           </a:p>
@@ -6661,7 +6660,7 @@
           <a:p>
             <a:fld id="{4AAD347D-5ACD-4C99-B74B-A9C85AD731AF}" type="datetimeFigureOut">
               <a:rPr lang="en-US" smtClean="0"/>
-              <a:t>3/28/2026</a:t>
+              <a:t>3/31/2026</a:t>
             </a:fld>
             <a:endParaRPr lang="en-US" dirty="0"/>
           </a:p>
@@ -6703,7 +6702,7 @@
           <a:p>
             <a:fld id="{D57F1E4F-1CFF-5643-939E-02111984F565}" type="slidenum">
               <a:rPr lang="en-US" smtClean="0"/>
-              <a:t>‹nº›</a:t>
+              <a:t>‹#›</a:t>
             </a:fld>
             <a:endParaRPr lang="en-US" dirty="0"/>
           </a:p>
@@ -6974,7 +6973,7 @@
           <a:p>
             <a:fld id="{4509A250-FF31-4206-8172-F9D3106AACB1}" type="datetimeFigureOut">
               <a:rPr lang="en-US" smtClean="0"/>
-              <a:t>3/28/2026</a:t>
+              <a:t>3/31/2026</a:t>
             </a:fld>
             <a:endParaRPr lang="en-US" dirty="0"/>
           </a:p>
@@ -7016,7 +7015,7 @@
           <a:p>
             <a:fld id="{D57F1E4F-1CFF-5643-939E-02111984F565}" type="slidenum">
               <a:rPr lang="en-US" smtClean="0"/>
-              <a:t>‹nº›</a:t>
+              <a:t>‹#›</a:t>
             </a:fld>
             <a:endParaRPr lang="en-US" dirty="0"/>
           </a:p>
@@ -7287,7 +7286,7 @@
           <a:p>
             <a:fld id="{4509A250-FF31-4206-8172-F9D3106AACB1}" type="datetimeFigureOut">
               <a:rPr lang="en-US" smtClean="0"/>
-              <a:t>3/28/2026</a:t>
+              <a:t>3/31/2026</a:t>
             </a:fld>
             <a:endParaRPr lang="en-US" dirty="0"/>
           </a:p>
@@ -7329,7 +7328,7 @@
           <a:p>
             <a:fld id="{D57F1E4F-1CFF-5643-939E-02111984F565}" type="slidenum">
               <a:rPr lang="en-US" smtClean="0"/>
-              <a:t>‹nº›</a:t>
+              <a:t>‹#›</a:t>
             </a:fld>
             <a:endParaRPr lang="en-US" dirty="0"/>
           </a:p>
@@ -7510,7 +7509,7 @@
           <a:p>
             <a:fld id="{4509A250-FF31-4206-8172-F9D3106AACB1}" type="datetimeFigureOut">
               <a:rPr lang="en-US" smtClean="0"/>
-              <a:t>3/28/2026</a:t>
+              <a:t>3/31/2026</a:t>
             </a:fld>
             <a:endParaRPr lang="en-US" dirty="0"/>
           </a:p>
@@ -7552,7 +7551,7 @@
           <a:p>
             <a:fld id="{D57F1E4F-1CFF-5643-939E-02111984F565}" type="slidenum">
               <a:rPr lang="en-US" smtClean="0"/>
-              <a:t>‹nº›</a:t>
+              <a:t>‹#›</a:t>
             </a:fld>
             <a:endParaRPr lang="en-US" dirty="0"/>
           </a:p>
@@ -7768,7 +7767,7 @@
           <a:p>
             <a:fld id="{9796027F-7875-4030-9381-8BD8C4F21935}" type="datetimeFigureOut">
               <a:rPr lang="en-US" smtClean="0"/>
-              <a:t>3/28/2026</a:t>
+              <a:t>3/31/2026</a:t>
             </a:fld>
             <a:endParaRPr lang="en-US" dirty="0"/>
           </a:p>
@@ -7810,7 +7809,7 @@
           <a:p>
             <a:fld id="{D57F1E4F-1CFF-5643-939E-02111984F565}" type="slidenum">
               <a:rPr lang="en-US" smtClean="0"/>
-              <a:t>‹nº›</a:t>
+              <a:t>‹#›</a:t>
             </a:fld>
             <a:endParaRPr lang="en-US" dirty="0"/>
           </a:p>
@@ -8060,7 +8059,7 @@
           <a:p>
             <a:fld id="{4AAD347D-5ACD-4C99-B74B-A9C85AD731AF}" type="datetimeFigureOut">
               <a:rPr lang="en-US" smtClean="0"/>
-              <a:t>3/28/2026</a:t>
+              <a:t>3/31/2026</a:t>
             </a:fld>
             <a:endParaRPr lang="en-US" dirty="0"/>
           </a:p>
@@ -8102,7 +8101,7 @@
           <a:p>
             <a:fld id="{D57F1E4F-1CFF-5643-939E-02111984F565}" type="slidenum">
               <a:rPr lang="en-US" smtClean="0"/>
-              <a:t>‹nº›</a:t>
+              <a:t>‹#›</a:t>
             </a:fld>
             <a:endParaRPr lang="en-US" dirty="0"/>
           </a:p>
@@ -8515,7 +8514,7 @@
           <a:p>
             <a:fld id="{4AAD347D-5ACD-4C99-B74B-A9C85AD731AF}" type="datetimeFigureOut">
               <a:rPr lang="en-US" smtClean="0"/>
-              <a:t>3/28/2026</a:t>
+              <a:t>3/31/2026</a:t>
             </a:fld>
             <a:endParaRPr lang="en-US" dirty="0"/>
           </a:p>
@@ -8557,7 +8556,7 @@
           <a:p>
             <a:fld id="{D57F1E4F-1CFF-5643-939E-02111984F565}" type="slidenum">
               <a:rPr lang="en-US" smtClean="0"/>
-              <a:t>‹nº›</a:t>
+              <a:t>‹#›</a:t>
             </a:fld>
             <a:endParaRPr lang="en-US" dirty="0"/>
           </a:p>
@@ -9092,7 +9091,7 @@
           <a:p>
             <a:fld id="{4509A250-FF31-4206-8172-F9D3106AACB1}" type="datetimeFigureOut">
               <a:rPr lang="en-US" smtClean="0"/>
-              <a:t>3/28/2026</a:t>
+              <a:t>3/31/2026</a:t>
             </a:fld>
             <a:endParaRPr lang="en-US" dirty="0"/>
           </a:p>
@@ -9134,7 +9133,7 @@
           <a:p>
             <a:fld id="{D57F1E4F-1CFF-5643-939E-02111984F565}" type="slidenum">
               <a:rPr lang="en-US" smtClean="0"/>
-              <a:t>‹nº›</a:t>
+              <a:t>‹#›</a:t>
             </a:fld>
             <a:endParaRPr lang="en-US" dirty="0"/>
           </a:p>
@@ -9945,7 +9944,7 @@
           <a:p>
             <a:fld id="{4509A250-FF31-4206-8172-F9D3106AACB1}" type="datetimeFigureOut">
               <a:rPr lang="en-US" smtClean="0"/>
-              <a:t>3/28/2026</a:t>
+              <a:t>3/31/2026</a:t>
             </a:fld>
             <a:endParaRPr lang="en-US" dirty="0"/>
           </a:p>
@@ -9987,7 +9986,7 @@
           <a:p>
             <a:fld id="{D57F1E4F-1CFF-5643-939E-02111984F565}" type="slidenum">
               <a:rPr lang="en-US" smtClean="0"/>
-              <a:t>‹nº›</a:t>
+              <a:t>‹#›</a:t>
             </a:fld>
             <a:endParaRPr lang="en-US" dirty="0"/>
           </a:p>
@@ -10151,7 +10150,7 @@
           <a:p>
             <a:fld id="{4AAD347D-5ACD-4C99-B74B-A9C85AD731AF}" type="datetimeFigureOut">
               <a:rPr lang="en-US" smtClean="0"/>
-              <a:t>3/28/2026</a:t>
+              <a:t>3/31/2026</a:t>
             </a:fld>
             <a:endParaRPr lang="en-US" dirty="0"/>
           </a:p>
@@ -10193,7 +10192,7 @@
           <a:p>
             <a:fld id="{D57F1E4F-1CFF-5643-939E-02111984F565}" type="slidenum">
               <a:rPr lang="en-US" smtClean="0"/>
-              <a:t>‹nº›</a:t>
+              <a:t>‹#›</a:t>
             </a:fld>
             <a:endParaRPr lang="en-US" dirty="0"/>
           </a:p>
@@ -10366,7 +10365,7 @@
           <a:p>
             <a:fld id="{4AAD347D-5ACD-4C99-B74B-A9C85AD731AF}" type="datetimeFigureOut">
               <a:rPr lang="en-US" smtClean="0"/>
-              <a:t>3/28/2026</a:t>
+              <a:t>3/31/2026</a:t>
             </a:fld>
             <a:endParaRPr lang="en-US" dirty="0"/>
           </a:p>
@@ -10408,7 +10407,7 @@
           <a:p>
             <a:fld id="{D57F1E4F-1CFF-5643-939E-02111984F565}" type="slidenum">
               <a:rPr lang="en-US" smtClean="0"/>
-              <a:t>‹nº›</a:t>
+              <a:t>‹#›</a:t>
             </a:fld>
             <a:endParaRPr lang="en-US" dirty="0"/>
           </a:p>
@@ -10634,7 +10633,7 @@
           <a:p>
             <a:fld id="{9796027F-7875-4030-9381-8BD8C4F21935}" type="datetimeFigureOut">
               <a:rPr lang="en-US" smtClean="0"/>
-              <a:t>3/28/2026</a:t>
+              <a:t>3/31/2026</a:t>
             </a:fld>
             <a:endParaRPr lang="en-US" dirty="0"/>
           </a:p>
@@ -10676,7 +10675,7 @@
           <a:p>
             <a:fld id="{D57F1E4F-1CFF-5643-939E-02111984F565}" type="slidenum">
               <a:rPr lang="en-US" smtClean="0"/>
-              <a:t>‹nº›</a:t>
+              <a:t>‹#›</a:t>
             </a:fld>
             <a:endParaRPr lang="en-US" dirty="0"/>
           </a:p>
@@ -11028,7 +11027,7 @@
           <a:p>
             <a:fld id="{9796027F-7875-4030-9381-8BD8C4F21935}" type="datetimeFigureOut">
               <a:rPr lang="en-US" smtClean="0"/>
-              <a:t>3/28/2026</a:t>
+              <a:t>3/31/2026</a:t>
             </a:fld>
             <a:endParaRPr lang="en-US" dirty="0"/>
           </a:p>
@@ -11070,7 +11069,7 @@
           <a:p>
             <a:fld id="{D57F1E4F-1CFF-5643-939E-02111984F565}" type="slidenum">
               <a:rPr lang="en-US" smtClean="0"/>
-              <a:t>‹nº›</a:t>
+              <a:t>‹#›</a:t>
             </a:fld>
             <a:endParaRPr lang="en-US" dirty="0"/>
           </a:p>
@@ -11147,7 +11146,7 @@
           <a:p>
             <a:fld id="{4509A250-FF31-4206-8172-F9D3106AACB1}" type="datetimeFigureOut">
               <a:rPr lang="en-US" smtClean="0"/>
-              <a:t>3/28/2026</a:t>
+              <a:t>3/31/2026</a:t>
             </a:fld>
             <a:endParaRPr lang="en-US" dirty="0"/>
           </a:p>
@@ -11189,7 +11188,7 @@
           <a:p>
             <a:fld id="{D57F1E4F-1CFF-5643-939E-02111984F565}" type="slidenum">
               <a:rPr lang="en-US" smtClean="0"/>
-              <a:t>‹nº›</a:t>
+              <a:t>‹#›</a:t>
             </a:fld>
             <a:endParaRPr lang="en-US" dirty="0"/>
           </a:p>
@@ -11243,7 +11242,7 @@
           <a:p>
             <a:fld id="{4509A250-FF31-4206-8172-F9D3106AACB1}" type="datetimeFigureOut">
               <a:rPr lang="en-US" smtClean="0"/>
-              <a:t>3/28/2026</a:t>
+              <a:t>3/31/2026</a:t>
             </a:fld>
             <a:endParaRPr lang="en-US" dirty="0"/>
           </a:p>
@@ -11285,7 +11284,7 @@
           <a:p>
             <a:fld id="{D57F1E4F-1CFF-5643-939E-02111984F565}" type="slidenum">
               <a:rPr lang="en-US" smtClean="0"/>
-              <a:t>‹nº›</a:t>
+              <a:t>‹#›</a:t>
             </a:fld>
             <a:endParaRPr lang="en-US" dirty="0"/>
           </a:p>
@@ -11517,7 +11516,7 @@
           <a:p>
             <a:fld id="{4509A250-FF31-4206-8172-F9D3106AACB1}" type="datetimeFigureOut">
               <a:rPr lang="en-US" smtClean="0"/>
-              <a:t>3/28/2026</a:t>
+              <a:t>3/31/2026</a:t>
             </a:fld>
             <a:endParaRPr lang="en-US" dirty="0"/>
           </a:p>
@@ -11559,7 +11558,7 @@
           <a:p>
             <a:fld id="{D57F1E4F-1CFF-5643-939E-02111984F565}" type="slidenum">
               <a:rPr lang="en-US" smtClean="0"/>
-              <a:t>‹nº›</a:t>
+              <a:t>‹#›</a:t>
             </a:fld>
             <a:endParaRPr lang="en-US" dirty="0"/>
           </a:p>
@@ -11799,7 +11798,7 @@
           <a:p>
             <a:fld id="{4509A250-FF31-4206-8172-F9D3106AACB1}" type="datetimeFigureOut">
               <a:rPr lang="en-US" smtClean="0"/>
-              <a:t>3/28/2026</a:t>
+              <a:t>3/31/2026</a:t>
             </a:fld>
             <a:endParaRPr lang="en-US" dirty="0"/>
           </a:p>
@@ -11841,7 +11840,7 @@
           <a:p>
             <a:fld id="{D57F1E4F-1CFF-5643-939E-02111984F565}" type="slidenum">
               <a:rPr lang="en-US" smtClean="0"/>
-              <a:t>‹nº›</a:t>
+              <a:t>‹#›</a:t>
             </a:fld>
             <a:endParaRPr lang="en-US" dirty="0"/>
           </a:p>
@@ -12040,7 +12039,7 @@
           <a:p>
             <a:fld id="{4AAD347D-5ACD-4C99-B74B-A9C85AD731AF}" type="datetimeFigureOut">
               <a:rPr lang="en-US" smtClean="0"/>
-              <a:t>3/28/2026</a:t>
+              <a:t>3/31/2026</a:t>
             </a:fld>
             <a:endParaRPr lang="en-US" dirty="0"/>
           </a:p>
@@ -12154,7 +12153,7 @@
           <a:p>
             <a:fld id="{D57F1E4F-1CFF-5643-939E-02111984F565}" type="slidenum">
               <a:rPr lang="en-US" smtClean="0"/>
-              <a:t>‹nº›</a:t>
+              <a:t>‹#›</a:t>
             </a:fld>
             <a:endParaRPr lang="en-US" dirty="0"/>
           </a:p>
@@ -12779,7 +12778,7 @@
           <a:p>
             <a:fld id="{4AAD347D-5ACD-4C99-B74B-A9C85AD731AF}" type="datetimeFigureOut">
               <a:rPr lang="en-US" smtClean="0"/>
-              <a:t>3/28/2026</a:t>
+              <a:t>3/31/2026</a:t>
             </a:fld>
             <a:endParaRPr lang="en-US" dirty="0"/>
           </a:p>
@@ -12853,7 +12852,7 @@
           <a:p>
             <a:fld id="{D57F1E4F-1CFF-5643-939E-02111984F565}" type="slidenum">
               <a:rPr lang="en-US" smtClean="0"/>
-              <a:t>‹nº›</a:t>
+              <a:t>‹#›</a:t>
             </a:fld>
             <a:endParaRPr lang="en-US" dirty="0"/>
           </a:p>
@@ -13387,8 +13386,8 @@
         </p:nvSpPr>
         <p:spPr>
           <a:xfrm>
-            <a:off x="347472" y="1719072"/>
-            <a:ext cx="6583680" cy="438912"/>
+            <a:off x="870541" y="1932174"/>
+            <a:ext cx="7532951" cy="438912"/>
           </a:xfrm>
           <a:prstGeom prst="rect">
             <a:avLst/>
@@ -13401,7 +13400,7 @@
           <a:lstStyle/>
           <a:p>
             <a:r>
-              <a:rPr lang="en-US" sz="1600">
+              <a:rPr lang="en-US" sz="3600">
                 <a:solidFill>
                   <a:srgbClr val="7AADCC"/>
                 </a:solidFill>
@@ -13409,9 +13408,9 @@
                 <a:ea typeface="Calibri"/>
                 <a:cs typeface="Calibri"/>
               </a:rPr>
-              <a:t>TASK 2 - Convolutional Neural Network</a:t>
-            </a:r>
-            <a:endParaRPr lang="en-US" sz="1600">
+              <a:t>Task 2 - Convolutional Neural Network</a:t>
+            </a:r>
+            <a:endParaRPr lang="en-US" sz="3600">
               <a:latin typeface="Calibri"/>
               <a:ea typeface="Calibri"/>
               <a:cs typeface="Calibri"/>
@@ -13426,9 +13425,9 @@
           <p:nvPr/>
         </p:nvSpPr>
         <p:spPr>
-          <a:xfrm>
-            <a:off x="347472" y="2267712"/>
-            <a:ext cx="3474720" cy="36576"/>
+          <a:xfrm flipV="1">
+            <a:off x="841480" y="2381781"/>
+            <a:ext cx="7165253" cy="69974"/>
           </a:xfrm>
           <a:prstGeom prst="rect">
             <a:avLst/>
@@ -13448,103 +13447,6 @@
           <a:lstStyle/>
           <a:p>
             <a:endParaRPr lang="pt-PT"/>
-          </a:p>
-        </p:txBody>
-      </p:sp>
-      <p:sp>
-        <p:nvSpPr>
-          <p:cNvPr id="9" name="Text 7"/>
-          <p:cNvSpPr/>
-          <p:nvPr/>
-        </p:nvSpPr>
-        <p:spPr>
-          <a:xfrm>
-            <a:off x="347472" y="2377440"/>
-            <a:ext cx="6858000" cy="914400"/>
-          </a:xfrm>
-          <a:prstGeom prst="rect">
-            <a:avLst/>
-          </a:prstGeom>
-          <a:noFill/>
-          <a:ln/>
-        </p:spPr>
-        <p:txBody>
-          <a:bodyPr wrap="square" rtlCol="0" anchor="ctr"/>
-          <a:lstStyle/>
-          <a:p>
-            <a:pPr marL="0" indent="0">
-              <a:buNone/>
-            </a:pPr>
-            <a:r>
-              <a:rPr lang="en-US" sz="1300" dirty="0">
-                <a:solidFill>
-                  <a:srgbClr val="AACDE0"/>
-                </a:solidFill>
-                <a:latin typeface="Calibri" pitchFamily="34" charset="0"/>
-                <a:ea typeface="Calibri" pitchFamily="34" charset="-122"/>
-                <a:cs typeface="Calibri" pitchFamily="34" charset="-120"/>
-              </a:rPr>
-              <a:t>70698 – Francisco Silva</a:t>
-            </a:r>
-          </a:p>
-          <a:p>
-            <a:r>
-              <a:rPr lang="en-US" sz="1300" dirty="0">
-                <a:solidFill>
-                  <a:srgbClr val="AACDE0"/>
-                </a:solidFill>
-                <a:latin typeface="Calibri" pitchFamily="34" charset="0"/>
-                <a:cs typeface="Calibri" pitchFamily="34" charset="-120"/>
-              </a:rPr>
-              <a:t>73208 </a:t>
-            </a:r>
-            <a:r>
-              <a:rPr lang="en-US" sz="1300" dirty="0">
-                <a:solidFill>
-                  <a:srgbClr val="AACDE0"/>
-                </a:solidFill>
-                <a:latin typeface="Calibri" pitchFamily="34" charset="0"/>
-                <a:ea typeface="Calibri" pitchFamily="34" charset="-122"/>
-                <a:cs typeface="Calibri" pitchFamily="34" charset="-120"/>
-              </a:rPr>
-              <a:t>– Rúben Silva</a:t>
-            </a:r>
-            <a:endParaRPr lang="en-US" sz="1300" dirty="0"/>
-          </a:p>
-          <a:p>
-            <a:pPr marL="0" indent="0">
-              <a:buNone/>
-            </a:pPr>
-            <a:r>
-              <a:rPr lang="en-US" sz="1300" dirty="0">
-                <a:solidFill>
-                  <a:srgbClr val="AACDE0"/>
-                </a:solidFill>
-                <a:latin typeface="Calibri" pitchFamily="34" charset="0"/>
-                <a:ea typeface="Calibri" pitchFamily="34" charset="-122"/>
-                <a:cs typeface="Calibri" pitchFamily="34" charset="-120"/>
-              </a:rPr>
-              <a:t>73554 – Miguel </a:t>
-            </a:r>
-            <a:r>
-              <a:rPr lang="en-US" sz="1300" dirty="0" err="1">
-                <a:solidFill>
-                  <a:srgbClr val="AACDE0"/>
-                </a:solidFill>
-                <a:latin typeface="Calibri" pitchFamily="34" charset="0"/>
-                <a:ea typeface="Calibri" pitchFamily="34" charset="-122"/>
-                <a:cs typeface="Calibri" pitchFamily="34" charset="-120"/>
-              </a:rPr>
-              <a:t>Cangalhas</a:t>
-            </a:r>
-            <a:endParaRPr lang="en-US" sz="1300" dirty="0">
-              <a:solidFill>
-                <a:srgbClr val="AACDE0"/>
-              </a:solidFill>
-              <a:latin typeface="Calibri" pitchFamily="34" charset="0"/>
-              <a:ea typeface="Calibri" pitchFamily="34" charset="-122"/>
-              <a:cs typeface="Calibri" pitchFamily="34" charset="-120"/>
-            </a:endParaRPr>
           </a:p>
         </p:txBody>
       </p:sp>
@@ -13810,53 +13712,6 @@
       </p:sp>
       <p:sp>
         <p:nvSpPr>
-          <p:cNvPr id="3" name="Badge">
-            <a:extLst>
-              <a:ext uri="{FF2B5EF4-FFF2-40B4-BE49-F238E27FC236}">
-                <a16:creationId xmlns:a16="http://schemas.microsoft.com/office/drawing/2014/main" id="{B9A7BBBA-FDA0-89BB-E46F-248D7D3FD1C0}"/>
-              </a:ext>
-            </a:extLst>
-          </p:cNvPr>
-          <p:cNvSpPr/>
-          <p:nvPr/>
-        </p:nvSpPr>
-        <p:spPr>
-          <a:xfrm>
-            <a:off x="7498079" y="82296"/>
-            <a:ext cx="1557633" cy="329184"/>
-          </a:xfrm>
-          <a:prstGeom prst="rect">
-            <a:avLst/>
-          </a:prstGeom>
-          <a:solidFill>
-            <a:srgbClr val="1C3A52"/>
-          </a:solidFill>
-          <a:ln w="12700">
-            <a:solidFill>
-              <a:srgbClr val="1C3A52"/>
-            </a:solidFill>
-            <a:prstDash val="solid"/>
-          </a:ln>
-        </p:spPr>
-        <p:txBody>
-          <a:bodyPr/>
-          <a:lstStyle/>
-          <a:p>
-            <a:pPr algn="ctr"/>
-            <a:r>
-              <a:rPr lang="en-US" b="1" dirty="0">
-                <a:solidFill>
-                  <a:srgbClr val="FFFFFF"/>
-                </a:solidFill>
-              </a:rPr>
-              <a:t>MODEL DEV</a:t>
-            </a:r>
-            <a:endParaRPr lang="en-US" b="1" dirty="0"/>
-          </a:p>
-        </p:txBody>
-      </p:sp>
-      <p:sp>
-        <p:nvSpPr>
           <p:cNvPr id="5" name="Title">
             <a:extLst>
               <a:ext uri="{FF2B5EF4-FFF2-40B4-BE49-F238E27FC236}">
@@ -13982,7 +13837,29 @@
                 <a:ea typeface="Calibri"/>
                 <a:cs typeface="Calibri"/>
               </a:rPr>
-              <a:t>Let's take a look at some samples from the dataset which feature the same Pokémon </a:t>
+              <a:t>Let's take a look at some samples from the dataset which feature the same </a:t>
+            </a:r>
+            <a:r>
+              <a:rPr lang="en-US" sz="1200" dirty="0" err="1">
+                <a:solidFill>
+                  <a:schemeClr val="bg1"/>
+                </a:solidFill>
+                <a:latin typeface="Calibri"/>
+                <a:ea typeface="Calibri"/>
+                <a:cs typeface="Calibri"/>
+              </a:rPr>
+              <a:t>pokemon</a:t>
+            </a:r>
+            <a:r>
+              <a:rPr lang="en-US" sz="1200" dirty="0">
+                <a:solidFill>
+                  <a:schemeClr val="bg1"/>
+                </a:solidFill>
+                <a:latin typeface="Calibri"/>
+                <a:ea typeface="Calibri"/>
+                <a:cs typeface="Calibri"/>
+              </a:rPr>
+              <a:t> </a:t>
             </a:r>
             <a:r>
               <a:rPr lang="en-US" sz="1200" b="1" dirty="0">
@@ -13998,7 +13875,7 @@
               </a:rPr>
               <a:t> </a:t>
             </a:r>
-            <a:endParaRPr lang="en-US" sz="1200" dirty="0">
+            <a:endParaRPr lang="en-US" sz="1200">
               <a:solidFill>
                 <a:schemeClr val="accent2">
                   <a:lumMod val="40000"/>
@@ -14009,53 +13886,6 @@
               <a:ea typeface="Calibri"/>
               <a:cs typeface="Calibri"/>
             </a:endParaRPr>
-          </a:p>
-        </p:txBody>
-      </p:sp>
-      <p:sp>
-        <p:nvSpPr>
-          <p:cNvPr id="12" name="NumCircle">
-            <a:extLst>
-              <a:ext uri="{FF2B5EF4-FFF2-40B4-BE49-F238E27FC236}">
-                <a16:creationId xmlns:a16="http://schemas.microsoft.com/office/drawing/2014/main" id="{5D4D01B2-87C7-6427-9C67-AAC1A5617321}"/>
-              </a:ext>
-            </a:extLst>
-          </p:cNvPr>
-          <p:cNvSpPr/>
-          <p:nvPr/>
-        </p:nvSpPr>
-        <p:spPr>
-          <a:xfrm>
-            <a:off x="7088176" y="4253"/>
-            <a:ext cx="470123" cy="470912"/>
-          </a:xfrm>
-          <a:prstGeom prst="roundRect">
-            <a:avLst/>
-          </a:prstGeom>
-        </p:spPr>
-        <p:style>
-          <a:lnRef idx="0">
-            <a:schemeClr val="accent1"/>
-          </a:lnRef>
-          <a:fillRef idx="3">
-            <a:schemeClr val="accent1"/>
-          </a:fillRef>
-          <a:effectRef idx="3">
-            <a:schemeClr val="accent1"/>
-          </a:effectRef>
-          <a:fontRef idx="minor">
-            <a:schemeClr val="lt1"/>
-          </a:fontRef>
-        </p:style>
-        <p:txBody>
-          <a:bodyPr lIns="91440" tIns="45720" rIns="91440" bIns="45720" rtlCol="0" anchor="ctr"/>
-          <a:lstStyle/>
-          <a:p>
-            <a:pPr algn="ctr"/>
-            <a:r>
-              <a:rPr lang="en-US" sz="2800" b="1"/>
-              <a:t>1</a:t>
-            </a:r>
           </a:p>
         </p:txBody>
       </p:sp>
@@ -14290,7 +14120,51 @@
                 <a:ea typeface="Calibri"/>
                 <a:cs typeface="Calibri"/>
               </a:rPr>
-              <a:t>From this small set of examples, we can see that the Pokémon always remains in the same upright position, facing the same direction, with the same colors, … and the only thing that changes are: its position in the picture, and the background. Since CNNs are invariant to the object's position in the picture, in reality, the only thing that really changes is the background. So, if we replace a training example that has all these characteristics with a flipped image of </a:t>
+              <a:t>From this small set of examples we can see that the </a:t>
+            </a:r>
+            <a:r>
+              <a:rPr lang="en-US" sz="1200" dirty="0" err="1">
+                <a:solidFill>
+                  <a:srgbClr val="0D1B2A"/>
+                </a:solidFill>
+                <a:latin typeface="Calibri"/>
+                <a:ea typeface="Calibri"/>
+                <a:cs typeface="Calibri"/>
+              </a:rPr>
+              <a:t>pokemon</a:t>
+            </a:r>
+            <a:r>
+              <a:rPr lang="en-US" sz="1200" dirty="0">
+                <a:solidFill>
+                  <a:srgbClr val="0D1B2A"/>
+                </a:solidFill>
+                <a:latin typeface="Calibri"/>
+                <a:ea typeface="Calibri"/>
+                <a:cs typeface="Calibri"/>
+              </a:rPr>
+              <a:t> always remains in the same upright position, facing the same direction, with the same </a:t>
+            </a:r>
+            <a:r>
+              <a:rPr lang="en-US" sz="1200" dirty="0" err="1">
+                <a:solidFill>
+                  <a:srgbClr val="0D1B2A"/>
+                </a:solidFill>
+                <a:latin typeface="Calibri"/>
+                <a:ea typeface="Calibri"/>
+                <a:cs typeface="Calibri"/>
+              </a:rPr>
+              <a:t>colours</a:t>
+            </a:r>
+            <a:r>
+              <a:rPr lang="en-US" sz="1200" dirty="0">
+                <a:solidFill>
+                  <a:srgbClr val="0D1B2A"/>
+                </a:solidFill>
+                <a:latin typeface="Calibri"/>
+                <a:ea typeface="Calibri"/>
+                <a:cs typeface="Calibri"/>
+              </a:rPr>
+              <a:t>, … and the only thing that changes are: its position in the picture, and the background. Since CNNs are invariant to the object's position in the picture, in reality, the only thing that really changes is the background. So, if we replace a training example that has all these characteristics with a flipped image of </a:t>
             </a:r>
             <a:r>
               <a:rPr lang="en-US" sz="1200" dirty="0" err="1">
@@ -14334,13 +14208,10 @@
                 <a:ea typeface="Calibri"/>
                 <a:cs typeface="Calibri"/>
               </a:rPr>
-              <a:t>/test time by adding unnecessary noise, which hurts our model's performance (specially in the case of color changes and grayscale since, as explored in task 1, the color is one of the dominant factors in identifying a Pokémon's type).</a:t>
-            </a:r>
-          </a:p>
-          <a:p>
-            <a:pPr algn="ctr"/>
-            <a:r>
-              <a:rPr lang="en-US" sz="1200" dirty="0">
+              <a:t>/test time by adding unnecessary noise, which hurts our model's performance (specially in the case of </a:t>
+            </a:r>
+            <a:r>
+              <a:rPr lang="en-US" sz="1200" dirty="0" err="1">
                 <a:solidFill>
                   <a:srgbClr val="0D1B2A"/>
                 </a:solidFill>
@@ -14348,8 +14219,194 @@
                 <a:ea typeface="Calibri"/>
                 <a:cs typeface="Calibri"/>
               </a:rPr>
-              <a:t>Even though we're not trying to identify the Pokémon itself, but its type, this reasoning can be applied.</a:t>
-            </a:r>
+              <a:t>colour</a:t>
+            </a:r>
+            <a:r>
+              <a:rPr lang="en-US" sz="1200" dirty="0">
+                <a:solidFill>
+                  <a:srgbClr val="0D1B2A"/>
+                </a:solidFill>
+                <a:latin typeface="Calibri"/>
+                <a:ea typeface="Calibri"/>
+                <a:cs typeface="Calibri"/>
+              </a:rPr>
+              <a:t> changes and grayscale since, as explored in task 1, the </a:t>
+            </a:r>
+            <a:r>
+              <a:rPr lang="en-US" sz="1200" dirty="0" err="1">
+                <a:solidFill>
+                  <a:srgbClr val="0D1B2A"/>
+                </a:solidFill>
+                <a:latin typeface="Calibri"/>
+                <a:ea typeface="Calibri"/>
+                <a:cs typeface="Calibri"/>
+              </a:rPr>
+              <a:t>colour</a:t>
+            </a:r>
+            <a:r>
+              <a:rPr lang="en-US" sz="1200" dirty="0">
+                <a:solidFill>
+                  <a:srgbClr val="0D1B2A"/>
+                </a:solidFill>
+                <a:latin typeface="Calibri"/>
+                <a:ea typeface="Calibri"/>
+                <a:cs typeface="Calibri"/>
+              </a:rPr>
+              <a:t> is one of the dominant factors in identifying a </a:t>
+            </a:r>
+            <a:r>
+              <a:rPr lang="en-US" sz="1200" dirty="0" err="1">
+                <a:solidFill>
+                  <a:srgbClr val="0D1B2A"/>
+                </a:solidFill>
+                <a:latin typeface="Calibri"/>
+                <a:ea typeface="Calibri"/>
+                <a:cs typeface="Calibri"/>
+              </a:rPr>
+              <a:t>pokemon's</a:t>
+            </a:r>
+            <a:r>
+              <a:rPr lang="en-US" sz="1200" dirty="0">
+                <a:solidFill>
+                  <a:srgbClr val="0D1B2A"/>
+                </a:solidFill>
+                <a:latin typeface="Calibri"/>
+                <a:ea typeface="Calibri"/>
+                <a:cs typeface="Calibri"/>
+              </a:rPr>
+              <a:t> type).</a:t>
+            </a:r>
+          </a:p>
+          <a:p>
+            <a:pPr algn="ctr"/>
+            <a:r>
+              <a:rPr lang="en-US" sz="1200" dirty="0">
+                <a:solidFill>
+                  <a:srgbClr val="0D1B2A"/>
+                </a:solidFill>
+                <a:latin typeface="Calibri"/>
+                <a:ea typeface="Calibri"/>
+                <a:cs typeface="Calibri"/>
+              </a:rPr>
+              <a:t>Even though we're not trying to identify the </a:t>
+            </a:r>
+            <a:r>
+              <a:rPr lang="en-US" sz="1200" dirty="0" err="1">
+                <a:solidFill>
+                  <a:srgbClr val="0D1B2A"/>
+                </a:solidFill>
+                <a:latin typeface="Calibri"/>
+                <a:ea typeface="Calibri"/>
+                <a:cs typeface="Calibri"/>
+              </a:rPr>
+              <a:t>pokemon</a:t>
+            </a:r>
+            <a:r>
+              <a:rPr lang="en-US" sz="1200" dirty="0">
+                <a:solidFill>
+                  <a:srgbClr val="0D1B2A"/>
+                </a:solidFill>
+                <a:latin typeface="Calibri"/>
+                <a:ea typeface="Calibri"/>
+                <a:cs typeface="Calibri"/>
+              </a:rPr>
+              <a:t> itself, but its type, this reasoning can be applied.</a:t>
+            </a:r>
+          </a:p>
+        </p:txBody>
+      </p:sp>
+      <p:sp>
+        <p:nvSpPr>
+          <p:cNvPr id="7" name="Badge">
+            <a:extLst>
+              <a:ext uri="{FF2B5EF4-FFF2-40B4-BE49-F238E27FC236}">
+                <a16:creationId xmlns:a16="http://schemas.microsoft.com/office/drawing/2014/main" id="{F59433D5-7CF0-1EB2-A5B2-79EB4DA7484E}"/>
+              </a:ext>
+            </a:extLst>
+          </p:cNvPr>
+          <p:cNvSpPr/>
+          <p:nvPr/>
+        </p:nvSpPr>
+        <p:spPr>
+          <a:xfrm>
+            <a:off x="6936266" y="78999"/>
+            <a:ext cx="2051641" cy="348556"/>
+          </a:xfrm>
+          <a:prstGeom prst="rect">
+            <a:avLst/>
+          </a:prstGeom>
+          <a:solidFill>
+            <a:srgbClr val="1C3A52"/>
+          </a:solidFill>
+          <a:ln w="12700">
+            <a:solidFill>
+              <a:srgbClr val="1C3A52"/>
+            </a:solidFill>
+            <a:prstDash val="solid"/>
+          </a:ln>
+        </p:spPr>
+        <p:txBody>
+          <a:bodyPr lIns="91440" tIns="45720" rIns="91440" bIns="45720" anchor="t"/>
+          <a:lstStyle/>
+          <a:p>
+            <a:pPr algn="ctr"/>
+            <a:r>
+              <a:rPr lang="en-US" b="1">
+                <a:solidFill>
+                  <a:srgbClr val="FFFFFF"/>
+                </a:solidFill>
+              </a:rPr>
+              <a:t>CNN MODEL DEV</a:t>
+            </a:r>
+            <a:endParaRPr lang="en-US" b="1"/>
+          </a:p>
+        </p:txBody>
+      </p:sp>
+      <p:sp>
+        <p:nvSpPr>
+          <p:cNvPr id="17" name="NumCircle">
+            <a:extLst>
+              <a:ext uri="{FF2B5EF4-FFF2-40B4-BE49-F238E27FC236}">
+                <a16:creationId xmlns:a16="http://schemas.microsoft.com/office/drawing/2014/main" id="{500B4D26-2D6F-A6A2-6FD0-DB96D3A3D21F}"/>
+              </a:ext>
+            </a:extLst>
+          </p:cNvPr>
+          <p:cNvSpPr/>
+          <p:nvPr/>
+        </p:nvSpPr>
+        <p:spPr>
+          <a:xfrm>
+            <a:off x="6080788" y="33312"/>
+            <a:ext cx="857580" cy="422479"/>
+          </a:xfrm>
+          <a:prstGeom prst="roundRect">
+            <a:avLst/>
+          </a:prstGeom>
+        </p:spPr>
+        <p:style>
+          <a:lnRef idx="0">
+            <a:schemeClr val="accent1"/>
+          </a:lnRef>
+          <a:fillRef idx="3">
+            <a:schemeClr val="accent1"/>
+          </a:fillRef>
+          <a:effectRef idx="3">
+            <a:schemeClr val="accent1"/>
+          </a:effectRef>
+          <a:fontRef idx="minor">
+            <a:schemeClr val="lt1"/>
+          </a:fontRef>
+        </p:style>
+        <p:txBody>
+          <a:bodyPr lIns="91440" tIns="45720" rIns="91440" bIns="45720" rtlCol="0" anchor="ctr"/>
+          <a:lstStyle/>
+          <a:p>
+            <a:pPr algn="ctr"/>
+            <a:r>
+              <a:rPr lang="en-US" sz="2800" b="1"/>
+              <a:t>2.1</a:t>
+            </a:r>
+            <a:endParaRPr lang="en-US" sz="2800" b="1" dirty="0"/>
           </a:p>
         </p:txBody>
       </p:sp>
@@ -14429,53 +14486,6 @@
       </p:sp>
       <p:sp>
         <p:nvSpPr>
-          <p:cNvPr id="3" name="Badge">
-            <a:extLst>
-              <a:ext uri="{FF2B5EF4-FFF2-40B4-BE49-F238E27FC236}">
-                <a16:creationId xmlns:a16="http://schemas.microsoft.com/office/drawing/2014/main" id="{67E573CD-D168-C91A-2665-4C531A2E637F}"/>
-              </a:ext>
-            </a:extLst>
-          </p:cNvPr>
-          <p:cNvSpPr/>
-          <p:nvPr/>
-        </p:nvSpPr>
-        <p:spPr>
-          <a:xfrm>
-            <a:off x="7498079" y="82296"/>
-            <a:ext cx="1557633" cy="329184"/>
-          </a:xfrm>
-          <a:prstGeom prst="rect">
-            <a:avLst/>
-          </a:prstGeom>
-          <a:solidFill>
-            <a:srgbClr val="1C3A52"/>
-          </a:solidFill>
-          <a:ln w="12700">
-            <a:solidFill>
-              <a:srgbClr val="1C3A52"/>
-            </a:solidFill>
-            <a:prstDash val="solid"/>
-          </a:ln>
-        </p:spPr>
-        <p:txBody>
-          <a:bodyPr/>
-          <a:lstStyle/>
-          <a:p>
-            <a:pPr algn="ctr"/>
-            <a:r>
-              <a:rPr lang="en-US" b="1" dirty="0">
-                <a:solidFill>
-                  <a:srgbClr val="FFFFFF"/>
-                </a:solidFill>
-              </a:rPr>
-              <a:t>MODEL DEV</a:t>
-            </a:r>
-            <a:endParaRPr lang="en-US" b="1" dirty="0"/>
-          </a:p>
-        </p:txBody>
-      </p:sp>
-      <p:sp>
-        <p:nvSpPr>
           <p:cNvPr id="5" name="Title">
             <a:extLst>
               <a:ext uri="{FF2B5EF4-FFF2-40B4-BE49-F238E27FC236}">
@@ -14842,53 +14852,6 @@
                 <a:cs typeface="Calibri"/>
               </a:rPr>
               <a:t> score 1.0 be combined together to get a worse performance? (much likely not... but let's test it anyway)</a:t>
-            </a:r>
-          </a:p>
-        </p:txBody>
-      </p:sp>
-      <p:sp>
-        <p:nvSpPr>
-          <p:cNvPr id="9" name="NumCircle">
-            <a:extLst>
-              <a:ext uri="{FF2B5EF4-FFF2-40B4-BE49-F238E27FC236}">
-                <a16:creationId xmlns:a16="http://schemas.microsoft.com/office/drawing/2014/main" id="{3FC19CEC-77FF-F306-BE08-9D032A075334}"/>
-              </a:ext>
-            </a:extLst>
-          </p:cNvPr>
-          <p:cNvSpPr/>
-          <p:nvPr/>
-        </p:nvSpPr>
-        <p:spPr>
-          <a:xfrm>
-            <a:off x="7088176" y="4253"/>
-            <a:ext cx="470123" cy="470912"/>
-          </a:xfrm>
-          <a:prstGeom prst="roundRect">
-            <a:avLst/>
-          </a:prstGeom>
-        </p:spPr>
-        <p:style>
-          <a:lnRef idx="0">
-            <a:schemeClr val="accent1"/>
-          </a:lnRef>
-          <a:fillRef idx="3">
-            <a:schemeClr val="accent1"/>
-          </a:fillRef>
-          <a:effectRef idx="3">
-            <a:schemeClr val="accent1"/>
-          </a:effectRef>
-          <a:fontRef idx="minor">
-            <a:schemeClr val="lt1"/>
-          </a:fontRef>
-        </p:style>
-        <p:txBody>
-          <a:bodyPr lIns="91440" tIns="45720" rIns="91440" bIns="45720" rtlCol="0" anchor="ctr"/>
-          <a:lstStyle/>
-          <a:p>
-            <a:pPr algn="ctr"/>
-            <a:r>
-              <a:rPr lang="en-US" sz="2800" b="1"/>
-              <a:t>1</a:t>
             </a:r>
           </a:p>
         </p:txBody>
@@ -14968,6 +14931,101 @@
               </a:solidFill>
               <a:latin typeface="Trebuchet MS"/>
             </a:endParaRPr>
+          </a:p>
+        </p:txBody>
+      </p:sp>
+      <p:sp>
+        <p:nvSpPr>
+          <p:cNvPr id="8" name="Badge">
+            <a:extLst>
+              <a:ext uri="{FF2B5EF4-FFF2-40B4-BE49-F238E27FC236}">
+                <a16:creationId xmlns:a16="http://schemas.microsoft.com/office/drawing/2014/main" id="{83E50EB0-1D58-FD60-142B-D1FFC795D9F6}"/>
+              </a:ext>
+            </a:extLst>
+          </p:cNvPr>
+          <p:cNvSpPr/>
+          <p:nvPr/>
+        </p:nvSpPr>
+        <p:spPr>
+          <a:xfrm>
+            <a:off x="6936266" y="78999"/>
+            <a:ext cx="2051641" cy="348556"/>
+          </a:xfrm>
+          <a:prstGeom prst="rect">
+            <a:avLst/>
+          </a:prstGeom>
+          <a:solidFill>
+            <a:srgbClr val="1C3A52"/>
+          </a:solidFill>
+          <a:ln w="12700">
+            <a:solidFill>
+              <a:srgbClr val="1C3A52"/>
+            </a:solidFill>
+            <a:prstDash val="solid"/>
+          </a:ln>
+        </p:spPr>
+        <p:txBody>
+          <a:bodyPr lIns="91440" tIns="45720" rIns="91440" bIns="45720" anchor="t"/>
+          <a:lstStyle/>
+          <a:p>
+            <a:pPr algn="ctr"/>
+            <a:r>
+              <a:rPr lang="en-US" b="1">
+                <a:solidFill>
+                  <a:srgbClr val="FFFFFF"/>
+                </a:solidFill>
+              </a:rPr>
+              <a:t>CNN MODEL DEV</a:t>
+            </a:r>
+            <a:endParaRPr lang="en-US" b="1"/>
+          </a:p>
+        </p:txBody>
+      </p:sp>
+      <p:sp>
+        <p:nvSpPr>
+          <p:cNvPr id="13" name="NumCircle">
+            <a:extLst>
+              <a:ext uri="{FF2B5EF4-FFF2-40B4-BE49-F238E27FC236}">
+                <a16:creationId xmlns:a16="http://schemas.microsoft.com/office/drawing/2014/main" id="{6570A38E-445A-3FE5-88A3-9316311152D3}"/>
+              </a:ext>
+            </a:extLst>
+          </p:cNvPr>
+          <p:cNvSpPr/>
+          <p:nvPr/>
+        </p:nvSpPr>
+        <p:spPr>
+          <a:xfrm>
+            <a:off x="6080788" y="33312"/>
+            <a:ext cx="857580" cy="422479"/>
+          </a:xfrm>
+          <a:prstGeom prst="roundRect">
+            <a:avLst/>
+          </a:prstGeom>
+        </p:spPr>
+        <p:style>
+          <a:lnRef idx="0">
+            <a:schemeClr val="accent1"/>
+          </a:lnRef>
+          <a:fillRef idx="3">
+            <a:schemeClr val="accent1"/>
+          </a:fillRef>
+          <a:effectRef idx="3">
+            <a:schemeClr val="accent1"/>
+          </a:effectRef>
+          <a:fontRef idx="minor">
+            <a:schemeClr val="lt1"/>
+          </a:fontRef>
+        </p:style>
+        <p:txBody>
+          <a:bodyPr lIns="91440" tIns="45720" rIns="91440" bIns="45720" rtlCol="0" anchor="ctr"/>
+          <a:lstStyle/>
+          <a:p>
+            <a:pPr algn="ctr"/>
+            <a:r>
+              <a:rPr lang="en-US" sz="2800" b="1"/>
+              <a:t>2.1</a:t>
+            </a:r>
+            <a:endParaRPr lang="en-US" sz="2800" b="1" dirty="0"/>
           </a:p>
         </p:txBody>
       </p:sp>
@@ -15047,53 +15105,6 @@
       </p:sp>
       <p:sp>
         <p:nvSpPr>
-          <p:cNvPr id="3" name="Badge">
-            <a:extLst>
-              <a:ext uri="{FF2B5EF4-FFF2-40B4-BE49-F238E27FC236}">
-                <a16:creationId xmlns:a16="http://schemas.microsoft.com/office/drawing/2014/main" id="{39AA655E-DFCA-46F8-1411-C263A94E8474}"/>
-              </a:ext>
-            </a:extLst>
-          </p:cNvPr>
-          <p:cNvSpPr/>
-          <p:nvPr/>
-        </p:nvSpPr>
-        <p:spPr>
-          <a:xfrm>
-            <a:off x="7498079" y="82296"/>
-            <a:ext cx="1557633" cy="329184"/>
-          </a:xfrm>
-          <a:prstGeom prst="rect">
-            <a:avLst/>
-          </a:prstGeom>
-          <a:solidFill>
-            <a:srgbClr val="1C3A52"/>
-          </a:solidFill>
-          <a:ln w="12700">
-            <a:solidFill>
-              <a:srgbClr val="1C3A52"/>
-            </a:solidFill>
-            <a:prstDash val="solid"/>
-          </a:ln>
-        </p:spPr>
-        <p:txBody>
-          <a:bodyPr/>
-          <a:lstStyle/>
-          <a:p>
-            <a:pPr algn="ctr"/>
-            <a:r>
-              <a:rPr lang="en-US" b="1" dirty="0">
-                <a:solidFill>
-                  <a:srgbClr val="FFFFFF"/>
-                </a:solidFill>
-              </a:rPr>
-              <a:t>MODEL DEV</a:t>
-            </a:r>
-            <a:endParaRPr lang="en-US" b="1" dirty="0"/>
-          </a:p>
-        </p:txBody>
-      </p:sp>
-      <p:sp>
-        <p:nvSpPr>
           <p:cNvPr id="5" name="Title">
             <a:extLst>
               <a:ext uri="{FF2B5EF4-FFF2-40B4-BE49-F238E27FC236}">
@@ -15227,53 +15238,6 @@
                 <a:cs typeface="Calibri"/>
               </a:rPr>
               <a:t>As it turns out, [I + K] still gets a validation score of 1.0 as we expected, but [C + H]'s performance stays relatively similar to just using H (with some variance), even though C got a weight of 0.4 and H 0.6. C's bad performance is not enough to drag the ensemble's performance down</a:t>
-            </a:r>
-          </a:p>
-        </p:txBody>
-      </p:sp>
-      <p:sp>
-        <p:nvSpPr>
-          <p:cNvPr id="9" name="NumCircle">
-            <a:extLst>
-              <a:ext uri="{FF2B5EF4-FFF2-40B4-BE49-F238E27FC236}">
-                <a16:creationId xmlns:a16="http://schemas.microsoft.com/office/drawing/2014/main" id="{D14A1906-5B7B-814C-FBC6-9376987DB7A9}"/>
-              </a:ext>
-            </a:extLst>
-          </p:cNvPr>
-          <p:cNvSpPr/>
-          <p:nvPr/>
-        </p:nvSpPr>
-        <p:spPr>
-          <a:xfrm>
-            <a:off x="7088176" y="4253"/>
-            <a:ext cx="470123" cy="470912"/>
-          </a:xfrm>
-          <a:prstGeom prst="roundRect">
-            <a:avLst/>
-          </a:prstGeom>
-        </p:spPr>
-        <p:style>
-          <a:lnRef idx="0">
-            <a:schemeClr val="accent1"/>
-          </a:lnRef>
-          <a:fillRef idx="3">
-            <a:schemeClr val="accent1"/>
-          </a:fillRef>
-          <a:effectRef idx="3">
-            <a:schemeClr val="accent1"/>
-          </a:effectRef>
-          <a:fontRef idx="minor">
-            <a:schemeClr val="lt1"/>
-          </a:fontRef>
-        </p:style>
-        <p:txBody>
-          <a:bodyPr lIns="91440" tIns="45720" rIns="91440" bIns="45720" rtlCol="0" anchor="ctr"/>
-          <a:lstStyle/>
-          <a:p>
-            <a:pPr algn="ctr"/>
-            <a:r>
-              <a:rPr lang="en-US" sz="2800" b="1"/>
-              <a:t>1</a:t>
             </a:r>
           </a:p>
         </p:txBody>
@@ -15309,6 +15273,101 @@
           </a:prstGeom>
         </p:spPr>
       </p:pic>
+      <p:sp>
+        <p:nvSpPr>
+          <p:cNvPr id="6" name="Badge">
+            <a:extLst>
+              <a:ext uri="{FF2B5EF4-FFF2-40B4-BE49-F238E27FC236}">
+                <a16:creationId xmlns:a16="http://schemas.microsoft.com/office/drawing/2014/main" id="{87DF1068-D9E0-F0FA-ED52-030DA79B0F34}"/>
+              </a:ext>
+            </a:extLst>
+          </p:cNvPr>
+          <p:cNvSpPr/>
+          <p:nvPr/>
+        </p:nvSpPr>
+        <p:spPr>
+          <a:xfrm>
+            <a:off x="6936266" y="78999"/>
+            <a:ext cx="2051641" cy="348556"/>
+          </a:xfrm>
+          <a:prstGeom prst="rect">
+            <a:avLst/>
+          </a:prstGeom>
+          <a:solidFill>
+            <a:srgbClr val="1C3A52"/>
+          </a:solidFill>
+          <a:ln w="12700">
+            <a:solidFill>
+              <a:srgbClr val="1C3A52"/>
+            </a:solidFill>
+            <a:prstDash val="solid"/>
+          </a:ln>
+        </p:spPr>
+        <p:txBody>
+          <a:bodyPr lIns="91440" tIns="45720" rIns="91440" bIns="45720" anchor="t"/>
+          <a:lstStyle/>
+          <a:p>
+            <a:pPr algn="ctr"/>
+            <a:r>
+              <a:rPr lang="en-US" b="1">
+                <a:solidFill>
+                  <a:srgbClr val="FFFFFF"/>
+                </a:solidFill>
+              </a:rPr>
+              <a:t>CNN MODEL DEV</a:t>
+            </a:r>
+            <a:endParaRPr lang="en-US" b="1"/>
+          </a:p>
+        </p:txBody>
+      </p:sp>
+      <p:sp>
+        <p:nvSpPr>
+          <p:cNvPr id="8" name="NumCircle">
+            <a:extLst>
+              <a:ext uri="{FF2B5EF4-FFF2-40B4-BE49-F238E27FC236}">
+                <a16:creationId xmlns:a16="http://schemas.microsoft.com/office/drawing/2014/main" id="{7B9FB318-E678-5F63-DCF2-55F82BC94294}"/>
+              </a:ext>
+            </a:extLst>
+          </p:cNvPr>
+          <p:cNvSpPr/>
+          <p:nvPr/>
+        </p:nvSpPr>
+        <p:spPr>
+          <a:xfrm>
+            <a:off x="6080788" y="33312"/>
+            <a:ext cx="857580" cy="422479"/>
+          </a:xfrm>
+          <a:prstGeom prst="roundRect">
+            <a:avLst/>
+          </a:prstGeom>
+        </p:spPr>
+        <p:style>
+          <a:lnRef idx="0">
+            <a:schemeClr val="accent1"/>
+          </a:lnRef>
+          <a:fillRef idx="3">
+            <a:schemeClr val="accent1"/>
+          </a:fillRef>
+          <a:effectRef idx="3">
+            <a:schemeClr val="accent1"/>
+          </a:effectRef>
+          <a:fontRef idx="minor">
+            <a:schemeClr val="lt1"/>
+          </a:fontRef>
+        </p:style>
+        <p:txBody>
+          <a:bodyPr lIns="91440" tIns="45720" rIns="91440" bIns="45720" rtlCol="0" anchor="ctr"/>
+          <a:lstStyle/>
+          <a:p>
+            <a:pPr algn="ctr"/>
+            <a:r>
+              <a:rPr lang="en-US" sz="2800" b="1"/>
+              <a:t>2.1</a:t>
+            </a:r>
+            <a:endParaRPr lang="en-US" sz="2800" b="1" dirty="0"/>
+          </a:p>
+        </p:txBody>
+      </p:sp>
     </p:spTree>
     <p:extLst>
       <p:ext uri="{BB962C8B-B14F-4D97-AF65-F5344CB8AC3E}">
@@ -15373,47 +15432,6 @@
       </p:sp>
       <p:sp>
         <p:nvSpPr>
-          <p:cNvPr id="3" name="Badge"/>
-          <p:cNvSpPr/>
-          <p:nvPr/>
-        </p:nvSpPr>
-        <p:spPr>
-          <a:xfrm>
-            <a:off x="7498079" y="82296"/>
-            <a:ext cx="1557633" cy="329184"/>
-          </a:xfrm>
-          <a:prstGeom prst="rect">
-            <a:avLst/>
-          </a:prstGeom>
-          <a:solidFill>
-            <a:srgbClr val="1C3A52"/>
-          </a:solidFill>
-          <a:ln w="12700">
-            <a:solidFill>
-              <a:srgbClr val="1C3A52"/>
-            </a:solidFill>
-            <a:prstDash val="solid"/>
-          </a:ln>
-        </p:spPr>
-        <p:txBody>
-          <a:bodyPr/>
-          <a:lstStyle/>
-          <a:p>
-            <a:pPr algn="ctr"/>
-            <a:r>
-              <a:rPr lang="en-US" b="1" dirty="0">
-                <a:solidFill>
-                  <a:srgbClr val="FFFFFF"/>
-                </a:solidFill>
-              </a:rPr>
-              <a:t>MODEL DEV</a:t>
-            </a:r>
-            <a:endParaRPr lang="en-US" b="1" dirty="0"/>
-          </a:p>
-        </p:txBody>
-      </p:sp>
-      <p:sp>
-        <p:nvSpPr>
           <p:cNvPr id="5" name="Title"/>
           <p:cNvSpPr/>
           <p:nvPr/>
@@ -15838,7 +15856,7 @@
               <a:buNone/>
             </a:pPr>
             <a:r>
-              <a:rPr lang="en-US" sz="1400" b="1" dirty="0">
+              <a:rPr lang="en-US" sz="1400" b="1">
                 <a:solidFill>
                   <a:srgbClr val="C0392B"/>
                 </a:solidFill>
@@ -15852,7 +15870,7 @@
               <a:buChar char="✗"/>
             </a:pPr>
             <a:r>
-              <a:rPr lang="en-US" sz="1100" b="1" dirty="0">
+              <a:rPr lang="en-US" sz="1100" b="1">
                 <a:solidFill>
                   <a:srgbClr val="C0392B"/>
                 </a:solidFill>
@@ -15885,7 +15903,29 @@
                 <a:ea typeface="Calibri"/>
                 <a:cs typeface="Calibri"/>
               </a:rPr>
-              <a:t>0.0149 F1; the Pokémons are always the same way, the only thing that changes are the background at the position; CNNs are translation invariant so the only real thing that changes for our network is the background. The more aggressive the augmentation is the bigger the decay in performance</a:t>
+              <a:t>0.0149 F1; the </a:t>
+            </a:r>
+            <a:r>
+              <a:rPr lang="en-US" sz="1000" dirty="0" err="1">
+                <a:solidFill>
+                  <a:srgbClr val="1A2B3C"/>
+                </a:solidFill>
+                <a:latin typeface="Calibri"/>
+                <a:ea typeface="Calibri"/>
+                <a:cs typeface="Calibri"/>
+              </a:rPr>
+              <a:t>pokemons</a:t>
+            </a:r>
+            <a:r>
+              <a:rPr lang="en-US" sz="1000" dirty="0">
+                <a:solidFill>
+                  <a:srgbClr val="1A2B3C"/>
+                </a:solidFill>
+                <a:latin typeface="Calibri"/>
+                <a:ea typeface="Calibri"/>
+                <a:cs typeface="Calibri"/>
+              </a:rPr>
+              <a:t> are always the same way, the only thing that changes are the background at the position; CNNs are translation invariant so the only real thing that changes for our network is the background. The more aggressive the augmentation is the bigger the decay in performance</a:t>
             </a:r>
           </a:p>
           <a:p>
@@ -15893,7 +15933,7 @@
               <a:buChar char="✗"/>
             </a:pPr>
             <a:r>
-              <a:rPr lang="en-US" sz="1100" b="1" dirty="0">
+              <a:rPr lang="en-US" sz="1100" b="1">
                 <a:solidFill>
                   <a:srgbClr val="C0392B"/>
                 </a:solidFill>
@@ -15903,6 +15943,14 @@
               </a:rPr>
               <a:t>Many FC layers</a:t>
             </a:r>
+            <a:endParaRPr lang="en-US" sz="1100" b="1" dirty="0">
+              <a:solidFill>
+                <a:srgbClr val="C0392B"/>
+              </a:solidFill>
+              <a:latin typeface="Calibri"/>
+              <a:ea typeface="Calibri"/>
+              <a:cs typeface="Calibri"/>
+            </a:endParaRPr>
           </a:p>
           <a:p>
             <a:pPr lvl="1"/>
@@ -15915,7 +15963,29 @@
                 <a:ea typeface="Calibri"/>
                 <a:cs typeface="Calibri"/>
               </a:rPr>
-              <a:t>- 3 or more FC layers starts giving us a slower training and worse results (parameters increase a lot if our convolution channels are wide); keep it simple and let convolutional layers learn the information, then pass them to minimal FC layers</a:t>
+              <a:t>- 3 or more FC layers starts giving us a slower training and </a:t>
+            </a:r>
+            <a:r>
+              <a:rPr lang="en-US" sz="1000">
+                <a:solidFill>
+                  <a:srgbClr val="1A2B3C"/>
+                </a:solidFill>
+                <a:latin typeface="Calibri"/>
+                <a:ea typeface="Calibri"/>
+                <a:cs typeface="Calibri"/>
+              </a:rPr>
+              <a:t>worse results (parameters increase a lot if our convolution channels are wide); keep it simple and </a:t>
+            </a:r>
+            <a:r>
+              <a:rPr lang="en-US" sz="1000" dirty="0">
+                <a:solidFill>
+                  <a:srgbClr val="1A2B3C"/>
+                </a:solidFill>
+                <a:latin typeface="Calibri"/>
+                <a:ea typeface="Calibri"/>
+                <a:cs typeface="Calibri"/>
+              </a:rPr>
+              <a:t>let convolutional layers learn the information, then pass them to minimal FC layers</a:t>
             </a:r>
           </a:p>
           <a:p>
@@ -15984,7 +16054,7 @@
               <a:buChar char="✗"/>
             </a:pPr>
             <a:r>
-              <a:rPr lang="en-US" sz="1100" b="1" dirty="0">
+              <a:rPr lang="en-US" sz="1100" b="1">
                 <a:solidFill>
                   <a:srgbClr val="C0392B"/>
                 </a:solidFill>
@@ -15994,7 +16064,7 @@
               </a:rPr>
               <a:t>Ensembles</a:t>
             </a:r>
-            <a:endParaRPr lang="en-US" sz="1100" b="1" dirty="0">
+            <a:endParaRPr lang="en-US" sz="1100" b="1">
               <a:solidFill>
                 <a:srgbClr val="C0392B"/>
               </a:solidFill>
@@ -16025,7 +16095,29 @@
                 <a:ea typeface="Calibri"/>
                 <a:cs typeface="Calibri"/>
               </a:rPr>
-              <a:t>Ensembled models could not achieve a better performance</a:t>
+              <a:t>Ensembled models </a:t>
+            </a:r>
+            <a:r>
+              <a:rPr lang="en-US" sz="1000">
+                <a:solidFill>
+                  <a:srgbClr val="1A2B3C"/>
+                </a:solidFill>
+                <a:latin typeface="Calibri"/>
+                <a:ea typeface="Calibri"/>
+                <a:cs typeface="Calibri"/>
+              </a:rPr>
+              <a:t>could not</a:t>
+            </a:r>
+            <a:r>
+              <a:rPr lang="en-US" sz="1000" dirty="0">
+                <a:solidFill>
+                  <a:srgbClr val="1A2B3C"/>
+                </a:solidFill>
+                <a:latin typeface="Calibri"/>
+                <a:ea typeface="Calibri"/>
+                <a:cs typeface="Calibri"/>
+              </a:rPr>
+              <a:t> achieve a better performance</a:t>
             </a:r>
           </a:p>
           <a:p>
@@ -16033,7 +16125,7 @@
               <a:buChar char="✗"/>
             </a:pPr>
             <a:r>
-              <a:rPr lang="en-US" sz="1100" b="1" dirty="0">
+              <a:rPr lang="en-US" sz="1100" b="1">
                 <a:solidFill>
                   <a:srgbClr val="C0392B"/>
                 </a:solidFill>
@@ -16043,6 +16135,14 @@
               </a:rPr>
               <a:t>Label Smoothing</a:t>
             </a:r>
+            <a:endParaRPr lang="en-US" sz="1100" b="1" dirty="0">
+              <a:solidFill>
+                <a:srgbClr val="C0392B"/>
+              </a:solidFill>
+              <a:latin typeface="Calibri"/>
+              <a:ea typeface="Calibri"/>
+              <a:cs typeface="Calibri"/>
+            </a:endParaRPr>
           </a:p>
           <a:p>
             <a:pPr lvl="1"/>
@@ -16058,7 +16158,7 @@
               <a:t>- </a:t>
             </a:r>
             <a:r>
-              <a:rPr lang="en-US" sz="1000" dirty="0">
+              <a:rPr lang="en-US" sz="1000">
                 <a:solidFill>
                   <a:srgbClr val="1A2B3C"/>
                 </a:solidFill>
@@ -16084,10 +16184,10 @@
       </p:sp>
       <p:sp>
         <p:nvSpPr>
-          <p:cNvPr id="7" name="NumCircle">
+          <p:cNvPr id="6" name="Badge">
             <a:extLst>
               <a:ext uri="{FF2B5EF4-FFF2-40B4-BE49-F238E27FC236}">
-                <a16:creationId xmlns:a16="http://schemas.microsoft.com/office/drawing/2014/main" id="{7A802B6A-95BB-C879-9108-BFFAB4284599}"/>
+                <a16:creationId xmlns:a16="http://schemas.microsoft.com/office/drawing/2014/main" id="{84CBF970-9D0A-4F08-5800-044F2A4F4BE5}"/>
               </a:ext>
             </a:extLst>
           </p:cNvPr>
@@ -16096,8 +16196,55 @@
         </p:nvSpPr>
         <p:spPr>
           <a:xfrm>
-            <a:off x="7088176" y="4253"/>
-            <a:ext cx="470123" cy="470912"/>
+            <a:off x="6936266" y="78999"/>
+            <a:ext cx="2051641" cy="348556"/>
+          </a:xfrm>
+          <a:prstGeom prst="rect">
+            <a:avLst/>
+          </a:prstGeom>
+          <a:solidFill>
+            <a:srgbClr val="1C3A52"/>
+          </a:solidFill>
+          <a:ln w="12700">
+            <a:solidFill>
+              <a:srgbClr val="1C3A52"/>
+            </a:solidFill>
+            <a:prstDash val="solid"/>
+          </a:ln>
+        </p:spPr>
+        <p:txBody>
+          <a:bodyPr lIns="91440" tIns="45720" rIns="91440" bIns="45720" anchor="t"/>
+          <a:lstStyle/>
+          <a:p>
+            <a:pPr algn="ctr"/>
+            <a:r>
+              <a:rPr lang="en-US" b="1">
+                <a:solidFill>
+                  <a:srgbClr val="FFFFFF"/>
+                </a:solidFill>
+              </a:rPr>
+              <a:t>CNN MODEL DEV</a:t>
+            </a:r>
+            <a:endParaRPr lang="en-US" b="1"/>
+          </a:p>
+        </p:txBody>
+      </p:sp>
+      <p:sp>
+        <p:nvSpPr>
+          <p:cNvPr id="9" name="NumCircle">
+            <a:extLst>
+              <a:ext uri="{FF2B5EF4-FFF2-40B4-BE49-F238E27FC236}">
+                <a16:creationId xmlns:a16="http://schemas.microsoft.com/office/drawing/2014/main" id="{008643FF-96DF-75DD-EAED-8581A7B9887C}"/>
+              </a:ext>
+            </a:extLst>
+          </p:cNvPr>
+          <p:cNvSpPr/>
+          <p:nvPr/>
+        </p:nvSpPr>
+        <p:spPr>
+          <a:xfrm>
+            <a:off x="6080788" y="33312"/>
+            <a:ext cx="857580" cy="422479"/>
           </a:xfrm>
           <a:prstGeom prst="roundRect">
             <a:avLst/>
@@ -16124,8 +16271,9 @@
             <a:pPr algn="ctr"/>
             <a:r>
               <a:rPr lang="en-US" sz="2800" b="1"/>
-              <a:t>1</a:t>
-            </a:r>
+              <a:t>2.1</a:t>
+            </a:r>
+            <a:endParaRPr lang="en-US" sz="2800" b="1" dirty="0"/>
           </a:p>
         </p:txBody>
       </p:sp>
@@ -16188,47 +16336,6 @@
       </p:sp>
       <p:sp>
         <p:nvSpPr>
-          <p:cNvPr id="3" name="Badge"/>
-          <p:cNvSpPr/>
-          <p:nvPr/>
-        </p:nvSpPr>
-        <p:spPr>
-          <a:xfrm>
-            <a:off x="7498079" y="82296"/>
-            <a:ext cx="1557633" cy="329184"/>
-          </a:xfrm>
-          <a:prstGeom prst="rect">
-            <a:avLst/>
-          </a:prstGeom>
-          <a:solidFill>
-            <a:srgbClr val="1C3A52"/>
-          </a:solidFill>
-          <a:ln w="12700">
-            <a:solidFill>
-              <a:srgbClr val="1C3A52"/>
-            </a:solidFill>
-            <a:prstDash val="solid"/>
-          </a:ln>
-        </p:spPr>
-        <p:txBody>
-          <a:bodyPr/>
-          <a:lstStyle/>
-          <a:p>
-            <a:pPr algn="ctr"/>
-            <a:r>
-              <a:rPr lang="en-US" b="1" dirty="0">
-                <a:solidFill>
-                  <a:srgbClr val="FFFFFF"/>
-                </a:solidFill>
-              </a:rPr>
-              <a:t>MODEL DEV</a:t>
-            </a:r>
-            <a:endParaRPr lang="en-US" b="1" dirty="0"/>
-          </a:p>
-        </p:txBody>
-      </p:sp>
-      <p:sp>
-        <p:nvSpPr>
           <p:cNvPr id="5" name="Title"/>
           <p:cNvSpPr/>
           <p:nvPr/>
@@ -16521,7 +16628,7 @@
           <a:lstStyle/>
           <a:p>
             <a:r>
-              <a:rPr lang="en-US" sz="1300" b="1" dirty="0">
+              <a:rPr lang="en-US" sz="1300" b="1">
                 <a:solidFill>
                   <a:srgbClr val="00A896"/>
                 </a:solidFill>
@@ -16574,7 +16681,29 @@
                 <a:ea typeface="Calibri"/>
                 <a:cs typeface="Calibri"/>
               </a:rPr>
-              <a:t>This problem screams CNN! The dataset has images, In which the Pokémons always appear in the same way, only changing their position and the background: CNNs are invariant to translations! MLPs lose all sense of spatial structure</a:t>
+              <a:t>This problem screams CNN! The dataset has images, In which the </a:t>
+            </a:r>
+            <a:r>
+              <a:rPr lang="en-US" sz="1100" dirty="0" err="1">
+                <a:solidFill>
+                  <a:schemeClr val="bg1"/>
+                </a:solidFill>
+                <a:latin typeface="Calibri"/>
+                <a:ea typeface="Calibri"/>
+                <a:cs typeface="Calibri"/>
+              </a:rPr>
+              <a:t>pokemons</a:t>
+            </a:r>
+            <a:r>
+              <a:rPr lang="en-US" sz="1100" dirty="0">
+                <a:solidFill>
+                  <a:schemeClr val="bg1"/>
+                </a:solidFill>
+                <a:latin typeface="Calibri"/>
+                <a:ea typeface="Calibri"/>
+                <a:cs typeface="Calibri"/>
+              </a:rPr>
+              <a:t> always appear in the same way, only changing their position and the background: CNNs are invariant to translations! MLPs lose all sense of spatial structure</a:t>
             </a:r>
           </a:p>
           <a:p>
@@ -16590,54 +16719,21 @@
                 <a:ea typeface="Calibri"/>
                 <a:cs typeface="Calibri"/>
               </a:rPr>
-              <a:t>Next: Transfer Learning and Fine-Tuning (Task 3) - can we achieve the same performance by replacing the classifier head of a pretrained model?</a:t>
-            </a:r>
-          </a:p>
-        </p:txBody>
-      </p:sp>
-      <p:sp>
-        <p:nvSpPr>
-          <p:cNvPr id="10" name="NumCircle">
-            <a:extLst>
-              <a:ext uri="{FF2B5EF4-FFF2-40B4-BE49-F238E27FC236}">
-                <a16:creationId xmlns:a16="http://schemas.microsoft.com/office/drawing/2014/main" id="{95FB885E-C505-9EB3-195B-57A20793EF10}"/>
-              </a:ext>
-            </a:extLst>
-          </p:cNvPr>
-          <p:cNvSpPr/>
-          <p:nvPr/>
-        </p:nvSpPr>
-        <p:spPr>
-          <a:xfrm>
-            <a:off x="7088176" y="4253"/>
-            <a:ext cx="470123" cy="470912"/>
-          </a:xfrm>
-          <a:prstGeom prst="roundRect">
-            <a:avLst/>
-          </a:prstGeom>
-        </p:spPr>
-        <p:style>
-          <a:lnRef idx="0">
-            <a:schemeClr val="accent1"/>
-          </a:lnRef>
-          <a:fillRef idx="3">
-            <a:schemeClr val="accent1"/>
-          </a:fillRef>
-          <a:effectRef idx="3">
-            <a:schemeClr val="accent1"/>
-          </a:effectRef>
-          <a:fontRef idx="minor">
-            <a:schemeClr val="lt1"/>
-          </a:fontRef>
-        </p:style>
-        <p:txBody>
-          <a:bodyPr lIns="91440" tIns="45720" rIns="91440" bIns="45720" rtlCol="0" anchor="ctr"/>
-          <a:lstStyle/>
-          <a:p>
-            <a:pPr algn="ctr"/>
-            <a:r>
-              <a:rPr lang="en-US" sz="2800" b="1"/>
-              <a:t>1</a:t>
+              <a:t>Next: Transfer Learning and Fine-Tuning (Task 3) - can we achieve the </a:t>
+            </a:r>
+            <a:r>
+              <a:rPr lang="en-US" sz="1100" b="1">
+                <a:solidFill>
+                  <a:schemeClr val="accent2">
+                    <a:lumMod val="40000"/>
+                    <a:lumOff val="60000"/>
+                  </a:schemeClr>
+                </a:solidFill>
+                <a:latin typeface="Calibri"/>
+                <a:ea typeface="Calibri"/>
+                <a:cs typeface="Calibri"/>
+              </a:rPr>
+              <a:t>same performance by replacing the classifier head of a pretrained model?</a:t>
             </a:r>
           </a:p>
         </p:txBody>
@@ -16673,6 +16769,101 @@
           </a:prstGeom>
         </p:spPr>
       </p:pic>
+      <p:sp>
+        <p:nvSpPr>
+          <p:cNvPr id="7" name="Badge">
+            <a:extLst>
+              <a:ext uri="{FF2B5EF4-FFF2-40B4-BE49-F238E27FC236}">
+                <a16:creationId xmlns:a16="http://schemas.microsoft.com/office/drawing/2014/main" id="{D190A8B6-4D71-C6D2-7EBF-5791B007E9C0}"/>
+              </a:ext>
+            </a:extLst>
+          </p:cNvPr>
+          <p:cNvSpPr/>
+          <p:nvPr/>
+        </p:nvSpPr>
+        <p:spPr>
+          <a:xfrm>
+            <a:off x="6936266" y="78999"/>
+            <a:ext cx="2051641" cy="348556"/>
+          </a:xfrm>
+          <a:prstGeom prst="rect">
+            <a:avLst/>
+          </a:prstGeom>
+          <a:solidFill>
+            <a:srgbClr val="1C3A52"/>
+          </a:solidFill>
+          <a:ln w="12700">
+            <a:solidFill>
+              <a:srgbClr val="1C3A52"/>
+            </a:solidFill>
+            <a:prstDash val="solid"/>
+          </a:ln>
+        </p:spPr>
+        <p:txBody>
+          <a:bodyPr lIns="91440" tIns="45720" rIns="91440" bIns="45720" anchor="t"/>
+          <a:lstStyle/>
+          <a:p>
+            <a:pPr algn="ctr"/>
+            <a:r>
+              <a:rPr lang="en-US" b="1">
+                <a:solidFill>
+                  <a:srgbClr val="FFFFFF"/>
+                </a:solidFill>
+              </a:rPr>
+              <a:t>CNN MODEL DEV</a:t>
+            </a:r>
+            <a:endParaRPr lang="en-US" b="1"/>
+          </a:p>
+        </p:txBody>
+      </p:sp>
+      <p:sp>
+        <p:nvSpPr>
+          <p:cNvPr id="12" name="NumCircle">
+            <a:extLst>
+              <a:ext uri="{FF2B5EF4-FFF2-40B4-BE49-F238E27FC236}">
+                <a16:creationId xmlns:a16="http://schemas.microsoft.com/office/drawing/2014/main" id="{6A936187-BA62-E41B-488C-5D385A1E5971}"/>
+              </a:ext>
+            </a:extLst>
+          </p:cNvPr>
+          <p:cNvSpPr/>
+          <p:nvPr/>
+        </p:nvSpPr>
+        <p:spPr>
+          <a:xfrm>
+            <a:off x="6080788" y="33312"/>
+            <a:ext cx="857580" cy="422479"/>
+          </a:xfrm>
+          <a:prstGeom prst="roundRect">
+            <a:avLst/>
+          </a:prstGeom>
+        </p:spPr>
+        <p:style>
+          <a:lnRef idx="0">
+            <a:schemeClr val="accent1"/>
+          </a:lnRef>
+          <a:fillRef idx="3">
+            <a:schemeClr val="accent1"/>
+          </a:fillRef>
+          <a:effectRef idx="3">
+            <a:schemeClr val="accent1"/>
+          </a:effectRef>
+          <a:fontRef idx="minor">
+            <a:schemeClr val="lt1"/>
+          </a:fontRef>
+        </p:style>
+        <p:txBody>
+          <a:bodyPr lIns="91440" tIns="45720" rIns="91440" bIns="45720" rtlCol="0" anchor="ctr"/>
+          <a:lstStyle/>
+          <a:p>
+            <a:pPr algn="ctr"/>
+            <a:r>
+              <a:rPr lang="en-US" sz="2800" b="1"/>
+              <a:t>2.1</a:t>
+            </a:r>
+            <a:endParaRPr lang="en-US" sz="2800" b="1" dirty="0"/>
+          </a:p>
+        </p:txBody>
+      </p:sp>
     </p:spTree>
   </p:cSld>
   <p:clrMapOvr>
@@ -17002,19 +17193,16 @@
           <a:bodyPr wrap="square" lIns="0" tIns="0" rIns="0" bIns="0" rtlCol="0" anchor="ctr"/>
           <a:lstStyle/>
           <a:p>
-            <a:pPr marL="0" indent="0">
-              <a:buNone/>
-            </a:pPr>
-            <a:r>
-              <a:rPr lang="en-US" sz="3000" b="1" dirty="0">
+            <a:r>
+              <a:rPr lang="en-US" sz="3000" b="1">
                 <a:solidFill>
                   <a:srgbClr val="FFFFFF"/>
                 </a:solidFill>
-                <a:latin typeface="Trebuchet MS" pitchFamily="34" charset="0"/>
+                <a:latin typeface="Trebuchet MS"/>
                 <a:ea typeface="Trebuchet MS" pitchFamily="34" charset="-122"/>
                 <a:cs typeface="Trebuchet MS" pitchFamily="34" charset="-120"/>
               </a:rPr>
-              <a:t>Training Efficiency</a:t>
+              <a:t>CNN Training Efficiency</a:t>
             </a:r>
           </a:p>
         </p:txBody>
@@ -17068,9 +17256,8 @@
             <a:pPr algn="ctr"/>
             <a:r>
               <a:rPr lang="en-US" sz="3200" b="1"/>
-              <a:t>2</a:t>
-            </a:r>
-            <a:endParaRPr lang="pt-PT" b="1" dirty="0"/>
+              <a:t>2.2</a:t>
+            </a:r>
           </a:p>
         </p:txBody>
       </p:sp>
@@ -19393,10 +19580,10 @@
       </p:sp>
       <p:sp>
         <p:nvSpPr>
-          <p:cNvPr id="27" name="Shape 2">
+          <p:cNvPr id="29" name="Badge">
             <a:extLst>
               <a:ext uri="{FF2B5EF4-FFF2-40B4-BE49-F238E27FC236}">
-                <a16:creationId xmlns:a16="http://schemas.microsoft.com/office/drawing/2014/main" id="{E5890930-6B10-522D-CD98-AB58F7196552}"/>
+                <a16:creationId xmlns:a16="http://schemas.microsoft.com/office/drawing/2014/main" id="{5C589F9A-0527-0A5E-2FBB-F293535A66A1}"/>
               </a:ext>
             </a:extLst>
           </p:cNvPr>
@@ -19405,8 +19592,8 @@
         </p:nvSpPr>
         <p:spPr>
           <a:xfrm>
-            <a:off x="7498079" y="82296"/>
-            <a:ext cx="1557633" cy="329184"/>
+            <a:off x="7372156" y="69313"/>
+            <a:ext cx="1606065" cy="338870"/>
           </a:xfrm>
           <a:prstGeom prst="rect">
             <a:avLst/>
@@ -19422,32 +19609,28 @@
           </a:ln>
         </p:spPr>
         <p:txBody>
-          <a:bodyPr/>
+          <a:bodyPr lIns="91440" tIns="45720" rIns="91440" bIns="45720" anchor="t"/>
           <a:lstStyle/>
           <a:p>
             <a:pPr algn="ctr"/>
             <a:r>
-              <a:rPr lang="en-US" b="1" dirty="0">
-                <a:solidFill>
-                  <a:schemeClr val="bg1"/>
+              <a:rPr lang="en-US" b="1">
+                <a:solidFill>
+                  <a:srgbClr val="FFFFFF"/>
                 </a:solidFill>
               </a:rPr>
-              <a:t>Train Eff</a:t>
-            </a:r>
-            <a:endParaRPr lang="pt-PT" b="1" dirty="0">
-              <a:solidFill>
-                <a:schemeClr val="bg1"/>
-              </a:solidFill>
-            </a:endParaRPr>
-          </a:p>
-        </p:txBody>
-      </p:sp>
-      <p:sp>
-        <p:nvSpPr>
-          <p:cNvPr id="28" name="Rectangle: Rounded Corners 27">
+              <a:t>CNN Train Eff</a:t>
+            </a:r>
+            <a:endParaRPr lang="en-US"/>
+          </a:p>
+        </p:txBody>
+      </p:sp>
+      <p:sp>
+        <p:nvSpPr>
+          <p:cNvPr id="31" name="NumCircle">
             <a:extLst>
               <a:ext uri="{FF2B5EF4-FFF2-40B4-BE49-F238E27FC236}">
-                <a16:creationId xmlns:a16="http://schemas.microsoft.com/office/drawing/2014/main" id="{F248EDA6-5E05-F981-E404-17752529D9B8}"/>
+                <a16:creationId xmlns:a16="http://schemas.microsoft.com/office/drawing/2014/main" id="{E7041BF3-31F1-4C6A-9C6C-ED818DA65622}"/>
               </a:ext>
             </a:extLst>
           </p:cNvPr>
@@ -19456,8 +19639,8 @@
         </p:nvSpPr>
         <p:spPr>
           <a:xfrm>
-            <a:off x="7088176" y="4253"/>
-            <a:ext cx="470123" cy="470912"/>
+            <a:off x="6516678" y="33312"/>
+            <a:ext cx="857580" cy="422479"/>
           </a:xfrm>
           <a:prstGeom prst="roundRect">
             <a:avLst/>
@@ -19484,7 +19667,7 @@
             <a:pPr algn="ctr"/>
             <a:r>
               <a:rPr lang="en-US" sz="2800" b="1"/>
-              <a:t>2</a:t>
+              <a:t>2.2</a:t>
             </a:r>
             <a:endParaRPr lang="en-US" sz="2800" b="1" dirty="0"/>
           </a:p>
@@ -19572,49 +19755,19 @@
               <a:buNone/>
             </a:pPr>
             <a:r>
-              <a:rPr lang="en-US" sz="2200" b="1" dirty="0">
+              <a:rPr lang="en-US" sz="2200" b="1">
                 <a:solidFill>
                   <a:srgbClr val="0D1B2A"/>
                 </a:solidFill>
-                <a:latin typeface="Trebuchet MS" pitchFamily="34" charset="0"/>
+                <a:latin typeface="Trebuchet MS"/>
                 <a:ea typeface="Trebuchet MS" pitchFamily="34" charset="-122"/>
                 <a:cs typeface="Trebuchet MS" pitchFamily="34" charset="-120"/>
               </a:rPr>
-              <a:t>Early Stopping — Results Across All Experiments</a:t>
-            </a:r>
-            <a:endParaRPr lang="en-US" sz="2200" dirty="0"/>
-          </a:p>
-        </p:txBody>
-      </p:sp>
-      <p:sp>
-        <p:nvSpPr>
-          <p:cNvPr id="4" name="Shape 2"/>
-          <p:cNvSpPr/>
-          <p:nvPr/>
-        </p:nvSpPr>
-        <p:spPr>
-          <a:xfrm>
-            <a:off x="7635240" y="109728"/>
-            <a:ext cx="1371600" cy="301752"/>
-          </a:xfrm>
-          <a:prstGeom prst="rect">
-            <a:avLst/>
-          </a:prstGeom>
-          <a:solidFill>
-            <a:srgbClr val="1C3A52"/>
-          </a:solidFill>
-          <a:ln w="12700">
-            <a:solidFill>
-              <a:srgbClr val="1C3A52"/>
-            </a:solidFill>
-            <a:prstDash val="solid"/>
-          </a:ln>
-        </p:spPr>
-        <p:txBody>
-          <a:bodyPr/>
-          <a:lstStyle/>
-          <a:p>
-            <a:endParaRPr lang="pt-PT"/>
+              <a:t>Early Stopping — Results Across Experiments</a:t>
+            </a:r>
+            <a:endParaRPr lang="en-US" sz="2200">
+              <a:latin typeface="Trebuchet MS"/>
+            </a:endParaRPr>
           </a:p>
         </p:txBody>
       </p:sp>
@@ -22369,10 +22522,10 @@
       </p:graphicFrame>
       <p:sp>
         <p:nvSpPr>
-          <p:cNvPr id="6" name="Shape 2">
+          <p:cNvPr id="22" name="Badge">
             <a:extLst>
               <a:ext uri="{FF2B5EF4-FFF2-40B4-BE49-F238E27FC236}">
-                <a16:creationId xmlns:a16="http://schemas.microsoft.com/office/drawing/2014/main" id="{19C6034F-83B9-2393-B074-9BCEEDF2312B}"/>
+                <a16:creationId xmlns:a16="http://schemas.microsoft.com/office/drawing/2014/main" id="{229580A7-6884-5EAC-5668-A563C2D5EAC4}"/>
               </a:ext>
             </a:extLst>
           </p:cNvPr>
@@ -22381,8 +22534,8 @@
         </p:nvSpPr>
         <p:spPr>
           <a:xfrm>
-            <a:off x="7498079" y="82296"/>
-            <a:ext cx="1557633" cy="329184"/>
+            <a:off x="7372156" y="69313"/>
+            <a:ext cx="1606065" cy="338870"/>
           </a:xfrm>
           <a:prstGeom prst="rect">
             <a:avLst/>
@@ -22398,32 +22551,28 @@
           </a:ln>
         </p:spPr>
         <p:txBody>
-          <a:bodyPr/>
+          <a:bodyPr lIns="91440" tIns="45720" rIns="91440" bIns="45720" anchor="t"/>
           <a:lstStyle/>
           <a:p>
             <a:pPr algn="ctr"/>
             <a:r>
-              <a:rPr lang="en-US" b="1" dirty="0">
-                <a:solidFill>
-                  <a:schemeClr val="bg1"/>
+              <a:rPr lang="en-US" b="1">
+                <a:solidFill>
+                  <a:srgbClr val="FFFFFF"/>
                 </a:solidFill>
               </a:rPr>
-              <a:t>Train Eff</a:t>
-            </a:r>
-            <a:endParaRPr lang="pt-PT" b="1" dirty="0">
-              <a:solidFill>
-                <a:schemeClr val="bg1"/>
-              </a:solidFill>
-            </a:endParaRPr>
-          </a:p>
-        </p:txBody>
-      </p:sp>
-      <p:sp>
-        <p:nvSpPr>
-          <p:cNvPr id="7" name="Rectangle: Rounded Corners 6">
+              <a:t>CNN Train Eff</a:t>
+            </a:r>
+            <a:endParaRPr lang="en-US"/>
+          </a:p>
+        </p:txBody>
+      </p:sp>
+      <p:sp>
+        <p:nvSpPr>
+          <p:cNvPr id="24" name="NumCircle">
             <a:extLst>
               <a:ext uri="{FF2B5EF4-FFF2-40B4-BE49-F238E27FC236}">
-                <a16:creationId xmlns:a16="http://schemas.microsoft.com/office/drawing/2014/main" id="{A87C9746-02DE-E79B-7221-A06138DE9599}"/>
+                <a16:creationId xmlns:a16="http://schemas.microsoft.com/office/drawing/2014/main" id="{9E94472E-BCD3-C86C-4D86-31D6A04E8FC4}"/>
               </a:ext>
             </a:extLst>
           </p:cNvPr>
@@ -22432,8 +22581,8 @@
         </p:nvSpPr>
         <p:spPr>
           <a:xfrm>
-            <a:off x="7088176" y="4253"/>
-            <a:ext cx="470123" cy="470912"/>
+            <a:off x="6516678" y="33312"/>
+            <a:ext cx="857580" cy="422479"/>
           </a:xfrm>
           <a:prstGeom prst="roundRect">
             <a:avLst/>
@@ -22460,8 +22609,9 @@
             <a:pPr algn="ctr"/>
             <a:r>
               <a:rPr lang="en-US" sz="2800" b="1"/>
-              <a:t>2</a:t>
-            </a:r>
+              <a:t>2.2</a:t>
+            </a:r>
+            <a:endParaRPr lang="en-US" sz="2800" b="1" dirty="0"/>
           </a:p>
         </p:txBody>
       </p:sp>
@@ -22565,97 +22715,19 @@
               <a:buNone/>
             </a:pPr>
             <a:r>
-              <a:rPr lang="en-US" sz="2200" b="1" dirty="0">
+              <a:rPr lang="en-US" sz="2200" b="1">
                 <a:solidFill>
                   <a:srgbClr val="0D1B2A"/>
                 </a:solidFill>
-                <a:latin typeface="Trebuchet MS" pitchFamily="34" charset="0"/>
+                <a:latin typeface="Trebuchet MS"/>
                 <a:ea typeface="Trebuchet MS" pitchFamily="34" charset="-122"/>
                 <a:cs typeface="Trebuchet MS" pitchFamily="34" charset="-120"/>
               </a:rPr>
-              <a:t>Early Stopping — Results Across All Experiments</a:t>
-            </a:r>
-            <a:endParaRPr lang="en-US" sz="2200" dirty="0"/>
-          </a:p>
-        </p:txBody>
-      </p:sp>
-      <p:sp>
-        <p:nvSpPr>
-          <p:cNvPr id="4" name="Shape 2">
-            <a:extLst>
-              <a:ext uri="{FF2B5EF4-FFF2-40B4-BE49-F238E27FC236}">
-                <a16:creationId xmlns:a16="http://schemas.microsoft.com/office/drawing/2014/main" id="{D216AB00-FD52-227D-A70F-9F876A54AF00}"/>
-              </a:ext>
-            </a:extLst>
-          </p:cNvPr>
-          <p:cNvSpPr/>
-          <p:nvPr/>
-        </p:nvSpPr>
-        <p:spPr>
-          <a:xfrm>
-            <a:off x="7635240" y="109728"/>
-            <a:ext cx="1371600" cy="301752"/>
-          </a:xfrm>
-          <a:prstGeom prst="rect">
-            <a:avLst/>
-          </a:prstGeom>
-          <a:solidFill>
-            <a:srgbClr val="1C3A52"/>
-          </a:solidFill>
-          <a:ln w="12700">
-            <a:solidFill>
-              <a:srgbClr val="1C3A52"/>
-            </a:solidFill>
-            <a:prstDash val="solid"/>
-          </a:ln>
-        </p:spPr>
-        <p:txBody>
-          <a:bodyPr/>
-          <a:lstStyle/>
-          <a:p>
-            <a:endParaRPr lang="pt-PT"/>
-          </a:p>
-        </p:txBody>
-      </p:sp>
-      <p:sp>
-        <p:nvSpPr>
-          <p:cNvPr id="5" name="Text 3">
-            <a:extLst>
-              <a:ext uri="{FF2B5EF4-FFF2-40B4-BE49-F238E27FC236}">
-                <a16:creationId xmlns:a16="http://schemas.microsoft.com/office/drawing/2014/main" id="{632C09BB-7A18-A75A-D099-409704408A7B}"/>
-              </a:ext>
-            </a:extLst>
-          </p:cNvPr>
-          <p:cNvSpPr/>
-          <p:nvPr/>
-        </p:nvSpPr>
-        <p:spPr>
-          <a:xfrm>
-            <a:off x="7635240" y="109728"/>
-            <a:ext cx="1371600" cy="301752"/>
-          </a:xfrm>
-          <a:prstGeom prst="rect">
-            <a:avLst/>
-          </a:prstGeom>
-          <a:noFill/>
-          <a:ln/>
-        </p:spPr>
-        <p:txBody>
-          <a:bodyPr wrap="square" lIns="0" tIns="0" rIns="0" bIns="0" rtlCol="0" anchor="ctr"/>
-          <a:lstStyle/>
-          <a:p>
-            <a:pPr marL="0" indent="0" algn="ctr">
-              <a:buNone/>
-            </a:pPr>
-            <a:r>
-              <a:rPr lang="en-US" sz="1000" b="1" dirty="0">
-                <a:solidFill>
-                  <a:srgbClr val="FFFFFF"/>
-                </a:solidFill>
-              </a:rPr>
-              <a:t>Train Eff</a:t>
-            </a:r>
-            <a:endParaRPr lang="en-US" sz="1000" dirty="0"/>
+              <a:t>Early Stopping — Results Across Experiments</a:t>
+            </a:r>
+            <a:endParaRPr lang="en-US" sz="2200">
+              <a:latin typeface="Trebuchet MS"/>
+            </a:endParaRPr>
           </a:p>
         </p:txBody>
       </p:sp>
@@ -23925,10 +23997,10 @@
       </p:graphicFrame>
       <p:sp>
         <p:nvSpPr>
-          <p:cNvPr id="6" name="Shape 2">
+          <p:cNvPr id="18" name="Badge">
             <a:extLst>
               <a:ext uri="{FF2B5EF4-FFF2-40B4-BE49-F238E27FC236}">
-                <a16:creationId xmlns:a16="http://schemas.microsoft.com/office/drawing/2014/main" id="{82704C14-F5D6-D083-24CA-0D130A2E709C}"/>
+                <a16:creationId xmlns:a16="http://schemas.microsoft.com/office/drawing/2014/main" id="{1F0C0D8E-EC21-70AB-8B7E-A51D0653EE03}"/>
               </a:ext>
             </a:extLst>
           </p:cNvPr>
@@ -23937,8 +24009,8 @@
         </p:nvSpPr>
         <p:spPr>
           <a:xfrm>
-            <a:off x="7498079" y="82296"/>
-            <a:ext cx="1557633" cy="329184"/>
+            <a:off x="7372156" y="69313"/>
+            <a:ext cx="1606065" cy="338870"/>
           </a:xfrm>
           <a:prstGeom prst="rect">
             <a:avLst/>
@@ -23954,32 +24026,28 @@
           </a:ln>
         </p:spPr>
         <p:txBody>
-          <a:bodyPr/>
+          <a:bodyPr lIns="91440" tIns="45720" rIns="91440" bIns="45720" anchor="t"/>
           <a:lstStyle/>
           <a:p>
             <a:pPr algn="ctr"/>
             <a:r>
-              <a:rPr lang="en-US" b="1" dirty="0">
-                <a:solidFill>
-                  <a:schemeClr val="bg1"/>
+              <a:rPr lang="en-US" b="1">
+                <a:solidFill>
+                  <a:srgbClr val="FFFFFF"/>
                 </a:solidFill>
               </a:rPr>
-              <a:t>Train Eff</a:t>
-            </a:r>
-            <a:endParaRPr lang="pt-PT" b="1" dirty="0">
-              <a:solidFill>
-                <a:schemeClr val="bg1"/>
-              </a:solidFill>
-            </a:endParaRPr>
-          </a:p>
-        </p:txBody>
-      </p:sp>
-      <p:sp>
-        <p:nvSpPr>
-          <p:cNvPr id="7" name="Rectangle: Rounded Corners 6">
+              <a:t>CNN Train Eff</a:t>
+            </a:r>
+            <a:endParaRPr lang="en-US"/>
+          </a:p>
+        </p:txBody>
+      </p:sp>
+      <p:sp>
+        <p:nvSpPr>
+          <p:cNvPr id="20" name="NumCircle">
             <a:extLst>
               <a:ext uri="{FF2B5EF4-FFF2-40B4-BE49-F238E27FC236}">
-                <a16:creationId xmlns:a16="http://schemas.microsoft.com/office/drawing/2014/main" id="{74C52EFB-1E20-25F8-57B1-32B1578DC6A9}"/>
+                <a16:creationId xmlns:a16="http://schemas.microsoft.com/office/drawing/2014/main" id="{72A48146-A399-C659-DA7B-AC09A767DD74}"/>
               </a:ext>
             </a:extLst>
           </p:cNvPr>
@@ -23988,8 +24056,8 @@
         </p:nvSpPr>
         <p:spPr>
           <a:xfrm>
-            <a:off x="7088176" y="4253"/>
-            <a:ext cx="470123" cy="470912"/>
+            <a:off x="6516678" y="33312"/>
+            <a:ext cx="857580" cy="422479"/>
           </a:xfrm>
           <a:prstGeom prst="roundRect">
             <a:avLst/>
@@ -24016,8 +24084,9 @@
             <a:pPr algn="ctr"/>
             <a:r>
               <a:rPr lang="en-US" sz="2800" b="1"/>
-              <a:t>2</a:t>
-            </a:r>
+              <a:t>2.2</a:t>
+            </a:r>
+            <a:endParaRPr lang="en-US" sz="2800" b="1" dirty="0"/>
           </a:p>
         </p:txBody>
       </p:sp>
@@ -24085,88 +24154,6 @@
       </p:sp>
       <p:sp>
         <p:nvSpPr>
-          <p:cNvPr id="3" name="Badge"/>
-          <p:cNvSpPr/>
-          <p:nvPr/>
-        </p:nvSpPr>
-        <p:spPr>
-          <a:xfrm>
-            <a:off x="7498079" y="82296"/>
-            <a:ext cx="1557633" cy="329184"/>
-          </a:xfrm>
-          <a:prstGeom prst="rect">
-            <a:avLst/>
-          </a:prstGeom>
-          <a:solidFill>
-            <a:srgbClr val="1C3A52"/>
-          </a:solidFill>
-          <a:ln w="12700">
-            <a:solidFill>
-              <a:srgbClr val="1C3A52"/>
-            </a:solidFill>
-            <a:prstDash val="solid"/>
-          </a:ln>
-        </p:spPr>
-        <p:txBody>
-          <a:bodyPr/>
-          <a:lstStyle/>
-          <a:p>
-            <a:pPr algn="ctr"/>
-            <a:r>
-              <a:rPr lang="en-US" b="1" dirty="0">
-                <a:solidFill>
-                  <a:srgbClr val="FFFFFF"/>
-                </a:solidFill>
-              </a:rPr>
-              <a:t>Train Eff</a:t>
-            </a:r>
-            <a:endParaRPr lang="en-US" b="1" dirty="0"/>
-          </a:p>
-        </p:txBody>
-      </p:sp>
-      <p:sp>
-        <p:nvSpPr>
-          <p:cNvPr id="4" name="NumCircle"/>
-          <p:cNvSpPr/>
-          <p:nvPr/>
-        </p:nvSpPr>
-        <p:spPr>
-          <a:xfrm>
-            <a:off x="7088176" y="4253"/>
-            <a:ext cx="470123" cy="470912"/>
-          </a:xfrm>
-          <a:prstGeom prst="roundRect">
-            <a:avLst/>
-          </a:prstGeom>
-        </p:spPr>
-        <p:style>
-          <a:lnRef idx="0">
-            <a:schemeClr val="accent1"/>
-          </a:lnRef>
-          <a:fillRef idx="3">
-            <a:schemeClr val="accent1"/>
-          </a:fillRef>
-          <a:effectRef idx="3">
-            <a:schemeClr val="accent1"/>
-          </a:effectRef>
-          <a:fontRef idx="minor">
-            <a:schemeClr val="lt1"/>
-          </a:fontRef>
-        </p:style>
-        <p:txBody>
-          <a:bodyPr lIns="91440" tIns="45720" rIns="91440" bIns="45720" rtlCol="0" anchor="ctr"/>
-          <a:lstStyle/>
-          <a:p>
-            <a:pPr algn="ctr"/>
-            <a:r>
-              <a:rPr lang="en-US" sz="2800" b="1"/>
-              <a:t>2</a:t>
-            </a:r>
-          </a:p>
-        </p:txBody>
-      </p:sp>
-      <p:sp>
-        <p:nvSpPr>
           <p:cNvPr id="5" name="Title"/>
           <p:cNvSpPr/>
           <p:nvPr/>
@@ -24779,6 +24766,101 @@
           </a:prstGeom>
         </p:spPr>
       </p:pic>
+      <p:sp>
+        <p:nvSpPr>
+          <p:cNvPr id="8" name="Badge">
+            <a:extLst>
+              <a:ext uri="{FF2B5EF4-FFF2-40B4-BE49-F238E27FC236}">
+                <a16:creationId xmlns:a16="http://schemas.microsoft.com/office/drawing/2014/main" id="{5E3C9511-E3B9-BF09-7D5C-5E771B6C6320}"/>
+              </a:ext>
+            </a:extLst>
+          </p:cNvPr>
+          <p:cNvSpPr/>
+          <p:nvPr/>
+        </p:nvSpPr>
+        <p:spPr>
+          <a:xfrm>
+            <a:off x="7372156" y="69313"/>
+            <a:ext cx="1606065" cy="338870"/>
+          </a:xfrm>
+          <a:prstGeom prst="rect">
+            <a:avLst/>
+          </a:prstGeom>
+          <a:solidFill>
+            <a:srgbClr val="1C3A52"/>
+          </a:solidFill>
+          <a:ln w="12700">
+            <a:solidFill>
+              <a:srgbClr val="1C3A52"/>
+            </a:solidFill>
+            <a:prstDash val="solid"/>
+          </a:ln>
+        </p:spPr>
+        <p:txBody>
+          <a:bodyPr lIns="91440" tIns="45720" rIns="91440" bIns="45720" anchor="t"/>
+          <a:lstStyle/>
+          <a:p>
+            <a:pPr algn="ctr"/>
+            <a:r>
+              <a:rPr lang="en-US" b="1">
+                <a:solidFill>
+                  <a:srgbClr val="FFFFFF"/>
+                </a:solidFill>
+              </a:rPr>
+              <a:t>CNN Train Eff</a:t>
+            </a:r>
+            <a:endParaRPr lang="en-US"/>
+          </a:p>
+        </p:txBody>
+      </p:sp>
+      <p:sp>
+        <p:nvSpPr>
+          <p:cNvPr id="10" name="NumCircle">
+            <a:extLst>
+              <a:ext uri="{FF2B5EF4-FFF2-40B4-BE49-F238E27FC236}">
+                <a16:creationId xmlns:a16="http://schemas.microsoft.com/office/drawing/2014/main" id="{D9CE2A85-2D4C-C7CB-CAA8-B852F2AABC2A}"/>
+              </a:ext>
+            </a:extLst>
+          </p:cNvPr>
+          <p:cNvSpPr/>
+          <p:nvPr/>
+        </p:nvSpPr>
+        <p:spPr>
+          <a:xfrm>
+            <a:off x="6516678" y="33312"/>
+            <a:ext cx="857580" cy="422479"/>
+          </a:xfrm>
+          <a:prstGeom prst="roundRect">
+            <a:avLst/>
+          </a:prstGeom>
+        </p:spPr>
+        <p:style>
+          <a:lnRef idx="0">
+            <a:schemeClr val="accent1"/>
+          </a:lnRef>
+          <a:fillRef idx="3">
+            <a:schemeClr val="accent1"/>
+          </a:fillRef>
+          <a:effectRef idx="3">
+            <a:schemeClr val="accent1"/>
+          </a:effectRef>
+          <a:fontRef idx="minor">
+            <a:schemeClr val="lt1"/>
+          </a:fontRef>
+        </p:style>
+        <p:txBody>
+          <a:bodyPr lIns="91440" tIns="45720" rIns="91440" bIns="45720" rtlCol="0" anchor="ctr"/>
+          <a:lstStyle/>
+          <a:p>
+            <a:pPr algn="ctr"/>
+            <a:r>
+              <a:rPr lang="en-US" sz="2800" b="1"/>
+              <a:t>2.2</a:t>
+            </a:r>
+            <a:endParaRPr lang="en-US" sz="2800" b="1" dirty="0"/>
+          </a:p>
+        </p:txBody>
+      </p:sp>
     </p:spTree>
   </p:cSld>
   <p:clrMapOvr>
@@ -24833,15 +24915,12 @@
           <a:bodyPr wrap="square" lIns="0" tIns="0" rIns="0" bIns="0" rtlCol="0" anchor="ctr"/>
           <a:lstStyle/>
           <a:p>
-            <a:pPr marL="0" indent="0">
-              <a:buNone/>
-            </a:pPr>
             <a:r>
               <a:rPr lang="en-US" sz="2200" b="1" dirty="0">
                 <a:solidFill>
                   <a:srgbClr val="FFFFFF"/>
                 </a:solidFill>
-                <a:latin typeface="Trebuchet MS" pitchFamily="34" charset="0"/>
+                <a:latin typeface="Trebuchet MS"/>
                 <a:ea typeface="Trebuchet MS" pitchFamily="34" charset="-122"/>
                 <a:cs typeface="Trebuchet MS" pitchFamily="34" charset="-120"/>
               </a:rPr>
@@ -24947,17 +25026,14 @@
               <a:buNone/>
             </a:pPr>
             <a:r>
-              <a:rPr lang="en-US" sz="2200" b="1" dirty="0">
+              <a:rPr lang="en-US" sz="2200" b="1">
                 <a:solidFill>
                   <a:srgbClr val="00A896"/>
                 </a:solidFill>
-                <a:latin typeface="Trebuchet MS" pitchFamily="34" charset="0"/>
-                <a:ea typeface="Trebuchet MS" pitchFamily="34" charset="-122"/>
-                <a:cs typeface="Trebuchet MS" pitchFamily="34" charset="-120"/>
+                <a:latin typeface="Trebuchet MS"/>
               </a:rPr>
-              <a:t>1</a:t>
-            </a:r>
-            <a:endParaRPr lang="en-US" sz="2200" dirty="0"/>
+              <a:t>2.1</a:t>
+            </a:r>
           </a:p>
         </p:txBody>
       </p:sp>
@@ -25131,17 +25207,20 @@
               <a:buNone/>
             </a:pPr>
             <a:r>
-              <a:rPr lang="en-US" sz="2200" b="1" dirty="0">
+              <a:rPr lang="en-US" sz="2200" b="1">
                 <a:solidFill>
                   <a:srgbClr val="00A896"/>
                 </a:solidFill>
-                <a:latin typeface="Trebuchet MS" pitchFamily="34" charset="0"/>
-                <a:ea typeface="Trebuchet MS" pitchFamily="34" charset="-122"/>
-                <a:cs typeface="Trebuchet MS" pitchFamily="34" charset="-120"/>
+                <a:latin typeface="Trebuchet MS"/>
               </a:rPr>
-              <a:t>2</a:t>
-            </a:r>
-            <a:endParaRPr lang="en-US" sz="2200" dirty="0"/>
+              <a:t>2.2</a:t>
+            </a:r>
+            <a:endParaRPr lang="en-US" sz="2200" b="1" dirty="0">
+              <a:solidFill>
+                <a:srgbClr val="00A896"/>
+              </a:solidFill>
+              <a:latin typeface="Trebuchet MS"/>
+            </a:endParaRPr>
           </a:p>
         </p:txBody>
       </p:sp>
@@ -25323,17 +25402,14 @@
               <a:buNone/>
             </a:pPr>
             <a:r>
-              <a:rPr lang="en-US" sz="2200" b="1" dirty="0">
+              <a:rPr lang="en-US" sz="2200" b="1">
                 <a:solidFill>
                   <a:srgbClr val="00A896"/>
                 </a:solidFill>
-                <a:latin typeface="Trebuchet MS" pitchFamily="34" charset="0"/>
-                <a:ea typeface="Trebuchet MS" pitchFamily="34" charset="-122"/>
-                <a:cs typeface="Trebuchet MS" pitchFamily="34" charset="-120"/>
+                <a:latin typeface="Trebuchet MS"/>
               </a:rPr>
-              <a:t>3</a:t>
-            </a:r>
-            <a:endParaRPr lang="en-US" sz="2200" dirty="0"/>
+              <a:t>2.3</a:t>
+            </a:r>
           </a:p>
         </p:txBody>
       </p:sp>
@@ -25418,194 +25494,6 @@
               <a:ea typeface="Calibri"/>
               <a:cs typeface="Calibri"/>
             </a:endParaRPr>
-          </a:p>
-        </p:txBody>
-      </p:sp>
-      <p:sp>
-        <p:nvSpPr>
-          <p:cNvPr id="25" name="Shape 23"/>
-          <p:cNvSpPr/>
-          <p:nvPr/>
-        </p:nvSpPr>
-        <p:spPr>
-          <a:xfrm>
-            <a:off x="4754880" y="2788920"/>
-            <a:ext cx="4160520" cy="1691640"/>
-          </a:xfrm>
-          <a:prstGeom prst="rect">
-            <a:avLst/>
-          </a:prstGeom>
-          <a:solidFill>
-            <a:srgbClr val="1C3A52"/>
-          </a:solidFill>
-          <a:ln w="6350">
-            <a:solidFill>
-              <a:srgbClr val="112233"/>
-            </a:solidFill>
-            <a:prstDash val="solid"/>
-          </a:ln>
-          <a:effectLst>
-            <a:outerShdw blurRad="101600" dist="38100" dir="8100000" algn="bl" rotWithShape="0">
-              <a:srgbClr val="000000">
-                <a:alpha val="10000"/>
-              </a:srgbClr>
-            </a:outerShdw>
-          </a:effectLst>
-        </p:spPr>
-        <p:txBody>
-          <a:bodyPr/>
-          <a:lstStyle/>
-          <a:p>
-            <a:endParaRPr lang="pt-PT"/>
-          </a:p>
-        </p:txBody>
-      </p:sp>
-      <p:sp>
-        <p:nvSpPr>
-          <p:cNvPr id="26" name="Shape 24"/>
-          <p:cNvSpPr/>
-          <p:nvPr/>
-        </p:nvSpPr>
-        <p:spPr>
-          <a:xfrm>
-            <a:off x="4754880" y="2788920"/>
-            <a:ext cx="82296" cy="1691640"/>
-          </a:xfrm>
-          <a:prstGeom prst="rect">
-            <a:avLst/>
-          </a:prstGeom>
-          <a:solidFill>
-            <a:srgbClr val="00A896"/>
-          </a:solidFill>
-          <a:ln w="12700">
-            <a:solidFill>
-              <a:srgbClr val="00A896"/>
-            </a:solidFill>
-            <a:prstDash val="solid"/>
-          </a:ln>
-        </p:spPr>
-        <p:txBody>
-          <a:bodyPr/>
-          <a:lstStyle/>
-          <a:p>
-            <a:endParaRPr lang="pt-PT"/>
-          </a:p>
-        </p:txBody>
-      </p:sp>
-      <p:sp>
-        <p:nvSpPr>
-          <p:cNvPr id="27" name="Text 25"/>
-          <p:cNvSpPr/>
-          <p:nvPr/>
-        </p:nvSpPr>
-        <p:spPr>
-          <a:xfrm>
-            <a:off x="4910328" y="2898648"/>
-            <a:ext cx="475488" cy="475488"/>
-          </a:xfrm>
-          <a:prstGeom prst="rect">
-            <a:avLst/>
-          </a:prstGeom>
-          <a:noFill/>
-          <a:ln/>
-        </p:spPr>
-        <p:txBody>
-          <a:bodyPr wrap="square" lIns="0" tIns="0" rIns="0" bIns="0" rtlCol="0" anchor="ctr"/>
-          <a:lstStyle/>
-          <a:p>
-            <a:pPr marL="0" indent="0">
-              <a:buNone/>
-            </a:pPr>
-            <a:r>
-              <a:rPr lang="en-US" sz="2200" b="1" dirty="0">
-                <a:solidFill>
-                  <a:srgbClr val="00A896"/>
-                </a:solidFill>
-                <a:latin typeface="Trebuchet MS" pitchFamily="34" charset="0"/>
-                <a:ea typeface="Trebuchet MS" pitchFamily="34" charset="-122"/>
-                <a:cs typeface="Trebuchet MS" pitchFamily="34" charset="-120"/>
-              </a:rPr>
-              <a:t>4</a:t>
-            </a:r>
-            <a:endParaRPr lang="en-US" sz="2200" dirty="0"/>
-          </a:p>
-        </p:txBody>
-      </p:sp>
-      <p:sp>
-        <p:nvSpPr>
-          <p:cNvPr id="30" name="Text 28"/>
-          <p:cNvSpPr/>
-          <p:nvPr/>
-        </p:nvSpPr>
-        <p:spPr>
-          <a:xfrm>
-            <a:off x="5440680" y="2898648"/>
-            <a:ext cx="3200400" cy="411480"/>
-          </a:xfrm>
-          <a:prstGeom prst="rect">
-            <a:avLst/>
-          </a:prstGeom>
-          <a:noFill/>
-          <a:ln/>
-        </p:spPr>
-        <p:txBody>
-          <a:bodyPr wrap="square" lIns="0" tIns="0" rIns="0" bIns="0" rtlCol="0" anchor="ctr"/>
-          <a:lstStyle/>
-          <a:p>
-            <a:pPr marL="0" indent="0">
-              <a:buNone/>
-            </a:pPr>
-            <a:r>
-              <a:rPr lang="en-US" sz="1400" b="1" dirty="0">
-                <a:solidFill>
-                  <a:srgbClr val="FFFFFF"/>
-                </a:solidFill>
-                <a:latin typeface="Trebuchet MS" pitchFamily="34" charset="0"/>
-                <a:ea typeface="Trebuchet MS" pitchFamily="34" charset="-122"/>
-                <a:cs typeface="Trebuchet MS" pitchFamily="34" charset="-120"/>
-              </a:rPr>
-              <a:t>Performance Evaluation</a:t>
-            </a:r>
-            <a:endParaRPr lang="en-US" sz="1400" dirty="0"/>
-          </a:p>
-        </p:txBody>
-      </p:sp>
-      <p:sp>
-        <p:nvSpPr>
-          <p:cNvPr id="31" name="Text 29"/>
-          <p:cNvSpPr/>
-          <p:nvPr/>
-        </p:nvSpPr>
-        <p:spPr>
-          <a:xfrm>
-            <a:off x="5416295" y="3355848"/>
-            <a:ext cx="3674195" cy="822960"/>
-          </a:xfrm>
-          <a:prstGeom prst="rect">
-            <a:avLst/>
-          </a:prstGeom>
-          <a:noFill/>
-          <a:ln/>
-        </p:spPr>
-        <p:txBody>
-          <a:bodyPr wrap="square" lIns="0" tIns="0" rIns="0" bIns="0" rtlCol="0" anchor="ctr"/>
-          <a:lstStyle/>
-          <a:p>
-            <a:pPr marL="0" indent="0">
-              <a:buNone/>
-            </a:pPr>
-            <a:r>
-              <a:rPr lang="en-US" sz="1400" dirty="0">
-                <a:solidFill>
-                  <a:srgbClr val="7AADCC"/>
-                </a:solidFill>
-                <a:latin typeface="Calibri" pitchFamily="34" charset="0"/>
-                <a:ea typeface="Calibri" pitchFamily="34" charset="-122"/>
-                <a:cs typeface="Calibri" pitchFamily="34" charset="-120"/>
-              </a:rPr>
-              <a:t>Macro-F1  ·  Per-class  ·  Confusion Matrix</a:t>
-            </a:r>
-            <a:endParaRPr lang="en-US" sz="1400" dirty="0"/>
           </a:p>
         </p:txBody>
       </p:sp>
@@ -26003,19 +25891,16 @@
           <a:bodyPr wrap="square" lIns="0" tIns="0" rIns="0" bIns="0" rtlCol="0" anchor="ctr"/>
           <a:lstStyle/>
           <a:p>
-            <a:pPr marL="0" indent="0">
-              <a:buNone/>
-            </a:pPr>
-            <a:r>
-              <a:rPr lang="en-US" sz="3000" b="1" dirty="0">
+            <a:r>
+              <a:rPr lang="en-US" sz="3000" b="1">
                 <a:solidFill>
                   <a:srgbClr val="FFFFFF"/>
                 </a:solidFill>
-                <a:latin typeface="Trebuchet MS" pitchFamily="34" charset="0"/>
+                <a:latin typeface="Trebuchet MS"/>
                 <a:ea typeface="Trebuchet MS" pitchFamily="34" charset="-122"/>
                 <a:cs typeface="Trebuchet MS" pitchFamily="34" charset="-120"/>
               </a:rPr>
-              <a:t>Performance Evaluation</a:t>
+              <a:t>CNN Performance Evaluation</a:t>
             </a:r>
           </a:p>
         </p:txBody>
@@ -26069,9 +25954,9 @@
             <a:pPr algn="ctr"/>
             <a:r>
               <a:rPr lang="en-US" sz="3200" b="1"/>
-              <a:t>3</a:t>
-            </a:r>
-            <a:endParaRPr lang="pt-PT" b="1" dirty="0"/>
+              <a:t>2.3</a:t>
+            </a:r>
+            <a:endParaRPr lang="en-US" sz="3200" b="1" dirty="0"/>
           </a:p>
         </p:txBody>
       </p:sp>
@@ -27010,7 +26895,7 @@
         </p:nvSpPr>
         <p:spPr>
           <a:xfrm>
-            <a:off x="7498079" y="82296"/>
+            <a:off x="7498079" y="72610"/>
             <a:ext cx="1557633" cy="329184"/>
           </a:xfrm>
           <a:prstGeom prst="rect">
@@ -27027,19 +26912,19 @@
           </a:ln>
         </p:spPr>
         <p:txBody>
-          <a:bodyPr/>
+          <a:bodyPr lIns="91440" tIns="45720" rIns="91440" bIns="45720" anchor="t"/>
           <a:lstStyle/>
           <a:p>
             <a:pPr algn="ctr"/>
             <a:r>
-              <a:rPr lang="en-US" b="1" dirty="0">
+              <a:rPr lang="en-US" b="1">
                 <a:solidFill>
                   <a:schemeClr val="bg1"/>
                 </a:solidFill>
               </a:rPr>
-              <a:t>Perf Eval</a:t>
-            </a:r>
-            <a:endParaRPr lang="pt-PT" b="1" dirty="0">
+              <a:t>CNN Perf Eval</a:t>
+            </a:r>
+            <a:endParaRPr lang="pt-PT" b="1">
               <a:solidFill>
                 <a:schemeClr val="bg1"/>
               </a:solidFill>
@@ -27049,10 +26934,10 @@
       </p:sp>
       <p:sp>
         <p:nvSpPr>
-          <p:cNvPr id="25" name="Rectangle: Rounded Corners 24">
+          <p:cNvPr id="23" name="TData">
             <a:extLst>
               <a:ext uri="{FF2B5EF4-FFF2-40B4-BE49-F238E27FC236}">
-                <a16:creationId xmlns:a16="http://schemas.microsoft.com/office/drawing/2014/main" id="{2D9348A7-BB2F-46AA-6AE0-8CD5208844DA}"/>
+                <a16:creationId xmlns:a16="http://schemas.microsoft.com/office/drawing/2014/main" id="{6A6165A4-672B-AF7A-ECDD-50015C018A27}"/>
               </a:ext>
             </a:extLst>
           </p:cNvPr>
@@ -27061,8 +26946,434 @@
         </p:nvSpPr>
         <p:spPr>
           <a:xfrm>
-            <a:off x="7088176" y="4253"/>
-            <a:ext cx="470123" cy="470912"/>
+            <a:off x="310896" y="2772088"/>
+            <a:ext cx="5077968" cy="2420968"/>
+          </a:xfrm>
+          <a:prstGeom prst="rect">
+            <a:avLst/>
+          </a:prstGeom>
+          <a:noFill/>
+          <a:ln/>
+        </p:spPr>
+        <p:txBody>
+          <a:bodyPr wrap="square" lIns="91440" tIns="45720" rIns="91440" bIns="45720" rtlCol="0" anchor="t"/>
+          <a:lstStyle/>
+          <a:p>
+            <a:pPr>
+              <a:buNone/>
+            </a:pPr>
+            <a:r>
+              <a:rPr lang="en-US" b="1" dirty="0">
+                <a:solidFill>
+                  <a:srgbClr val="1C3A52"/>
+                </a:solidFill>
+                <a:latin typeface="Calibri"/>
+              </a:rPr>
+              <a:t>System                    			macro-F1   	acc    </a:t>
+            </a:r>
+          </a:p>
+          <a:p>
+            <a:pPr>
+              <a:buNone/>
+            </a:pPr>
+            <a:r>
+              <a:rPr lang="en-US" dirty="0">
+                <a:solidFill>
+                  <a:srgbClr val="888888"/>
+                </a:solidFill>
+                <a:latin typeface="Calibri"/>
+              </a:rPr>
+              <a:t>Random baseline           		0.111      		11.1%</a:t>
+            </a:r>
+          </a:p>
+          <a:p>
+            <a:r>
+              <a:rPr lang="en-US">
+                <a:solidFill>
+                  <a:srgbClr val="888888"/>
+                </a:solidFill>
+                <a:latin typeface="Calibri"/>
+              </a:rPr>
+              <a:t>Always-Water              		0.021      		18.7%</a:t>
+            </a:r>
+            <a:endParaRPr lang="en-US">
+              <a:solidFill>
+                <a:srgbClr val="888888"/>
+              </a:solidFill>
+              <a:latin typeface="Calibri"/>
+              <a:ea typeface="Calibri"/>
+              <a:cs typeface="Calibri"/>
+            </a:endParaRPr>
+          </a:p>
+          <a:p>
+            <a:r>
+              <a:rPr lang="en-US" b="1">
+                <a:solidFill>
+                  <a:srgbClr val="00A896"/>
+                </a:solidFill>
+                <a:latin typeface="Calibri"/>
+                <a:ea typeface="Calibri"/>
+                <a:cs typeface="Calibri"/>
+              </a:rPr>
+              <a:t>M_CNN (submitted) ★		1.0000              100%</a:t>
+            </a:r>
+            <a:endParaRPr lang="en-US" b="1" dirty="0">
+              <a:solidFill>
+                <a:srgbClr val="00A896"/>
+              </a:solidFill>
+              <a:latin typeface="Calibri"/>
+              <a:ea typeface="Calibri"/>
+              <a:cs typeface="Calibri"/>
+            </a:endParaRPr>
+          </a:p>
+          <a:p>
+            <a:r>
+              <a:rPr lang="en-US">
+                <a:solidFill>
+                  <a:srgbClr val="1C3A52"/>
+                </a:solidFill>
+                <a:latin typeface="Calibri"/>
+              </a:rPr>
+              <a:t>Kaggle public test                     1.0000                 —</a:t>
+            </a:r>
+          </a:p>
+          <a:p>
+            <a:r>
+              <a:rPr lang="en-US">
+                <a:solidFill>
+                  <a:srgbClr val="1C3A52"/>
+                </a:solidFill>
+                <a:latin typeface="Calibri"/>
+              </a:rPr>
+              <a:t>Kaggle private test                   0.99752               — </a:t>
+            </a:r>
+            <a:r>
+              <a:rPr lang="en-US" dirty="0">
+                <a:solidFill>
+                  <a:srgbClr val="1C3A52"/>
+                </a:solidFill>
+                <a:latin typeface="Calibri"/>
+              </a:rPr>
+              <a:t>  </a:t>
+            </a:r>
+            <a:endParaRPr lang="en-US">
+              <a:solidFill>
+                <a:srgbClr val="1C3A52"/>
+              </a:solidFill>
+              <a:latin typeface="Calibri"/>
+              <a:ea typeface="Calibri"/>
+              <a:cs typeface="Calibri"/>
+            </a:endParaRPr>
+          </a:p>
+        </p:txBody>
+      </p:sp>
+      <p:sp>
+        <p:nvSpPr>
+          <p:cNvPr id="28" name="MetricBG">
+            <a:extLst>
+              <a:ext uri="{FF2B5EF4-FFF2-40B4-BE49-F238E27FC236}">
+                <a16:creationId xmlns:a16="http://schemas.microsoft.com/office/drawing/2014/main" id="{CC59F894-6BB4-3F3A-9F78-9236B7E8164D}"/>
+              </a:ext>
+            </a:extLst>
+          </p:cNvPr>
+          <p:cNvSpPr/>
+          <p:nvPr/>
+        </p:nvSpPr>
+        <p:spPr>
+          <a:xfrm>
+            <a:off x="5546979" y="2436880"/>
+            <a:ext cx="3414141" cy="2530051"/>
+          </a:xfrm>
+          <a:prstGeom prst="rect">
+            <a:avLst/>
+          </a:prstGeom>
+          <a:solidFill>
+            <a:srgbClr val="0D1B2A"/>
+          </a:solidFill>
+          <a:ln w="0">
+            <a:noFill/>
+          </a:ln>
+        </p:spPr>
+        <p:txBody>
+          <a:bodyPr/>
+          <a:lstStyle/>
+          <a:p>
+            <a:endParaRPr lang="en-US"/>
+          </a:p>
+        </p:txBody>
+      </p:sp>
+      <p:sp>
+        <p:nvSpPr>
+          <p:cNvPr id="29" name="MetricText">
+            <a:extLst>
+              <a:ext uri="{FF2B5EF4-FFF2-40B4-BE49-F238E27FC236}">
+                <a16:creationId xmlns:a16="http://schemas.microsoft.com/office/drawing/2014/main" id="{8BC9AFA8-BE80-9441-0C07-2D003F12BB94}"/>
+              </a:ext>
+            </a:extLst>
+          </p:cNvPr>
+          <p:cNvSpPr/>
+          <p:nvPr/>
+        </p:nvSpPr>
+        <p:spPr>
+          <a:xfrm>
+            <a:off x="5546979" y="2433861"/>
+            <a:ext cx="3414141" cy="2541843"/>
+          </a:xfrm>
+          <a:prstGeom prst="rect">
+            <a:avLst/>
+          </a:prstGeom>
+          <a:noFill/>
+          <a:ln/>
+        </p:spPr>
+        <p:txBody>
+          <a:bodyPr wrap="square" lIns="91440" tIns="45720" rIns="91440" bIns="45720" rtlCol="0" anchor="t"/>
+          <a:lstStyle/>
+          <a:p>
+            <a:r>
+              <a:rPr lang="en-US" b="1" dirty="0">
+                <a:solidFill>
+                  <a:srgbClr val="00A896"/>
+                </a:solidFill>
+                <a:latin typeface="Trebuchet MS"/>
+              </a:rPr>
+              <a:t>Our model achieved </a:t>
+            </a:r>
+            <a:r>
+              <a:rPr lang="en-US" b="1">
+                <a:solidFill>
+                  <a:srgbClr val="00A896"/>
+                </a:solidFill>
+                <a:latin typeface="Trebuchet MS"/>
+              </a:rPr>
+              <a:t>a perfect performance</a:t>
+            </a:r>
+            <a:endParaRPr lang="en-US" b="1" dirty="0">
+              <a:solidFill>
+                <a:srgbClr val="00A896"/>
+              </a:solidFill>
+              <a:latin typeface="Trebuchet MS"/>
+            </a:endParaRPr>
+          </a:p>
+          <a:p>
+            <a:pPr>
+              <a:buNone/>
+            </a:pPr>
+            <a:r>
+              <a:rPr lang="en-US" sz="1600" b="1">
+                <a:solidFill>
+                  <a:srgbClr val="00A896"/>
+                </a:solidFill>
+                <a:latin typeface="Calibri"/>
+              </a:rPr>
+              <a:t>Kaggle private score:</a:t>
+            </a:r>
+            <a:endParaRPr lang="en-US" sz="1600" b="1">
+              <a:solidFill>
+                <a:srgbClr val="00A896"/>
+              </a:solidFill>
+              <a:latin typeface="Calibri"/>
+              <a:ea typeface="Calibri"/>
+              <a:cs typeface="Calibri"/>
+            </a:endParaRPr>
+          </a:p>
+          <a:p>
+            <a:r>
+              <a:rPr lang="en-US" sz="1600" b="1" dirty="0">
+                <a:solidFill>
+                  <a:srgbClr val="00A896"/>
+                </a:solidFill>
+                <a:latin typeface="Calibri"/>
+              </a:rPr>
+              <a:t>	</a:t>
+            </a:r>
+            <a:r>
+              <a:rPr lang="en-US" sz="2400" b="1">
+                <a:solidFill>
+                  <a:srgbClr val="00A896"/>
+                </a:solidFill>
+                <a:latin typeface="Calibri"/>
+              </a:rPr>
+              <a:t>0.99752</a:t>
+            </a:r>
+            <a:endParaRPr lang="en-US" sz="2400" b="1" dirty="0">
+              <a:solidFill>
+                <a:srgbClr val="00A896"/>
+              </a:solidFill>
+              <a:latin typeface="Calibri"/>
+              <a:ea typeface="Calibri"/>
+              <a:cs typeface="Calibri"/>
+            </a:endParaRPr>
+          </a:p>
+          <a:p>
+            <a:r>
+              <a:rPr lang="en-US" sz="1100" b="1" dirty="0">
+                <a:solidFill>
+                  <a:schemeClr val="bg1"/>
+                </a:solidFill>
+                <a:latin typeface="Calibri"/>
+                <a:ea typeface="Calibri"/>
+                <a:cs typeface="Calibri"/>
+              </a:rPr>
+              <a:t>Note: </a:t>
+            </a:r>
+            <a:r>
+              <a:rPr lang="en-US" sz="1100" dirty="0">
+                <a:solidFill>
+                  <a:schemeClr val="bg1"/>
+                </a:solidFill>
+                <a:latin typeface="Calibri"/>
+                <a:ea typeface="Calibri"/>
+                <a:cs typeface="Calibri"/>
+              </a:rPr>
+              <a:t>we submitted M (Residual Network) instead of I since it also achieves a perfect score, but with lower losses (10^-3 vs 10^-2). In this report, we decided to analyze I instead of M since it converged faster, and M is so powerful that changing parameters and doing strange augmentation didn't hurt it, making it impossible to come to new conclusions</a:t>
+            </a:r>
+          </a:p>
+          <a:p>
+            <a:endParaRPr lang="en-US" sz="2400" dirty="0">
+              <a:solidFill>
+                <a:srgbClr val="00A896"/>
+              </a:solidFill>
+              <a:latin typeface="Calibri"/>
+              <a:ea typeface="Calibri"/>
+              <a:cs typeface="Calibri"/>
+            </a:endParaRPr>
+          </a:p>
+        </p:txBody>
+      </p:sp>
+      <p:sp>
+        <p:nvSpPr>
+          <p:cNvPr id="22" name="Text 14">
+            <a:extLst>
+              <a:ext uri="{FF2B5EF4-FFF2-40B4-BE49-F238E27FC236}">
+                <a16:creationId xmlns:a16="http://schemas.microsoft.com/office/drawing/2014/main" id="{16BD9560-217A-B398-F89C-2FD2E89C8DE9}"/>
+              </a:ext>
+            </a:extLst>
+          </p:cNvPr>
+          <p:cNvSpPr/>
+          <p:nvPr/>
+        </p:nvSpPr>
+        <p:spPr>
+          <a:xfrm>
+            <a:off x="6876288" y="864112"/>
+            <a:ext cx="1993392" cy="658368"/>
+          </a:xfrm>
+          <a:prstGeom prst="rect">
+            <a:avLst/>
+          </a:prstGeom>
+          <a:noFill/>
+          <a:ln/>
+        </p:spPr>
+        <p:txBody>
+          <a:bodyPr wrap="square" lIns="0" tIns="0" rIns="0" bIns="0" rtlCol="0" anchor="ctr"/>
+          <a:lstStyle/>
+          <a:p>
+            <a:pPr marL="0" indent="0" algn="ctr">
+              <a:buNone/>
+            </a:pPr>
+            <a:r>
+              <a:rPr lang="en-US" sz="3200" b="1">
+                <a:solidFill>
+                  <a:srgbClr val="00A896"/>
+                </a:solidFill>
+                <a:latin typeface="Trebuchet MS"/>
+              </a:rPr>
+              <a:t>0.99752</a:t>
+            </a:r>
+            <a:endParaRPr lang="en-US" sz="3200">
+              <a:solidFill>
+                <a:srgbClr val="00A896"/>
+              </a:solidFill>
+            </a:endParaRPr>
+          </a:p>
+        </p:txBody>
+      </p:sp>
+      <p:sp>
+        <p:nvSpPr>
+          <p:cNvPr id="30" name="Text 15">
+            <a:extLst>
+              <a:ext uri="{FF2B5EF4-FFF2-40B4-BE49-F238E27FC236}">
+                <a16:creationId xmlns:a16="http://schemas.microsoft.com/office/drawing/2014/main" id="{5A29E501-55E5-F4F7-3B35-6649D8784CA8}"/>
+              </a:ext>
+            </a:extLst>
+          </p:cNvPr>
+          <p:cNvSpPr/>
+          <p:nvPr/>
+        </p:nvSpPr>
+        <p:spPr>
+          <a:xfrm>
+            <a:off x="6876288" y="1549912"/>
+            <a:ext cx="1993392" cy="621792"/>
+          </a:xfrm>
+          <a:prstGeom prst="rect">
+            <a:avLst/>
+          </a:prstGeom>
+          <a:noFill/>
+          <a:ln/>
+        </p:spPr>
+        <p:txBody>
+          <a:bodyPr wrap="square" lIns="0" tIns="0" rIns="0" bIns="0" rtlCol="0" anchor="ctr"/>
+          <a:lstStyle/>
+          <a:p>
+            <a:pPr marL="0" indent="0" algn="ctr">
+              <a:buNone/>
+            </a:pPr>
+            <a:r>
+              <a:rPr lang="en-US" sz="1100" b="1" dirty="0">
+                <a:solidFill>
+                  <a:schemeClr val="bg1"/>
+                </a:solidFill>
+                <a:latin typeface="Calibri"/>
+                <a:ea typeface="Calibri"/>
+                <a:cs typeface="Calibri"/>
+              </a:rPr>
+              <a:t>Kaggle private score</a:t>
+            </a:r>
+            <a:endParaRPr lang="en-US" sz="1100" b="1">
+              <a:solidFill>
+                <a:schemeClr val="bg1"/>
+              </a:solidFill>
+              <a:latin typeface="Calibri"/>
+              <a:ea typeface="Calibri"/>
+              <a:cs typeface="Calibri"/>
+            </a:endParaRPr>
+          </a:p>
+          <a:p>
+            <a:pPr algn="ctr"/>
+            <a:r>
+              <a:rPr lang="en-US" sz="1100" dirty="0">
+                <a:solidFill>
+                  <a:srgbClr val="FFFFFF"/>
+                </a:solidFill>
+                <a:latin typeface="Calibri"/>
+                <a:ea typeface="Calibri"/>
+                <a:cs typeface="Calibri"/>
+              </a:rPr>
+              <a:t>(submitted M_CNN)</a:t>
+            </a:r>
+            <a:endParaRPr lang="en-US" sz="1100" dirty="0">
+              <a:latin typeface="Calibri"/>
+              <a:ea typeface="Calibri"/>
+              <a:cs typeface="Calibri"/>
+            </a:endParaRPr>
+          </a:p>
+        </p:txBody>
+      </p:sp>
+      <p:sp>
+        <p:nvSpPr>
+          <p:cNvPr id="32" name="NumCircle">
+            <a:extLst>
+              <a:ext uri="{FF2B5EF4-FFF2-40B4-BE49-F238E27FC236}">
+                <a16:creationId xmlns:a16="http://schemas.microsoft.com/office/drawing/2014/main" id="{BA48E8AF-0D9A-8CAA-14B2-DBB1DC40E32A}"/>
+              </a:ext>
+            </a:extLst>
+          </p:cNvPr>
+          <p:cNvSpPr/>
+          <p:nvPr/>
+        </p:nvSpPr>
+        <p:spPr>
+          <a:xfrm>
+            <a:off x="6652288" y="33312"/>
+            <a:ext cx="857580" cy="422479"/>
           </a:xfrm>
           <a:prstGeom prst="roundRect">
             <a:avLst/>
@@ -27089,414 +27400,9 @@
             <a:pPr algn="ctr"/>
             <a:r>
               <a:rPr lang="en-US" sz="2800" b="1"/>
-              <a:t>3</a:t>
-            </a:r>
-          </a:p>
-        </p:txBody>
-      </p:sp>
-      <p:sp>
-        <p:nvSpPr>
-          <p:cNvPr id="23" name="TData">
-            <a:extLst>
-              <a:ext uri="{FF2B5EF4-FFF2-40B4-BE49-F238E27FC236}">
-                <a16:creationId xmlns:a16="http://schemas.microsoft.com/office/drawing/2014/main" id="{6A6165A4-672B-AF7A-ECDD-50015C018A27}"/>
-              </a:ext>
-            </a:extLst>
-          </p:cNvPr>
-          <p:cNvSpPr/>
-          <p:nvPr/>
-        </p:nvSpPr>
-        <p:spPr>
-          <a:xfrm>
-            <a:off x="310896" y="2772088"/>
-            <a:ext cx="5077968" cy="2420968"/>
-          </a:xfrm>
-          <a:prstGeom prst="rect">
-            <a:avLst/>
-          </a:prstGeom>
-          <a:noFill/>
-          <a:ln/>
-        </p:spPr>
-        <p:txBody>
-          <a:bodyPr wrap="square" lIns="91440" tIns="45720" rIns="91440" bIns="45720" rtlCol="0" anchor="t"/>
-          <a:lstStyle/>
-          <a:p>
-            <a:pPr>
-              <a:buNone/>
-            </a:pPr>
-            <a:r>
-              <a:rPr lang="en-US" b="1" dirty="0">
-                <a:solidFill>
-                  <a:srgbClr val="1C3A52"/>
-                </a:solidFill>
-                <a:latin typeface="Calibri"/>
-              </a:rPr>
-              <a:t>System                    			macro-F1   	acc    </a:t>
-            </a:r>
-          </a:p>
-          <a:p>
-            <a:pPr>
-              <a:buNone/>
-            </a:pPr>
-            <a:r>
-              <a:rPr lang="en-US" dirty="0">
-                <a:solidFill>
-                  <a:srgbClr val="888888"/>
-                </a:solidFill>
-                <a:latin typeface="Calibri"/>
-              </a:rPr>
-              <a:t>Random baseline           		0.111      		11.1%</a:t>
-            </a:r>
-          </a:p>
-          <a:p>
-            <a:r>
-              <a:rPr lang="en-US">
-                <a:solidFill>
-                  <a:srgbClr val="888888"/>
-                </a:solidFill>
-                <a:latin typeface="Calibri"/>
-              </a:rPr>
-              <a:t>Always-Water              		0.021      		18.7%</a:t>
-            </a:r>
-            <a:endParaRPr lang="en-US">
-              <a:solidFill>
-                <a:srgbClr val="888888"/>
-              </a:solidFill>
-              <a:latin typeface="Calibri"/>
-              <a:ea typeface="Calibri"/>
-              <a:cs typeface="Calibri"/>
-            </a:endParaRPr>
-          </a:p>
-          <a:p>
-            <a:r>
-              <a:rPr lang="en-US" b="1">
-                <a:solidFill>
-                  <a:srgbClr val="00A896"/>
-                </a:solidFill>
-                <a:latin typeface="Calibri"/>
-                <a:ea typeface="Calibri"/>
-                <a:cs typeface="Calibri"/>
-              </a:rPr>
-              <a:t>M_CNN (submitted) ★		1.0000              100%</a:t>
-            </a:r>
-            <a:endParaRPr lang="en-US" b="1" dirty="0">
-              <a:solidFill>
-                <a:srgbClr val="00A896"/>
-              </a:solidFill>
-              <a:latin typeface="Calibri"/>
-              <a:ea typeface="Calibri"/>
-              <a:cs typeface="Calibri"/>
-            </a:endParaRPr>
-          </a:p>
-          <a:p>
-            <a:r>
-              <a:rPr lang="en-US">
-                <a:solidFill>
-                  <a:srgbClr val="1C3A52"/>
-                </a:solidFill>
-                <a:latin typeface="Calibri"/>
-              </a:rPr>
-              <a:t>Kaggle public test                     1.0000                 —  </a:t>
-            </a:r>
-            <a:endParaRPr lang="en-US">
-              <a:solidFill>
-                <a:srgbClr val="1C3A52"/>
-              </a:solidFill>
-              <a:latin typeface="Calibri"/>
-              <a:ea typeface="Calibri"/>
-              <a:cs typeface="Calibri"/>
-            </a:endParaRPr>
-          </a:p>
-        </p:txBody>
-      </p:sp>
-      <p:sp>
-        <p:nvSpPr>
-          <p:cNvPr id="28" name="MetricBG">
-            <a:extLst>
-              <a:ext uri="{FF2B5EF4-FFF2-40B4-BE49-F238E27FC236}">
-                <a16:creationId xmlns:a16="http://schemas.microsoft.com/office/drawing/2014/main" id="{CC59F894-6BB4-3F3A-9F78-9236B7E8164D}"/>
-              </a:ext>
-            </a:extLst>
-          </p:cNvPr>
-          <p:cNvSpPr/>
-          <p:nvPr/>
-        </p:nvSpPr>
-        <p:spPr>
-          <a:xfrm>
-            <a:off x="5546979" y="2436880"/>
-            <a:ext cx="3414141" cy="2530051"/>
-          </a:xfrm>
-          <a:prstGeom prst="rect">
-            <a:avLst/>
-          </a:prstGeom>
-          <a:solidFill>
-            <a:srgbClr val="0D1B2A"/>
-          </a:solidFill>
-          <a:ln w="0">
-            <a:noFill/>
-          </a:ln>
-        </p:spPr>
-        <p:txBody>
-          <a:bodyPr/>
-          <a:lstStyle/>
-          <a:p>
-            <a:endParaRPr lang="en-US"/>
-          </a:p>
-        </p:txBody>
-      </p:sp>
-      <p:sp>
-        <p:nvSpPr>
-          <p:cNvPr id="29" name="MetricText">
-            <a:extLst>
-              <a:ext uri="{FF2B5EF4-FFF2-40B4-BE49-F238E27FC236}">
-                <a16:creationId xmlns:a16="http://schemas.microsoft.com/office/drawing/2014/main" id="{8BC9AFA8-BE80-9441-0C07-2D003F12BB94}"/>
-              </a:ext>
-            </a:extLst>
-          </p:cNvPr>
-          <p:cNvSpPr/>
-          <p:nvPr/>
-        </p:nvSpPr>
-        <p:spPr>
-          <a:xfrm>
-            <a:off x="5546979" y="2433861"/>
-            <a:ext cx="3414141" cy="2541843"/>
-          </a:xfrm>
-          <a:prstGeom prst="rect">
-            <a:avLst/>
-          </a:prstGeom>
-          <a:noFill/>
-          <a:ln/>
-        </p:spPr>
-        <p:txBody>
-          <a:bodyPr wrap="square" lIns="91440" tIns="45720" rIns="91440" bIns="45720" rtlCol="0" anchor="t"/>
-          <a:lstStyle/>
-          <a:p>
-            <a:r>
-              <a:rPr lang="en-US" b="1" dirty="0">
-                <a:solidFill>
-                  <a:srgbClr val="00A896"/>
-                </a:solidFill>
-                <a:latin typeface="Trebuchet MS"/>
-              </a:rPr>
-              <a:t>Our model achieved </a:t>
-            </a:r>
-            <a:r>
-              <a:rPr lang="en-US" b="1">
-                <a:solidFill>
-                  <a:srgbClr val="00A896"/>
-                </a:solidFill>
-                <a:latin typeface="Trebuchet MS"/>
-              </a:rPr>
-              <a:t>a perfect performance</a:t>
-            </a:r>
-            <a:endParaRPr lang="en-US" b="1" dirty="0">
-              <a:solidFill>
-                <a:srgbClr val="00A896"/>
-              </a:solidFill>
-              <a:latin typeface="Trebuchet MS"/>
-            </a:endParaRPr>
-          </a:p>
-          <a:p>
-            <a:pPr>
-              <a:buNone/>
-            </a:pPr>
-            <a:r>
-              <a:rPr lang="en-US" sz="1600" b="1">
-                <a:solidFill>
-                  <a:srgbClr val="00A896"/>
-                </a:solidFill>
-                <a:latin typeface="Calibri"/>
-              </a:rPr>
-              <a:t>Kaggle private score:</a:t>
-            </a:r>
-            <a:endParaRPr lang="en-US" sz="1600" b="1">
-              <a:solidFill>
-                <a:srgbClr val="00A896"/>
-              </a:solidFill>
-              <a:latin typeface="Calibri"/>
-              <a:ea typeface="Calibri"/>
-              <a:cs typeface="Calibri"/>
-            </a:endParaRPr>
-          </a:p>
-          <a:p>
-            <a:r>
-              <a:rPr lang="en-US" sz="1600" b="1" dirty="0">
-                <a:solidFill>
-                  <a:srgbClr val="00A896"/>
-                </a:solidFill>
-                <a:latin typeface="Calibri"/>
-              </a:rPr>
-              <a:t>	</a:t>
-            </a:r>
-            <a:r>
-              <a:rPr lang="en-US" sz="2400" b="1">
-                <a:solidFill>
-                  <a:srgbClr val="00A896"/>
-                </a:solidFill>
-                <a:latin typeface="Calibri"/>
-              </a:rPr>
-              <a:t>0.</a:t>
-            </a:r>
-            <a:endParaRPr lang="en-US" sz="2400" b="1" dirty="0">
-              <a:solidFill>
-                <a:srgbClr val="00A896"/>
-              </a:solidFill>
-              <a:latin typeface="Calibri"/>
-              <a:ea typeface="Calibri"/>
-              <a:cs typeface="Calibri"/>
-            </a:endParaRPr>
-          </a:p>
-          <a:p>
-            <a:r>
-              <a:rPr lang="en-US" sz="1100" b="1" dirty="0">
-                <a:solidFill>
-                  <a:schemeClr val="bg1"/>
-                </a:solidFill>
-                <a:latin typeface="Calibri"/>
-                <a:ea typeface="Calibri"/>
-                <a:cs typeface="Calibri"/>
-              </a:rPr>
-              <a:t>Note: </a:t>
-            </a:r>
-            <a:r>
-              <a:rPr lang="en-US" sz="1100" dirty="0">
-                <a:solidFill>
-                  <a:schemeClr val="bg1"/>
-                </a:solidFill>
-                <a:latin typeface="Calibri"/>
-                <a:ea typeface="Calibri"/>
-                <a:cs typeface="Calibri"/>
-              </a:rPr>
-              <a:t>we submitted M (Residual Network) instead of I since it also achieves a perfect score, but with lower losses (10^-3 vs 10^-2). In this report, we decided to analyze I instead of M since it converged faster, and M is so powerful that changing parameters and doing strange augmentation didn't hurt it, making it impossible to come to new conclusions</a:t>
-            </a:r>
-          </a:p>
-          <a:p>
-            <a:endParaRPr lang="en-US" sz="2400" dirty="0">
-              <a:solidFill>
-                <a:srgbClr val="00A896"/>
-              </a:solidFill>
-              <a:latin typeface="Calibri"/>
-              <a:ea typeface="Calibri"/>
-              <a:cs typeface="Calibri"/>
-            </a:endParaRPr>
-          </a:p>
-        </p:txBody>
-      </p:sp>
-      <p:sp>
-        <p:nvSpPr>
-          <p:cNvPr id="22" name="Text 14">
-            <a:extLst>
-              <a:ext uri="{FF2B5EF4-FFF2-40B4-BE49-F238E27FC236}">
-                <a16:creationId xmlns:a16="http://schemas.microsoft.com/office/drawing/2014/main" id="{16BD9560-217A-B398-F89C-2FD2E89C8DE9}"/>
-              </a:ext>
-            </a:extLst>
-          </p:cNvPr>
-          <p:cNvSpPr/>
-          <p:nvPr/>
-        </p:nvSpPr>
-        <p:spPr>
-          <a:xfrm>
-            <a:off x="6876288" y="864112"/>
-            <a:ext cx="1993392" cy="658368"/>
-          </a:xfrm>
-          <a:prstGeom prst="rect">
-            <a:avLst/>
-          </a:prstGeom>
-          <a:noFill/>
-          <a:ln/>
-        </p:spPr>
-        <p:txBody>
-          <a:bodyPr wrap="square" lIns="0" tIns="0" rIns="0" bIns="0" rtlCol="0" anchor="ctr"/>
-          <a:lstStyle/>
-          <a:p>
-            <a:pPr marL="0" indent="0" algn="ctr">
-              <a:buNone/>
-            </a:pPr>
-            <a:r>
-              <a:rPr lang="en-US" sz="3200" b="1">
-                <a:solidFill>
-                  <a:srgbClr val="00A896"/>
-                </a:solidFill>
-                <a:latin typeface="Trebuchet MS"/>
-              </a:rPr>
-              <a:t>0.</a:t>
-            </a:r>
-            <a:endParaRPr lang="en-US" sz="3200">
-              <a:solidFill>
-                <a:srgbClr val="00A896"/>
-              </a:solidFill>
-            </a:endParaRPr>
-          </a:p>
-        </p:txBody>
-      </p:sp>
-      <p:sp>
-        <p:nvSpPr>
-          <p:cNvPr id="30" name="Text 15">
-            <a:extLst>
-              <a:ext uri="{FF2B5EF4-FFF2-40B4-BE49-F238E27FC236}">
-                <a16:creationId xmlns:a16="http://schemas.microsoft.com/office/drawing/2014/main" id="{5A29E501-55E5-F4F7-3B35-6649D8784CA8}"/>
-              </a:ext>
-            </a:extLst>
-          </p:cNvPr>
-          <p:cNvSpPr/>
-          <p:nvPr/>
-        </p:nvSpPr>
-        <p:spPr>
-          <a:xfrm>
-            <a:off x="6876288" y="1549912"/>
-            <a:ext cx="1993392" cy="621792"/>
-          </a:xfrm>
-          <a:prstGeom prst="rect">
-            <a:avLst/>
-          </a:prstGeom>
-          <a:noFill/>
-          <a:ln/>
-        </p:spPr>
-        <p:txBody>
-          <a:bodyPr wrap="square" lIns="0" tIns="0" rIns="0" bIns="0" rtlCol="0" anchor="ctr"/>
-          <a:lstStyle/>
-          <a:p>
-            <a:pPr marL="0" indent="0" algn="ctr">
-              <a:buNone/>
-            </a:pPr>
-            <a:r>
-              <a:rPr lang="en-US" sz="1100" b="1" dirty="0">
-                <a:solidFill>
-                  <a:schemeClr val="bg1"/>
-                </a:solidFill>
-                <a:latin typeface="Calibri"/>
-                <a:ea typeface="Calibri"/>
-                <a:cs typeface="Calibri"/>
-              </a:rPr>
-              <a:t>Kaggle private score</a:t>
-            </a:r>
-            <a:endParaRPr lang="en-US" sz="1100" b="1">
-              <a:solidFill>
-                <a:schemeClr val="bg1"/>
-              </a:solidFill>
-              <a:latin typeface="Calibri"/>
-              <a:ea typeface="Calibri"/>
-              <a:cs typeface="Calibri"/>
-            </a:endParaRPr>
-          </a:p>
-          <a:p>
-            <a:pPr algn="ctr"/>
-            <a:r>
-              <a:rPr lang="en-US" sz="1100" dirty="0">
-                <a:solidFill>
-                  <a:srgbClr val="FFFFFF"/>
-                </a:solidFill>
-                <a:latin typeface="Calibri"/>
-                <a:ea typeface="Calibri"/>
-                <a:cs typeface="Calibri"/>
-              </a:rPr>
-              <a:t>(submitted M_CNN)</a:t>
-            </a:r>
-            <a:endParaRPr lang="en-US" sz="1100" dirty="0">
-              <a:latin typeface="Calibri"/>
-              <a:ea typeface="Calibri"/>
-              <a:cs typeface="Calibri"/>
-            </a:endParaRPr>
+              <a:t>2.3</a:t>
+            </a:r>
+            <a:endParaRPr lang="en-US" sz="2800" b="1" dirty="0"/>
           </a:p>
         </p:txBody>
       </p:sp>
@@ -27559,87 +27465,6 @@
       </p:sp>
       <p:sp>
         <p:nvSpPr>
-          <p:cNvPr id="3" name="Badge"/>
-          <p:cNvSpPr/>
-          <p:nvPr/>
-        </p:nvSpPr>
-        <p:spPr>
-          <a:xfrm>
-            <a:off x="7498079" y="82296"/>
-            <a:ext cx="1557633" cy="329184"/>
-          </a:xfrm>
-          <a:prstGeom prst="rect">
-            <a:avLst/>
-          </a:prstGeom>
-          <a:solidFill>
-            <a:srgbClr val="1C3A52"/>
-          </a:solidFill>
-          <a:ln w="12700">
-            <a:solidFill>
-              <a:srgbClr val="1C3A52"/>
-            </a:solidFill>
-            <a:prstDash val="solid"/>
-          </a:ln>
-        </p:spPr>
-        <p:txBody>
-          <a:bodyPr/>
-          <a:lstStyle/>
-          <a:p>
-            <a:pPr algn="ctr"/>
-            <a:r>
-              <a:rPr lang="en-US" b="1" dirty="0">
-                <a:solidFill>
-                  <a:srgbClr val="FFFFFF"/>
-                </a:solidFill>
-              </a:rPr>
-              <a:t>Perf Eval</a:t>
-            </a:r>
-          </a:p>
-        </p:txBody>
-      </p:sp>
-      <p:sp>
-        <p:nvSpPr>
-          <p:cNvPr id="4" name="NumCircle"/>
-          <p:cNvSpPr/>
-          <p:nvPr/>
-        </p:nvSpPr>
-        <p:spPr>
-          <a:xfrm>
-            <a:off x="7088176" y="4253"/>
-            <a:ext cx="470123" cy="470912"/>
-          </a:xfrm>
-          <a:prstGeom prst="roundRect">
-            <a:avLst/>
-          </a:prstGeom>
-        </p:spPr>
-        <p:style>
-          <a:lnRef idx="0">
-            <a:schemeClr val="accent1"/>
-          </a:lnRef>
-          <a:fillRef idx="3">
-            <a:schemeClr val="accent1"/>
-          </a:fillRef>
-          <a:effectRef idx="3">
-            <a:schemeClr val="accent1"/>
-          </a:effectRef>
-          <a:fontRef idx="minor">
-            <a:schemeClr val="lt1"/>
-          </a:fontRef>
-        </p:style>
-        <p:txBody>
-          <a:bodyPr lIns="91440" tIns="45720" rIns="91440" bIns="45720" rtlCol="0" anchor="ctr"/>
-          <a:lstStyle/>
-          <a:p>
-            <a:pPr algn="ctr"/>
-            <a:r>
-              <a:rPr lang="en-US" sz="2800" b="1"/>
-              <a:t>3</a:t>
-            </a:r>
-          </a:p>
-        </p:txBody>
-      </p:sp>
-      <p:sp>
-        <p:nvSpPr>
           <p:cNvPr id="50" name="InsightBG"/>
           <p:cNvSpPr/>
           <p:nvPr/>
@@ -27707,7 +27532,79 @@
                 </a:solidFill>
                 <a:latin typeface="Calibri"/>
               </a:rPr>
-              <a:t>as in MLPs there's high F1 in Fire/Poison/Water, due to the distinctive colors of these types; shared palette or humanoid shape give us low F1 (Bug/Rock/Fighting/Ground), since they have no predominant colors. These models had more difficulty making the jump from the colors to the shapes of the Pokémon themselves</a:t>
+              <a:t>as in MLPs there's high F1 in Fire/Poison/Water, due to the distinctive </a:t>
+            </a:r>
+            <a:r>
+              <a:rPr lang="en-US" sz="1200" dirty="0" err="1">
+                <a:solidFill>
+                  <a:srgbClr val="AACCD8"/>
+                </a:solidFill>
+                <a:latin typeface="Calibri"/>
+              </a:rPr>
+              <a:t>colours</a:t>
+            </a:r>
+            <a:r>
+              <a:rPr lang="en-US" sz="1200" dirty="0">
+                <a:solidFill>
+                  <a:srgbClr val="AACCD8"/>
+                </a:solidFill>
+                <a:latin typeface="Calibri"/>
+              </a:rPr>
+              <a:t> of these types; shared palette or humanoid shape give us low F1 (Bug/Rock/Fighting/Ground), since they have no predominant </a:t>
+            </a:r>
+            <a:r>
+              <a:rPr lang="en-US" sz="1200" dirty="0" err="1">
+                <a:solidFill>
+                  <a:srgbClr val="AACCD8"/>
+                </a:solidFill>
+                <a:latin typeface="Calibri"/>
+              </a:rPr>
+              <a:t>colours</a:t>
+            </a:r>
+            <a:r>
+              <a:rPr lang="en-US" sz="1200" dirty="0">
+                <a:solidFill>
+                  <a:srgbClr val="AACCD8"/>
+                </a:solidFill>
+                <a:latin typeface="Calibri"/>
+              </a:rPr>
+              <a:t>. These models had more difficulty making the jump from the </a:t>
+            </a:r>
+            <a:r>
+              <a:rPr lang="en-US" sz="1200" dirty="0" err="1">
+                <a:solidFill>
+                  <a:srgbClr val="AACCD8"/>
+                </a:solidFill>
+                <a:latin typeface="Calibri"/>
+              </a:rPr>
+              <a:t>colours</a:t>
+            </a:r>
+            <a:r>
+              <a:rPr lang="en-US" sz="1200" dirty="0">
+                <a:solidFill>
+                  <a:srgbClr val="AACCD8"/>
+                </a:solidFill>
+                <a:latin typeface="Calibri"/>
+              </a:rPr>
+              <a:t> to the shapes of the </a:t>
+            </a:r>
+            <a:r>
+              <a:rPr lang="en-US" sz="1200" dirty="0" err="1">
+                <a:solidFill>
+                  <a:srgbClr val="AACCD8"/>
+                </a:solidFill>
+                <a:latin typeface="Calibri"/>
+              </a:rPr>
+              <a:t>pokemon</a:t>
+            </a:r>
+            <a:r>
+              <a:rPr lang="en-US" sz="1200" dirty="0">
+                <a:solidFill>
+                  <a:srgbClr val="AACCD8"/>
+                </a:solidFill>
+                <a:latin typeface="Calibri"/>
+              </a:rPr>
+              <a:t> themselves</a:t>
             </a:r>
             <a:endParaRPr lang="en-US" sz="1200" dirty="0">
               <a:solidFill>
@@ -30406,6 +30303,105 @@
           </a:graphicData>
         </a:graphic>
       </p:graphicFrame>
+      <p:sp>
+        <p:nvSpPr>
+          <p:cNvPr id="7" name="Shape 2">
+            <a:extLst>
+              <a:ext uri="{FF2B5EF4-FFF2-40B4-BE49-F238E27FC236}">
+                <a16:creationId xmlns:a16="http://schemas.microsoft.com/office/drawing/2014/main" id="{29BA15D0-3936-62B2-8776-4A81F788C65C}"/>
+              </a:ext>
+            </a:extLst>
+          </p:cNvPr>
+          <p:cNvSpPr/>
+          <p:nvPr/>
+        </p:nvSpPr>
+        <p:spPr>
+          <a:xfrm>
+            <a:off x="7498079" y="72610"/>
+            <a:ext cx="1557633" cy="329184"/>
+          </a:xfrm>
+          <a:prstGeom prst="rect">
+            <a:avLst/>
+          </a:prstGeom>
+          <a:solidFill>
+            <a:srgbClr val="1C3A52"/>
+          </a:solidFill>
+          <a:ln w="12700">
+            <a:solidFill>
+              <a:srgbClr val="1C3A52"/>
+            </a:solidFill>
+            <a:prstDash val="solid"/>
+          </a:ln>
+        </p:spPr>
+        <p:txBody>
+          <a:bodyPr lIns="91440" tIns="45720" rIns="91440" bIns="45720" anchor="t"/>
+          <a:lstStyle/>
+          <a:p>
+            <a:pPr algn="ctr"/>
+            <a:r>
+              <a:rPr lang="en-US" b="1">
+                <a:solidFill>
+                  <a:schemeClr val="bg1"/>
+                </a:solidFill>
+              </a:rPr>
+              <a:t>CNN Perf Eval</a:t>
+            </a:r>
+            <a:endParaRPr lang="pt-PT" b="1">
+              <a:solidFill>
+                <a:schemeClr val="bg1"/>
+              </a:solidFill>
+            </a:endParaRPr>
+          </a:p>
+        </p:txBody>
+      </p:sp>
+      <p:sp>
+        <p:nvSpPr>
+          <p:cNvPr id="9" name="NumCircle">
+            <a:extLst>
+              <a:ext uri="{FF2B5EF4-FFF2-40B4-BE49-F238E27FC236}">
+                <a16:creationId xmlns:a16="http://schemas.microsoft.com/office/drawing/2014/main" id="{558FF5CF-69F3-17A8-5326-78D12DAF5B73}"/>
+              </a:ext>
+            </a:extLst>
+          </p:cNvPr>
+          <p:cNvSpPr/>
+          <p:nvPr/>
+        </p:nvSpPr>
+        <p:spPr>
+          <a:xfrm>
+            <a:off x="6652288" y="33312"/>
+            <a:ext cx="857580" cy="422479"/>
+          </a:xfrm>
+          <a:prstGeom prst="roundRect">
+            <a:avLst/>
+          </a:prstGeom>
+        </p:spPr>
+        <p:style>
+          <a:lnRef idx="0">
+            <a:schemeClr val="accent1"/>
+          </a:lnRef>
+          <a:fillRef idx="3">
+            <a:schemeClr val="accent1"/>
+          </a:fillRef>
+          <a:effectRef idx="3">
+            <a:schemeClr val="accent1"/>
+          </a:effectRef>
+          <a:fontRef idx="minor">
+            <a:schemeClr val="lt1"/>
+          </a:fontRef>
+        </p:style>
+        <p:txBody>
+          <a:bodyPr lIns="91440" tIns="45720" rIns="91440" bIns="45720" rtlCol="0" anchor="ctr"/>
+          <a:lstStyle/>
+          <a:p>
+            <a:pPr algn="ctr"/>
+            <a:r>
+              <a:rPr lang="en-US" sz="2800" b="1"/>
+              <a:t>2.3</a:t>
+            </a:r>
+            <a:endParaRPr lang="en-US" sz="2800" b="1" dirty="0"/>
+          </a:p>
+        </p:txBody>
+      </p:sp>
     </p:spTree>
   </p:cSld>
   <p:clrMapOvr>
@@ -30465,94 +30461,13 @@
       </p:sp>
       <p:sp>
         <p:nvSpPr>
-          <p:cNvPr id="3" name="Badge"/>
-          <p:cNvSpPr/>
-          <p:nvPr/>
-        </p:nvSpPr>
-        <p:spPr>
-          <a:xfrm>
-            <a:off x="7498079" y="82296"/>
-            <a:ext cx="1557633" cy="329184"/>
-          </a:xfrm>
-          <a:prstGeom prst="rect">
-            <a:avLst/>
-          </a:prstGeom>
-          <a:solidFill>
-            <a:srgbClr val="1C3A52"/>
-          </a:solidFill>
-          <a:ln w="12700">
-            <a:solidFill>
-              <a:srgbClr val="1C3A52"/>
-            </a:solidFill>
-            <a:prstDash val="solid"/>
-          </a:ln>
-        </p:spPr>
-        <p:txBody>
-          <a:bodyPr/>
-          <a:lstStyle/>
-          <a:p>
-            <a:pPr algn="ctr"/>
-            <a:r>
-              <a:rPr lang="en-US" b="1" dirty="0">
-                <a:solidFill>
-                  <a:srgbClr val="FFFFFF"/>
-                </a:solidFill>
-              </a:rPr>
-              <a:t>Perf Eval</a:t>
-            </a:r>
-          </a:p>
-        </p:txBody>
-      </p:sp>
-      <p:sp>
-        <p:nvSpPr>
-          <p:cNvPr id="4" name="NumCircle"/>
-          <p:cNvSpPr/>
-          <p:nvPr/>
-        </p:nvSpPr>
-        <p:spPr>
-          <a:xfrm>
-            <a:off x="7088176" y="4253"/>
-            <a:ext cx="470123" cy="470912"/>
-          </a:xfrm>
-          <a:prstGeom prst="roundRect">
-            <a:avLst/>
-          </a:prstGeom>
-        </p:spPr>
-        <p:style>
-          <a:lnRef idx="0">
-            <a:schemeClr val="accent1"/>
-          </a:lnRef>
-          <a:fillRef idx="3">
-            <a:schemeClr val="accent1"/>
-          </a:fillRef>
-          <a:effectRef idx="3">
-            <a:schemeClr val="accent1"/>
-          </a:effectRef>
-          <a:fontRef idx="minor">
-            <a:schemeClr val="lt1"/>
-          </a:fontRef>
-        </p:style>
-        <p:txBody>
-          <a:bodyPr lIns="91440" tIns="45720" rIns="91440" bIns="45720" rtlCol="0" anchor="ctr"/>
-          <a:lstStyle/>
-          <a:p>
-            <a:pPr algn="ctr"/>
-            <a:r>
-              <a:rPr lang="en-US" sz="2800" b="1"/>
-              <a:t>3</a:t>
-            </a:r>
-          </a:p>
-        </p:txBody>
-      </p:sp>
-      <p:sp>
-        <p:nvSpPr>
           <p:cNvPr id="5" name="Title"/>
           <p:cNvSpPr/>
           <p:nvPr/>
         </p:nvSpPr>
         <p:spPr>
           <a:xfrm>
-            <a:off x="457200" y="109728"/>
+            <a:off x="185980" y="109728"/>
             <a:ext cx="6400800" cy="530352"/>
           </a:xfrm>
           <a:prstGeom prst="rect">
@@ -30631,7 +30546,7 @@
           <a:lstStyle/>
           <a:p>
             <a:r>
-              <a:rPr lang="en-US" sz="1200" b="1" dirty="0">
+              <a:rPr lang="en-US" sz="1200" b="1">
                 <a:solidFill>
                   <a:srgbClr val="00A896"/>
                 </a:solidFill>
@@ -30639,7 +30554,7 @@
               </a:rPr>
               <a:t>Normal is the catch-all for MLP</a:t>
             </a:r>
-            <a:endParaRPr lang="en-US" dirty="0"/>
+            <a:endParaRPr lang="en-US"/>
           </a:p>
           <a:p>
             <a:pPr marL="228600" indent="-228600">
@@ -30652,9 +30567,18 @@
                 </a:solidFill>
                 <a:latin typeface="Calibri"/>
               </a:rPr>
-              <a:t>Normal = most diverse class: humanoids of every shape and size, no dominant color</a:t>
-            </a:r>
-            <a:endParaRPr lang="en-US" sz="1100" dirty="0">
+              <a:t>Normal = most diverse class: humanoids of every shape and size, no dominant </a:t>
+            </a:r>
+            <a:r>
+              <a:rPr lang="en-US" sz="1100" dirty="0" err="1">
+                <a:solidFill>
+                  <a:schemeClr val="bg1"/>
+                </a:solidFill>
+                <a:latin typeface="Calibri"/>
+              </a:rPr>
+              <a:t>colour</a:t>
+            </a:r>
+            <a:endParaRPr lang="en-US" sz="1100" dirty="0" err="1">
               <a:solidFill>
                 <a:schemeClr val="bg1"/>
               </a:solidFill>
@@ -30849,7 +30773,7 @@
           <a:lstStyle/>
           <a:p>
             <a:r>
-              <a:rPr lang="en-US" sz="1200" b="1" dirty="0">
+              <a:rPr lang="en-US" sz="1200" b="1">
                 <a:solidFill>
                   <a:srgbClr val="00A896"/>
                 </a:solidFill>
@@ -30857,7 +30781,7 @@
               </a:rPr>
               <a:t>CNNs are immune to this</a:t>
             </a:r>
-            <a:endParaRPr lang="en-US" dirty="0"/>
+            <a:endParaRPr lang="en-US"/>
           </a:p>
           <a:p>
             <a:pPr marL="228600" indent="-228600">
@@ -30873,7 +30797,29 @@
                 <a:ea typeface="Calibri"/>
                 <a:cs typeface="Calibri"/>
               </a:rPr>
-              <a:t>As stated before, they can learn other patterns besides color and independent pixels</a:t>
+              <a:t>As stated before, they can learn other patterns besides </a:t>
+            </a:r>
+            <a:r>
+              <a:rPr lang="en-US" sz="1100" dirty="0" err="1">
+                <a:solidFill>
+                  <a:schemeClr val="bg1"/>
+                </a:solidFill>
+                <a:latin typeface="Calibri"/>
+                <a:ea typeface="Calibri"/>
+                <a:cs typeface="Calibri"/>
+              </a:rPr>
+              <a:t>colour</a:t>
+            </a:r>
+            <a:r>
+              <a:rPr lang="en-US" sz="1100" dirty="0">
+                <a:solidFill>
+                  <a:schemeClr val="bg1"/>
+                </a:solidFill>
+                <a:latin typeface="Calibri"/>
+                <a:ea typeface="Calibri"/>
+                <a:cs typeface="Calibri"/>
+              </a:rPr>
+              <a:t> and independent pixels</a:t>
             </a:r>
           </a:p>
         </p:txBody>
@@ -30922,6 +30868,105 @@
               <a:ea typeface="Calibri"/>
               <a:cs typeface="Calibri"/>
             </a:endParaRPr>
+          </a:p>
+        </p:txBody>
+      </p:sp>
+      <p:sp>
+        <p:nvSpPr>
+          <p:cNvPr id="9" name="Shape 2">
+            <a:extLst>
+              <a:ext uri="{FF2B5EF4-FFF2-40B4-BE49-F238E27FC236}">
+                <a16:creationId xmlns:a16="http://schemas.microsoft.com/office/drawing/2014/main" id="{327BFDEF-F7A7-BB23-1A7D-A78AEDACEDDB}"/>
+              </a:ext>
+            </a:extLst>
+          </p:cNvPr>
+          <p:cNvSpPr/>
+          <p:nvPr/>
+        </p:nvSpPr>
+        <p:spPr>
+          <a:xfrm>
+            <a:off x="7498079" y="72610"/>
+            <a:ext cx="1557633" cy="329184"/>
+          </a:xfrm>
+          <a:prstGeom prst="rect">
+            <a:avLst/>
+          </a:prstGeom>
+          <a:solidFill>
+            <a:srgbClr val="1C3A52"/>
+          </a:solidFill>
+          <a:ln w="12700">
+            <a:solidFill>
+              <a:srgbClr val="1C3A52"/>
+            </a:solidFill>
+            <a:prstDash val="solid"/>
+          </a:ln>
+        </p:spPr>
+        <p:txBody>
+          <a:bodyPr lIns="91440" tIns="45720" rIns="91440" bIns="45720" anchor="t"/>
+          <a:lstStyle/>
+          <a:p>
+            <a:pPr algn="ctr"/>
+            <a:r>
+              <a:rPr lang="en-US" b="1">
+                <a:solidFill>
+                  <a:schemeClr val="bg1"/>
+                </a:solidFill>
+              </a:rPr>
+              <a:t>CNN Perf Eval</a:t>
+            </a:r>
+            <a:endParaRPr lang="pt-PT" b="1">
+              <a:solidFill>
+                <a:schemeClr val="bg1"/>
+              </a:solidFill>
+            </a:endParaRPr>
+          </a:p>
+        </p:txBody>
+      </p:sp>
+      <p:sp>
+        <p:nvSpPr>
+          <p:cNvPr id="11" name="NumCircle">
+            <a:extLst>
+              <a:ext uri="{FF2B5EF4-FFF2-40B4-BE49-F238E27FC236}">
+                <a16:creationId xmlns:a16="http://schemas.microsoft.com/office/drawing/2014/main" id="{A4A43363-4011-D7C6-6B2C-89563A9E8912}"/>
+              </a:ext>
+            </a:extLst>
+          </p:cNvPr>
+          <p:cNvSpPr/>
+          <p:nvPr/>
+        </p:nvSpPr>
+        <p:spPr>
+          <a:xfrm>
+            <a:off x="6652288" y="33312"/>
+            <a:ext cx="857580" cy="422479"/>
+          </a:xfrm>
+          <a:prstGeom prst="roundRect">
+            <a:avLst/>
+          </a:prstGeom>
+        </p:spPr>
+        <p:style>
+          <a:lnRef idx="0">
+            <a:schemeClr val="accent1"/>
+          </a:lnRef>
+          <a:fillRef idx="3">
+            <a:schemeClr val="accent1"/>
+          </a:fillRef>
+          <a:effectRef idx="3">
+            <a:schemeClr val="accent1"/>
+          </a:effectRef>
+          <a:fontRef idx="minor">
+            <a:schemeClr val="lt1"/>
+          </a:fontRef>
+        </p:style>
+        <p:txBody>
+          <a:bodyPr lIns="91440" tIns="45720" rIns="91440" bIns="45720" rtlCol="0" anchor="ctr"/>
+          <a:lstStyle/>
+          <a:p>
+            <a:pPr algn="ctr"/>
+            <a:r>
+              <a:rPr lang="en-US" sz="2800" b="1"/>
+              <a:t>2.3</a:t>
+            </a:r>
+            <a:endParaRPr lang="en-US" sz="2800" b="1" dirty="0"/>
           </a:p>
         </p:txBody>
       </p:sp>
@@ -30984,87 +31029,6 @@
       </p:sp>
       <p:sp>
         <p:nvSpPr>
-          <p:cNvPr id="3" name="Badge"/>
-          <p:cNvSpPr/>
-          <p:nvPr/>
-        </p:nvSpPr>
-        <p:spPr>
-          <a:xfrm>
-            <a:off x="7498079" y="82296"/>
-            <a:ext cx="1557633" cy="329184"/>
-          </a:xfrm>
-          <a:prstGeom prst="rect">
-            <a:avLst/>
-          </a:prstGeom>
-          <a:solidFill>
-            <a:srgbClr val="1C3A52"/>
-          </a:solidFill>
-          <a:ln w="12700">
-            <a:solidFill>
-              <a:srgbClr val="1C3A52"/>
-            </a:solidFill>
-            <a:prstDash val="solid"/>
-          </a:ln>
-        </p:spPr>
-        <p:txBody>
-          <a:bodyPr/>
-          <a:lstStyle/>
-          <a:p>
-            <a:pPr algn="ctr"/>
-            <a:r>
-              <a:rPr lang="en-US" b="1" dirty="0">
-                <a:solidFill>
-                  <a:srgbClr val="FFFFFF"/>
-                </a:solidFill>
-              </a:rPr>
-              <a:t>Perf Eval</a:t>
-            </a:r>
-          </a:p>
-        </p:txBody>
-      </p:sp>
-      <p:sp>
-        <p:nvSpPr>
-          <p:cNvPr id="4" name="NumCircle"/>
-          <p:cNvSpPr/>
-          <p:nvPr/>
-        </p:nvSpPr>
-        <p:spPr>
-          <a:xfrm>
-            <a:off x="7088176" y="4253"/>
-            <a:ext cx="470123" cy="470912"/>
-          </a:xfrm>
-          <a:prstGeom prst="roundRect">
-            <a:avLst/>
-          </a:prstGeom>
-        </p:spPr>
-        <p:style>
-          <a:lnRef idx="0">
-            <a:schemeClr val="accent1"/>
-          </a:lnRef>
-          <a:fillRef idx="3">
-            <a:schemeClr val="accent1"/>
-          </a:fillRef>
-          <a:effectRef idx="3">
-            <a:schemeClr val="accent1"/>
-          </a:effectRef>
-          <a:fontRef idx="minor">
-            <a:schemeClr val="lt1"/>
-          </a:fontRef>
-        </p:style>
-        <p:txBody>
-          <a:bodyPr lIns="91440" tIns="45720" rIns="91440" bIns="45720" rtlCol="0" anchor="ctr"/>
-          <a:lstStyle/>
-          <a:p>
-            <a:pPr algn="ctr"/>
-            <a:r>
-              <a:rPr lang="en-US" sz="2800" b="1"/>
-              <a:t>3</a:t>
-            </a:r>
-          </a:p>
-        </p:txBody>
-      </p:sp>
-      <p:sp>
-        <p:nvSpPr>
           <p:cNvPr id="5" name="Title"/>
           <p:cNvSpPr/>
           <p:nvPr/>
@@ -31540,7 +31504,7 @@
                 </a:solidFill>
                 <a:latin typeface="Trebuchet MS"/>
               </a:rPr>
-              <a:t> – 1.0000</a:t>
+              <a:t> – 0.99752</a:t>
             </a:r>
           </a:p>
           <a:p>
@@ -31551,7 +31515,7 @@
                 </a:solidFill>
                 <a:latin typeface="Trebuchet MS"/>
               </a:rPr>
-              <a:t>	−0.0000 (-0.00%)</a:t>
+              <a:t>	−0.00248 (-0.2486%)</a:t>
             </a:r>
           </a:p>
           <a:p>
@@ -31573,7 +31537,7 @@
                 </a:solidFill>
                 <a:latin typeface="Calibri"/>
               </a:rPr>
-              <a:t>No gap:</a:t>
+              <a:t>Negligible gap:</a:t>
             </a:r>
             <a:endParaRPr lang="en-US" sz="1000" b="1">
               <a:solidFill>
@@ -31607,6 +31571,105 @@
               <a:ea typeface="Calibri"/>
               <a:cs typeface="Calibri"/>
             </a:endParaRPr>
+          </a:p>
+        </p:txBody>
+      </p:sp>
+      <p:sp>
+        <p:nvSpPr>
+          <p:cNvPr id="7" name="Shape 2">
+            <a:extLst>
+              <a:ext uri="{FF2B5EF4-FFF2-40B4-BE49-F238E27FC236}">
+                <a16:creationId xmlns:a16="http://schemas.microsoft.com/office/drawing/2014/main" id="{046D97F3-2152-72D7-FF43-B776D8D831CA}"/>
+              </a:ext>
+            </a:extLst>
+          </p:cNvPr>
+          <p:cNvSpPr/>
+          <p:nvPr/>
+        </p:nvSpPr>
+        <p:spPr>
+          <a:xfrm>
+            <a:off x="7498079" y="72610"/>
+            <a:ext cx="1557633" cy="329184"/>
+          </a:xfrm>
+          <a:prstGeom prst="rect">
+            <a:avLst/>
+          </a:prstGeom>
+          <a:solidFill>
+            <a:srgbClr val="1C3A52"/>
+          </a:solidFill>
+          <a:ln w="12700">
+            <a:solidFill>
+              <a:srgbClr val="1C3A52"/>
+            </a:solidFill>
+            <a:prstDash val="solid"/>
+          </a:ln>
+        </p:spPr>
+        <p:txBody>
+          <a:bodyPr lIns="91440" tIns="45720" rIns="91440" bIns="45720" anchor="t"/>
+          <a:lstStyle/>
+          <a:p>
+            <a:pPr algn="ctr"/>
+            <a:r>
+              <a:rPr lang="en-US" b="1">
+                <a:solidFill>
+                  <a:schemeClr val="bg1"/>
+                </a:solidFill>
+              </a:rPr>
+              <a:t>CNN Perf Eval</a:t>
+            </a:r>
+            <a:endParaRPr lang="pt-PT" b="1">
+              <a:solidFill>
+                <a:schemeClr val="bg1"/>
+              </a:solidFill>
+            </a:endParaRPr>
+          </a:p>
+        </p:txBody>
+      </p:sp>
+      <p:sp>
+        <p:nvSpPr>
+          <p:cNvPr id="9" name="NumCircle">
+            <a:extLst>
+              <a:ext uri="{FF2B5EF4-FFF2-40B4-BE49-F238E27FC236}">
+                <a16:creationId xmlns:a16="http://schemas.microsoft.com/office/drawing/2014/main" id="{BE1F69D0-A6A2-C8B1-B747-7A8A529A1E49}"/>
+              </a:ext>
+            </a:extLst>
+          </p:cNvPr>
+          <p:cNvSpPr/>
+          <p:nvPr/>
+        </p:nvSpPr>
+        <p:spPr>
+          <a:xfrm>
+            <a:off x="6652288" y="33312"/>
+            <a:ext cx="857580" cy="422479"/>
+          </a:xfrm>
+          <a:prstGeom prst="roundRect">
+            <a:avLst/>
+          </a:prstGeom>
+        </p:spPr>
+        <p:style>
+          <a:lnRef idx="0">
+            <a:schemeClr val="accent1"/>
+          </a:lnRef>
+          <a:fillRef idx="3">
+            <a:schemeClr val="accent1"/>
+          </a:fillRef>
+          <a:effectRef idx="3">
+            <a:schemeClr val="accent1"/>
+          </a:effectRef>
+          <a:fontRef idx="minor">
+            <a:schemeClr val="lt1"/>
+          </a:fontRef>
+        </p:style>
+        <p:txBody>
+          <a:bodyPr lIns="91440" tIns="45720" rIns="91440" bIns="45720" rtlCol="0" anchor="ctr"/>
+          <a:lstStyle/>
+          <a:p>
+            <a:pPr algn="ctr"/>
+            <a:r>
+              <a:rPr lang="en-US" sz="2800" b="1"/>
+              <a:t>2.3</a:t>
+            </a:r>
+            <a:endParaRPr lang="en-US" sz="2800" b="1" dirty="0"/>
           </a:p>
         </p:txBody>
       </p:sp>
@@ -31710,38 +31773,6 @@
       </p:sp>
       <p:sp>
         <p:nvSpPr>
-          <p:cNvPr id="4" name="Shape 2"/>
-          <p:cNvSpPr/>
-          <p:nvPr/>
-        </p:nvSpPr>
-        <p:spPr>
-          <a:xfrm>
-            <a:off x="7498080" y="109728"/>
-            <a:ext cx="1463040" cy="301752"/>
-          </a:xfrm>
-          <a:prstGeom prst="rect">
-            <a:avLst/>
-          </a:prstGeom>
-          <a:solidFill>
-            <a:srgbClr val="1C3A52"/>
-          </a:solidFill>
-          <a:ln w="12700">
-            <a:solidFill>
-              <a:srgbClr val="1C3A52"/>
-            </a:solidFill>
-            <a:prstDash val="solid"/>
-          </a:ln>
-        </p:spPr>
-        <p:txBody>
-          <a:bodyPr/>
-          <a:lstStyle/>
-          <a:p>
-            <a:endParaRPr lang="pt-PT"/>
-          </a:p>
-        </p:txBody>
-      </p:sp>
-      <p:sp>
-        <p:nvSpPr>
           <p:cNvPr id="5" name="Text 3"/>
           <p:cNvSpPr/>
           <p:nvPr/>
@@ -32967,10 +32998,10 @@
       </p:sp>
       <p:sp>
         <p:nvSpPr>
-          <p:cNvPr id="34" name="Shape 2">
+          <p:cNvPr id="41" name="Shape 2">
             <a:extLst>
               <a:ext uri="{FF2B5EF4-FFF2-40B4-BE49-F238E27FC236}">
-                <a16:creationId xmlns:a16="http://schemas.microsoft.com/office/drawing/2014/main" id="{165FD74B-79DA-23ED-55E8-07094F8039D1}"/>
+                <a16:creationId xmlns:a16="http://schemas.microsoft.com/office/drawing/2014/main" id="{C57A5BFA-AC7E-EB19-EC06-592D883C878B}"/>
               </a:ext>
             </a:extLst>
           </p:cNvPr>
@@ -32979,7 +33010,7 @@
         </p:nvSpPr>
         <p:spPr>
           <a:xfrm>
-            <a:off x="7498079" y="82296"/>
+            <a:off x="7498079" y="72610"/>
             <a:ext cx="1557633" cy="329184"/>
           </a:xfrm>
           <a:prstGeom prst="rect">
@@ -32996,19 +33027,19 @@
           </a:ln>
         </p:spPr>
         <p:txBody>
-          <a:bodyPr/>
+          <a:bodyPr lIns="91440" tIns="45720" rIns="91440" bIns="45720" anchor="t"/>
           <a:lstStyle/>
           <a:p>
             <a:pPr algn="ctr"/>
             <a:r>
-              <a:rPr lang="en-US" b="1" dirty="0">
+              <a:rPr lang="en-US" b="1">
                 <a:solidFill>
                   <a:schemeClr val="bg1"/>
                 </a:solidFill>
               </a:rPr>
-              <a:t>Perf Eval</a:t>
-            </a:r>
-            <a:endParaRPr lang="pt-PT" b="1" dirty="0">
+              <a:t>CNN Perf Eval</a:t>
+            </a:r>
+            <a:endParaRPr lang="pt-PT" b="1">
               <a:solidFill>
                 <a:schemeClr val="bg1"/>
               </a:solidFill>
@@ -33018,10 +33049,10 @@
       </p:sp>
       <p:sp>
         <p:nvSpPr>
-          <p:cNvPr id="35" name="Rectangle: Rounded Corners 34">
+          <p:cNvPr id="43" name="NumCircle">
             <a:extLst>
               <a:ext uri="{FF2B5EF4-FFF2-40B4-BE49-F238E27FC236}">
-                <a16:creationId xmlns:a16="http://schemas.microsoft.com/office/drawing/2014/main" id="{41064285-E4DC-E9BB-6886-354EDD050043}"/>
+                <a16:creationId xmlns:a16="http://schemas.microsoft.com/office/drawing/2014/main" id="{8302D6AB-0F74-1815-7D32-55FE90CCCDF9}"/>
               </a:ext>
             </a:extLst>
           </p:cNvPr>
@@ -33030,8 +33061,8 @@
         </p:nvSpPr>
         <p:spPr>
           <a:xfrm>
-            <a:off x="7088176" y="4253"/>
-            <a:ext cx="470123" cy="470912"/>
+            <a:off x="6652288" y="33312"/>
+            <a:ext cx="857580" cy="422479"/>
           </a:xfrm>
           <a:prstGeom prst="roundRect">
             <a:avLst/>
@@ -33058,7 +33089,7 @@
             <a:pPr algn="ctr"/>
             <a:r>
               <a:rPr lang="en-US" sz="2800" b="1"/>
-              <a:t>3</a:t>
+              <a:t>2.3</a:t>
             </a:r>
             <a:endParaRPr lang="en-US" sz="2800" b="1" dirty="0"/>
           </a:p>
@@ -33351,7 +33382,29 @@
                 <a:ea typeface="Trebuchet MS" pitchFamily="34" charset="-122"/>
                 <a:cs typeface="Trebuchet MS" pitchFamily="34" charset="-120"/>
               </a:rPr>
-              <a:t> F1 (I, J, K, L, M, I+K), 1.0000 Kaggle (M)</a:t>
+              <a:t> F1 (I, J, K, L, M, I+K), </a:t>
+            </a:r>
+            <a:r>
+              <a:rPr lang="en-US" sz="1100" b="1" dirty="0">
+                <a:solidFill>
+                  <a:srgbClr val="FFFFFF"/>
+                </a:solidFill>
+                <a:latin typeface="Trebuchet MS"/>
+                <a:ea typeface="+mn-lt"/>
+                <a:cs typeface="+mn-lt"/>
+              </a:rPr>
+              <a:t>0.99752</a:t>
+            </a:r>
+            <a:r>
+              <a:rPr lang="en-US" sz="1100" b="1" dirty="0">
+                <a:solidFill>
+                  <a:srgbClr val="FFFFFF"/>
+                </a:solidFill>
+                <a:latin typeface="Trebuchet MS"/>
+                <a:ea typeface="Trebuchet MS" pitchFamily="34" charset="-122"/>
+                <a:cs typeface="Trebuchet MS" pitchFamily="34" charset="-120"/>
+              </a:rPr>
+              <a:t> Kaggle (M)</a:t>
             </a:r>
             <a:endParaRPr lang="en-US" sz="1100" dirty="0">
               <a:latin typeface="Trebuchet MS"/>
@@ -34304,9 +34357,7 @@
           <a:bodyPr wrap="square" lIns="0" tIns="0" rIns="0" bIns="0" rtlCol="0" anchor="ctr"/>
           <a:lstStyle/>
           <a:p>
-            <a:pPr marL="0" indent="0" algn="ctr">
-              <a:buNone/>
-            </a:pPr>
+            <a:pPr algn="ctr"/>
             <a:r>
               <a:rPr lang="en-US" sz="1000">
                 <a:solidFill>
@@ -34316,7 +34367,7 @@
                 <a:ea typeface="Calibri"/>
                 <a:cs typeface="Calibri"/>
               </a:rPr>
-              <a:t>Task 2 complete  ·  Kaggle score: 1.0000 · 17 experiments  ·  ~37 min on T4</a:t>
+              <a:t>Task 2 complete  ·  Kaggle score: 0.99752 · 17 experiments  ·  ~37 min on T4</a:t>
             </a:r>
             <a:endParaRPr lang="en-US" sz="1000">
               <a:latin typeface="Calibri"/>
@@ -34476,7 +34527,7 @@
                 <a:ea typeface="Calibri"/>
                 <a:cs typeface="Calibri"/>
               </a:rPr>
-              <a:t>DEEP LEARNING  ·  ASSIGNMENT 1  ·  TASK 2</a:t>
+              <a:t>DEEP LEARNING  ·  ASSIGNMENT 1</a:t>
             </a:r>
             <a:endParaRPr lang="en-US" sz="1000" dirty="0"/>
           </a:p>
@@ -34563,7 +34614,28 @@
                 <a:ea typeface="Calibri"/>
                 <a:cs typeface="Calibri"/>
               </a:rPr>
-              <a:t>TASK 2 - Convolutional Neural Network</a:t>
+              <a:t>TASK 1 - Multi-Layer Perceptron</a:t>
+            </a:r>
+            <a:endParaRPr lang="en-US" sz="1600" dirty="0">
+              <a:solidFill>
+                <a:srgbClr val="7AADCC"/>
+              </a:solidFill>
+              <a:latin typeface="Calibri"/>
+              <a:ea typeface="Calibri"/>
+              <a:cs typeface="Calibri"/>
+            </a:endParaRPr>
+          </a:p>
+          <a:p>
+            <a:r>
+              <a:rPr lang="en-US" sz="1600">
+                <a:solidFill>
+                  <a:srgbClr val="7AADCC"/>
+                </a:solidFill>
+                <a:latin typeface="Calibri"/>
+                <a:ea typeface="Calibri"/>
+                <a:cs typeface="Calibri"/>
+              </a:rPr>
+              <a:t>TASK 2 - Convolutional Neural Network</a:t>
             </a:r>
             <a:endParaRPr lang="en-US" sz="1600">
               <a:latin typeface="Calibri"/>
@@ -35302,19 +35374,16 @@
           <a:bodyPr wrap="square" lIns="0" tIns="0" rIns="0" bIns="0" rtlCol="0" anchor="ctr"/>
           <a:lstStyle/>
           <a:p>
-            <a:pPr marL="0" indent="0">
-              <a:buNone/>
-            </a:pPr>
-            <a:r>
-              <a:rPr lang="en-US" sz="3000" b="1" dirty="0">
+            <a:r>
+              <a:rPr lang="en-US" sz="3000" b="1">
                 <a:solidFill>
                   <a:srgbClr val="FFFFFF"/>
                 </a:solidFill>
-                <a:latin typeface="Trebuchet MS" pitchFamily="34" charset="0"/>
+                <a:latin typeface="Trebuchet MS"/>
                 <a:ea typeface="Trebuchet MS" pitchFamily="34" charset="-122"/>
                 <a:cs typeface="Trebuchet MS" pitchFamily="34" charset="-120"/>
               </a:rPr>
-              <a:t>Model Development</a:t>
+              <a:t>CNN Model Development</a:t>
             </a:r>
           </a:p>
         </p:txBody>
@@ -35362,15 +35431,15 @@
           </a:fontRef>
         </p:style>
         <p:txBody>
-          <a:bodyPr rtlCol="0" anchor="ctr"/>
+          <a:bodyPr lIns="91440" tIns="45720" rIns="91440" bIns="45720" rtlCol="0" anchor="ctr"/>
           <a:lstStyle/>
           <a:p>
             <a:pPr algn="ctr"/>
             <a:r>
-              <a:rPr lang="en-US" sz="3200" b="1" dirty="0"/>
-              <a:t>1</a:t>
-            </a:r>
-            <a:endParaRPr lang="pt-PT" b="1" dirty="0"/>
+              <a:rPr lang="en-US" sz="3200" b="1"/>
+              <a:t>2.1</a:t>
+            </a:r>
+            <a:endParaRPr lang="en-US" sz="3200" b="1" dirty="0"/>
           </a:p>
         </p:txBody>
       </p:sp>
@@ -35488,8 +35557,8 @@
         </p:nvSpPr>
         <p:spPr>
           <a:xfrm>
-            <a:off x="7498079" y="78998"/>
-            <a:ext cx="1557633" cy="329184"/>
+            <a:off x="6936266" y="78999"/>
+            <a:ext cx="2051641" cy="348556"/>
           </a:xfrm>
           <a:prstGeom prst="rect">
             <a:avLst/>
@@ -35505,19 +35574,19 @@
           </a:ln>
         </p:spPr>
         <p:txBody>
-          <a:bodyPr/>
+          <a:bodyPr lIns="91440" tIns="45720" rIns="91440" bIns="45720" anchor="t"/>
           <a:lstStyle/>
           <a:p>
             <a:pPr algn="ctr"/>
             <a:r>
-              <a:rPr lang="en-US" b="1" dirty="0">
+              <a:rPr lang="en-US" b="1">
                 <a:solidFill>
                   <a:srgbClr val="FFFFFF"/>
                 </a:solidFill>
               </a:rPr>
-              <a:t>MODEL DEV</a:t>
-            </a:r>
-            <a:endParaRPr lang="en-US" b="1" dirty="0"/>
+              <a:t>CNN MODEL DEV</a:t>
+            </a:r>
+            <a:endParaRPr lang="en-US" b="1"/>
           </a:p>
         </p:txBody>
       </p:sp>
@@ -35529,8 +35598,8 @@
         </p:nvSpPr>
         <p:spPr>
           <a:xfrm>
-            <a:off x="7088176" y="4253"/>
-            <a:ext cx="470123" cy="470912"/>
+            <a:off x="6080788" y="33312"/>
+            <a:ext cx="857580" cy="422479"/>
           </a:xfrm>
           <a:prstGeom prst="roundRect">
             <a:avLst/>
@@ -35557,8 +35626,9 @@
             <a:pPr algn="ctr"/>
             <a:r>
               <a:rPr lang="en-US" sz="2800" b="1"/>
-              <a:t>1</a:t>
-            </a:r>
+              <a:t>2.1</a:t>
+            </a:r>
+            <a:endParaRPr lang="en-US" sz="2800" b="1" dirty="0"/>
           </a:p>
         </p:txBody>
       </p:sp>
@@ -40586,47 +40656,6 @@
       </p:sp>
       <p:sp>
         <p:nvSpPr>
-          <p:cNvPr id="3" name="Badge"/>
-          <p:cNvSpPr/>
-          <p:nvPr/>
-        </p:nvSpPr>
-        <p:spPr>
-          <a:xfrm>
-            <a:off x="7498079" y="82296"/>
-            <a:ext cx="1557633" cy="329184"/>
-          </a:xfrm>
-          <a:prstGeom prst="rect">
-            <a:avLst/>
-          </a:prstGeom>
-          <a:solidFill>
-            <a:srgbClr val="1C3A52"/>
-          </a:solidFill>
-          <a:ln w="12700">
-            <a:solidFill>
-              <a:srgbClr val="1C3A52"/>
-            </a:solidFill>
-            <a:prstDash val="solid"/>
-          </a:ln>
-        </p:spPr>
-        <p:txBody>
-          <a:bodyPr/>
-          <a:lstStyle/>
-          <a:p>
-            <a:pPr algn="ctr"/>
-            <a:r>
-              <a:rPr lang="en-US" b="1" dirty="0">
-                <a:solidFill>
-                  <a:srgbClr val="FFFFFF"/>
-                </a:solidFill>
-              </a:rPr>
-              <a:t>MODEL DEV</a:t>
-            </a:r>
-            <a:endParaRPr lang="en-US" b="1" dirty="0"/>
-          </a:p>
-        </p:txBody>
-      </p:sp>
-      <p:sp>
-        <p:nvSpPr>
           <p:cNvPr id="5" name="Title"/>
           <p:cNvSpPr/>
           <p:nvPr/>
@@ -40754,10 +40783,10 @@
       </p:pic>
       <p:sp>
         <p:nvSpPr>
-          <p:cNvPr id="9" name="NumCircle">
+          <p:cNvPr id="13" name="Badge">
             <a:extLst>
               <a:ext uri="{FF2B5EF4-FFF2-40B4-BE49-F238E27FC236}">
-                <a16:creationId xmlns:a16="http://schemas.microsoft.com/office/drawing/2014/main" id="{60965A97-3CF0-C770-CB0B-D8988B404F6D}"/>
+                <a16:creationId xmlns:a16="http://schemas.microsoft.com/office/drawing/2014/main" id="{6290DB65-3642-0BC3-DBE8-40CBEB2EDE82}"/>
               </a:ext>
             </a:extLst>
           </p:cNvPr>
@@ -40766,8 +40795,55 @@
         </p:nvSpPr>
         <p:spPr>
           <a:xfrm>
-            <a:off x="7088176" y="4253"/>
-            <a:ext cx="470123" cy="470912"/>
+            <a:off x="6936266" y="78999"/>
+            <a:ext cx="2051641" cy="348556"/>
+          </a:xfrm>
+          <a:prstGeom prst="rect">
+            <a:avLst/>
+          </a:prstGeom>
+          <a:solidFill>
+            <a:srgbClr val="1C3A52"/>
+          </a:solidFill>
+          <a:ln w="12700">
+            <a:solidFill>
+              <a:srgbClr val="1C3A52"/>
+            </a:solidFill>
+            <a:prstDash val="solid"/>
+          </a:ln>
+        </p:spPr>
+        <p:txBody>
+          <a:bodyPr lIns="91440" tIns="45720" rIns="91440" bIns="45720" anchor="t"/>
+          <a:lstStyle/>
+          <a:p>
+            <a:pPr algn="ctr"/>
+            <a:r>
+              <a:rPr lang="en-US" b="1">
+                <a:solidFill>
+                  <a:srgbClr val="FFFFFF"/>
+                </a:solidFill>
+              </a:rPr>
+              <a:t>CNN MODEL DEV</a:t>
+            </a:r>
+            <a:endParaRPr lang="en-US" b="1"/>
+          </a:p>
+        </p:txBody>
+      </p:sp>
+      <p:sp>
+        <p:nvSpPr>
+          <p:cNvPr id="15" name="NumCircle">
+            <a:extLst>
+              <a:ext uri="{FF2B5EF4-FFF2-40B4-BE49-F238E27FC236}">
+                <a16:creationId xmlns:a16="http://schemas.microsoft.com/office/drawing/2014/main" id="{D2AA396D-045A-C446-7595-256EA235ED08}"/>
+              </a:ext>
+            </a:extLst>
+          </p:cNvPr>
+          <p:cNvSpPr/>
+          <p:nvPr/>
+        </p:nvSpPr>
+        <p:spPr>
+          <a:xfrm>
+            <a:off x="6080788" y="33312"/>
+            <a:ext cx="857580" cy="422479"/>
           </a:xfrm>
           <a:prstGeom prst="roundRect">
             <a:avLst/>
@@ -40794,8 +40870,9 @@
             <a:pPr algn="ctr"/>
             <a:r>
               <a:rPr lang="en-US" sz="2800" b="1"/>
-              <a:t>1</a:t>
-            </a:r>
+              <a:t>2.1</a:t>
+            </a:r>
+            <a:endParaRPr lang="en-US" sz="2800" b="1" dirty="0"/>
           </a:p>
         </p:txBody>
       </p:sp>
@@ -40870,53 +40947,6 @@
       </p:sp>
       <p:sp>
         <p:nvSpPr>
-          <p:cNvPr id="3" name="Badge">
-            <a:extLst>
-              <a:ext uri="{FF2B5EF4-FFF2-40B4-BE49-F238E27FC236}">
-                <a16:creationId xmlns:a16="http://schemas.microsoft.com/office/drawing/2014/main" id="{F1D40FED-81BC-FB83-7C8D-D35BC772905B}"/>
-              </a:ext>
-            </a:extLst>
-          </p:cNvPr>
-          <p:cNvSpPr/>
-          <p:nvPr/>
-        </p:nvSpPr>
-        <p:spPr>
-          <a:xfrm>
-            <a:off x="7498079" y="82296"/>
-            <a:ext cx="1557633" cy="329184"/>
-          </a:xfrm>
-          <a:prstGeom prst="rect">
-            <a:avLst/>
-          </a:prstGeom>
-          <a:solidFill>
-            <a:srgbClr val="1C3A52"/>
-          </a:solidFill>
-          <a:ln w="12700">
-            <a:solidFill>
-              <a:srgbClr val="1C3A52"/>
-            </a:solidFill>
-            <a:prstDash val="solid"/>
-          </a:ln>
-        </p:spPr>
-        <p:txBody>
-          <a:bodyPr/>
-          <a:lstStyle/>
-          <a:p>
-            <a:pPr algn="ctr"/>
-            <a:r>
-              <a:rPr lang="en-US" b="1" dirty="0">
-                <a:solidFill>
-                  <a:srgbClr val="FFFFFF"/>
-                </a:solidFill>
-              </a:rPr>
-              <a:t>MODEL DEV</a:t>
-            </a:r>
-            <a:endParaRPr lang="en-US" b="1" dirty="0"/>
-          </a:p>
-        </p:txBody>
-      </p:sp>
-      <p:sp>
-        <p:nvSpPr>
           <p:cNvPr id="5" name="Title">
             <a:extLst>
               <a:ext uri="{FF2B5EF4-FFF2-40B4-BE49-F238E27FC236}">
@@ -41454,10 +41484,10 @@
       </p:sp>
       <p:sp>
         <p:nvSpPr>
-          <p:cNvPr id="7" name="NumCircle">
+          <p:cNvPr id="6" name="Badge">
             <a:extLst>
               <a:ext uri="{FF2B5EF4-FFF2-40B4-BE49-F238E27FC236}">
-                <a16:creationId xmlns:a16="http://schemas.microsoft.com/office/drawing/2014/main" id="{62AE0E9A-E324-33CD-BE2D-4032AEA07E40}"/>
+                <a16:creationId xmlns:a16="http://schemas.microsoft.com/office/drawing/2014/main" id="{2441FFA1-3287-41EE-263D-14786D672F90}"/>
               </a:ext>
             </a:extLst>
           </p:cNvPr>
@@ -41466,8 +41496,55 @@
         </p:nvSpPr>
         <p:spPr>
           <a:xfrm>
-            <a:off x="7088176" y="4253"/>
-            <a:ext cx="470123" cy="470912"/>
+            <a:off x="6936266" y="78999"/>
+            <a:ext cx="2051641" cy="348556"/>
+          </a:xfrm>
+          <a:prstGeom prst="rect">
+            <a:avLst/>
+          </a:prstGeom>
+          <a:solidFill>
+            <a:srgbClr val="1C3A52"/>
+          </a:solidFill>
+          <a:ln w="12700">
+            <a:solidFill>
+              <a:srgbClr val="1C3A52"/>
+            </a:solidFill>
+            <a:prstDash val="solid"/>
+          </a:ln>
+        </p:spPr>
+        <p:txBody>
+          <a:bodyPr lIns="91440" tIns="45720" rIns="91440" bIns="45720" anchor="t"/>
+          <a:lstStyle/>
+          <a:p>
+            <a:pPr algn="ctr"/>
+            <a:r>
+              <a:rPr lang="en-US" b="1">
+                <a:solidFill>
+                  <a:srgbClr val="FFFFFF"/>
+                </a:solidFill>
+              </a:rPr>
+              <a:t>CNN MODEL DEV</a:t>
+            </a:r>
+            <a:endParaRPr lang="en-US" b="1"/>
+          </a:p>
+        </p:txBody>
+      </p:sp>
+      <p:sp>
+        <p:nvSpPr>
+          <p:cNvPr id="9" name="NumCircle">
+            <a:extLst>
+              <a:ext uri="{FF2B5EF4-FFF2-40B4-BE49-F238E27FC236}">
+                <a16:creationId xmlns:a16="http://schemas.microsoft.com/office/drawing/2014/main" id="{E3FF0140-F3B5-4645-9471-5571E2A2BEBD}"/>
+              </a:ext>
+            </a:extLst>
+          </p:cNvPr>
+          <p:cNvSpPr/>
+          <p:nvPr/>
+        </p:nvSpPr>
+        <p:spPr>
+          <a:xfrm>
+            <a:off x="6080788" y="33312"/>
+            <a:ext cx="857580" cy="422479"/>
           </a:xfrm>
           <a:prstGeom prst="roundRect">
             <a:avLst/>
@@ -41494,8 +41571,9 @@
             <a:pPr algn="ctr"/>
             <a:r>
               <a:rPr lang="en-US" sz="2800" b="1"/>
-              <a:t>1</a:t>
-            </a:r>
+              <a:t>2.1</a:t>
+            </a:r>
+            <a:endParaRPr lang="en-US" sz="2800" b="1" dirty="0"/>
           </a:p>
         </p:txBody>
       </p:sp>
@@ -41563,47 +41641,6 @@
       </p:sp>
       <p:sp>
         <p:nvSpPr>
-          <p:cNvPr id="3" name="Badge"/>
-          <p:cNvSpPr/>
-          <p:nvPr/>
-        </p:nvSpPr>
-        <p:spPr>
-          <a:xfrm>
-            <a:off x="7498079" y="82296"/>
-            <a:ext cx="1557633" cy="329184"/>
-          </a:xfrm>
-          <a:prstGeom prst="rect">
-            <a:avLst/>
-          </a:prstGeom>
-          <a:solidFill>
-            <a:srgbClr val="1C3A52"/>
-          </a:solidFill>
-          <a:ln w="12700">
-            <a:solidFill>
-              <a:srgbClr val="1C3A52"/>
-            </a:solidFill>
-            <a:prstDash val="solid"/>
-          </a:ln>
-        </p:spPr>
-        <p:txBody>
-          <a:bodyPr/>
-          <a:lstStyle/>
-          <a:p>
-            <a:pPr algn="ctr"/>
-            <a:r>
-              <a:rPr lang="en-US" b="1" dirty="0">
-                <a:solidFill>
-                  <a:srgbClr val="FFFFFF"/>
-                </a:solidFill>
-              </a:rPr>
-              <a:t>MODEL DEV</a:t>
-            </a:r>
-            <a:endParaRPr lang="en-US" b="1" dirty="0"/>
-          </a:p>
-        </p:txBody>
-      </p:sp>
-      <p:sp>
-        <p:nvSpPr>
           <p:cNvPr id="5" name="Title"/>
           <p:cNvSpPr/>
           <p:nvPr/>
@@ -41949,7 +41986,7 @@
               <a:buNone/>
             </a:pPr>
             <a:r>
-              <a:rPr lang="en-US" sz="1400" b="1" dirty="0">
+              <a:rPr lang="en-US" sz="1400" b="1">
                 <a:solidFill>
                   <a:srgbClr val="00A896"/>
                 </a:solidFill>
@@ -41960,7 +41997,7 @@
           </a:p>
           <a:p>
             <a:r>
-              <a:rPr lang="en-US" sz="1100" b="1" dirty="0">
+              <a:rPr lang="en-US" sz="1100" b="1">
                 <a:solidFill>
                   <a:srgbClr val="1C3A52"/>
                 </a:solidFill>
@@ -41970,7 +42007,7 @@
               </a:rPr>
               <a:t>Decreased effectiveness when compared to MLPs. Idea:</a:t>
             </a:r>
-            <a:endParaRPr lang="en-US" sz="1100" b="1" dirty="0">
+            <a:endParaRPr lang="en-US" sz="1100" b="1">
               <a:solidFill>
                 <a:srgbClr val="1C3A52"/>
               </a:solidFill>
@@ -41992,29 +42029,10 @@
                 <a:ea typeface="Calibri"/>
                 <a:cs typeface="Calibri"/>
               </a:rPr>
-              <a:t>Softens hard one-hot targets (0.9/0.1 blend vs 1.0 hard)</a:t>
-            </a:r>
-          </a:p>
-          <a:p>
-            <a:pPr marL="228600" indent="-228600">
-              <a:buChar char="•"/>
-            </a:pPr>
-            <a:r>
-              <a:rPr lang="en-US" sz="1100" dirty="0">
-                <a:solidFill>
-                  <a:srgbClr val="1A2B3C"/>
-                </a:solidFill>
-                <a:latin typeface="Calibri" pitchFamily="34" charset="0"/>
-              </a:rPr>
-              <a:t>Prevents overconfident predictions on visually ambiguous classes</a:t>
-            </a:r>
-          </a:p>
-          <a:p>
-            <a:pPr marL="228600" indent="-228600">
-              <a:buChar char="•"/>
-            </a:pPr>
-            <a:r>
-              <a:rPr lang="en-US" sz="1100" dirty="0">
+              <a:t>Softens hard one-hot targets </a:t>
+            </a:r>
+            <a:r>
+              <a:rPr lang="en-US" sz="1100">
                 <a:solidFill>
                   <a:srgbClr val="1A2B3C"/>
                 </a:solidFill>
@@ -42022,7 +42040,59 @@
                 <a:ea typeface="Calibri"/>
                 <a:cs typeface="Calibri"/>
               </a:rPr>
-              <a:t>Key on noisy boundaries — Bug/Grass and Rock/Ground share color palettes</a:t>
+              <a:t>(0.9/0.1 blend vs 1.0 hard)</a:t>
+            </a:r>
+          </a:p>
+          <a:p>
+            <a:pPr marL="228600" indent="-228600">
+              <a:buChar char="•"/>
+            </a:pPr>
+            <a:r>
+              <a:rPr lang="en-US" sz="1100" dirty="0">
+                <a:solidFill>
+                  <a:srgbClr val="1A2B3C"/>
+                </a:solidFill>
+                <a:latin typeface="Calibri" pitchFamily="34" charset="0"/>
+              </a:rPr>
+              <a:t>Prevents overconfident predictions on visually ambiguous classes</a:t>
+            </a:r>
+          </a:p>
+          <a:p>
+            <a:pPr marL="228600" indent="-228600">
+              <a:buChar char="•"/>
+            </a:pPr>
+            <a:r>
+              <a:rPr lang="en-US" sz="1100" dirty="0">
+                <a:solidFill>
+                  <a:srgbClr val="1A2B3C"/>
+                </a:solidFill>
+                <a:latin typeface="Calibri"/>
+                <a:ea typeface="Calibri"/>
+                <a:cs typeface="Calibri"/>
+              </a:rPr>
+              <a:t>Key on noisy boundaries — Bug/Grass and Rock/Ground share </a:t>
+            </a:r>
+            <a:r>
+              <a:rPr lang="en-US" sz="1100" dirty="0" err="1">
+                <a:solidFill>
+                  <a:srgbClr val="1A2B3C"/>
+                </a:solidFill>
+                <a:latin typeface="Calibri"/>
+                <a:ea typeface="Calibri"/>
+                <a:cs typeface="Calibri"/>
+              </a:rPr>
+              <a:t>colour</a:t>
+            </a:r>
+            <a:r>
+              <a:rPr lang="en-US" sz="1100" dirty="0">
+                <a:solidFill>
+                  <a:srgbClr val="1A2B3C"/>
+                </a:solidFill>
+                <a:latin typeface="Calibri"/>
+                <a:ea typeface="Calibri"/>
+                <a:cs typeface="Calibri"/>
+              </a:rPr>
+              <a:t> palettes</a:t>
             </a:r>
           </a:p>
           <a:p>
@@ -42030,7 +42100,7 @@
               <a:buNone/>
             </a:pPr>
             <a:r>
-              <a:rPr lang="en-US" sz="1100" b="1" dirty="0">
+              <a:rPr lang="en-US" sz="1100" b="1">
                 <a:solidFill>
                   <a:srgbClr val="1C3A52"/>
                 </a:solidFill>
@@ -42046,7 +42116,7 @@
               <a:buChar char="•"/>
             </a:pPr>
             <a:r>
-              <a:rPr lang="en-US" sz="1100" dirty="0">
+              <a:rPr lang="en-US" sz="1100">
                 <a:solidFill>
                   <a:srgbClr val="1A2B3C"/>
                 </a:solidFill>
@@ -42054,7 +42124,29 @@
                 <a:ea typeface="Calibri"/>
                 <a:cs typeface="Calibri"/>
               </a:rPr>
-              <a:t>LS=0.1 (F) = 0.9750 vs LS=0.0 (C) = 0.9880 — tiny decrease</a:t>
+              <a:t>LS=0.1 (F) = 0.9750 vs LS=0.0 </a:t>
+            </a:r>
+            <a:r>
+              <a:rPr lang="en-US" sz="1100" dirty="0">
+                <a:solidFill>
+                  <a:srgbClr val="1A2B3C"/>
+                </a:solidFill>
+                <a:latin typeface="Calibri"/>
+                <a:ea typeface="Calibri"/>
+                <a:cs typeface="Calibri"/>
+              </a:rPr>
+              <a:t>(C) = </a:t>
+            </a:r>
+            <a:r>
+              <a:rPr lang="en-US" sz="1100">
+                <a:solidFill>
+                  <a:srgbClr val="1A2B3C"/>
+                </a:solidFill>
+                <a:latin typeface="Calibri"/>
+                <a:ea typeface="Calibri"/>
+                <a:cs typeface="Calibri"/>
+              </a:rPr>
+              <a:t>0.9880 — tiny decrease</a:t>
             </a:r>
           </a:p>
           <a:p>
@@ -42077,7 +42169,29 @@
                 <a:ea typeface="Calibri"/>
                 <a:cs typeface="Calibri"/>
               </a:rPr>
-              <a:t>A lot of models can effectively converge to a near-perfect validation score, adding label smoothing adds unnecessary noise</a:t>
+              <a:t>A lot of models can effectively </a:t>
+            </a:r>
+            <a:r>
+              <a:rPr lang="en-US" sz="1100">
+                <a:solidFill>
+                  <a:srgbClr val="1A2B3C"/>
+                </a:solidFill>
+                <a:latin typeface="Calibri"/>
+                <a:ea typeface="Calibri"/>
+                <a:cs typeface="Calibri"/>
+              </a:rPr>
+              <a:t>converge to a near-perfect validation score, adding label smoothing adds unnecessary </a:t>
+            </a:r>
+            <a:r>
+              <a:rPr lang="en-US" sz="1100" dirty="0">
+                <a:solidFill>
+                  <a:srgbClr val="1A2B3C"/>
+                </a:solidFill>
+                <a:latin typeface="Calibri"/>
+                <a:ea typeface="Calibri"/>
+                <a:cs typeface="Calibri"/>
+              </a:rPr>
+              <a:t>noise</a:t>
             </a:r>
           </a:p>
         </p:txBody>
@@ -42386,10 +42500,10 @@
       </p:sp>
       <p:sp>
         <p:nvSpPr>
-          <p:cNvPr id="8" name="NumCircle">
+          <p:cNvPr id="15" name="Badge">
             <a:extLst>
               <a:ext uri="{FF2B5EF4-FFF2-40B4-BE49-F238E27FC236}">
-                <a16:creationId xmlns:a16="http://schemas.microsoft.com/office/drawing/2014/main" id="{E5E4B655-0C2C-EE7E-736B-22A386EA0052}"/>
+                <a16:creationId xmlns:a16="http://schemas.microsoft.com/office/drawing/2014/main" id="{126339B8-3404-3014-9413-7BB1812D9E3C}"/>
               </a:ext>
             </a:extLst>
           </p:cNvPr>
@@ -42398,8 +42512,55 @@
         </p:nvSpPr>
         <p:spPr>
           <a:xfrm>
-            <a:off x="7088176" y="4253"/>
-            <a:ext cx="470123" cy="470912"/>
+            <a:off x="6936266" y="78999"/>
+            <a:ext cx="2051641" cy="348556"/>
+          </a:xfrm>
+          <a:prstGeom prst="rect">
+            <a:avLst/>
+          </a:prstGeom>
+          <a:solidFill>
+            <a:srgbClr val="1C3A52"/>
+          </a:solidFill>
+          <a:ln w="12700">
+            <a:solidFill>
+              <a:srgbClr val="1C3A52"/>
+            </a:solidFill>
+            <a:prstDash val="solid"/>
+          </a:ln>
+        </p:spPr>
+        <p:txBody>
+          <a:bodyPr lIns="91440" tIns="45720" rIns="91440" bIns="45720" anchor="t"/>
+          <a:lstStyle/>
+          <a:p>
+            <a:pPr algn="ctr"/>
+            <a:r>
+              <a:rPr lang="en-US" b="1">
+                <a:solidFill>
+                  <a:srgbClr val="FFFFFF"/>
+                </a:solidFill>
+              </a:rPr>
+              <a:t>CNN MODEL DEV</a:t>
+            </a:r>
+            <a:endParaRPr lang="en-US" b="1"/>
+          </a:p>
+        </p:txBody>
+      </p:sp>
+      <p:sp>
+        <p:nvSpPr>
+          <p:cNvPr id="17" name="NumCircle">
+            <a:extLst>
+              <a:ext uri="{FF2B5EF4-FFF2-40B4-BE49-F238E27FC236}">
+                <a16:creationId xmlns:a16="http://schemas.microsoft.com/office/drawing/2014/main" id="{B9C98147-9059-627A-B0EE-F6A32AC7B17B}"/>
+              </a:ext>
+            </a:extLst>
+          </p:cNvPr>
+          <p:cNvSpPr/>
+          <p:nvPr/>
+        </p:nvSpPr>
+        <p:spPr>
+          <a:xfrm>
+            <a:off x="6080788" y="33312"/>
+            <a:ext cx="857580" cy="422479"/>
           </a:xfrm>
           <a:prstGeom prst="roundRect">
             <a:avLst/>
@@ -42426,8 +42587,9 @@
             <a:pPr algn="ctr"/>
             <a:r>
               <a:rPr lang="en-US" sz="2800" b="1"/>
-              <a:t>1</a:t>
-            </a:r>
+              <a:t>2.1</a:t>
+            </a:r>
+            <a:endParaRPr lang="en-US" sz="2800" b="1" dirty="0"/>
           </a:p>
         </p:txBody>
       </p:sp>
@@ -42490,47 +42652,6 @@
       </p:sp>
       <p:sp>
         <p:nvSpPr>
-          <p:cNvPr id="3" name="Badge"/>
-          <p:cNvSpPr/>
-          <p:nvPr/>
-        </p:nvSpPr>
-        <p:spPr>
-          <a:xfrm>
-            <a:off x="7498079" y="82296"/>
-            <a:ext cx="1557633" cy="329184"/>
-          </a:xfrm>
-          <a:prstGeom prst="rect">
-            <a:avLst/>
-          </a:prstGeom>
-          <a:solidFill>
-            <a:srgbClr val="1C3A52"/>
-          </a:solidFill>
-          <a:ln w="12700">
-            <a:solidFill>
-              <a:srgbClr val="1C3A52"/>
-            </a:solidFill>
-            <a:prstDash val="solid"/>
-          </a:ln>
-        </p:spPr>
-        <p:txBody>
-          <a:bodyPr/>
-          <a:lstStyle/>
-          <a:p>
-            <a:pPr algn="ctr"/>
-            <a:r>
-              <a:rPr lang="en-US" b="1" dirty="0">
-                <a:solidFill>
-                  <a:srgbClr val="FFFFFF"/>
-                </a:solidFill>
-              </a:rPr>
-              <a:t>MODEL DEV</a:t>
-            </a:r>
-            <a:endParaRPr lang="en-US" b="1" dirty="0"/>
-          </a:p>
-        </p:txBody>
-      </p:sp>
-      <p:sp>
-        <p:nvSpPr>
           <p:cNvPr id="5" name="Title"/>
           <p:cNvSpPr/>
           <p:nvPr/>
@@ -42625,13 +42746,22 @@
               <a:buNone/>
             </a:pPr>
             <a:r>
-              <a:rPr lang="en-US" sz="1400" b="1" dirty="0">
+              <a:rPr lang="en-US" sz="1400" b="1" dirty="0" err="1">
                 <a:solidFill>
                   <a:srgbClr val="028090"/>
                 </a:solidFill>
                 <a:latin typeface="Trebuchet MS"/>
               </a:rPr>
-              <a:t>Optimizer + Scheduler</a:t>
+              <a:t>Optimiser</a:t>
+            </a:r>
+            <a:r>
+              <a:rPr lang="en-US" sz="1400" b="1" dirty="0">
+                <a:solidFill>
+                  <a:srgbClr val="028090"/>
+                </a:solidFill>
+                <a:latin typeface="Trebuchet MS"/>
+              </a:rPr>
+              <a:t> + Scheduler</a:t>
             </a:r>
           </a:p>
           <a:p>
@@ -42963,10 +43093,10 @@
       </p:sp>
       <p:sp>
         <p:nvSpPr>
-          <p:cNvPr id="9" name="NumCircle">
+          <p:cNvPr id="8" name="Badge">
             <a:extLst>
               <a:ext uri="{FF2B5EF4-FFF2-40B4-BE49-F238E27FC236}">
-                <a16:creationId xmlns:a16="http://schemas.microsoft.com/office/drawing/2014/main" id="{19B1823F-C1D0-A206-9152-51BE99AB140B}"/>
+                <a16:creationId xmlns:a16="http://schemas.microsoft.com/office/drawing/2014/main" id="{FD79B158-A654-9152-AFE8-A8A17209200C}"/>
               </a:ext>
             </a:extLst>
           </p:cNvPr>
@@ -42975,8 +43105,55 @@
         </p:nvSpPr>
         <p:spPr>
           <a:xfrm>
-            <a:off x="7088176" y="4253"/>
-            <a:ext cx="470123" cy="470912"/>
+            <a:off x="6936266" y="78999"/>
+            <a:ext cx="2051641" cy="348556"/>
+          </a:xfrm>
+          <a:prstGeom prst="rect">
+            <a:avLst/>
+          </a:prstGeom>
+          <a:solidFill>
+            <a:srgbClr val="1C3A52"/>
+          </a:solidFill>
+          <a:ln w="12700">
+            <a:solidFill>
+              <a:srgbClr val="1C3A52"/>
+            </a:solidFill>
+            <a:prstDash val="solid"/>
+          </a:ln>
+        </p:spPr>
+        <p:txBody>
+          <a:bodyPr lIns="91440" tIns="45720" rIns="91440" bIns="45720" anchor="t"/>
+          <a:lstStyle/>
+          <a:p>
+            <a:pPr algn="ctr"/>
+            <a:r>
+              <a:rPr lang="en-US" b="1">
+                <a:solidFill>
+                  <a:srgbClr val="FFFFFF"/>
+                </a:solidFill>
+              </a:rPr>
+              <a:t>CNN MODEL DEV</a:t>
+            </a:r>
+            <a:endParaRPr lang="en-US" b="1"/>
+          </a:p>
+        </p:txBody>
+      </p:sp>
+      <p:sp>
+        <p:nvSpPr>
+          <p:cNvPr id="15" name="NumCircle">
+            <a:extLst>
+              <a:ext uri="{FF2B5EF4-FFF2-40B4-BE49-F238E27FC236}">
+                <a16:creationId xmlns:a16="http://schemas.microsoft.com/office/drawing/2014/main" id="{371472B0-C293-A262-4D3E-C9008B9E80F4}"/>
+              </a:ext>
+            </a:extLst>
+          </p:cNvPr>
+          <p:cNvSpPr/>
+          <p:nvPr/>
+        </p:nvSpPr>
+        <p:spPr>
+          <a:xfrm>
+            <a:off x="6080788" y="33312"/>
+            <a:ext cx="857580" cy="422479"/>
           </a:xfrm>
           <a:prstGeom prst="roundRect">
             <a:avLst/>
@@ -43003,8 +43180,9 @@
             <a:pPr algn="ctr"/>
             <a:r>
               <a:rPr lang="en-US" sz="2800" b="1"/>
-              <a:t>1</a:t>
-            </a:r>
+              <a:t>2.1</a:t>
+            </a:r>
+            <a:endParaRPr lang="en-US" sz="2800" b="1" dirty="0"/>
           </a:p>
         </p:txBody>
       </p:sp>
@@ -43079,53 +43257,6 @@
       </p:sp>
       <p:sp>
         <p:nvSpPr>
-          <p:cNvPr id="3" name="Badge">
-            <a:extLst>
-              <a:ext uri="{FF2B5EF4-FFF2-40B4-BE49-F238E27FC236}">
-                <a16:creationId xmlns:a16="http://schemas.microsoft.com/office/drawing/2014/main" id="{205B505A-FD03-FCEE-E6D5-0BDD47BBB1A7}"/>
-              </a:ext>
-            </a:extLst>
-          </p:cNvPr>
-          <p:cNvSpPr/>
-          <p:nvPr/>
-        </p:nvSpPr>
-        <p:spPr>
-          <a:xfrm>
-            <a:off x="7498079" y="82296"/>
-            <a:ext cx="1557633" cy="329184"/>
-          </a:xfrm>
-          <a:prstGeom prst="rect">
-            <a:avLst/>
-          </a:prstGeom>
-          <a:solidFill>
-            <a:srgbClr val="1C3A52"/>
-          </a:solidFill>
-          <a:ln w="12700">
-            <a:solidFill>
-              <a:srgbClr val="1C3A52"/>
-            </a:solidFill>
-            <a:prstDash val="solid"/>
-          </a:ln>
-        </p:spPr>
-        <p:txBody>
-          <a:bodyPr/>
-          <a:lstStyle/>
-          <a:p>
-            <a:pPr algn="ctr"/>
-            <a:r>
-              <a:rPr lang="en-US" b="1" dirty="0">
-                <a:solidFill>
-                  <a:srgbClr val="FFFFFF"/>
-                </a:solidFill>
-              </a:rPr>
-              <a:t>MODEL DEV</a:t>
-            </a:r>
-            <a:endParaRPr lang="en-US" b="1" dirty="0"/>
-          </a:p>
-        </p:txBody>
-      </p:sp>
-      <p:sp>
-        <p:nvSpPr>
           <p:cNvPr id="5" name="Title">
             <a:extLst>
               <a:ext uri="{FF2B5EF4-FFF2-40B4-BE49-F238E27FC236}">
@@ -43429,9 +43560,54 @@
                 </a:solidFill>
                 <a:latin typeface="Calibri"/>
               </a:rPr>
-              <a:t>A 64x64 RGB image results in an initial vector of length = 12.288. If we convert to grayscale the size is reduced by 3, to 4096. Are we able to achieve similar results with this smaller input?  Turns out no. Pokémon classification is strongly color-dependent (Fire=orange, water=blue, poison=purple, grass=green, ...)</a:t>
-            </a:r>
-            <a:endParaRPr lang="en-US" sz="1300" dirty="0">
+              <a:t>A 64x64 RGB image results in an initial vector of length = 12.288. If we convert to grayscale the size is reduced by 3, to 4096. Are we able to achieve similar results with this smaller input?  Turns out no. </a:t>
+            </a:r>
+            <a:r>
+              <a:rPr lang="en-US" sz="1300" err="1">
+                <a:solidFill>
+                  <a:srgbClr val="1A2B3C"/>
+                </a:solidFill>
+                <a:latin typeface="Calibri"/>
+              </a:rPr>
+              <a:t>Pokemon</a:t>
+            </a:r>
+            <a:r>
+              <a:rPr lang="en-US" sz="1300" dirty="0">
+                <a:solidFill>
+                  <a:srgbClr val="1A2B3C"/>
+                </a:solidFill>
+                <a:latin typeface="Calibri"/>
+              </a:rPr>
+              <a:t> classi</a:t>
+            </a:r>
+            <a:r>
+              <a:rPr lang="en-US" sz="1300" err="1">
+                <a:solidFill>
+                  <a:srgbClr val="1A2B3C"/>
+                </a:solidFill>
+                <a:latin typeface="Calibri"/>
+              </a:rPr>
+              <a:t>ficatio</a:t>
+            </a:r>
+            <a:r>
+              <a:rPr lang="en-US" sz="1300" dirty="0">
+                <a:solidFill>
+                  <a:srgbClr val="1A2B3C"/>
+                </a:solidFill>
+                <a:latin typeface="Calibri"/>
+              </a:rPr>
+              <a:t>n is strongly color-dependent (Fire=orange, water=blue, poison=purple, </a:t>
+            </a:r>
+            <a:r>
+              <a:rPr lang="en-US" sz="1300">
+                <a:solidFill>
+                  <a:srgbClr val="1A2B3C"/>
+                </a:solidFill>
+                <a:latin typeface="Calibri"/>
+              </a:rPr>
+              <a:t>grass=green, ...)</a:t>
+            </a:r>
+            <a:endParaRPr lang="en-US" sz="1300">
               <a:solidFill>
                 <a:srgbClr val="1A2B3C"/>
               </a:solidFill>
@@ -43715,53 +43891,6 @@
           </a:p>
         </p:txBody>
       </p:sp>
-      <p:sp>
-        <p:nvSpPr>
-          <p:cNvPr id="25" name="NumCircle">
-            <a:extLst>
-              <a:ext uri="{FF2B5EF4-FFF2-40B4-BE49-F238E27FC236}">
-                <a16:creationId xmlns:a16="http://schemas.microsoft.com/office/drawing/2014/main" id="{AE338B7C-11CB-5629-826A-7F987F11EF25}"/>
-              </a:ext>
-            </a:extLst>
-          </p:cNvPr>
-          <p:cNvSpPr/>
-          <p:nvPr/>
-        </p:nvSpPr>
-        <p:spPr>
-          <a:xfrm>
-            <a:off x="7088176" y="4253"/>
-            <a:ext cx="470123" cy="470912"/>
-          </a:xfrm>
-          <a:prstGeom prst="roundRect">
-            <a:avLst/>
-          </a:prstGeom>
-        </p:spPr>
-        <p:style>
-          <a:lnRef idx="0">
-            <a:schemeClr val="accent1"/>
-          </a:lnRef>
-          <a:fillRef idx="3">
-            <a:schemeClr val="accent1"/>
-          </a:fillRef>
-          <a:effectRef idx="3">
-            <a:schemeClr val="accent1"/>
-          </a:effectRef>
-          <a:fontRef idx="minor">
-            <a:schemeClr val="lt1"/>
-          </a:fontRef>
-        </p:style>
-        <p:txBody>
-          <a:bodyPr lIns="91440" tIns="45720" rIns="91440" bIns="45720" rtlCol="0" anchor="ctr"/>
-          <a:lstStyle/>
-          <a:p>
-            <a:pPr algn="ctr"/>
-            <a:r>
-              <a:rPr lang="en-US" sz="2800" b="1"/>
-              <a:t>1</a:t>
-            </a:r>
-          </a:p>
-        </p:txBody>
-      </p:sp>
       <p:pic>
         <p:nvPicPr>
           <p:cNvPr id="6" name="Picture 5">
@@ -43863,6 +43992,101 @@
               <a:t>Note that we tried very simple augmentation processes for this analysis; stronger augmentation gave us even worse results</a:t>
             </a:r>
             <a:endParaRPr lang="en-US" dirty="0"/>
+          </a:p>
+        </p:txBody>
+      </p:sp>
+      <p:sp>
+        <p:nvSpPr>
+          <p:cNvPr id="12" name="Badge">
+            <a:extLst>
+              <a:ext uri="{FF2B5EF4-FFF2-40B4-BE49-F238E27FC236}">
+                <a16:creationId xmlns:a16="http://schemas.microsoft.com/office/drawing/2014/main" id="{03989AA3-7962-BB37-1508-0A25D80204B0}"/>
+              </a:ext>
+            </a:extLst>
+          </p:cNvPr>
+          <p:cNvSpPr/>
+          <p:nvPr/>
+        </p:nvSpPr>
+        <p:spPr>
+          <a:xfrm>
+            <a:off x="6936266" y="78999"/>
+            <a:ext cx="2051641" cy="348556"/>
+          </a:xfrm>
+          <a:prstGeom prst="rect">
+            <a:avLst/>
+          </a:prstGeom>
+          <a:solidFill>
+            <a:srgbClr val="1C3A52"/>
+          </a:solidFill>
+          <a:ln w="12700">
+            <a:solidFill>
+              <a:srgbClr val="1C3A52"/>
+            </a:solidFill>
+            <a:prstDash val="solid"/>
+          </a:ln>
+        </p:spPr>
+        <p:txBody>
+          <a:bodyPr lIns="91440" tIns="45720" rIns="91440" bIns="45720" anchor="t"/>
+          <a:lstStyle/>
+          <a:p>
+            <a:pPr algn="ctr"/>
+            <a:r>
+              <a:rPr lang="en-US" b="1">
+                <a:solidFill>
+                  <a:srgbClr val="FFFFFF"/>
+                </a:solidFill>
+              </a:rPr>
+              <a:t>CNN MODEL DEV</a:t>
+            </a:r>
+            <a:endParaRPr lang="en-US" b="1"/>
+          </a:p>
+        </p:txBody>
+      </p:sp>
+      <p:sp>
+        <p:nvSpPr>
+          <p:cNvPr id="14" name="NumCircle">
+            <a:extLst>
+              <a:ext uri="{FF2B5EF4-FFF2-40B4-BE49-F238E27FC236}">
+                <a16:creationId xmlns:a16="http://schemas.microsoft.com/office/drawing/2014/main" id="{3C5B3943-9502-9F87-0D4D-E2E48353AFAA}"/>
+              </a:ext>
+            </a:extLst>
+          </p:cNvPr>
+          <p:cNvSpPr/>
+          <p:nvPr/>
+        </p:nvSpPr>
+        <p:spPr>
+          <a:xfrm>
+            <a:off x="6080788" y="33312"/>
+            <a:ext cx="857580" cy="422479"/>
+          </a:xfrm>
+          <a:prstGeom prst="roundRect">
+            <a:avLst/>
+          </a:prstGeom>
+        </p:spPr>
+        <p:style>
+          <a:lnRef idx="0">
+            <a:schemeClr val="accent1"/>
+          </a:lnRef>
+          <a:fillRef idx="3">
+            <a:schemeClr val="accent1"/>
+          </a:fillRef>
+          <a:effectRef idx="3">
+            <a:schemeClr val="accent1"/>
+          </a:effectRef>
+          <a:fontRef idx="minor">
+            <a:schemeClr val="lt1"/>
+          </a:fontRef>
+        </p:style>
+        <p:txBody>
+          <a:bodyPr lIns="91440" tIns="45720" rIns="91440" bIns="45720" rtlCol="0" anchor="ctr"/>
+          <a:lstStyle/>
+          <a:p>
+            <a:pPr algn="ctr"/>
+            <a:r>
+              <a:rPr lang="en-US" sz="2800" b="1"/>
+              <a:t>2.1</a:t>
+            </a:r>
+            <a:endParaRPr lang="en-US" sz="2800" b="1" dirty="0"/>
           </a:p>
         </p:txBody>
       </p:sp>

--- a/assignment_1/task2/Task2_report.pptx
+++ b/assignment_1/task2/Task2_report.pptx
@@ -10,7 +10,7 @@
   </p:notesMasterIdLst>
   <p:sldIdLst>
     <p:sldId id="256" r:id="rId3"/>
-    <p:sldId id="257" r:id="rId4"/>
+    <p:sldId id="301" r:id="rId4"/>
     <p:sldId id="281" r:id="rId5"/>
     <p:sldId id="288" r:id="rId6"/>
     <p:sldId id="285" r:id="rId7"/>
@@ -145,6 +145,7 @@
 <file path=ppt/revisionInfo.xml><?xml version="1.0" encoding="utf-8"?>
 <p1510:revInfo xmlns:a="http://schemas.openxmlformats.org/drawingml/2006/main" xmlns:r="http://schemas.openxmlformats.org/officeDocument/2006/relationships" xmlns:p1510="http://schemas.microsoft.com/office/powerpoint/2015/10/main">
   <p1510:revLst>
+    <p1510:client id="{94A61B75-DC6C-91AD-544F-487179451F0D}" v="2" dt="2026-03-31T13:10:10.099"/>
     <p1510:client id="{CDABB519-467D-FD08-6A41-EB6CC6DEA994}" v="72" dt="2026-03-31T09:43:37.433"/>
     <p1510:client id="{DA793C8F-70EE-6D19-B59A-A289D2A9283E}" v="297" dt="2026-03-31T12:48:54.240"/>
   </p1510:revLst>
@@ -641,7 +642,13 @@
   <p:cSld>
     <p:spTree>
       <p:nvGrpSpPr>
-        <p:cNvPr id="1" name=""/>
+        <p:cNvPr id="1" name="">
+          <a:extLst>
+            <a:ext uri="{FF2B5EF4-FFF2-40B4-BE49-F238E27FC236}">
+              <a16:creationId xmlns:a16="http://schemas.microsoft.com/office/drawing/2014/main" id="{14C475A1-DEF6-D10E-8697-72BF654B7468}"/>
+            </a:ext>
+          </a:extLst>
+        </p:cNvPr>
         <p:cNvGrpSpPr/>
         <p:nvPr/>
       </p:nvGrpSpPr>
@@ -655,7 +662,13 @@
       </p:grpSpPr>
       <p:sp>
         <p:nvSpPr>
-          <p:cNvPr id="2" name="Slide Image Placeholder 1"/>
+          <p:cNvPr id="2" name="Slide Image Placeholder 1">
+            <a:extLst>
+              <a:ext uri="{FF2B5EF4-FFF2-40B4-BE49-F238E27FC236}">
+                <a16:creationId xmlns:a16="http://schemas.microsoft.com/office/drawing/2014/main" id="{42307DCD-71D3-A7FA-7B56-6929D2E1CCF9}"/>
+              </a:ext>
+            </a:extLst>
+          </p:cNvPr>
           <p:cNvSpPr>
             <a:spLocks noGrp="1" noRot="1" noChangeAspect="1"/>
           </p:cNvSpPr>
@@ -667,7 +680,13 @@
       </p:sp>
       <p:sp>
         <p:nvSpPr>
-          <p:cNvPr id="3" name="Notes Placeholder 2"/>
+          <p:cNvPr id="3" name="Notes Placeholder 2">
+            <a:extLst>
+              <a:ext uri="{FF2B5EF4-FFF2-40B4-BE49-F238E27FC236}">
+                <a16:creationId xmlns:a16="http://schemas.microsoft.com/office/drawing/2014/main" id="{CAC87203-1C5F-A086-5121-74702AC085D3}"/>
+              </a:ext>
+            </a:extLst>
+          </p:cNvPr>
           <p:cNvSpPr>
             <a:spLocks noGrp="1"/>
           </p:cNvSpPr>
@@ -686,7 +705,13 @@
       </p:sp>
       <p:sp>
         <p:nvSpPr>
-          <p:cNvPr id="4" name="Slide Number Placeholder 3"/>
+          <p:cNvPr id="4" name="Slide Number Placeholder 3">
+            <a:extLst>
+              <a:ext uri="{FF2B5EF4-FFF2-40B4-BE49-F238E27FC236}">
+                <a16:creationId xmlns:a16="http://schemas.microsoft.com/office/drawing/2014/main" id="{F220D66F-EBA4-DA3B-7ABF-07C608793D13}"/>
+              </a:ext>
+            </a:extLst>
+          </p:cNvPr>
           <p:cNvSpPr>
             <a:spLocks noGrp="1"/>
           </p:cNvSpPr>
@@ -710,7 +735,7 @@
     </p:spTree>
     <p:extLst>
       <p:ext uri="{BB962C8B-B14F-4D97-AF65-F5344CB8AC3E}">
-        <p14:creationId xmlns:p14="http://schemas.microsoft.com/office/powerpoint/2010/main" val="1024086991"/>
+        <p14:creationId xmlns:p14="http://schemas.microsoft.com/office/powerpoint/2010/main" val="2589285946"/>
       </p:ext>
     </p:extLst>
   </p:cSld>
@@ -24871,7 +24896,7 @@
 
 <file path=ppt/slides/slide2.xml><?xml version="1.0" encoding="utf-8"?>
 <p:sld xmlns:a="http://schemas.openxmlformats.org/drawingml/2006/main" xmlns:r="http://schemas.openxmlformats.org/officeDocument/2006/relationships" xmlns:p="http://schemas.openxmlformats.org/presentationml/2006/main">
-  <p:cSld name="Slide 2">
+  <p:cSld>
     <p:bg>
       <p:bgPr>
         <a:solidFill>
@@ -24882,7 +24907,13 @@
     </p:bg>
     <p:spTree>
       <p:nvGrpSpPr>
-        <p:cNvPr id="1" name=""/>
+        <p:cNvPr id="1" name="">
+          <a:extLst>
+            <a:ext uri="{FF2B5EF4-FFF2-40B4-BE49-F238E27FC236}">
+              <a16:creationId xmlns:a16="http://schemas.microsoft.com/office/drawing/2014/main" id="{E0AD6CE1-8DD7-EA0E-3A10-D977ED071647}"/>
+            </a:ext>
+          </a:extLst>
+        </p:cNvPr>
         <p:cNvGrpSpPr/>
         <p:nvPr/>
       </p:nvGrpSpPr>
@@ -24896,7 +24927,13 @@
       </p:grpSpPr>
       <p:sp>
         <p:nvSpPr>
-          <p:cNvPr id="3" name="Text 1"/>
+          <p:cNvPr id="3" name="Text 1">
+            <a:extLst>
+              <a:ext uri="{FF2B5EF4-FFF2-40B4-BE49-F238E27FC236}">
+                <a16:creationId xmlns:a16="http://schemas.microsoft.com/office/drawing/2014/main" id="{F7BD48B3-01CF-732B-559B-5C2A8608FA95}"/>
+              </a:ext>
+            </a:extLst>
+          </p:cNvPr>
           <p:cNvSpPr/>
           <p:nvPr/>
         </p:nvSpPr>
@@ -24916,7 +24953,7 @@
           <a:lstStyle/>
           <a:p>
             <a:r>
-              <a:rPr lang="en-US" sz="2200" b="1" dirty="0">
+              <a:rPr lang="en-US" sz="2200" b="1">
                 <a:solidFill>
                   <a:srgbClr val="FFFFFF"/>
                 </a:solidFill>
@@ -24924,7 +24961,7 @@
                 <a:ea typeface="Trebuchet MS" pitchFamily="34" charset="-122"/>
                 <a:cs typeface="Trebuchet MS" pitchFamily="34" charset="-120"/>
               </a:rPr>
-              <a:t>What We Cover</a:t>
+              <a:t>What We Cover (Task 2)</a:t>
             </a:r>
             <a:endParaRPr lang="en-US" sz="2200" dirty="0"/>
           </a:p>
@@ -24932,7 +24969,13 @@
       </p:sp>
       <p:sp>
         <p:nvSpPr>
-          <p:cNvPr id="4" name="Shape 2"/>
+          <p:cNvPr id="4" name="Shape 2">
+            <a:extLst>
+              <a:ext uri="{FF2B5EF4-FFF2-40B4-BE49-F238E27FC236}">
+                <a16:creationId xmlns:a16="http://schemas.microsoft.com/office/drawing/2014/main" id="{18B8DBFB-A82A-8A1F-30D1-B682A18B7B3C}"/>
+              </a:ext>
+            </a:extLst>
+          </p:cNvPr>
           <p:cNvSpPr/>
           <p:nvPr/>
         </p:nvSpPr>
@@ -24971,7 +25014,13 @@
       </p:sp>
       <p:sp>
         <p:nvSpPr>
-          <p:cNvPr id="5" name="Shape 3"/>
+          <p:cNvPr id="5" name="Shape 3">
+            <a:extLst>
+              <a:ext uri="{FF2B5EF4-FFF2-40B4-BE49-F238E27FC236}">
+                <a16:creationId xmlns:a16="http://schemas.microsoft.com/office/drawing/2014/main" id="{616973DD-8CF0-26D8-0FD0-784620FC065F}"/>
+              </a:ext>
+            </a:extLst>
+          </p:cNvPr>
           <p:cNvSpPr/>
           <p:nvPr/>
         </p:nvSpPr>
@@ -25003,7 +25052,13 @@
       </p:sp>
       <p:sp>
         <p:nvSpPr>
-          <p:cNvPr id="6" name="Text 4"/>
+          <p:cNvPr id="6" name="Text 4">
+            <a:extLst>
+              <a:ext uri="{FF2B5EF4-FFF2-40B4-BE49-F238E27FC236}">
+                <a16:creationId xmlns:a16="http://schemas.microsoft.com/office/drawing/2014/main" id="{E6B1FF23-D968-7974-6A9F-DB933B190302}"/>
+              </a:ext>
+            </a:extLst>
+          </p:cNvPr>
           <p:cNvSpPr/>
           <p:nvPr/>
         </p:nvSpPr>
@@ -25039,7 +25094,13 @@
       </p:sp>
       <p:sp>
         <p:nvSpPr>
-          <p:cNvPr id="9" name="Text 7"/>
+          <p:cNvPr id="9" name="Text 7">
+            <a:extLst>
+              <a:ext uri="{FF2B5EF4-FFF2-40B4-BE49-F238E27FC236}">
+                <a16:creationId xmlns:a16="http://schemas.microsoft.com/office/drawing/2014/main" id="{1A4EEA4D-82B3-CDAD-BFA0-3D31AA35C5CA}"/>
+              </a:ext>
+            </a:extLst>
+          </p:cNvPr>
           <p:cNvSpPr/>
           <p:nvPr/>
         </p:nvSpPr>
@@ -25058,62 +25119,28 @@
           <a:bodyPr wrap="square" lIns="0" tIns="0" rIns="0" bIns="0" rtlCol="0" anchor="ctr"/>
           <a:lstStyle/>
           <a:p>
-            <a:pPr marL="0" indent="0">
-              <a:buNone/>
-            </a:pPr>
-            <a:r>
-              <a:rPr lang="en-US" sz="1400" b="1" dirty="0">
+            <a:r>
+              <a:rPr lang="en-US" sz="1400" b="1">
                 <a:solidFill>
                   <a:srgbClr val="FFFFFF"/>
                 </a:solidFill>
-                <a:latin typeface="Trebuchet MS" pitchFamily="34" charset="0"/>
-                <a:ea typeface="Trebuchet MS" pitchFamily="34" charset="-122"/>
-                <a:cs typeface="Trebuchet MS" pitchFamily="34" charset="-120"/>
+                <a:latin typeface="Trebuchet MS"/>
               </a:rPr>
-              <a:t>Model Development</a:t>
-            </a:r>
-            <a:endParaRPr lang="en-US" sz="1400" dirty="0"/>
-          </a:p>
-        </p:txBody>
-      </p:sp>
-      <p:sp>
-        <p:nvSpPr>
-          <p:cNvPr id="10" name="Text 8"/>
-          <p:cNvSpPr/>
-          <p:nvPr/>
-        </p:nvSpPr>
-        <p:spPr>
-          <a:xfrm>
-            <a:off x="1027176" y="1389888"/>
-            <a:ext cx="3480816" cy="822960"/>
-          </a:xfrm>
-          <a:prstGeom prst="rect">
-            <a:avLst/>
-          </a:prstGeom>
-          <a:noFill/>
-          <a:ln/>
-        </p:spPr>
-        <p:txBody>
-          <a:bodyPr wrap="square" lIns="0" tIns="0" rIns="0" bIns="0" rtlCol="0" anchor="ctr"/>
-          <a:lstStyle/>
-          <a:p>
-            <a:r>
-              <a:rPr lang="en-US" sz="1400">
-                <a:solidFill>
-                  <a:srgbClr val="7AADCC"/>
-                </a:solidFill>
-                <a:latin typeface="Calibri"/>
-                <a:ea typeface="Calibri"/>
-                <a:cs typeface="Calibri"/>
-              </a:rPr>
-              <a:t>Architectures  · Experiments · Augmentation · Regularization · Ensembles · Results</a:t>
-            </a:r>
-          </a:p>
-        </p:txBody>
-      </p:sp>
-      <p:sp>
-        <p:nvSpPr>
-          <p:cNvPr id="11" name="Shape 9"/>
+              <a:t>CNN Model Development</a:t>
+            </a:r>
+            <a:endParaRPr lang="en-US"/>
+          </a:p>
+        </p:txBody>
+      </p:sp>
+      <p:sp>
+        <p:nvSpPr>
+          <p:cNvPr id="11" name="Shape 9">
+            <a:extLst>
+              <a:ext uri="{FF2B5EF4-FFF2-40B4-BE49-F238E27FC236}">
+                <a16:creationId xmlns:a16="http://schemas.microsoft.com/office/drawing/2014/main" id="{06E21292-5A68-2116-F8F3-E4B71CE1CDA2}"/>
+              </a:ext>
+            </a:extLst>
+          </p:cNvPr>
           <p:cNvSpPr/>
           <p:nvPr/>
         </p:nvSpPr>
@@ -25152,7 +25179,13 @@
       </p:sp>
       <p:sp>
         <p:nvSpPr>
-          <p:cNvPr id="12" name="Shape 10"/>
+          <p:cNvPr id="12" name="Shape 10">
+            <a:extLst>
+              <a:ext uri="{FF2B5EF4-FFF2-40B4-BE49-F238E27FC236}">
+                <a16:creationId xmlns:a16="http://schemas.microsoft.com/office/drawing/2014/main" id="{26953524-E134-78EB-E1F9-011FF455373E}"/>
+              </a:ext>
+            </a:extLst>
+          </p:cNvPr>
           <p:cNvSpPr/>
           <p:nvPr/>
         </p:nvSpPr>
@@ -25184,7 +25217,13 @@
       </p:sp>
       <p:sp>
         <p:nvSpPr>
-          <p:cNvPr id="13" name="Text 11"/>
+          <p:cNvPr id="13" name="Text 11">
+            <a:extLst>
+              <a:ext uri="{FF2B5EF4-FFF2-40B4-BE49-F238E27FC236}">
+                <a16:creationId xmlns:a16="http://schemas.microsoft.com/office/drawing/2014/main" id="{84200415-3E31-8607-B56A-FF3FC7673127}"/>
+              </a:ext>
+            </a:extLst>
+          </p:cNvPr>
           <p:cNvSpPr/>
           <p:nvPr/>
         </p:nvSpPr>
@@ -25226,7 +25265,13 @@
       </p:sp>
       <p:sp>
         <p:nvSpPr>
-          <p:cNvPr id="16" name="Text 14"/>
+          <p:cNvPr id="16" name="Text 14">
+            <a:extLst>
+              <a:ext uri="{FF2B5EF4-FFF2-40B4-BE49-F238E27FC236}">
+                <a16:creationId xmlns:a16="http://schemas.microsoft.com/office/drawing/2014/main" id="{534DEB6F-45FC-AEF5-C409-D5FF250BAA50}"/>
+              </a:ext>
+            </a:extLst>
+          </p:cNvPr>
           <p:cNvSpPr/>
           <p:nvPr/>
         </p:nvSpPr>
@@ -25246,69 +25291,42 @@
           <a:lstStyle/>
           <a:p>
             <a:r>
+              <a:rPr lang="en-US" sz="1400" b="1" dirty="0">
+                <a:solidFill>
+                  <a:srgbClr val="FFFFFF"/>
+                </a:solidFill>
+                <a:latin typeface="Trebuchet MS"/>
+                <a:ea typeface="Trebuchet MS" pitchFamily="34" charset="-122"/>
+                <a:cs typeface="Trebuchet MS" pitchFamily="34" charset="-120"/>
+              </a:rPr>
+              <a:t>CNN </a:t>
+            </a:r>
+            <a:r>
               <a:rPr lang="en-US" sz="1400" b="1">
                 <a:solidFill>
                   <a:srgbClr val="FFFFFF"/>
                 </a:solidFill>
                 <a:latin typeface="Trebuchet MS"/>
+                <a:ea typeface="Trebuchet MS" pitchFamily="34" charset="-122"/>
+                <a:cs typeface="Trebuchet MS" pitchFamily="34" charset="-120"/>
               </a:rPr>
               <a:t>Training Efficiency</a:t>
             </a:r>
-            <a:endParaRPr lang="en-US"/>
-          </a:p>
-        </p:txBody>
-      </p:sp>
-      <p:sp>
-        <p:nvSpPr>
-          <p:cNvPr id="17" name="Text 15"/>
-          <p:cNvSpPr/>
-          <p:nvPr/>
-        </p:nvSpPr>
-        <p:spPr>
-          <a:xfrm>
-            <a:off x="5416296" y="1389888"/>
-            <a:ext cx="3480816" cy="822960"/>
-          </a:xfrm>
-          <a:prstGeom prst="rect">
-            <a:avLst/>
-          </a:prstGeom>
-          <a:noFill/>
-          <a:ln/>
-        </p:spPr>
-        <p:txBody>
-          <a:bodyPr wrap="square" lIns="0" tIns="0" rIns="0" bIns="0" rtlCol="0" anchor="ctr"/>
-          <a:lstStyle/>
-          <a:p>
-            <a:r>
-              <a:rPr lang="en-US" sz="1400">
-                <a:solidFill>
-                  <a:srgbClr val="7AADCC"/>
-                </a:solidFill>
-                <a:latin typeface="Calibri"/>
-                <a:ea typeface="Calibri"/>
-                <a:cs typeface="Calibri"/>
-              </a:rPr>
-              <a:t>Early Stopping · GPU budget · Checkpointing</a:t>
-            </a:r>
-          </a:p>
-          <a:p>
-            <a:pPr marL="0" indent="0">
-              <a:buNone/>
-            </a:pPr>
-            <a:endParaRPr lang="en-US" sz="1400" dirty="0">
-              <a:solidFill>
-                <a:srgbClr val="7AADCC"/>
-              </a:solidFill>
-              <a:latin typeface="Calibri"/>
-              <a:ea typeface="Calibri"/>
-              <a:cs typeface="Calibri"/>
+            <a:endParaRPr lang="en-US" sz="1400">
+              <a:latin typeface="Corbel"/>
             </a:endParaRPr>
           </a:p>
         </p:txBody>
       </p:sp>
       <p:sp>
         <p:nvSpPr>
-          <p:cNvPr id="18" name="Shape 16"/>
+          <p:cNvPr id="18" name="Shape 16">
+            <a:extLst>
+              <a:ext uri="{FF2B5EF4-FFF2-40B4-BE49-F238E27FC236}">
+                <a16:creationId xmlns:a16="http://schemas.microsoft.com/office/drawing/2014/main" id="{077BC993-03BE-47AA-C96D-25FC5BFC0858}"/>
+              </a:ext>
+            </a:extLst>
+          </p:cNvPr>
           <p:cNvSpPr/>
           <p:nvPr/>
         </p:nvSpPr>
@@ -25347,7 +25365,13 @@
       </p:sp>
       <p:sp>
         <p:nvSpPr>
-          <p:cNvPr id="19" name="Shape 17"/>
+          <p:cNvPr id="19" name="Shape 17">
+            <a:extLst>
+              <a:ext uri="{FF2B5EF4-FFF2-40B4-BE49-F238E27FC236}">
+                <a16:creationId xmlns:a16="http://schemas.microsoft.com/office/drawing/2014/main" id="{B0DAF62F-D0FC-382A-9C0D-4579869576AF}"/>
+              </a:ext>
+            </a:extLst>
+          </p:cNvPr>
           <p:cNvSpPr/>
           <p:nvPr/>
         </p:nvSpPr>
@@ -25379,7 +25403,13 @@
       </p:sp>
       <p:sp>
         <p:nvSpPr>
-          <p:cNvPr id="20" name="Text 18"/>
+          <p:cNvPr id="20" name="Text 18">
+            <a:extLst>
+              <a:ext uri="{FF2B5EF4-FFF2-40B4-BE49-F238E27FC236}">
+                <a16:creationId xmlns:a16="http://schemas.microsoft.com/office/drawing/2014/main" id="{A1DC5693-2DC8-CD0B-D57E-21AB8B659DDB}"/>
+              </a:ext>
+            </a:extLst>
+          </p:cNvPr>
           <p:cNvSpPr/>
           <p:nvPr/>
         </p:nvSpPr>
@@ -25410,12 +25440,24 @@
               </a:rPr>
               <a:t>2.3</a:t>
             </a:r>
-          </a:p>
-        </p:txBody>
-      </p:sp>
-      <p:sp>
-        <p:nvSpPr>
-          <p:cNvPr id="23" name="Text 21"/>
+            <a:endParaRPr lang="en-US" sz="2200" b="1" dirty="0">
+              <a:solidFill>
+                <a:srgbClr val="00A896"/>
+              </a:solidFill>
+              <a:latin typeface="Trebuchet MS"/>
+            </a:endParaRPr>
+          </a:p>
+        </p:txBody>
+      </p:sp>
+      <p:sp>
+        <p:nvSpPr>
+          <p:cNvPr id="23" name="Text 21">
+            <a:extLst>
+              <a:ext uri="{FF2B5EF4-FFF2-40B4-BE49-F238E27FC236}">
+                <a16:creationId xmlns:a16="http://schemas.microsoft.com/office/drawing/2014/main" id="{7BA1232D-3B7D-9344-6B80-EAE9DCEA4D7E}"/>
+              </a:ext>
+            </a:extLst>
+          </p:cNvPr>
           <p:cNvSpPr/>
           <p:nvPr/>
         </p:nvSpPr>
@@ -25441,59 +25483,9 @@
                 </a:solidFill>
                 <a:latin typeface="Trebuchet MS"/>
               </a:rPr>
-              <a:t>Performance Evaluation</a:t>
-            </a:r>
-            <a:endParaRPr lang="en-US" sz="1400" b="1">
-              <a:latin typeface="Trebuchet MS"/>
-            </a:endParaRPr>
-          </a:p>
-        </p:txBody>
-      </p:sp>
-      <p:sp>
-        <p:nvSpPr>
-          <p:cNvPr id="24" name="Text 22"/>
-          <p:cNvSpPr/>
-          <p:nvPr/>
-        </p:nvSpPr>
-        <p:spPr>
-          <a:xfrm>
-            <a:off x="1027176" y="3355848"/>
-            <a:ext cx="3480816" cy="822960"/>
-          </a:xfrm>
-          <a:prstGeom prst="rect">
-            <a:avLst/>
-          </a:prstGeom>
-          <a:noFill/>
-          <a:ln/>
-        </p:spPr>
-        <p:txBody>
-          <a:bodyPr wrap="square" lIns="0" tIns="0" rIns="0" bIns="0" rtlCol="0" anchor="ctr"/>
-          <a:lstStyle/>
-          <a:p>
-            <a:r>
-              <a:rPr lang="en-US" sz="1400">
-                <a:solidFill>
-                  <a:srgbClr val="7AADCC"/>
-                </a:solidFill>
-                <a:latin typeface="Calibri"/>
-                <a:ea typeface="Calibri"/>
-                <a:cs typeface="Calibri"/>
-              </a:rPr>
-              <a:t>Macro-F1 · Per-class · Confusion Matrix</a:t>
-            </a:r>
-          </a:p>
-          <a:p>
-            <a:pPr marL="0" indent="0">
-              <a:buNone/>
-            </a:pPr>
-            <a:endParaRPr lang="en-US" sz="1400" dirty="0">
-              <a:solidFill>
-                <a:srgbClr val="7AADCC"/>
-              </a:solidFill>
-              <a:latin typeface="Calibri"/>
-              <a:ea typeface="Calibri"/>
-              <a:cs typeface="Calibri"/>
-            </a:endParaRPr>
+              <a:t>CNN Performance Evaluation</a:t>
+            </a:r>
+            <a:endParaRPr lang="en-US"/>
           </a:p>
         </p:txBody>
       </p:sp>
@@ -25502,7 +25494,7 @@
           <p:cNvPr id="7" name="Picture 8" descr="NOSSA™ | NOVA School of Science &amp; Technology">
             <a:extLst>
               <a:ext uri="{FF2B5EF4-FFF2-40B4-BE49-F238E27FC236}">
-                <a16:creationId xmlns:a16="http://schemas.microsoft.com/office/drawing/2014/main" id="{468AEAC2-1FE2-5767-8EC3-4A82ADED1E0D}"/>
+                <a16:creationId xmlns:a16="http://schemas.microsoft.com/office/drawing/2014/main" id="{FE1E5FDD-EC68-36C1-3496-C70F89340CF9}"/>
               </a:ext>
             </a:extLst>
           </p:cNvPr>
@@ -25562,7 +25554,443 @@
           </a:extLst>
         </p:spPr>
       </p:pic>
+      <p:sp>
+        <p:nvSpPr>
+          <p:cNvPr id="2" name="Text 8">
+            <a:extLst>
+              <a:ext uri="{FF2B5EF4-FFF2-40B4-BE49-F238E27FC236}">
+                <a16:creationId xmlns:a16="http://schemas.microsoft.com/office/drawing/2014/main" id="{45582F91-F82F-6695-5ABA-AC153DC16ABC}"/>
+              </a:ext>
+            </a:extLst>
+          </p:cNvPr>
+          <p:cNvSpPr/>
+          <p:nvPr/>
+        </p:nvSpPr>
+        <p:spPr>
+          <a:xfrm>
+            <a:off x="1027176" y="1389888"/>
+            <a:ext cx="3480816" cy="822960"/>
+          </a:xfrm>
+          <a:prstGeom prst="rect">
+            <a:avLst/>
+          </a:prstGeom>
+          <a:noFill/>
+          <a:ln/>
+        </p:spPr>
+        <p:txBody>
+          <a:bodyPr wrap="square" lIns="0" tIns="0" rIns="0" bIns="0" rtlCol="0" anchor="ctr"/>
+          <a:lstStyle>
+            <a:defPPr>
+              <a:defRPr lang="en-US"/>
+            </a:defPPr>
+            <a:lvl1pPr marL="0" algn="l" defTabSz="457200" rtl="0" eaLnBrk="1" latinLnBrk="0" hangingPunct="1">
+              <a:defRPr sz="1800" kern="1200">
+                <a:solidFill>
+                  <a:schemeClr val="tx1"/>
+                </a:solidFill>
+                <a:latin typeface="+mn-lt"/>
+                <a:ea typeface="+mn-ea"/>
+                <a:cs typeface="+mn-cs"/>
+              </a:defRPr>
+            </a:lvl1pPr>
+            <a:lvl2pPr marL="457200" algn="l" defTabSz="457200" rtl="0" eaLnBrk="1" latinLnBrk="0" hangingPunct="1">
+              <a:defRPr sz="1800" kern="1200">
+                <a:solidFill>
+                  <a:schemeClr val="tx1"/>
+                </a:solidFill>
+                <a:latin typeface="+mn-lt"/>
+                <a:ea typeface="+mn-ea"/>
+                <a:cs typeface="+mn-cs"/>
+              </a:defRPr>
+            </a:lvl2pPr>
+            <a:lvl3pPr marL="914400" algn="l" defTabSz="457200" rtl="0" eaLnBrk="1" latinLnBrk="0" hangingPunct="1">
+              <a:defRPr sz="1800" kern="1200">
+                <a:solidFill>
+                  <a:schemeClr val="tx1"/>
+                </a:solidFill>
+                <a:latin typeface="+mn-lt"/>
+                <a:ea typeface="+mn-ea"/>
+                <a:cs typeface="+mn-cs"/>
+              </a:defRPr>
+            </a:lvl3pPr>
+            <a:lvl4pPr marL="1371600" algn="l" defTabSz="457200" rtl="0" eaLnBrk="1" latinLnBrk="0" hangingPunct="1">
+              <a:defRPr sz="1800" kern="1200">
+                <a:solidFill>
+                  <a:schemeClr val="tx1"/>
+                </a:solidFill>
+                <a:latin typeface="+mn-lt"/>
+                <a:ea typeface="+mn-ea"/>
+                <a:cs typeface="+mn-cs"/>
+              </a:defRPr>
+            </a:lvl4pPr>
+            <a:lvl5pPr marL="1828800" algn="l" defTabSz="457200" rtl="0" eaLnBrk="1" latinLnBrk="0" hangingPunct="1">
+              <a:defRPr sz="1800" kern="1200">
+                <a:solidFill>
+                  <a:schemeClr val="tx1"/>
+                </a:solidFill>
+                <a:latin typeface="+mn-lt"/>
+                <a:ea typeface="+mn-ea"/>
+                <a:cs typeface="+mn-cs"/>
+              </a:defRPr>
+            </a:lvl5pPr>
+            <a:lvl6pPr marL="2286000" algn="l" defTabSz="457200" rtl="0" eaLnBrk="1" latinLnBrk="0" hangingPunct="1">
+              <a:defRPr sz="1800" kern="1200">
+                <a:solidFill>
+                  <a:schemeClr val="tx1"/>
+                </a:solidFill>
+                <a:latin typeface="+mn-lt"/>
+                <a:ea typeface="+mn-ea"/>
+                <a:cs typeface="+mn-cs"/>
+              </a:defRPr>
+            </a:lvl6pPr>
+            <a:lvl7pPr marL="2743200" algn="l" defTabSz="457200" rtl="0" eaLnBrk="1" latinLnBrk="0" hangingPunct="1">
+              <a:defRPr sz="1800" kern="1200">
+                <a:solidFill>
+                  <a:schemeClr val="tx1"/>
+                </a:solidFill>
+                <a:latin typeface="+mn-lt"/>
+                <a:ea typeface="+mn-ea"/>
+                <a:cs typeface="+mn-cs"/>
+              </a:defRPr>
+            </a:lvl7pPr>
+            <a:lvl8pPr marL="3200400" algn="l" defTabSz="457200" rtl="0" eaLnBrk="1" latinLnBrk="0" hangingPunct="1">
+              <a:defRPr sz="1800" kern="1200">
+                <a:solidFill>
+                  <a:schemeClr val="tx1"/>
+                </a:solidFill>
+                <a:latin typeface="+mn-lt"/>
+                <a:ea typeface="+mn-ea"/>
+                <a:cs typeface="+mn-cs"/>
+              </a:defRPr>
+            </a:lvl8pPr>
+            <a:lvl9pPr marL="3657600" algn="l" defTabSz="457200" rtl="0" eaLnBrk="1" latinLnBrk="0" hangingPunct="1">
+              <a:defRPr sz="1800" kern="1200">
+                <a:solidFill>
+                  <a:schemeClr val="tx1"/>
+                </a:solidFill>
+                <a:latin typeface="+mn-lt"/>
+                <a:ea typeface="+mn-ea"/>
+                <a:cs typeface="+mn-cs"/>
+              </a:defRPr>
+            </a:lvl9pPr>
+          </a:lstStyle>
+          <a:p>
+            <a:r>
+              <a:rPr lang="en-US" sz="1400">
+                <a:solidFill>
+                  <a:srgbClr val="7AADCC"/>
+                </a:solidFill>
+                <a:latin typeface="Calibri"/>
+                <a:ea typeface="Calibri"/>
+                <a:cs typeface="Calibri"/>
+              </a:rPr>
+              <a:t>Architectures  · Experiments · Augmentation · Regularization · Ensembles · Results</a:t>
+            </a:r>
+          </a:p>
+        </p:txBody>
+      </p:sp>
+      <p:sp>
+        <p:nvSpPr>
+          <p:cNvPr id="8" name="Text 15">
+            <a:extLst>
+              <a:ext uri="{FF2B5EF4-FFF2-40B4-BE49-F238E27FC236}">
+                <a16:creationId xmlns:a16="http://schemas.microsoft.com/office/drawing/2014/main" id="{E1A1C06B-B22B-F4BE-84EA-F8CC56FA0683}"/>
+              </a:ext>
+            </a:extLst>
+          </p:cNvPr>
+          <p:cNvSpPr/>
+          <p:nvPr/>
+        </p:nvSpPr>
+        <p:spPr>
+          <a:xfrm>
+            <a:off x="5416296" y="1389888"/>
+            <a:ext cx="3480816" cy="822960"/>
+          </a:xfrm>
+          <a:prstGeom prst="rect">
+            <a:avLst/>
+          </a:prstGeom>
+          <a:noFill/>
+          <a:ln/>
+        </p:spPr>
+        <p:txBody>
+          <a:bodyPr wrap="square" lIns="0" tIns="0" rIns="0" bIns="0" rtlCol="0" anchor="ctr"/>
+          <a:lstStyle>
+            <a:defPPr>
+              <a:defRPr lang="en-US"/>
+            </a:defPPr>
+            <a:lvl1pPr marL="0" algn="l" defTabSz="457200" rtl="0" eaLnBrk="1" latinLnBrk="0" hangingPunct="1">
+              <a:defRPr sz="1800" kern="1200">
+                <a:solidFill>
+                  <a:schemeClr val="tx1"/>
+                </a:solidFill>
+                <a:latin typeface="+mn-lt"/>
+                <a:ea typeface="+mn-ea"/>
+                <a:cs typeface="+mn-cs"/>
+              </a:defRPr>
+            </a:lvl1pPr>
+            <a:lvl2pPr marL="457200" algn="l" defTabSz="457200" rtl="0" eaLnBrk="1" latinLnBrk="0" hangingPunct="1">
+              <a:defRPr sz="1800" kern="1200">
+                <a:solidFill>
+                  <a:schemeClr val="tx1"/>
+                </a:solidFill>
+                <a:latin typeface="+mn-lt"/>
+                <a:ea typeface="+mn-ea"/>
+                <a:cs typeface="+mn-cs"/>
+              </a:defRPr>
+            </a:lvl2pPr>
+            <a:lvl3pPr marL="914400" algn="l" defTabSz="457200" rtl="0" eaLnBrk="1" latinLnBrk="0" hangingPunct="1">
+              <a:defRPr sz="1800" kern="1200">
+                <a:solidFill>
+                  <a:schemeClr val="tx1"/>
+                </a:solidFill>
+                <a:latin typeface="+mn-lt"/>
+                <a:ea typeface="+mn-ea"/>
+                <a:cs typeface="+mn-cs"/>
+              </a:defRPr>
+            </a:lvl3pPr>
+            <a:lvl4pPr marL="1371600" algn="l" defTabSz="457200" rtl="0" eaLnBrk="1" latinLnBrk="0" hangingPunct="1">
+              <a:defRPr sz="1800" kern="1200">
+                <a:solidFill>
+                  <a:schemeClr val="tx1"/>
+                </a:solidFill>
+                <a:latin typeface="+mn-lt"/>
+                <a:ea typeface="+mn-ea"/>
+                <a:cs typeface="+mn-cs"/>
+              </a:defRPr>
+            </a:lvl4pPr>
+            <a:lvl5pPr marL="1828800" algn="l" defTabSz="457200" rtl="0" eaLnBrk="1" latinLnBrk="0" hangingPunct="1">
+              <a:defRPr sz="1800" kern="1200">
+                <a:solidFill>
+                  <a:schemeClr val="tx1"/>
+                </a:solidFill>
+                <a:latin typeface="+mn-lt"/>
+                <a:ea typeface="+mn-ea"/>
+                <a:cs typeface="+mn-cs"/>
+              </a:defRPr>
+            </a:lvl5pPr>
+            <a:lvl6pPr marL="2286000" algn="l" defTabSz="457200" rtl="0" eaLnBrk="1" latinLnBrk="0" hangingPunct="1">
+              <a:defRPr sz="1800" kern="1200">
+                <a:solidFill>
+                  <a:schemeClr val="tx1"/>
+                </a:solidFill>
+                <a:latin typeface="+mn-lt"/>
+                <a:ea typeface="+mn-ea"/>
+                <a:cs typeface="+mn-cs"/>
+              </a:defRPr>
+            </a:lvl6pPr>
+            <a:lvl7pPr marL="2743200" algn="l" defTabSz="457200" rtl="0" eaLnBrk="1" latinLnBrk="0" hangingPunct="1">
+              <a:defRPr sz="1800" kern="1200">
+                <a:solidFill>
+                  <a:schemeClr val="tx1"/>
+                </a:solidFill>
+                <a:latin typeface="+mn-lt"/>
+                <a:ea typeface="+mn-ea"/>
+                <a:cs typeface="+mn-cs"/>
+              </a:defRPr>
+            </a:lvl7pPr>
+            <a:lvl8pPr marL="3200400" algn="l" defTabSz="457200" rtl="0" eaLnBrk="1" latinLnBrk="0" hangingPunct="1">
+              <a:defRPr sz="1800" kern="1200">
+                <a:solidFill>
+                  <a:schemeClr val="tx1"/>
+                </a:solidFill>
+                <a:latin typeface="+mn-lt"/>
+                <a:ea typeface="+mn-ea"/>
+                <a:cs typeface="+mn-cs"/>
+              </a:defRPr>
+            </a:lvl8pPr>
+            <a:lvl9pPr marL="3657600" algn="l" defTabSz="457200" rtl="0" eaLnBrk="1" latinLnBrk="0" hangingPunct="1">
+              <a:defRPr sz="1800" kern="1200">
+                <a:solidFill>
+                  <a:schemeClr val="tx1"/>
+                </a:solidFill>
+                <a:latin typeface="+mn-lt"/>
+                <a:ea typeface="+mn-ea"/>
+                <a:cs typeface="+mn-cs"/>
+              </a:defRPr>
+            </a:lvl9pPr>
+          </a:lstStyle>
+          <a:p>
+            <a:r>
+              <a:rPr lang="en-US" sz="1400">
+                <a:solidFill>
+                  <a:srgbClr val="7AADCC"/>
+                </a:solidFill>
+                <a:latin typeface="Calibri"/>
+                <a:ea typeface="Calibri"/>
+                <a:cs typeface="Calibri"/>
+              </a:rPr>
+              <a:t>Early Stopping · GPU budget · Checkpointing</a:t>
+            </a:r>
+          </a:p>
+          <a:p>
+            <a:pPr marL="0" indent="0">
+              <a:buNone/>
+            </a:pPr>
+            <a:endParaRPr lang="en-US" sz="1400" dirty="0">
+              <a:solidFill>
+                <a:srgbClr val="7AADCC"/>
+              </a:solidFill>
+              <a:latin typeface="Calibri"/>
+              <a:ea typeface="Calibri"/>
+              <a:cs typeface="Calibri"/>
+            </a:endParaRPr>
+          </a:p>
+        </p:txBody>
+      </p:sp>
+      <p:sp>
+        <p:nvSpPr>
+          <p:cNvPr id="14" name="Text 22">
+            <a:extLst>
+              <a:ext uri="{FF2B5EF4-FFF2-40B4-BE49-F238E27FC236}">
+                <a16:creationId xmlns:a16="http://schemas.microsoft.com/office/drawing/2014/main" id="{E7CF663A-2942-4EC2-15F0-D01B7DC858F3}"/>
+              </a:ext>
+            </a:extLst>
+          </p:cNvPr>
+          <p:cNvSpPr/>
+          <p:nvPr/>
+        </p:nvSpPr>
+        <p:spPr>
+          <a:xfrm>
+            <a:off x="1027176" y="3355848"/>
+            <a:ext cx="3480816" cy="822960"/>
+          </a:xfrm>
+          <a:prstGeom prst="rect">
+            <a:avLst/>
+          </a:prstGeom>
+          <a:noFill/>
+          <a:ln/>
+        </p:spPr>
+        <p:txBody>
+          <a:bodyPr wrap="square" lIns="0" tIns="0" rIns="0" bIns="0" rtlCol="0" anchor="ctr"/>
+          <a:lstStyle>
+            <a:defPPr>
+              <a:defRPr lang="en-US"/>
+            </a:defPPr>
+            <a:lvl1pPr marL="0" algn="l" defTabSz="457200" rtl="0" eaLnBrk="1" latinLnBrk="0" hangingPunct="1">
+              <a:defRPr sz="1800" kern="1200">
+                <a:solidFill>
+                  <a:schemeClr val="tx1"/>
+                </a:solidFill>
+                <a:latin typeface="+mn-lt"/>
+                <a:ea typeface="+mn-ea"/>
+                <a:cs typeface="+mn-cs"/>
+              </a:defRPr>
+            </a:lvl1pPr>
+            <a:lvl2pPr marL="457200" algn="l" defTabSz="457200" rtl="0" eaLnBrk="1" latinLnBrk="0" hangingPunct="1">
+              <a:defRPr sz="1800" kern="1200">
+                <a:solidFill>
+                  <a:schemeClr val="tx1"/>
+                </a:solidFill>
+                <a:latin typeface="+mn-lt"/>
+                <a:ea typeface="+mn-ea"/>
+                <a:cs typeface="+mn-cs"/>
+              </a:defRPr>
+            </a:lvl2pPr>
+            <a:lvl3pPr marL="914400" algn="l" defTabSz="457200" rtl="0" eaLnBrk="1" latinLnBrk="0" hangingPunct="1">
+              <a:defRPr sz="1800" kern="1200">
+                <a:solidFill>
+                  <a:schemeClr val="tx1"/>
+                </a:solidFill>
+                <a:latin typeface="+mn-lt"/>
+                <a:ea typeface="+mn-ea"/>
+                <a:cs typeface="+mn-cs"/>
+              </a:defRPr>
+            </a:lvl3pPr>
+            <a:lvl4pPr marL="1371600" algn="l" defTabSz="457200" rtl="0" eaLnBrk="1" latinLnBrk="0" hangingPunct="1">
+              <a:defRPr sz="1800" kern="1200">
+                <a:solidFill>
+                  <a:schemeClr val="tx1"/>
+                </a:solidFill>
+                <a:latin typeface="+mn-lt"/>
+                <a:ea typeface="+mn-ea"/>
+                <a:cs typeface="+mn-cs"/>
+              </a:defRPr>
+            </a:lvl4pPr>
+            <a:lvl5pPr marL="1828800" algn="l" defTabSz="457200" rtl="0" eaLnBrk="1" latinLnBrk="0" hangingPunct="1">
+              <a:defRPr sz="1800" kern="1200">
+                <a:solidFill>
+                  <a:schemeClr val="tx1"/>
+                </a:solidFill>
+                <a:latin typeface="+mn-lt"/>
+                <a:ea typeface="+mn-ea"/>
+                <a:cs typeface="+mn-cs"/>
+              </a:defRPr>
+            </a:lvl5pPr>
+            <a:lvl6pPr marL="2286000" algn="l" defTabSz="457200" rtl="0" eaLnBrk="1" latinLnBrk="0" hangingPunct="1">
+              <a:defRPr sz="1800" kern="1200">
+                <a:solidFill>
+                  <a:schemeClr val="tx1"/>
+                </a:solidFill>
+                <a:latin typeface="+mn-lt"/>
+                <a:ea typeface="+mn-ea"/>
+                <a:cs typeface="+mn-cs"/>
+              </a:defRPr>
+            </a:lvl6pPr>
+            <a:lvl7pPr marL="2743200" algn="l" defTabSz="457200" rtl="0" eaLnBrk="1" latinLnBrk="0" hangingPunct="1">
+              <a:defRPr sz="1800" kern="1200">
+                <a:solidFill>
+                  <a:schemeClr val="tx1"/>
+                </a:solidFill>
+                <a:latin typeface="+mn-lt"/>
+                <a:ea typeface="+mn-ea"/>
+                <a:cs typeface="+mn-cs"/>
+              </a:defRPr>
+            </a:lvl7pPr>
+            <a:lvl8pPr marL="3200400" algn="l" defTabSz="457200" rtl="0" eaLnBrk="1" latinLnBrk="0" hangingPunct="1">
+              <a:defRPr sz="1800" kern="1200">
+                <a:solidFill>
+                  <a:schemeClr val="tx1"/>
+                </a:solidFill>
+                <a:latin typeface="+mn-lt"/>
+                <a:ea typeface="+mn-ea"/>
+                <a:cs typeface="+mn-cs"/>
+              </a:defRPr>
+            </a:lvl8pPr>
+            <a:lvl9pPr marL="3657600" algn="l" defTabSz="457200" rtl="0" eaLnBrk="1" latinLnBrk="0" hangingPunct="1">
+              <a:defRPr sz="1800" kern="1200">
+                <a:solidFill>
+                  <a:schemeClr val="tx1"/>
+                </a:solidFill>
+                <a:latin typeface="+mn-lt"/>
+                <a:ea typeface="+mn-ea"/>
+                <a:cs typeface="+mn-cs"/>
+              </a:defRPr>
+            </a:lvl9pPr>
+          </a:lstStyle>
+          <a:p>
+            <a:r>
+              <a:rPr lang="en-US" sz="1400">
+                <a:solidFill>
+                  <a:srgbClr val="7AADCC"/>
+                </a:solidFill>
+                <a:latin typeface="Calibri"/>
+                <a:ea typeface="Calibri"/>
+                <a:cs typeface="Calibri"/>
+              </a:rPr>
+              <a:t>Macro-F1 · Per-class · Confusion Matrix</a:t>
+            </a:r>
+          </a:p>
+          <a:p>
+            <a:pPr marL="0" indent="0">
+              <a:buNone/>
+            </a:pPr>
+            <a:endParaRPr lang="en-US" sz="1400" dirty="0">
+              <a:solidFill>
+                <a:srgbClr val="7AADCC"/>
+              </a:solidFill>
+              <a:latin typeface="Calibri"/>
+              <a:ea typeface="Calibri"/>
+              <a:cs typeface="Calibri"/>
+            </a:endParaRPr>
+          </a:p>
+        </p:txBody>
+      </p:sp>
     </p:spTree>
+    <p:extLst>
+      <p:ext uri="{BB962C8B-B14F-4D97-AF65-F5344CB8AC3E}">
+        <p14:creationId xmlns:p14="http://schemas.microsoft.com/office/powerpoint/2010/main" val="1626159172"/>
+      </p:ext>
+    </p:extLst>
   </p:cSld>
   <p:clrMapOvr>
     <a:masterClrMapping/>
